--- a/Panduan Orang Tua Pizza Snack Play/Panduan Orang Tua Pizza Snack Play.pptx
+++ b/Panduan Orang Tua Pizza Snack Play/Panduan Orang Tua Pizza Snack Play.pptx
@@ -558,7 +558,7 @@
   <p:cSld>
     <p:spTree>
       <p:nvGrpSpPr>
-        <p:cNvPr id="1" name="" descr="&lt;Slide&#10;    style={{&#10;        width: '1280px',&#10;        height: '720px',&#10;        background: '#FAF7F2',&#10;        flexDirection: 'row',&#10;        padding: 0,&#10;        position: 'relative',&#10;        overflow: 'hidden',&#10;    }}&#10;&gt;&#10;    {/* dekorasi latar — lingkaran besar semi-transparan */}&#10;    &lt;Box&#10;        style={{&#10;            position: 'absolute',&#10;            top: -140,&#10;            right: -120,&#10;            width: 520,&#10;            height: 520,&#10;            borderRadius: 260,&#10;            background: 'linear-gradient(135deg, #51277C 0%, #7A45A8 100%)',&#10;            opacity: 0.10,&#10;        }}&#10;    /&gt;&#10;    &lt;Box&#10;        style={{&#10;            position: 'absolute',&#10;            bottom: -90,&#10;            left: -80,&#10;            width: 360,&#10;            height: 360,&#10;            borderRadius: 180,&#10;            background: 'linear-gradient(135deg, #AFC440 0%, #F3B26C 100%)',&#10;            opacity: 0.14,&#10;        }}&#10;    /&gt;&#10;&#10;    {/* ── kolom kiri: judul ── */}&#10;    &lt;Box&#10;        style={{&#10;            position: 'relative',&#10;            zIndex: 1,&#10;            width: '56%',&#10;            paddingTop: 96,&#10;            paddingBottom: 96,&#10;            paddingLeft: 64,&#10;            paddingRight: 32,&#10;            justifyContent: 'center',&#10;        }}&#10;    &gt;&#10;        &lt;Box&#10;            style={{&#10;                flexDirection: 'row',&#10;                alignItems: 'center',&#10;                gap: 10,&#10;                alignSelf: 'flex-start',&#10;                background: '#51277C',&#10;                borderRadius: 999,&#10;                paddingTop: 9,&#10;                paddingBottom: 9,&#10;                paddingLeft: 20,&#10;                paddingRight: 22,&#10;            }}&#10;        &gt;&#10;            &lt;FAIcon name='users' style={{ fill: '#F3B26C', width: 20, height: 20 }} /&gt;&#10;            &lt;Text style={{ fontSize: 17, color: '#FFFFFF', fontFamily: 'Verdana', fontWeight: 'bold' }}&gt;&#10;                Panduan Orang Tua Murid&#10;            &lt;/Text&gt;&#10;        &lt;/Box&gt;&#10;&#10;        &lt;Text&#10;            style={{&#10;                marginTop: 26,&#10;                fontSize: 66,&#10;                fontWeight: 'bold',&#10;                color: '#51277C',&#10;                fontFamily: 'Trebuchet MS',&#10;                lineHeight: 1.15,&#10;            }}&#10;        &gt;&#10;            Pizza Snack Play&#10;        &lt;/Text&gt;&#10;&#10;        &lt;Box style={{ marginTop: 18, width: 96, height: 7, borderRadius: 4, background: '#AFC440' }} /&gt;&#10;&#10;        &lt;Text&#10;            style={{&#10;                marginTop: 26,&#10;                fontSize: 23,&#10;                color: '#2A2333',&#10;                fontFamily: 'Verdana',&#10;                lineHeight: 1.55,&#10;            }}&#10;        &gt;&#10;            Jadwal snack anak, giliran piket, dan menu hari ini —&#10;            &lt;span style={{ fontWeight: 'bold', color: '#51277C' }}&gt; semuanya langsung kelihatan di HP&lt;/span&gt;&#10;            {' '}Bapak dan Ibu.&#10;        &lt;/Text&gt;&#10;&#10;        &lt;Text&#10;            style={{&#10;                marginTop: 22,&#10;                fontSize: 19,&#10;                color: '#6B6478',&#10;                fontFamily: 'Verdana',&#10;                lineHeight: 1.5,&#10;            }}&#10;        &gt;&#10;            Tidak perlu lagi tanya-tanya ke grup.&#10;        &lt;/Text&gt;&#10;    &lt;/Box&gt;&#10;&#10;    {/* ── kolom kanan: logo + ilustrasi ── */}&#10;    &lt;Box&#10;        style={{&#10;            position: 'relative',&#10;            zIndex: 1,&#10;            width: '44%',&#10;            justifyContent: 'center',&#10;            alignItems: 'center',&#10;        }}&#10;    &gt;&#10;        &lt;Image&#10;            src=&quot;assets/app_logo.png&quot;&#10;            style={{ width: 400, height: 388, objectFit: 'contain' }}&#10;        /&gt;&#10;&#10;        &lt;Box&#10;            style={{&#10;                marginTop: 18,&#10;                flexDirection: 'row',&#10;                alignItems: 'center',&#10;                gap: 12,&#10;                background: 'rgba(81,39,124,0.07)',&#10;                borderRadius: 14,&#10;                paddingTop: 12,&#10;                paddingBottom: 12,&#10;                paddingLeft: 22,&#10;                paddingRight: 22,&#10;            }}&#10;        &gt;&#10;            &lt;svg width={34} height={34} viewBox='0 0 24 24'&gt;&#10;                &lt;path&#10;                    d='M7 2v3M17 2v3M3 9h18M5 5h14a2 2 0 0 1 2 2v12a2 2 0 0 1-2 2H5a2 2 0 0 1-2-2V7a2 2 0 0 1 2-2z'&#10;                    fill='none'&#10;                    stroke='#51277C'&#10;                    strokeWidth='2'&#10;                    strokeLinecap='round'&#10;                /&gt;&#10;            &lt;/svg&gt;&#10;            &lt;Text style={{ fontSize: 18, color: '#51277C', fontFamily: 'Verdana', fontWeight: 'bold' }}&gt;&#10;                Senin sampai Jumat&#10;            &lt;/Text&gt;&#10;        &lt;/Box&gt;&#10;    &lt;/Box&gt;&#10;&lt;/Slide&gt;&#10;"/>
+        <p:cNvPr id="1" name="" descr="&lt;Slide&#13;&#10;    style={{&#13;&#10;        width: '1280px',&#13;&#10;        height: '720px',&#13;&#10;        background: '#FAF7F2',&#13;&#10;        flexDirection: 'row',&#13;&#10;        padding: 0,&#13;&#10;        position: 'relative',&#13;&#10;        overflow: 'hidden',&#13;&#10;    }}&#13;&#10;&gt;&#13;&#10;    {/* dekorasi latar — lingkaran besar semi-transparan */}&#13;&#10;    &lt;Box&#13;&#10;        style={{&#13;&#10;            position: 'absolute',&#13;&#10;            top: -140,&#13;&#10;            right: -120,&#13;&#10;            width: 520,&#13;&#10;            height: 520,&#13;&#10;            borderRadius: 260,&#13;&#10;            background: 'linear-gradient(135deg, #51277C 0%, #7A45A8 100%)',&#13;&#10;            opacity: 0.10,&#13;&#10;        }}&#13;&#10;    /&gt;&#13;&#10;    &lt;Box&#13;&#10;        style={{&#13;&#10;            position: 'absolute',&#13;&#10;            bottom: -90,&#13;&#10;            left: -80,&#13;&#10;            width: 360,&#13;&#10;            height: 360,&#13;&#10;            borderRadius: 180,&#13;&#10;            background: 'linear-gradient(135deg, #AFC440 0%, #F3B26C 100%)',&#13;&#10;            opacity: 0.14,&#13;&#10;        }}&#13;&#10;    /&gt;&#13;&#10;&#13;&#10;    {/* ── kolom kiri: judul ── */}&#13;&#10;    &lt;Box&#13;&#10;        style={{&#13;&#10;            position: 'relative',&#13;&#10;            zIndex: 1,&#13;&#10;            width: '56%',&#13;&#10;            paddingTop: 96,&#13;&#10;            paddingBottom: 96,&#13;&#10;            paddingLeft: 64,&#13;&#10;            paddingRight: 32,&#13;&#10;            justifyContent: 'center',&#13;&#10;        }}&#13;&#10;    &gt;&#13;&#10;        &lt;Box&#13;&#10;            style={{&#13;&#10;                flexDirection: 'row',&#13;&#10;                alignItems: 'center',&#13;&#10;                gap: 10,&#13;&#10;                alignSelf: 'flex-start',&#13;&#10;                background: '#51277C',&#13;&#10;                borderRadius: 999,&#13;&#10;                paddingTop: 9,&#13;&#10;                paddingBottom: 9,&#13;&#10;                paddingLeft: 20,&#13;&#10;                paddingRight: 22,&#13;&#10;            }}&#13;&#10;        &gt;&#13;&#10;            &lt;svg width={20} height={20} viewBox=&quot;0 0 640 512&quot; xmlns=&quot;http://www.w3.org/2000/svg&quot;&gt;&lt;path fill=&quot;#F3B26C&quot; d=&quot;M144 0a80 80 0 1 1 0 160A80 80 0 1 1 144 0zM512 0a80 80 0 1 1 0 160A80 80 0 1 1 512 0zM0 298.7C0 239.8 47.8 192 106.7 192h42.7c15.9 0 31 3.5 44.6 9.7c-1.3 7.2-1.9 14.7-1.9 22.3c0 38.2 16.8 72.5 43.3 96c-.2 0-.4 0-.7 0H21.3C9.6 320 0 310.4 0 298.7zM405.3 320c-.2 0-.4 0-.7 0c26.6-23.5 43.3-57.8 43.3-96c0-7.6-.7-15-1.9-22.3c13.6-6.3 28.7-9.7 44.6-9.7h42.7C592.2 192 640 239.8 640 298.7c0 11.8-9.6 21.3-21.3 21.3H405.3zM224 224a96 96 0 1 1 192 0 96 96 0 1 1 -192 0zM128 485.3C128 411.7 187.7 352 261.3 352H378.7C452.3 352 512 411.7 512 485.3c0 14.7-11.9 26.7-26.7 26.7H154.7c-14.7 0-26.7-11.9-26.7-26.7z&quot; /&gt;&lt;/svg&gt;&#13;&#10;            &lt;Text style={{ fontSize: 17, color: '#FFFFFF', fontFamily: 'Verdana', fontWeight: 'bold' }}&gt;&#13;&#10;                Panduan Orang Tua Murid&#13;&#10;            &lt;/Text&gt;&#13;&#10;        &lt;/Box&gt;&#13;&#10;&#13;&#10;        &lt;Text&#13;&#10;            style={{&#13;&#10;                marginTop: 26,&#13;&#10;                fontSize: 66,&#13;&#10;                fontWeight: 'bold',&#13;&#10;                color: '#51277C',&#13;&#10;                fontFamily: 'Trebuchet MS',&#13;&#10;                lineHeight: 1.15,&#13;&#10;            }}&#13;&#10;        &gt;&#13;&#10;            Pizza Snack Play&#13;&#10;        &lt;/Text&gt;&#13;&#10;&#13;&#10;        &lt;Box style={{ marginTop: 18, width: 96, height: 7, borderRadius: 4, background: '#AFC440' }} /&gt;&#13;&#10;&#13;&#10;        &lt;Text&#13;&#10;            style={{&#13;&#10;                marginTop: 26,&#13;&#10;                fontSize: 23,&#13;&#10;                color: '#2A2333',&#13;&#10;                fontFamily: 'Verdana',&#13;&#10;                lineHeight: 1.55,&#13;&#10;            }}&#13;&#10;        &gt;&#13;&#10;            Jadwal snack anak, giliran piket, dan menu hari ini —&#13;&#10;            &lt;span style={{ fontWeight: 'bold', color: '#51277C' }}&gt; semuanya langsung kelihatan di HP&lt;/span&gt;&#13;&#10;            {' '}Bapak dan Ibu.&#13;&#10;        &lt;/Text&gt;&#13;&#10;&#13;&#10;        &lt;Text&#13;&#10;            style={{&#13;&#10;                marginTop: 22,&#13;&#10;                fontSize: 19,&#13;&#10;                color: '#6B6478',&#13;&#10;                fontFamily: 'Verdana',&#13;&#10;                lineHeight: 1.5,&#13;&#10;            }}&#13;&#10;        &gt;&#13;&#10;            Tidak perlu lagi tanya-tanya ke grup.&#13;&#10;        &lt;/Text&gt;&#13;&#10;    &lt;/Box&gt;&#13;&#10;&#13;&#10;    {/* ── kolom kanan: logo + ilustrasi ── */}&#13;&#10;    &lt;Box&#13;&#10;        style={{&#13;&#10;            position: 'relative',&#13;&#10;            zIndex: 1,&#13;&#10;            width: '44%',&#13;&#10;            justifyContent: 'center',&#13;&#10;            alignItems: 'center',&#13;&#10;        }}&#13;&#10;    &gt;&#13;&#10;        &lt;Image&#13;&#10;            src=&quot;assets/app_logo.png&quot;&#13;&#10;            style={{ width: 400, height: 388, objectFit: 'contain' }}&#13;&#10;        /&gt;&#13;&#10;&#13;&#10;        &lt;Box&#13;&#10;            style={{&#13;&#10;                marginTop: 18,&#13;&#10;                flexDirection: 'row',&#13;&#10;                alignItems: 'center',&#13;&#10;                gap: 12,&#13;&#10;                background: 'rgba(81,39,124,0.07)',&#13;&#10;                borderRadius: 14,&#13;&#10;                paddingTop: 12,&#13;&#10;                paddingBottom: 12,&#13;&#10;                paddingLeft: 22,&#13;&#10;                paddingRight: 22,&#13;&#10;            }}&#13;&#10;        &gt;&#13;&#10;            &lt;svg width={34} height={34} viewBox='0 0 24 24'&gt;&#13;&#10;                &lt;path&#13;&#10;                    d='M7 2v3M17 2v3M3 9h18M5 5h14a2 2 0 0 1 2 2v12a2 2 0 0 1-2 2H5a2 2 0 0 1-2-2V7a2 2 0 0 1 2-2z'&#13;&#10;                    fill='none'&#13;&#10;                    stroke='#51277C'&#13;&#10;                    strokeWidth='2'&#13;&#10;                    strokeLinecap='round'&#13;&#10;                /&gt;&#13;&#10;            &lt;/svg&gt;&#13;&#10;            &lt;Text style={{ fontSize: 18, color: '#51277C', fontFamily: 'Verdana', fontWeight: 'bold' }}&gt;&#13;&#10;                Senin sampai Jumat&#13;&#10;            &lt;/Text&gt;&#13;&#10;        &lt;/Box&gt;&#13;&#10;    &lt;/Box&gt;&#13;&#10;&lt;/Slide&gt;"/>
         <p:cNvGrpSpPr/>
         <p:nvPr/>
       </p:nvGrpSpPr>
@@ -1410,7 +1410,7 @@
   <p:cSld>
     <p:spTree>
       <p:nvGrpSpPr>
-        <p:cNvPr id="16" name="" descr="&lt;Slide&#10;    style={{&#10;        width: '1280px',&#10;        height: '720px',&#10;        background: '#FAF7F2',&#10;        paddingTop: 20,&#10;        paddingBottom: 20,&#10;        paddingLeft: 64,&#10;        paddingRight: 64,&#10;    }}&#10;&gt;&#10;    {/* ── A · blok judul ── */}&#10;    &lt;Box style={{ height: 110, justifyContent: 'center' }}&gt;&#10;        &lt;Text&#10;            style={{&#10;                fontSize: 34,&#10;                fontWeight: 'bold',&#10;                color: '#51277C',&#10;                fontFamily: 'Trebuchet MS',&#10;                lineHeight: 1.3,&#10;            }}&#10;        &gt;&#10;            Lihat jadwal snack&#10;        &lt;/Text&gt;&#10;        &lt;Box style={{ marginTop: 10, width: 72, height: 6, borderRadius: 3, background: '#51277C' }} /&gt;&#10;    &lt;/Box&gt;&#10;&#10;    {/* ── B · area konten ── */}&#10;    &lt;Box style={{ height: 530 }}&gt;&#10;        {/* atas 64% · ilustrasi jadwal sepekan */}&#10;        &lt;Box&#10;            style={{&#10;                height: 340,&#10;                background: 'rgba(81,39,124,0.06)',&#10;                borderRadius: 20,&#10;                justifyContent: 'center',&#10;                alignItems: 'center',&#10;            }}&#10;        &gt;&#10;            &lt;svg width={1100} height={300} viewBox='0 0 1100 300'&gt;&#10;                {/* Senin */}&#10;                &lt;rect x='6' y='8' width='208' height='284' rx='16' fill='#FFFFFF' stroke='#E6DFD2' strokeWidth='2' /&gt;&#10;                &lt;rect x='6' y='8' width='208' height='58' rx='16' fill='#EFEAE1' /&gt;&#10;                &lt;rect x='6' y='44' width='208' height='22' fill='#EFEAE1' /&gt;&#10;                &lt;text x='110' y='46' fontFamily='Trebuchet MS' fontSize='24' fontWeight='bold' fill='#51277C' textAnchor='middle'&gt;&#10;                    Senin&#10;                &lt;/text&gt;&#10;                &lt;rect x='28' y='92' width='164' height='16' rx='8' fill='#DED7CB' /&gt;&#10;                &lt;rect x='28' y='124' width='128' height='14' rx='7' fill='#EDE8DF' /&gt;&#10;                &lt;rect x='28' y='158' width='72' height='28' rx='14' fill='#AFC440' /&gt;&#10;                &lt;text x='64' y='178' fontFamily='Verdana' fontSize='15' fill='#3F4718' textAnchor='middle'&gt;&#10;                    Jeruk&#10;                &lt;/text&gt;&#10;                &lt;rect x='28' y='214' width='164' height='1' fill='#EFEAE1' /&gt;&#10;                &lt;circle cx='44' cy='240' r='12' fill='#DED7CB' /&gt;&#10;                &lt;rect x='64' y='233' width='104' height='12' rx='6' fill='#EDE8DF' /&gt;&#10;&#10;                {/* Selasa */}&#10;                &lt;rect x='226' y='8' width='208' height='284' rx='16' fill='#FFFFFF' stroke='#E6DFD2' strokeWidth='2' /&gt;&#10;                &lt;rect x='226' y='8' width='208' height='58' rx='16' fill='#EFEAE1' /&gt;&#10;                &lt;rect x='226' y='44' width='208' height='22' fill='#EFEAE1' /&gt;&#10;                &lt;text x='330' y='46' fontFamily='Trebuchet MS' fontSize='24' fontWeight='bold' fill='#51277C' textAnchor='middle'&gt;&#10;                    Selasa&#10;                &lt;/text&gt;&#10;                &lt;rect x='248' y='92' width='164' height='16' rx='8' fill='#DED7CB' /&gt;&#10;                &lt;rect x='248' y='124' width='112' height='14' rx='7' fill='#EDE8DF' /&gt;&#10;                &lt;rect x='248' y='158' width='72' height='28' rx='14' fill='#AFC440' /&gt;&#10;                &lt;text x='284' y='178' fontFamily='Verdana' fontSize='15' fill='#3F4718' textAnchor='middle'&gt;&#10;                    Pisang&#10;                &lt;/text&gt;&#10;                &lt;rect x='248' y='214' width='164' height='1' fill='#EFEAE1' /&gt;&#10;                &lt;circle cx='264' cy='240' r='12' fill='#DED7CB' /&gt;&#10;                &lt;rect x='284' y='233' width='96' height='12' rx='6' fill='#EDE8DF' /&gt;&#10;&#10;                {/* Rabu — hari ini, disorot */}&#10;                &lt;rect x='446' y='0' width='208' height='300' rx='16' fill='#FFFFFF' stroke='#F3B26C' strokeWidth='5' /&gt;&#10;                &lt;rect x='446' y='0' width='208' height='62' rx='16' fill='#51277C' /&gt;&#10;                &lt;rect x='446' y='40' width='208' height='22' fill='#51277C' /&gt;&#10;                &lt;text x='550' y='42' fontFamily='Trebuchet MS' fontSize='24' fontWeight='bold' fill='#FFFFFF' textAnchor='middle'&gt;&#10;                    Rabu&#10;                &lt;/text&gt;&#10;                &lt;rect x='468' y='92' width='164' height='16' rx='8' fill='#51277C' opacity='0.65' /&gt;&#10;                &lt;rect x='468' y='124' width='136' height='14' rx='7' fill='#EDE8DF' /&gt;&#10;                &lt;rect x='468' y='158' width='92' height='28' rx='14' fill='#F3B26C' /&gt;&#10;                &lt;text x='514' y='178' fontFamily='Verdana' fontSize='15' fill='#51277C' textAnchor='middle'&gt;&#10;                    Semangka&#10;                &lt;/text&gt;&#10;                &lt;rect x='468' y='214' width='164' height='1' fill='#EFEAE1' /&gt;&#10;                &lt;circle cx='484' cy='240' r='12' fill='#51277C' opacity='0.25' /&gt;&#10;                &lt;rect x='504' y='233' width='118' height='12' rx='6' fill='#DED7CB' /&gt;&#10;                &lt;circle cx='654' cy='16' r='13' fill='#F3B26C' /&gt;&#10;                &lt;text x='654' y='22' fontFamily='Verdana' fontSize='13' fontWeight='bold' fill='#51277C' textAnchor='middle'&gt;&#10;                    !&#10;                &lt;/text&gt;&#10;&#10;                {/* Kamis */}&#10;                &lt;rect x='666' y='8' width='208' height='284' rx='16' fill='#FFFFFF' stroke='#E6DFD2' strokeWidth='2' /&gt;&#10;                &lt;rect x='666' y='8' width='208' height='58' rx='16' fill='#EFEAE1' /&gt;&#10;                &lt;rect x='666' y='44' width='208' height='22' fill='#EFEAE1' /&gt;&#10;                &lt;text x='770' y='46' fontFamily='Trebuchet MS' fontSize='24' fontWeight='bold' fill='#51277C' textAnchor='middle'&gt;&#10;                    Kamis&#10;                &lt;/text&gt;&#10;                &lt;rect x='688' y='92' width='164' height='16' rx='8' fill='#DED7CB' /&gt;&#10;                &lt;rect x='688' y='124' width='120' height='14' rx='7' fill='#EDE8DF' /&gt;&#10;                &lt;rect x='688' y='158' width='64' height='28' rx='14' fill='#AFC440' /&gt;&#10;                &lt;text x='720' y='178' fontFamily='Verdana' fontSize='15' fill='#3F4718' textAnchor='middle'&gt;&#10;                    Apel&#10;                &lt;/text&gt;&#10;                &lt;rect x='688' y='214' width='164' height='1' fill='#EFEAE1' /&gt;&#10;                &lt;circle cx='704' cy='240' r='12' fill='#DED7CB' /&gt;&#10;                &lt;rect x='724' y='233' width='88' height='12' rx='6' fill='#EDE8DF' /&gt;&#10;&#10;                {/* Jumat */}&#10;                &lt;rect x='886' y='8' width='208' height='284' rx='16' fill='#FFFFFF' stroke='#E6DFD2' strokeWidth='2' /&gt;&#10;                &lt;rect x='886' y='8' width='208' height='58' rx='16' fill='#EFEAE1' /&gt;&#10;                &lt;rect x='886' y='44' width='208' height='22' fill='#EFEAE1' /&gt;&#10;                &lt;text x='990' y='46' fontFamily='Trebuchet MS' fontSize='24' fontWeight='bold' fill='#51277C' textAnchor='middle'&gt;&#10;                    Jumat&#10;                &lt;/text&gt;&#10;                &lt;rect x='908' y='92' width='164' height='16' rx='8' fill='#DED7CB' /&gt;&#10;                &lt;rect x='908' y='124' width='132' height='14' rx='7' fill='#EDE8DF' /&gt;&#10;                &lt;rect x='908' y='158' width='70' height='28' rx='14' fill='#AFC440' /&gt;&#10;                &lt;text x='943' y='178' fontFamily='Verdana' fontSize='15' fill='#3F4718' textAnchor='middle'&gt;&#10;                    Melon&#10;                &lt;/text&gt;&#10;                &lt;rect x='908' y='214' width='164' height='1' fill='#EFEAE1' /&gt;&#10;                &lt;circle cx='924' cy='240' r='12' fill='#DED7CB' /&gt;&#10;                &lt;rect x='944' y='233' width='106' height='12' rx='6' fill='#EDE8DF' /&gt;&#10;            &lt;/svg&gt;&#10;        &lt;/Box&gt;&#10;&#10;        {/* bawah · dua kartu 60:40 */}&#10;        &lt;Box style={{ marginTop: 18, height: 172, flexDirection: 'row', gap: 24 }}&gt;&#10;            &lt;Box&#10;                style={{&#10;                    width: '60%',&#10;                    background: '#FFFFFF',&#10;                    borderRadius: 16,&#10;                    boxShadow: '0 4px 20px rgba(0,0,0,0.08)',&#10;                    padding: 24,&#10;                    borderLeft: '8px solid #F3B26C',&#10;                }}&#10;            &gt;&#10;                &lt;Text&#10;                    style={{&#10;                        fontSize: 26,&#10;                        fontWeight: 'bold',&#10;                        color: '#51277C',&#10;                        fontFamily: 'Trebuchet MS',&#10;                    }}&#10;                &gt;&#10;                    Hari ini &amp;amp; minggu ini&#10;                &lt;/Text&gt;&#10;                &lt;Text&#10;                    style={{&#10;                        marginTop: 10,&#10;                        fontSize: 19,&#10;                        color: '#6B6478',&#10;                        fontFamily: 'Verdana',&#10;                        lineHeight: 1.5,&#10;                    }}&#10;                &gt;&#10;                    Begitu aplikasi dibuka, makanan dan buahnya langsung kelihatan. Hari yang sedang berjalan ditandai, jadi tidak salah lihat.&#10;                &lt;/Text&gt;&#10;            &lt;/Box&gt;&#10;&#10;            &lt;Box&#10;                style={{&#10;                    width: '40%',&#10;                    background: '#FFFFFF',&#10;                    borderRadius: 16,&#10;                    boxShadow: '0 4px 20px rgba(0,0,0,0.08)',&#10;                    padding: 24,&#10;                    borderLeft: '8px solid #AFC440',&#10;                }}&#10;            &gt;&#10;                &lt;Text&#10;                    style={{&#10;                        fontSize: 26,&#10;                        fontWeight: 'bold',&#10;                        color: '#51277C',&#10;                        fontFamily: 'Trebuchet MS',&#10;                    }}&#10;                &gt;&#10;                    Bulan ini&#10;                &lt;/Text&gt;&#10;                &lt;Text&#10;                    style={{&#10;                        marginTop: 10,&#10;                        fontSize: 19,&#10;                        color: '#6B6478',&#10;                        fontFamily: 'Verdana',&#10;                        lineHeight: 1.5,&#10;                    }}&#10;                &gt;&#10;                    Kalender penuh satu bulan — bisa melihat jadwal jauh hari sebelumnya.&#10;                &lt;/Text&gt;&#10;            &lt;/Box&gt;&#10;        &lt;/Box&gt;&#10;    &lt;/Box&gt;&#10;&#10;    {/* ── C · bilah kaki ── */}&#10;    &lt;Box&#10;        style={{&#10;            height: 40,&#10;            flexDirection: 'row',&#10;            alignItems: 'center',&#10;            justifyContent: 'space-between',&#10;        }}&#10;    &gt;&#10;        &lt;Text style={{ fontSize: 14, color: '#6B6478', fontFamily: 'Verdana' }}&gt;&#10;            Pizza Snack Play · Panduan Orang Tua&#10;        &lt;/Text&gt;&#10;        &lt;Text style={{ fontSize: 14, color: '#6B6478', fontFamily: 'Verdana' }}&gt;10 / 15&lt;/Text&gt;&#10;    &lt;/Box&gt;&#10;&lt;/Slide&gt;&#10;"/>
+        <p:cNvPr id="16" name="" descr="&lt;Slide&#10;    style={{&#10;        width: '1280px',&#10;        height: '720px',&#10;        background: '#FAF7F2',&#10;        paddingTop: 20,&#10;        paddingBottom: 20,&#10;        paddingLeft: 64,&#10;        paddingRight: 64,&#10;    }}&#10;&gt;&#10;    {/* ── A · blok judul ── */}&#10;    &lt;Box style={{ height: 110, justifyContent: 'center' }}&gt;&#10;        &lt;Text&#10;            style={{&#10;                fontSize: 34,&#10;                fontWeight: 'bold',&#10;                color: '#51277C',&#10;                fontFamily: 'Trebuchet MS',&#10;                lineHeight: 1.3,&#10;            }}&#10;        &gt;&#10;            Lihat jadwal snack&#10;        &lt;/Text&gt;&#10;        &lt;Box style={{ marginTop: 10, width: 72, height: 6, borderRadius: 3, background: '#51277C' }} /&gt;&#10;    &lt;/Box&gt;&#10;&#10;    {/* ── B · area konten ── */}&#10;    &lt;Box style={{ height: 530 }}&gt;&#10;        {/* atas 64% · ilustrasi jadwal sepekan */}&#10;        &lt;Box&#10;            style={{&#10;                height: 340,&#10;                background: 'rgba(81,39,124,0.06)',&#10;                borderRadius: 20,&#10;                justifyContent: 'center',&#10;                alignItems: 'center',&#10;            }}&#10;        &gt;&#10;            &lt;svg width={1100} height={300} viewBox='0 0 1100 300'&gt;&#10;                {/* Senin */}&#10;                &lt;rect x='6' y='8' width='208' height='284' rx='16' fill='#FFFFFF' stroke='#E6DFD2' strokeWidth='2' /&gt;&#10;                &lt;rect x='6' y='8' width='208' height='58' rx='16' fill='#EFEAE1' /&gt;&#10;                &lt;rect x='6' y='44' width='208' height='22' fill='#EFEAE1' /&gt;&#10;                &lt;text x='110' y='46' fontFamily='Trebuchet MS' fontSize='24' fontWeight='bold' fill='#51277C' textAnchor='middle'&gt;&#10;                    Senin&#10;                &lt;/text&gt;&#10;                &lt;rect x='28' y='92' width='164' height='16' rx='8' fill='#DED7CB' /&gt;&#10;                &lt;rect x='28' y='124' width='128' height='14' rx='7' fill='#EDE8DF' /&gt;&#10;                &lt;rect x='28' y='158' width='72' height='28' rx='14' fill='#AFC440' /&gt;&#10;                &lt;text x='64' y='178' fontFamily='Verdana' fontSize='15' fill='#3F4718' textAnchor='middle'&gt;&#10;                    Jeruk&#10;                &lt;/text&gt;&#10;                &lt;rect x='28' y='214' width='164' height='1' fill='#EFEAE1' /&gt;&#10;                &lt;circle cx='44' cy='240' r='12' fill='#DED7CB' /&gt;&#10;                &lt;rect x='64' y='233' width='104' height='12' rx='6' fill='#EDE8DF' /&gt;&#10;&#10;                {/* Selasa */}&#10;                &lt;rect x='226' y='8' width='208' height='284' rx='16' fill='#FFFFFF' stroke='#E6DFD2' strokeWidth='2' /&gt;&#10;                &lt;rect x='226' y='8' width='208' height='58' rx='16' fill='#EFEAE1' /&gt;&#10;                &lt;rect x='226' y='44' width='208' height='22' fill='#EFEAE1' /&gt;&#10;                &lt;text x='330' y='46' fontFamily='Trebuchet MS' fontSize='24' fontWeight='bold' fill='#51277C' textAnchor='middle'&gt;&#10;                    Selasa&#10;                &lt;/text&gt;&#10;                &lt;rect x='248' y='92' width='164' height='16' rx='8' fill='#DED7CB' /&gt;&#10;                &lt;rect x='248' y='124' width='112' height='14' rx='7' fill='#EDE8DF' /&gt;&#10;                &lt;rect x='248' y='158' width='72' height='28' rx='14' fill='#AFC440' /&gt;&#10;                &lt;text x='284' y='178' fontFamily='Verdana' fontSize='15' fill='#3F4718' textAnchor='middle'&gt;&#10;                    Pisang&#10;                &lt;/text&gt;&#10;                &lt;rect x='248' y='214' width='164' height='1' fill='#EFEAE1' /&gt;&#10;                &lt;circle cx='264' cy='240' r='12' fill='#DED7CB' /&gt;&#10;                &lt;rect x='284' y='233' width='96' height='12' rx='6' fill='#EDE8DF' /&gt;&#10;&#10;                {/* Rabu — hari ini, disorot */}&#10;                &lt;rect x='446' y='0' width='208' height='300' rx='16' fill='#FFFFFF' stroke='#F3B26C' strokeWidth='5' /&gt;&#10;                &lt;rect x='446' y='0' width='208' height='62' rx='16' fill='#51277C' /&gt;&#10;                &lt;rect x='446' y='40' width='208' height='22' fill='#51277C' /&gt;&#10;                &lt;text x='550' y='42' fontFamily='Trebuchet MS' fontSize='24' fontWeight='bold' fill='#FFFFFF' textAnchor='middle'&gt;&#10;                    Rabu&#10;                &lt;/text&gt;&#10;                &lt;rect x='468' y='92' width='164' height='16' rx='8' fill='#51277C' opacity='0.65' /&gt;&#10;                &lt;rect x='468' y='124' width='136' height='14' rx='7' fill='#EDE8DF' /&gt;&#10;                &lt;rect x='468' y='158' width='92' height='28' rx='14' fill='#F3B26C' /&gt;&#10;                &lt;text x='514' y='178' fontFamily='Verdana' fontSize='15' fill='#51277C' textAnchor='middle'&gt;&#10;                    Semangka&#10;                &lt;/text&gt;&#10;                &lt;rect x='468' y='214' width='164' height='1' fill='#EFEAE1' /&gt;&#10;                &lt;circle cx='484' cy='240' r='12' fill='#51277C' opacity='0.25' /&gt;&#10;                &lt;rect x='504' y='233' width='118' height='12' rx='6' fill='#DED7CB' /&gt;&#10;                &lt;circle cx='654' cy='16' r='13' fill='#F3B26C' /&gt;&#10;                &lt;text x='654' y='22' fontFamily='Verdana' fontSize='13' fontWeight='bold' fill='#51277C' textAnchor='middle'&gt;&#10;                    !&#10;                &lt;/text&gt;&#10;&#10;                {/* Kamis */}&#10;                &lt;rect x='666' y='8' width='208' height='284' rx='16' fill='#FFFFFF' stroke='#E6DFD2' strokeWidth='2' /&gt;&#10;                &lt;rect x='666' y='8' width='208' height='58' rx='16' fill='#EFEAE1' /&gt;&#10;                &lt;rect x='666' y='44' width='208' height='22' fill='#EFEAE1' /&gt;&#10;                &lt;text x='770' y='46' fontFamily='Trebuchet MS' fontSize='24' fontWeight='bold' fill='#51277C' textAnchor='middle'&gt;&#10;                    Kamis&#10;                &lt;/text&gt;&#10;                &lt;rect x='688' y='92' width='164' height='16' rx='8' fill='#DED7CB' /&gt;&#10;                &lt;rect x='688' y='124' width='120' height='14' rx='7' fill='#EDE8DF' /&gt;&#10;                &lt;rect x='688' y='158' width='64' height='28' rx='14' fill='#AFC440' /&gt;&#10;                &lt;text x='720' y='178' fontFamily='Verdana' fontSize='15' fill='#3F4718' textAnchor='middle'&gt;&#10;                    Apel&#10;                &lt;/text&gt;&#10;                &lt;rect x='688' y='214' width='164' height='1' fill='#EFEAE1' /&gt;&#10;                &lt;circle cx='704' cy='240' r='12' fill='#DED7CB' /&gt;&#10;                &lt;rect x='724' y='233' width='88' height='12' rx='6' fill='#EDE8DF' /&gt;&#10;&#10;                {/* Jumat */}&#10;                &lt;rect x='886' y='8' width='208' height='284' rx='16' fill='#FFFFFF' stroke='#E6DFD2' strokeWidth='2' /&gt;&#10;                &lt;rect x='886' y='8' width='208' height='58' rx='16' fill='#EFEAE1' /&gt;&#10;                &lt;rect x='886' y='44' width='208' height='22' fill='#EFEAE1' /&gt;&#10;                &lt;text x='990' y='46' fontFamily='Trebuchet MS' fontSize='24' fontWeight='bold' fill='#51277C' textAnchor='middle'&gt;&#10;                    Jumat&#10;                &lt;/text&gt;&#10;                &lt;rect x='908' y='92' width='164' height='16' rx='8' fill='#DED7CB' /&gt;&#10;                &lt;rect x='908' y='124' width='132' height='14' rx='7' fill='#EDE8DF' /&gt;&#10;                &lt;rect x='908' y='158' width='70' height='28' rx='14' fill='#AFC440' /&gt;&#10;                &lt;text x='943' y='178' fontFamily='Verdana' fontSize='15' fill='#3F4718' textAnchor='middle'&gt;&#10;                    Melon&#10;                &lt;/text&gt;&#10;                &lt;rect x='908' y='214' width='164' height='1' fill='#EFEAE1' /&gt;&#10;                &lt;circle cx='924' cy='240' r='12' fill='#DED7CB' /&gt;&#10;                &lt;rect x='944' y='233' width='106' height='12' rx='6' fill='#EDE8DF' /&gt;&#10;            &lt;/svg&gt;&#10;        &lt;/Box&gt;&#10;&#10;        {/* bawah · dua kartu 60:40 */}&#10;        &lt;Box style={{ marginTop: 18, height: 172, flexDirection: 'row', gap: 24 }}&gt;&#10;            &lt;Box&#10;                style={{&#10;                    width: '60%',&#10;                    background: '#FFFFFF',&#10;                    borderRadius: 16,&#10;                    boxShadow: '0 4px 20px rgba(0,0,0,0.08)',&#10;                    padding: 24,&#10;                    borderLeft: '8px solid #F3B26C',&#10;                }}&#10;            &gt;&#10;                &lt;Text&#10;                    style={{&#10;                        fontSize: 26,&#10;                        fontWeight: 'bold',&#10;                        color: '#51277C',&#10;                        fontFamily: 'Trebuchet MS',&#10;                    }}&#10;                &gt;&#10;                    Hari ini &amp;amp; minggu ini&#10;                &lt;/Text&gt;&#10;                &lt;Text&#10;                    style={{&#10;                        marginTop: 10,&#10;                        fontSize: 19,&#10;                        color: '#6B6478',&#10;                        fontFamily: 'Verdana',&#10;                        lineHeight: 1.5,&#10;                    }}&#10;                &gt;&#10;                    Begitu aplikasi dibuka, makanan dan buahnya langsung kelihatan. Hari yang sedang berjalan ditandai, jadi tidak salah lihat.&#10;                &lt;/Text&gt;&#10;            &lt;/Box&gt;&#10;&#10;            &lt;Box&#10;                style={{&#10;                    width: '40%',&#10;                    background: '#FFFFFF',&#10;                    borderRadius: 16,&#10;                    boxShadow: '0 4px 20px rgba(0,0,0,0.08)',&#10;                    padding: 24,&#10;                    borderLeft: '8px solid #AFC440',&#10;                }}&#10;            &gt;&#10;                &lt;Text&#10;                    style={{&#10;                        fontSize: 26,&#10;                        fontWeight: 'bold',&#10;                        color: '#51277C',&#10;                        fontFamily: 'Trebuchet MS',&#10;                    }}&#10;                &gt;&#10;                    Bulan ini&#10;                &lt;/Text&gt;&#10;                &lt;Text&#10;                    style={{&#10;                        marginTop: 10,&#10;                        fontSize: 19,&#10;                        color: '#6B6478',&#10;                        fontFamily: 'Verdana',&#10;                        lineHeight: 1.5,&#10;                    }}&#10;                &gt;&#10;                    Kalender penuh satu bulan — bisa melihat jadwal jauh hari sebelumnya.&#10;                &lt;/Text&gt;&#10;            &lt;/Box&gt;&#10;        &lt;/Box&gt;&#10;    &lt;/Box&gt;&#10;&#10;    {/* ── C · bilah kaki ── */}&#10;    &lt;Box&#10;        style={{&#10;            height: 40,&#10;            flexDirection: 'row',&#10;            alignItems: 'center',&#10;            justifyContent: 'space-between',&#10;        }}&#10;    &gt;&#10;        &lt;Text style={{ fontSize: 14, color: '#6B6478', fontFamily: 'Verdana' }}&gt;&#10;            Pizza Snack Play · Panduan Orang Tua&#10;        &lt;/Text&gt;&#10;        &lt;Text style={{ fontSize: 14, color: '#6B6478', fontFamily: 'Verdana' }}&gt;10 / 15&lt;/Text&gt;&#10;    &lt;/Box&gt;&#10;&lt;/Slide&gt;"/>
         <p:cNvGrpSpPr/>
         <p:nvPr/>
       </p:nvGrpSpPr>
@@ -1970,7 +1970,7 @@
   <p:cSld>
     <p:spTree>
       <p:nvGrpSpPr>
-        <p:cNvPr id="32" name="" descr="&lt;Slide&#10;    style={{&#10;        width: '1280px',&#10;        height: '720px',&#10;        background: '#FAF7F2',&#10;        paddingTop: 20,&#10;        paddingBottom: 20,&#10;        paddingLeft: 64,&#10;        paddingRight: 64,&#10;        position: 'relative',&#10;        overflow: 'hidden',&#10;    }}&#10;&gt;&#10;    {/* sorotan latar Hero */}&#10;    &lt;Box&#10;        style={{&#10;            position: 'absolute',&#10;            top: 120,&#10;            left: -60,&#10;            width: 420,&#10;            height: 420,&#10;            borderRadius: 210,&#10;            background: '#F3B26C',&#10;            opacity: 0.20,&#10;        }}&#10;    /&gt;&#10;&#10;    {/* ── A · blok judul ── */}&#10;    &lt;Box style={{ height: 110, justifyContent: 'center', position: 'relative', zIndex: 1 }}&gt;&#10;        &lt;Text&#10;            style={{&#10;                fontSize: 34,&#10;                fontWeight: 'bold',&#10;                color: '#51277C',&#10;                fontFamily: 'Trebuchet MS',&#10;                lineHeight: 1.3,&#10;            }}&#10;        &gt;&#10;            Ambil tanggal piket&#10;        &lt;/Text&gt;&#10;        &lt;Box style={{ marginTop: 10, width: 72, height: 6, borderRadius: 3, background: '#51277C' }} /&gt;&#10;    &lt;/Box&gt;&#10;&#10;    {/* ── B · area konten ── */}&#10;    &lt;Box style={{ height: 530, flexDirection: 'row', gap: 30, position: 'relative', zIndex: 1 }}&gt;&#10;        {/* kiri · frasa raksasa + penjelasan */}&#10;        &lt;Box style={{ width: '52%', justifyContent: 'center' }}&gt;&#10;            &lt;Text&#10;                style={{&#10;                    fontSize: 72,&#10;                    fontWeight: 'bold',&#10;                    color: '#51277C',&#10;                    fontFamily: 'Trebuchet MS',&#10;                    lineHeight: 1.05,&#10;                }}&#10;            &gt;&#10;                Siapa cepat,{'\n'}dia dapat.&#10;            &lt;/Text&gt;&#10;&#10;            &lt;Box style={{ marginTop: 24, width: 110, height: 7, borderRadius: 4, background: '#F3B26C' }} /&gt;&#10;&#10;            &lt;Text&#10;                style={{&#10;                    marginTop: 22,&#10;                    fontSize: 19,&#10;                    color: '#2A2333',&#10;                    fontFamily: 'Verdana',&#10;                    lineHeight: 1.55,&#10;                }}&#10;            &gt;&#10;                Tanggal yang belum ada petugasnya bisa diambil sendiri. Satu ketuk langsung tercatat.&#10;            &lt;/Text&gt;&#10;&#10;            &lt;Text&#10;                style={{&#10;                    marginTop: 14,&#10;                    fontSize: 19,&#10;                    color: '#6B6478',&#10;                    fontFamily: 'Verdana',&#10;                    lineHeight: 1.55,&#10;                }}&#10;            &gt;&#10;                Kalau keduluan, aplikasi menyebut siapa yang lebih dulu mengambilnya. Jadi tidak ada lagi dua orang merasa sama-sama sudah dapat.&#10;            &lt;/Text&gt;&#10;&#10;            &lt;Box&#10;                style={{&#10;                    marginTop: 22,&#10;                    flexDirection: 'row',&#10;                    alignItems: 'center',&#10;                    gap: 12,&#10;                    alignSelf: 'flex-start',&#10;                    background: '#FFFFFF',&#10;                    borderRadius: 14,&#10;                    boxShadow: '0 4px 20px rgba(0,0,0,0.08)',&#10;                    paddingTop: 12,&#10;                    paddingBottom: 12,&#10;                    paddingLeft: 20,&#10;                    paddingRight: 22,&#10;                }}&#10;            &gt;&#10;                &lt;FAIcon name='undo' style={{ fill: '#51277C', width: 22, height: 22 }} /&gt;&#10;                &lt;Text style={{ fontSize: 18, color: '#2A2333', fontFamily: 'Verdana' }}&gt;&#10;                    Masih bisa dibatalkan sendiri&#10;                &lt;/Text&gt;&#10;            &lt;/Box&gt;&#10;        &lt;/Box&gt;&#10;&#10;        {/* kanan · kartu tanggal */}&#10;        &lt;Box&#10;            style={{&#10;                width: '48%',&#10;                justifyContent: 'center',&#10;                alignItems: 'center',&#10;            }}&#10;        &gt;&#10;            &lt;svg width={480} height={420} viewBox='0 0 480 420'&gt;&#10;                {/* kartu tersedia */}&#10;                &lt;rect x='8' y='8' width='464' height='236' rx='20' fill='#FFFFFF' stroke='#E6DFD2' strokeWidth='3' /&gt;&#10;                &lt;path d='M8 88 h464 v-32 a20 20 0 0 0 -20 -20 h-424 a20 20 0 0 0 -20 20 z' fill='#51277C' /&gt;&#10;                &lt;rect x='8' y='56' width='464' height='32' fill='#51277C' /&gt;&#10;                &lt;text x='36' y='62' fontFamily='Trebuchet MS' fontSize='23' fontWeight='bold' fill='#FFFFFF'&gt;&#10;                    Selasa, 1 September&#10;                &lt;/text&gt;&#10;                &lt;text x='36' y='158' fontFamily='Trebuchet MS' fontSize='64' fontWeight='bold' fill='#51277C'&gt;&#10;                    1&#10;                &lt;/text&gt;&#10;                &lt;text x='36' y='192' fontFamily='Verdana' fontSize='17' fill='#6B6478'&gt;&#10;                    Belum ada petugas&#10;                &lt;/text&gt;&#10;                &lt;rect x='272' y='132' width='176' height='62' rx='18' fill='#F3B26C' /&gt;&#10;                &lt;text x='360' y='172' fontFamily='Trebuchet MS' fontSize='26' fontWeight='bold' fill='#51277C' textAnchor='middle'&gt;&#10;                    Ambil&#10;                &lt;/text&gt;&#10;&#10;                {/* kartu sudah diambil */}&#10;                &lt;rect x='8' y='268' width='464' height='144' rx='20' fill='#FFFFFF' stroke='#AFC440' strokeWidth='4' /&gt;&#10;                &lt;circle cx='60' cy='340' r='30' fill='#AFC440' /&gt;&#10;                &lt;path&#10;                    d='M46 340 l10 11 l19 -22'&#10;                    fill='none'&#10;                    stroke='#FFFFFF'&#10;                    strokeWidth='7'&#10;                    strokeLinecap='round'&#10;                    strokeLinejoin='round'&#10;                /&gt;&#10;                &lt;text x='108' y='334' fontFamily='Trebuchet MS' fontSize='23' fontWeight='bold' fill='#2A2333'&gt;&#10;                    Diambil Bu Sari&#10;                &lt;/text&gt;&#10;                &lt;text x='108' y='364' fontFamily='Verdana' fontSize='17' fill='#6B6478'&gt;&#10;                    Tanggal ini sudah punya petugas&#10;                &lt;/text&gt;&#10;            &lt;/svg&gt;&#10;        &lt;/Box&gt;&#10;    &lt;/Box&gt;&#10;&#10;    {/* ── C · bilah kaki ── */}&#10;    &lt;Box&#10;        style={{&#10;            height: 40,&#10;            flexDirection: 'row',&#10;            alignItems: 'center',&#10;            justifyContent: 'space-between',&#10;            position: 'relative',&#10;            zIndex: 1,&#10;        }}&#10;    &gt;&#10;        &lt;Text style={{ fontSize: 14, color: '#6B6478', fontFamily: 'Verdana' }}&gt;&#10;            Pizza Snack Play · Panduan Orang Tua&#10;        &lt;/Text&gt;&#10;        &lt;Text style={{ fontSize: 14, color: '#6B6478', fontFamily: 'Verdana' }}&gt;11 / 15&lt;/Text&gt;&#10;    &lt;/Box&gt;&#10;&lt;/Slide&gt;&#10;"/>
+        <p:cNvPr id="32" name="" descr="&lt;Slide&#13;&#10;    style={{&#13;&#10;        width: '1280px',&#13;&#10;        height: '720px',&#13;&#10;        background: '#FAF7F2',&#13;&#10;        paddingTop: 20,&#13;&#10;        paddingBottom: 20,&#13;&#10;        paddingLeft: 64,&#13;&#10;        paddingRight: 64,&#13;&#10;        position: 'relative',&#13;&#10;        overflow: 'hidden',&#13;&#10;    }}&#13;&#10;&gt;&#13;&#10;    {/* sorotan latar Hero */}&#13;&#10;    &lt;Box&#13;&#10;        style={{&#13;&#10;            position: 'absolute',&#13;&#10;            top: 120,&#13;&#10;            left: -60,&#13;&#10;            width: 420,&#13;&#10;            height: 420,&#13;&#10;            borderRadius: 210,&#13;&#10;            background: '#F3B26C',&#13;&#10;            opacity: 0.20,&#13;&#10;        }}&#13;&#10;    /&gt;&#13;&#10;&#13;&#10;    {/* ── A · blok judul ── */}&#13;&#10;    &lt;Box style={{ height: 110, justifyContent: 'center', position: 'relative', zIndex: 1 }}&gt;&#13;&#10;        &lt;Text&#13;&#10;            style={{&#13;&#10;                fontSize: 34,&#13;&#10;                fontWeight: 'bold',&#13;&#10;                color: '#51277C',&#13;&#10;                fontFamily: 'Trebuchet MS',&#13;&#10;                lineHeight: 1.3,&#13;&#10;            }}&#13;&#10;        &gt;&#13;&#10;            Ambil tanggal piket&#13;&#10;        &lt;/Text&gt;&#13;&#10;        &lt;Box style={{ marginTop: 10, width: 72, height: 6, borderRadius: 3, background: '#51277C' }} /&gt;&#13;&#10;    &lt;/Box&gt;&#13;&#10;&#13;&#10;    {/* ── B · area konten ── */}&#13;&#10;    &lt;Box style={{ height: 530, flexDirection: 'row', gap: 30, position: 'relative', zIndex: 1 }}&gt;&#13;&#10;        {/* kiri · frasa raksasa + penjelasan */}&#13;&#10;        &lt;Box style={{ width: '52%', justifyContent: 'center' }}&gt;&#13;&#10;            &lt;Text&#13;&#10;                style={{&#13;&#10;                    fontSize: 72,&#13;&#10;                    fontWeight: 'bold',&#13;&#10;                    color: '#51277C',&#13;&#10;                    fontFamily: 'Trebuchet MS',&#13;&#10;                    lineHeight: 1.05,&#13;&#10;                }}&#13;&#10;            &gt;&#13;&#10;                Siapa cepat,{'\n'}dia dapat.&#13;&#10;            &lt;/Text&gt;&#13;&#10;&#13;&#10;            &lt;Box style={{ marginTop: 24, width: 110, height: 7, borderRadius: 4, background: '#F3B26C' }} /&gt;&#13;&#10;&#13;&#10;            &lt;Text&#13;&#10;                style={{&#13;&#10;                    marginTop: 22,&#13;&#10;                    fontSize: 19,&#13;&#10;                    color: '#2A2333',&#13;&#10;                    fontFamily: 'Verdana',&#13;&#10;                    lineHeight: 1.55,&#13;&#10;                }}&#13;&#10;            &gt;&#13;&#10;                Tanggal yang belum ada petugasnya bisa diambil sendiri. Satu ketuk langsung tercatat.&#13;&#10;            &lt;/Text&gt;&#13;&#10;&#13;&#10;            &lt;Text&#13;&#10;                style={{&#13;&#10;                    marginTop: 14,&#13;&#10;                    fontSize: 19,&#13;&#10;                    color: '#6B6478',&#13;&#10;                    fontFamily: 'Verdana',&#13;&#10;                    lineHeight: 1.55,&#13;&#10;                }}&#13;&#10;            &gt;&#13;&#10;                Kalau keduluan, aplikasi menyebut siapa yang lebih dulu mengambilnya. Jadi tidak ada lagi dua orang merasa sama-sama sudah dapat.&#13;&#10;            &lt;/Text&gt;&#13;&#10;&#13;&#10;            &lt;Box&#13;&#10;                style={{&#13;&#10;                    marginTop: 22,&#13;&#10;                    flexDirection: 'row',&#13;&#10;                    alignItems: 'center',&#13;&#10;                    gap: 12,&#13;&#10;                    alignSelf: 'flex-start',&#13;&#10;                    background: '#FFFFFF',&#13;&#10;                    borderRadius: 14,&#13;&#10;                    boxShadow: '0 4px 20px rgba(0,0,0,0.08)',&#13;&#10;                    paddingTop: 12,&#13;&#10;                    paddingBottom: 12,&#13;&#10;                    paddingLeft: 20,&#13;&#10;                    paddingRight: 22,&#13;&#10;                }}&#13;&#10;            &gt;&#13;&#10;                &lt;svg width={22} height={22} viewBox=&quot;0 0 512 512&quot; xmlns=&quot;http://www.w3.org/2000/svg&quot;&gt;&lt;path fill=&quot;#51277C&quot; d=&quot;M48.5 224H40c-13.3 0-24-10.7-24-24V72c0-9.7 5.8-18.5 14.8-22.2s19.3-1.7 26.2 5.2L98.6 96.6c87.6-86.5 228.7-86.2 315.8 1c87.5 87.5 87.5 229.3 0 316.8s-229.3 87.5-316.8 0c-12.5-12.5-12.5-32.8 0-45.3s32.8-12.5 45.3 0c62.5 62.5 163.8 62.5 226.3 0s62.5-163.8 0-226.3c-62.2-62.2-162.7-62.5-225.3-1L185 183c6.9 6.9 8.9 17.2 5.2 26.2s-12.5 14.8-22.2 14.8H48.5z&quot; /&gt;&lt;/svg&gt;&#13;&#10;                &lt;Text style={{ fontSize: 18, color: '#2A2333', fontFamily: 'Verdana' }}&gt;&#13;&#10;                    Masih bisa dibatalkan sendiri&#13;&#10;                &lt;/Text&gt;&#13;&#10;            &lt;/Box&gt;&#13;&#10;        &lt;/Box&gt;&#13;&#10;&#13;&#10;        {/* kanan · kartu tanggal */}&#13;&#10;        &lt;Box&#13;&#10;            style={{&#13;&#10;                width: '48%',&#13;&#10;                justifyContent: 'center',&#13;&#10;                alignItems: 'center',&#13;&#10;            }}&#13;&#10;        &gt;&#13;&#10;            &lt;svg width={480} height={420} viewBox='0 0 480 420'&gt;&#13;&#10;                {/* kartu tersedia */}&#13;&#10;                &lt;rect x='8' y='8' width='464' height='236' rx='20' fill='#FFFFFF' stroke='#E6DFD2' strokeWidth='3' /&gt;&#13;&#10;                &lt;path d='M8 88 h464 v-32 a20 20 0 0 0 -20 -20 h-424 a20 20 0 0 0 -20 20 z' fill='#51277C' /&gt;&#13;&#10;                &lt;rect x='8' y='56' width='464' height='32' fill='#51277C' /&gt;&#13;&#10;                &lt;text x='36' y='62' fontFamily='Trebuchet MS' fontSize='23' fontWeight='bold' fill='#FFFFFF'&gt;&#13;&#10;                    Selasa, 1 September&#13;&#10;                &lt;/text&gt;&#13;&#10;                &lt;text x='36' y='158' fontFamily='Trebuchet MS' fontSize='64' fontWeight='bold' fill='#51277C'&gt;&#13;&#10;                    1&#13;&#10;                &lt;/text&gt;&#13;&#10;                &lt;text x='36' y='192' fontFamily='Verdana' fontSize='17' fill='#6B6478'&gt;&#13;&#10;                    Belum ada petugas&#13;&#10;                &lt;/text&gt;&#13;&#10;                &lt;rect x='272' y='132' width='176' height='62' rx='18' fill='#F3B26C' /&gt;&#13;&#10;                &lt;text x='360' y='172' fontFamily='Trebuchet MS' fontSize='26' fontWeight='bold' fill='#51277C' textAnchor='middle'&gt;&#13;&#10;                    Ambil&#13;&#10;                &lt;/text&gt;&#13;&#10;&#13;&#10;                {/* kartu sudah diambil */}&#13;&#10;                &lt;rect x='8' y='268' width='464' height='144' rx='20' fill='#FFFFFF' stroke='#AFC440' strokeWidth='4' /&gt;&#13;&#10;                &lt;circle cx='60' cy='340' r='30' fill='#AFC440' /&gt;&#13;&#10;                &lt;path&#13;&#10;                    d='M46 340 l10 11 l19 -22'&#13;&#10;                    fill='none'&#13;&#10;                    stroke='#FFFFFF'&#13;&#10;                    strokeWidth='7'&#13;&#10;                    strokeLinecap='round'&#13;&#10;                    strokeLinejoin='round'&#13;&#10;                /&gt;&#13;&#10;                &lt;text x='108' y='334' fontFamily='Trebuchet MS' fontSize='23' fontWeight='bold' fill='#2A2333'&gt;&#13;&#10;                    Diambil Bu Sari&#13;&#10;                &lt;/text&gt;&#13;&#10;                &lt;text x='108' y='364' fontFamily='Verdana' fontSize='17' fill='#6B6478'&gt;&#13;&#10;                    Tanggal ini sudah punya petugas&#13;&#10;                &lt;/text&gt;&#13;&#10;            &lt;/svg&gt;&#13;&#10;        &lt;/Box&gt;&#13;&#10;    &lt;/Box&gt;&#13;&#10;&#13;&#10;    {/* ── C · bilah kaki ── */}&#13;&#10;    &lt;Box&#13;&#10;        style={{&#13;&#10;            height: 40,&#13;&#10;            flexDirection: 'row',&#13;&#10;            alignItems: 'center',&#13;&#10;            justifyContent: 'space-between',&#13;&#10;            position: 'relative',&#13;&#10;            zIndex: 1,&#13;&#10;        }}&#13;&#10;    &gt;&#13;&#10;        &lt;Text style={{ fontSize: 14, color: '#6B6478', fontFamily: 'Verdana' }}&gt;&#13;&#10;            Pizza Snack Play · Panduan Orang Tua&#13;&#10;        &lt;/Text&gt;&#13;&#10;        &lt;Text style={{ fontSize: 14, color: '#6B6478', fontFamily: 'Verdana' }}&gt;11 / 15&lt;/Text&gt;&#13;&#10;    &lt;/Box&gt;&#13;&#10;&lt;/Slide&gt;"/>
         <p:cNvGrpSpPr/>
         <p:nvPr/>
       </p:nvGrpSpPr>
@@ -3045,7 +3045,7 @@
   <p:cSld>
     <p:spTree>
       <p:nvGrpSpPr>
-        <p:cNvPr id="47" name="" descr="&lt;Slide&#10;    style={{&#10;        width: '1280px',&#10;        height: '720px',&#10;        background: '#FAF7F2',&#10;        paddingTop: 20,&#10;        paddingBottom: 20,&#10;        paddingLeft: 64,&#10;        paddingRight: 64,&#10;    }}&#10;&gt;&#10;    {/* ── A · blok judul ── */}&#10;    &lt;Box style={{ height: 110, justifyContent: 'center' }}&gt;&#10;        &lt;Text&#10;            style={{&#10;                fontSize: 34,&#10;                fontWeight: 'bold',&#10;                color: '#51277C',&#10;                fontFamily: 'Trebuchet MS',&#10;                lineHeight: 1.3,&#10;            }}&#10;        &gt;&#10;            Cari menu&#10;        &lt;/Text&gt;&#10;        &lt;Box style={{ marginTop: 10, width: 72, height: 6, borderRadius: 3, background: '#51277C' }} /&gt;&#10;    &lt;/Box&gt;&#10;&#10;    {/* ── B · area konten ── */}&#10;    &lt;Box style={{ height: 530, flexDirection: 'row', gap: 28 }}&gt;&#10;        {/* kiri 30% · panel ungu */}&#10;        &lt;Box&#10;            style={{&#10;                width: '30%',&#10;                height: '100%',&#10;                background: 'linear-gradient(135deg, #51277C 0%, #7A45A8 100%)',&#10;                borderRadius: 20,&#10;                padding: 26,&#10;                justifyContent: 'space-between',&#10;                alignItems: 'center',&#10;            }}&#10;        &gt;&#10;            &lt;Box style={{ alignItems: 'center' }}&gt;&#10;                &lt;Text style={{ fontSize: 16, color: 'rgba(255,255,255,0.75)', fontFamily: 'Verdana' }}&gt;&#10;                    Fitur pendukung&#10;                &lt;/Text&gt;&#10;                &lt;Text&#10;                    style={{&#10;                        marginTop: 8,&#10;                        fontSize: 40,&#10;                        fontWeight: 'bold',&#10;                        color: '#FFFFFF',&#10;                        fontFamily: 'Trebuchet MS',&#10;                    }}&#10;                &gt;&#10;                    Cari&#10;                &lt;/Text&gt;&#10;            &lt;/Box&gt;&#10;&#10;            &lt;svg width={190} height={190} viewBox='0 0 190 190'&gt;&#10;                &lt;circle cx='82' cy='82' r='54' fill='none' stroke='#FFFFFF' strokeWidth='12' /&gt;&#10;                &lt;path d='M122 122 l44 44' stroke='#F3B26C' strokeWidth='14' strokeLinecap='round' /&gt;&#10;                &lt;circle cx='82' cy='82' r='34' fill='#AFC440' opacity='0.35' /&gt;&#10;                &lt;circle cx='70' cy='72' r='7' fill='#FFFFFF' /&gt;&#10;                &lt;circle cx='94' cy='88' r='7' fill='#FFFFFF' /&gt;&#10;                &lt;circle cx='76' cy='98' r='7' fill='#FFFFFF' /&gt;&#10;            &lt;/svg&gt;&#10;&#10;            &lt;Text&#10;                style={{&#10;                    fontSize: 17,&#10;                    color: 'rgba(255,255,255,0.9)',&#10;                    fontFamily: 'Verdana',&#10;                    lineHeight: 1.5,&#10;                    textAlign: 'center',&#10;                }}&#10;            &gt;&#10;                Dipakai kalau ingin tahu riwayat menu.&#10;            &lt;/Text&gt;&#10;        &lt;/Box&gt;&#10;&#10;        {/* kanan 70% · tiga keterangan */}&#10;        &lt;Box style={{ width: '70%', height: '100%', justifyContent: 'space-between' }}&gt;&#10;            &lt;Box&#10;                style={{&#10;                    height: 166,&#10;                    flexDirection: 'row',&#10;                    alignItems: 'center',&#10;                    gap: 20,&#10;                    background: '#FFFFFF',&#10;                    borderRadius: 16,&#10;                    boxShadow: '0 4px 20px rgba(0,0,0,0.08)',&#10;                    paddingLeft: 24,&#10;                    paddingRight: 26,&#10;                    borderLeft: '8px solid #AFC440',&#10;                }}&#10;            &gt;&#10;                &lt;Box&#10;                    style={{&#10;                        width: 54,&#10;                        height: 54,&#10;                        borderRadius: 27,&#10;                        background: 'rgba(81,39,124,0.10)',&#10;                        justifyContent: 'center',&#10;                        alignItems: 'center',&#10;                    }}&#10;                &gt;&#10;                    &lt;FAIcon name='search' style={{ fill: '#51277C', width: 28, height: 28 }} /&gt;&#10;                &lt;/Box&gt;&#10;                &lt;Box style={{ flex: 1 }}&gt;&#10;                    &lt;Text&#10;                        style={{&#10;                            fontSize: 24,&#10;                            fontWeight: 'bold',&#10;                            color: '#2A2333',&#10;                            fontFamily: 'Trebuchet MS',&#10;                            lineHeight: 1.3,&#10;                        }}&#10;                    &gt;&#10;                        Ketik nama makanan atau buah&#10;                    &lt;/Text&gt;&#10;                    &lt;Text&#10;                        style={{&#10;                            marginTop: 6,&#10;                            fontSize: 18,&#10;                            color: '#6B6478',&#10;                            fontFamily: 'Verdana',&#10;                            lineHeight: 1.45,&#10;                        }}&#10;                    &gt;&#10;                        Misalnya &quot;jeruk&quot; atau &quot;roti&quot;. Aplikasi langsung menemukannya.&#10;                    &lt;/Text&gt;&#10;                &lt;/Box&gt;&#10;            &lt;/Box&gt;&#10;&#10;            &lt;Box&#10;                style={{&#10;                    height: 166,&#10;                    flexDirection: 'row',&#10;                    alignItems: 'center',&#10;                    gap: 20,&#10;                    background: '#FFFFFF',&#10;                    borderRadius: 16,&#10;                    boxShadow: '0 4px 20px rgba(0,0,0,0.08)',&#10;                    paddingLeft: 24,&#10;                    paddingRight: 26,&#10;                    borderLeft: '8px solid #AFC440',&#10;                }}&#10;            &gt;&#10;                &lt;Box&#10;                    style={{&#10;                        width: 54,&#10;                        height: 54,&#10;                        borderRadius: 27,&#10;                        background: 'rgba(81,39,124,0.10)',&#10;                        justifyContent: 'center',&#10;                        alignItems: 'center',&#10;                    }}&#10;                &gt;&#10;                    &lt;FAIcon name='calendar' style={{ fill: '#51277C', width: 28, height: 28 }} /&gt;&#10;                &lt;/Box&gt;&#10;                &lt;Box style={{ flex: 1 }}&gt;&#10;                    &lt;Text&#10;                        style={{&#10;                            fontSize: 24,&#10;                            fontWeight: 'bold',&#10;                            color: '#2A2333',&#10;                            fontFamily: 'Trebuchet MS',&#10;                            lineHeight: 1.3,&#10;                        }}&#10;                    &gt;&#10;                        Tahu kapan terakhir disajikan&#10;                    &lt;/Text&gt;&#10;                    &lt;Text&#10;                        style={{&#10;                            marginTop: 6,&#10;                            fontSize: 18,&#10;                            color: '#6B6478',&#10;                            fontFamily: 'Verdana',&#10;                            lineHeight: 1.45,&#10;                        }}&#10;                    &gt;&#10;                        Hasilnya berupa daftar tanggal, jadi rotasi menunya kelihatan.&#10;                    &lt;/Text&gt;&#10;                &lt;/Box&gt;&#10;            &lt;/Box&gt;&#10;&#10;            &lt;Box&#10;                style={{&#10;                    height: 166,&#10;                    background: '#FFFFFF',&#10;                    borderRadius: 16,&#10;                    boxShadow: '0 4px 20px rgba(0,0,0,0.08)',&#10;                    padding: 22,&#10;                    borderLeft: '8px solid #F3B26C',&#10;                }}&#10;            &gt;&#10;                &lt;Text&#10;                    style={{&#10;                        fontSize: 24,&#10;                        fontWeight: 'bold',&#10;                        color: '#2A2333',&#10;                        fontFamily: 'Trebuchet MS',&#10;                        lineHeight: 1.3,&#10;                    }}&#10;                &gt;&#10;                    Berguna kalau anak punya pantangan&#10;                &lt;/Text&gt;&#10;                &lt;Text&#10;                    style={{&#10;                        marginTop: 8,&#10;                        fontSize: 18,&#10;                        color: '#6B6478',&#10;                        fontFamily: 'Verdana',&#10;                        lineHeight: 1.45,&#10;                    }}&#10;                &gt;&#10;                    Bisa dicek lebih dulu sebelum hari itu tiba. Kalau perlu, hubungi korlas kelas agar menu diganti.&#10;                &lt;/Text&gt;&#10;                &lt;Box style={{ marginTop: 'auto' }}&gt;&#10;                    &lt;Text style={{ fontSize: 15, color: '#51277C', fontFamily: 'Verdana', fontWeight: 'bold' }}&gt;&#10;                        Contoh: cari &quot;udang&quot;, lalu lihat tanggalnya&#10;                    &lt;/Text&gt;&#10;                &lt;/Box&gt;&#10;            &lt;/Box&gt;&#10;        &lt;/Box&gt;&#10;    &lt;/Box&gt;&#10;&#10;    {/* ── C · bilah kaki ── */}&#10;    &lt;Box&#10;        style={{&#10;            height: 40,&#10;            flexDirection: 'row',&#10;            alignItems: 'center',&#10;            justifyContent: 'space-between',&#10;        }}&#10;    &gt;&#10;        &lt;Text style={{ fontSize: 14, color: '#6B6478', fontFamily: 'Verdana' }}&gt;&#10;            Pizza Snack Play · Panduan Orang Tua&#10;        &lt;/Text&gt;&#10;        &lt;Text style={{ fontSize: 14, color: '#6B6478', fontFamily: 'Verdana' }}&gt;12 / 15&lt;/Text&gt;&#10;    &lt;/Box&gt;&#10;&lt;/Slide&gt;&#10;"/>
+        <p:cNvPr id="47" name="" descr="&lt;Slide&#13;&#10;    style={{&#13;&#10;        width: '1280px',&#13;&#10;        height: '720px',&#13;&#10;        background: '#FAF7F2',&#13;&#10;        paddingTop: 20,&#13;&#10;        paddingBottom: 20,&#13;&#10;        paddingLeft: 64,&#13;&#10;        paddingRight: 64,&#13;&#10;    }}&#13;&#10;&gt;&#13;&#10;    {/* ── A · blok judul ── */}&#13;&#10;    &lt;Box style={{ height: 110, justifyContent: 'center' }}&gt;&#13;&#10;        &lt;Text&#13;&#10;            style={{&#13;&#10;                fontSize: 34,&#13;&#10;                fontWeight: 'bold',&#13;&#10;                color: '#51277C',&#13;&#10;                fontFamily: 'Trebuchet MS',&#13;&#10;                lineHeight: 1.3,&#13;&#10;            }}&#13;&#10;        &gt;&#13;&#10;            Cari menu&#13;&#10;        &lt;/Text&gt;&#13;&#10;        &lt;Box style={{ marginTop: 10, width: 72, height: 6, borderRadius: 3, background: '#51277C' }} /&gt;&#13;&#10;    &lt;/Box&gt;&#13;&#10;&#13;&#10;    {/* ── B · area konten ── */}&#13;&#10;    &lt;Box style={{ height: 530, flexDirection: 'row', gap: 28 }}&gt;&#13;&#10;        {/* kiri 30% · panel ungu */}&#13;&#10;        &lt;Box&#13;&#10;            style={{&#13;&#10;                width: '30%',&#13;&#10;                height: '100%',&#13;&#10;                background: 'linear-gradient(135deg, #51277C 0%, #7A45A8 100%)',&#13;&#10;                borderRadius: 20,&#13;&#10;                padding: 26,&#13;&#10;                justifyContent: 'space-between',&#13;&#10;                alignItems: 'center',&#13;&#10;            }}&#13;&#10;        &gt;&#13;&#10;            &lt;Box style={{ alignItems: 'center' }}&gt;&#13;&#10;                &lt;Text style={{ fontSize: 16, color: 'rgba(255,255,255,0.75)', fontFamily: 'Verdana' }}&gt;&#13;&#10;                    Fitur pendukung&#13;&#10;                &lt;/Text&gt;&#13;&#10;                &lt;Text&#13;&#10;                    style={{&#13;&#10;                        marginTop: 8,&#13;&#10;                        fontSize: 40,&#13;&#10;                        fontWeight: 'bold',&#13;&#10;                        color: '#FFFFFF',&#13;&#10;                        fontFamily: 'Trebuchet MS',&#13;&#10;                    }}&#13;&#10;                &gt;&#13;&#10;                    Cari&#13;&#10;                &lt;/Text&gt;&#13;&#10;            &lt;/Box&gt;&#13;&#10;&#13;&#10;            &lt;svg width={190} height={190} viewBox='0 0 190 190'&gt;&#13;&#10;                &lt;circle cx='82' cy='82' r='54' fill='none' stroke='#FFFFFF' strokeWidth='12' /&gt;&#13;&#10;                &lt;path d='M122 122 l44 44' stroke='#F3B26C' strokeWidth='14' strokeLinecap='round' /&gt;&#13;&#10;                &lt;circle cx='82' cy='82' r='34' fill='#AFC440' opacity='0.35' /&gt;&#13;&#10;                &lt;circle cx='70' cy='72' r='7' fill='#FFFFFF' /&gt;&#13;&#10;                &lt;circle cx='94' cy='88' r='7' fill='#FFFFFF' /&gt;&#13;&#10;                &lt;circle cx='76' cy='98' r='7' fill='#FFFFFF' /&gt;&#13;&#10;            &lt;/svg&gt;&#13;&#10;&#13;&#10;            &lt;Text&#13;&#10;                style={{&#13;&#10;                    fontSize: 17,&#13;&#10;                    color: 'rgba(255,255,255,0.9)',&#13;&#10;                    fontFamily: 'Verdana',&#13;&#10;                    lineHeight: 1.5,&#13;&#10;                    textAlign: 'center',&#13;&#10;                }}&#13;&#10;            &gt;&#13;&#10;                Dipakai kalau ingin tahu riwayat menu.&#13;&#10;            &lt;/Text&gt;&#13;&#10;        &lt;/Box&gt;&#13;&#10;&#13;&#10;        {/* kanan 70% · tiga keterangan */}&#13;&#10;        &lt;Box style={{ width: '70%', height: '100%', justifyContent: 'space-between' }}&gt;&#13;&#10;            &lt;Box&#13;&#10;                style={{&#13;&#10;                    height: 166,&#13;&#10;                    flexDirection: 'row',&#13;&#10;                    alignItems: 'center',&#13;&#10;                    gap: 20,&#13;&#10;                    background: '#FFFFFF',&#13;&#10;                    borderRadius: 16,&#13;&#10;                    boxShadow: '0 4px 20px rgba(0,0,0,0.08)',&#13;&#10;                    paddingLeft: 24,&#13;&#10;                    paddingRight: 26,&#13;&#10;                    borderLeft: '8px solid #AFC440',&#13;&#10;                }}&#13;&#10;            &gt;&#13;&#10;                &lt;Box&#13;&#10;                    style={{&#13;&#10;                        width: 54,&#13;&#10;                        height: 54,&#13;&#10;                        borderRadius: 27,&#13;&#10;                        background: 'rgba(81,39,124,0.10)',&#13;&#10;                        justifyContent: 'center',&#13;&#10;                        alignItems: 'center',&#13;&#10;                    }}&#13;&#10;                &gt;&#13;&#10;                    &lt;svg width={28} height={28} viewBox=&quot;0 0 512 512&quot; xmlns=&quot;http://www.w3.org/2000/svg&quot;&gt;&lt;path fill=&quot;#51277C&quot; d=&quot;M416 208c0 45.9-14.9 88.3-40 122.7L502.6 457.4c12.5 12.5 12.5 32.8 0 45.3s-32.8 12.5-45.3 0L330.7 376c-34.4 25.2-76.8 40-122.7 40C93.1 416 0 322.9 0 208S93.1 0 208 0S416 93.1 416 208zM208 352a144 144 0 1 0 0-288 144 144 0 1 0 0 288z&quot; /&gt;&lt;/svg&gt;&#13;&#10;                &lt;/Box&gt;&#13;&#10;                &lt;Box style={{ flex: 1 }}&gt;&#13;&#10;                    &lt;Text&#13;&#10;                        style={{&#13;&#10;                            fontSize: 24,&#13;&#10;                            fontWeight: 'bold',&#13;&#10;                            color: '#2A2333',&#13;&#10;                            fontFamily: 'Trebuchet MS',&#13;&#10;                            lineHeight: 1.3,&#13;&#10;                        }}&#13;&#10;                    &gt;&#13;&#10;                        Ketik nama makanan atau buah&#13;&#10;                    &lt;/Text&gt;&#13;&#10;                    &lt;Text&#13;&#10;                        style={{&#13;&#10;                            marginTop: 6,&#13;&#10;                            fontSize: 18,&#13;&#10;                            color: '#6B6478',&#13;&#10;                            fontFamily: 'Verdana',&#13;&#10;                            lineHeight: 1.45,&#13;&#10;                        }}&#13;&#10;                    &gt;&#13;&#10;                        Misalnya &quot;jeruk&quot; atau &quot;roti&quot;. Aplikasi langsung menemukannya.&#13;&#10;                    &lt;/Text&gt;&#13;&#10;                &lt;/Box&gt;&#13;&#10;            &lt;/Box&gt;&#13;&#10;&#13;&#10;            &lt;Box&#13;&#10;                style={{&#13;&#10;                    height: 166,&#13;&#10;                    flexDirection: 'row',&#13;&#10;                    alignItems: 'center',&#13;&#10;                    gap: 20,&#13;&#10;                    background: '#FFFFFF',&#13;&#10;                    borderRadius: 16,&#13;&#10;                    boxShadow: '0 4px 20px rgba(0,0,0,0.08)',&#13;&#10;                    paddingLeft: 24,&#13;&#10;                    paddingRight: 26,&#13;&#10;                    borderLeft: '8px solid #AFC440',&#13;&#10;                }}&#13;&#10;            &gt;&#13;&#10;                &lt;Box&#13;&#10;                    style={{&#13;&#10;                        width: 54,&#13;&#10;                        height: 54,&#13;&#10;                        borderRadius: 27,&#13;&#10;                        background: 'rgba(81,39,124,0.10)',&#13;&#10;                        justifyContent: 'center',&#13;&#10;                        alignItems: 'center',&#13;&#10;                    }}&#13;&#10;                &gt;&#13;&#10;                    &lt;svg width={28} height={28} viewBox=&quot;0 0 448 512&quot; xmlns=&quot;http://www.w3.org/2000/svg&quot;&gt;&lt;path fill=&quot;#51277C&quot; d=&quot;M96 32V64H48C21.5 64 0 85.5 0 112v48H448V112c0-26.5-21.5-48-48-48H352V32c0-17.7-14.3-32-32-32s-32 14.3-32 32V64H160V32c0-17.7-14.3-32-32-32S96 14.3 96 32zM448 192H0V464c0 26.5 21.5 48 48 48H400c26.5 0 48-21.5 48-48V192z&quot; /&gt;&lt;/svg&gt;&#13;&#10;                &lt;/Box&gt;&#13;&#10;                &lt;Box style={{ flex: 1 }}&gt;&#13;&#10;                    &lt;Text&#13;&#10;                        style={{&#13;&#10;                            fontSize: 24,&#13;&#10;                            fontWeight: 'bold',&#13;&#10;                            color: '#2A2333',&#13;&#10;                            fontFamily: 'Trebuchet MS',&#13;&#10;                            lineHeight: 1.3,&#13;&#10;                        }}&#13;&#10;                    &gt;&#13;&#10;                        Tahu kapan terakhir disajikan&#13;&#10;                    &lt;/Text&gt;&#13;&#10;                    &lt;Text&#13;&#10;                        style={{&#13;&#10;                            marginTop: 6,&#13;&#10;                            fontSize: 18,&#13;&#10;                            color: '#6B6478',&#13;&#10;                            fontFamily: 'Verdana',&#13;&#10;                            lineHeight: 1.45,&#13;&#10;                        }}&#13;&#10;                    &gt;&#13;&#10;                        Hasilnya berupa daftar tanggal, jadi rotasi menunya kelihatan.&#13;&#10;                    &lt;/Text&gt;&#13;&#10;                &lt;/Box&gt;&#13;&#10;            &lt;/Box&gt;&#13;&#10;&#13;&#10;            &lt;Box&#13;&#10;                style={{&#13;&#10;                    height: 166,&#13;&#10;                    background: '#FFFFFF',&#13;&#10;                    borderRadius: 16,&#13;&#10;                    boxShadow: '0 4px 20px rgba(0,0,0,0.08)',&#13;&#10;                    padding: 22,&#13;&#10;                    borderLeft: '8px solid #F3B26C',&#13;&#10;                }}&#13;&#10;            &gt;&#13;&#10;                &lt;Text&#13;&#10;                    style={{&#13;&#10;                        fontSize: 24,&#13;&#10;                        fontWeight: 'bold',&#13;&#10;                        color: '#2A2333',&#13;&#10;                        fontFamily: 'Trebuchet MS',&#13;&#10;                        lineHeight: 1.3,&#13;&#10;                    }}&#13;&#10;                &gt;&#13;&#10;                    Berguna kalau anak punya pantangan&#13;&#10;                &lt;/Text&gt;&#13;&#10;                &lt;Text&#13;&#10;                    style={{&#13;&#10;                        marginTop: 8,&#13;&#10;                        fontSize: 18,&#13;&#10;                        color: '#6B6478',&#13;&#10;                        fontFamily: 'Verdana',&#13;&#10;                        lineHeight: 1.45,&#13;&#10;                    }}&#13;&#10;                &gt;&#13;&#10;                    Bisa dicek lebih dulu sebelum hari itu tiba. Kalau perlu, hubungi korlas kelas agar menu diganti.&#13;&#10;                &lt;/Text&gt;&#13;&#10;                &lt;Box style={{ marginTop: 'auto' }}&gt;&#13;&#10;                    &lt;Text style={{ fontSize: 15, color: '#51277C', fontFamily: 'Verdana', fontWeight: 'bold' }}&gt;&#13;&#10;                        Contoh: cari &quot;udang&quot;, lalu lihat tanggalnya&#13;&#10;                    &lt;/Text&gt;&#13;&#10;                &lt;/Box&gt;&#13;&#10;            &lt;/Box&gt;&#13;&#10;        &lt;/Box&gt;&#13;&#10;    &lt;/Box&gt;&#13;&#10;&#13;&#10;    {/* ── C · bilah kaki ── */}&#13;&#10;    &lt;Box&#13;&#10;        style={{&#13;&#10;            height: 40,&#13;&#10;            flexDirection: 'row',&#13;&#10;            alignItems: 'center',&#13;&#10;            justifyContent: 'space-between',&#13;&#10;        }}&#13;&#10;    &gt;&#13;&#10;        &lt;Text style={{ fontSize: 14, color: '#6B6478', fontFamily: 'Verdana' }}&gt;&#13;&#10;            Pizza Snack Play · Panduan Orang Tua&#13;&#10;        &lt;/Text&gt;&#13;&#10;        &lt;Text style={{ fontSize: 14, color: '#6B6478', fontFamily: 'Verdana' }}&gt;12 / 15&lt;/Text&gt;&#13;&#10;    &lt;/Box&gt;&#13;&#10;&lt;/Slide&gt;"/>
         <p:cNvGrpSpPr/>
         <p:nvPr/>
       </p:nvGrpSpPr>
@@ -3667,7 +3667,7 @@
           <a:blip>
             <a:extLst>
               <a:ext uri="{96DAC541-7B7A-43D3-8B79-37D633B846F1}">
-                <asvg:svgBlip r:embed="rId2"/>
+                <asvg:svgBlip r:embed="rId3"/>
               </a:ext>
             </a:extLst>
           </a:blip>
@@ -4033,7 +4033,7 @@
   <p:cSld>
     <p:spTree>
       <p:nvGrpSpPr>
-        <p:cNvPr id="75" name="" descr="&lt;Slide&#10;    style={{&#10;        width: '1280px',&#10;        height: '720px',&#10;        background: 'linear-gradient(135deg, #51277C 0%, #7A45A8 100%)',&#10;        paddingTop: 60,&#10;        paddingBottom: 60,&#10;        paddingLeft: 72,&#10;        paddingRight: 72,&#10;        justifyContent: 'center',&#10;        position: 'relative',&#10;        overflow: 'hidden',&#10;    }}&#10;&gt;&#10;    {/* dekorasi: lingkaran centang + bintang */}&#10;    &lt;Box&#10;        style={{&#10;            position: 'absolute',&#10;            bottom: -130,&#10;            right: -40,&#10;            width: 420,&#10;            height: 420,&#10;            borderRadius: 210,&#10;            background: '#AFC440',&#10;            opacity: 0.16,&#10;        }}&#10;    /&gt;&#10;    &lt;Box style={{ position: 'absolute', top: 78, right: 96, opacity: 0.22 }}&gt;&#10;        &lt;svg width={230} height={230} viewBox='0 0 230 230'&gt;&#10;            &lt;circle cx='115' cy='115' r='96' fill='none' stroke='#FFFFFF' strokeWidth='8' /&gt;&#10;            &lt;path&#10;                d='M72 118 l30 32 l60 -70'&#10;                fill='none'&#10;                stroke='#AFC440'&#10;                strokeWidth='16'&#10;                strokeLinecap='round'&#10;                strokeLinejoin='round'&#10;            /&gt;&#10;            &lt;path&#10;                d='M196 36 l8 18 l18 8 l-18 8 l-8 18 l-8 -18 l-18 -8 l18 -8 z'&#10;                fill='#F3B26C'&#10;            /&gt;&#10;        &lt;/svg&gt;&#10;    &lt;/Box&gt;&#10;&#10;    {/* isi */}&#10;    &lt;Box style={{ position: 'relative', zIndex: 1, width: '62%' }}&gt;&#10;        &lt;Box style={{ flexDirection: 'row', alignItems: 'center', gap: 14, alignSelf: 'flex-start' }}&gt;&#10;            &lt;Text&#10;                style={{&#10;                    fontSize: 76,&#10;                    fontWeight: 'bold',&#10;                    color: '#F3B26C',&#10;                    fontFamily: 'Trebuchet MS',&#10;                    lineHeight: 1,&#10;                }}&#10;            &gt;&#10;                04&#10;            &lt;/Text&gt;&#10;            &lt;Box style={{ width: 3, height: 52, background: 'rgba(255,255,255,0.45)' }} /&gt;&#10;            &lt;Text style={{ fontSize: 19, color: 'rgba(255,255,255,0.8)', fontFamily: 'Verdana' }}&gt;&#10;                Bagian terakhir&#10;            &lt;/Text&gt;&#10;        &lt;/Box&gt;&#10;&#10;        &lt;Text&#10;            style={{&#10;                marginTop: 26,&#10;                fontSize: 60,&#10;                fontWeight: 'bold',&#10;                color: '#FFFFFF',&#10;                fontFamily: 'Trebuchet MS',&#10;                lineHeight: 1.15,&#10;            }}&#10;        &gt;&#10;            Yang perlu{'\n'}diingat&#10;        &lt;/Text&gt;&#10;&#10;        &lt;Text&#10;            style={{&#10;                marginTop: 24,&#10;                fontSize: 22,&#10;                color: 'rgba(255,255,255,0.88)',&#10;                fontFamily: 'Verdana',&#10;                lineHeight: 1.5,&#10;            }}&#10;        &gt;&#10;            Empat hal yang paling sering ditanyakan orang tua.&#10;        &lt;/Text&gt;&#10;    &lt;/Box&gt;&#10;&lt;/Slide&gt;&#10;"/>
+        <p:cNvPr id="75" name="" descr="&lt;Slide&#10;    style={{&#10;        width: '1280px',&#10;        height: '720px',&#10;        background: 'linear-gradient(135deg, #51277C 0%, #7A45A8 100%)',&#10;        paddingTop: 60,&#10;        paddingBottom: 60,&#10;        paddingLeft: 72,&#10;        paddingRight: 72,&#10;        justifyContent: 'center',&#10;        position: 'relative',&#10;        overflow: 'hidden',&#10;    }}&#10;&gt;&#10;    {/* dekorasi: lingkaran centang + bintang */}&#10;    &lt;Box&#10;        style={{&#10;            position: 'absolute',&#10;            bottom: -130,&#10;            right: -40,&#10;            width: 420,&#10;            height: 420,&#10;            borderRadius: 210,&#10;            background: '#AFC440',&#10;            opacity: 0.16,&#10;        }}&#10;    /&gt;&#10;    &lt;Box style={{ position: 'absolute', top: 78, right: 96, opacity: 0.22 }}&gt;&#10;        &lt;svg width={230} height={230} viewBox='0 0 230 230'&gt;&#10;            &lt;circle cx='115' cy='115' r='96' fill='none' stroke='#FFFFFF' strokeWidth='8' /&gt;&#10;            &lt;path&#10;                d='M72 118 l30 32 l60 -70'&#10;                fill='none'&#10;                stroke='#AFC440'&#10;                strokeWidth='16'&#10;                strokeLinecap='round'&#10;                strokeLinejoin='round'&#10;            /&gt;&#10;            &lt;path&#10;                d='M196 36 l8 18 l18 8 l-18 8 l-8 18 l-8 -18 l-18 -8 l18 -8 z'&#10;                fill='#F3B26C'&#10;            /&gt;&#10;        &lt;/svg&gt;&#10;    &lt;/Box&gt;&#10;&#10;    {/* isi */}&#10;    &lt;Box style={{ position: 'relative', zIndex: 1, width: '62%' }}&gt;&#10;        &lt;Box style={{ flexDirection: 'row', alignItems: 'center', gap: 14, alignSelf: 'flex-start' }}&gt;&#10;            &lt;Text&#10;                style={{&#10;                    fontSize: 76,&#10;                    fontWeight: 'bold',&#10;                    color: '#F3B26C',&#10;                    fontFamily: 'Trebuchet MS',&#10;                    lineHeight: 1,&#10;                }}&#10;            &gt;&#10;                04&#10;            &lt;/Text&gt;&#10;            &lt;Box style={{ width: 3, height: 52, background: 'rgba(255,255,255,0.45)' }} /&gt;&#10;            &lt;Text style={{ fontSize: 19, color: 'rgba(255,255,255,0.8)', fontFamily: 'Verdana' }}&gt;&#10;                Bagian terakhir&#10;            &lt;/Text&gt;&#10;        &lt;/Box&gt;&#10;&#10;        &lt;Text&#10;            style={{&#10;                marginTop: 26,&#10;                fontSize: 60,&#10;                fontWeight: 'bold',&#10;                color: '#FFFFFF',&#10;                fontFamily: 'Trebuchet MS',&#10;                lineHeight: 1.15,&#10;            }}&#10;        &gt;&#10;            Yang perlu{'\n'}diingat&#10;        &lt;/Text&gt;&#10;&#10;        &lt;Text&#10;            style={{&#10;                marginTop: 24,&#10;                fontSize: 22,&#10;                color: 'rgba(255,255,255,0.88)',&#10;                fontFamily: 'Verdana',&#10;                lineHeight: 1.5,&#10;            }}&#10;        &gt;&#10;            Empat hal yang paling sering ditanyakan orang tua.&#10;        &lt;/Text&gt;&#10;    &lt;/Box&gt;&#10;&lt;/Slide&gt;"/>
         <p:cNvGrpSpPr/>
         <p:nvPr/>
       </p:nvGrpSpPr>
@@ -4700,7 +4700,7 @@
   <p:cSld>
     <p:spTree>
       <p:nvGrpSpPr>
-        <p:cNvPr id="84" name="" descr="&lt;Slide&#10;    style={{&#10;        width: '1280px',&#10;        height: '720px',&#10;        background: '#FAF7F2',&#10;        paddingTop: 20,&#10;        paddingBottom: 20,&#10;        paddingLeft: 64,&#10;        paddingRight: 64,&#10;    }}&#10;&gt;&#10;    {/* ── A · blok judul ── */}&#10;    &lt;Box style={{ height: 110, justifyContent: 'center' }}&gt;&#10;        &lt;Text&#10;            style={{&#10;                fontSize: 34,&#10;                fontWeight: 'bold',&#10;                color: '#51277C',&#10;                fontFamily: 'Trebuchet MS',&#10;                lineHeight: 1.3,&#10;            }}&#10;        &gt;&#10;            Empat hal yang perlu diingat&#10;        &lt;/Text&gt;&#10;        &lt;Box style={{ marginTop: 10, width: 72, height: 6, borderRadius: 3, background: '#51277C' }} /&gt;&#10;    &lt;/Box&gt;&#10;&#10;    {/* ── B · area konten ── */}&#10;    &lt;Box style={{ height: 530 }}&gt;&#10;        &lt;Box style={{ height: 470, flexDirection: 'row', gap: 18 }}&gt;&#10;            {[&#10;                {&#10;                    i: 'clock',&#10;                    t: 'Jadwal muncul setelah diumumkan',&#10;                    d: 'Jadwal baru tampil setelah korlas atau admin sekolah mengumumkannya. Kalau hari itu belum muncul, berarti belum diumumkan — bukan hilang.',&#10;                    g: 'Sabar menunggu',&#10;                },&#10;                {&#10;                    i: 'users',&#10;                    t: 'Satu akun untuk beberapa anak',&#10;                    d: 'Punya dua anak di kelas berbeda tidak perlu akun tambahan. Pilih kelasnya di bagian atas layar, jadwalnya ikut berganti.',&#10;                    g: 'Tidak perlu daftar ulang',&#10;                },&#10;                {&#10;                    i: 'home',&#10;                    t: 'Ambil tanggal di kelas anak sendiri',&#10;                    d: 'Setiap kelas punya baris jadwalnya sendiri. Mengambil tanggal di kelas lain tidak bisa, dan tanggal di kelas anak tidak tertutup oleh kelas lain.',&#10;                    g: 'Adil per kelas',&#10;                },&#10;                {&#10;                    i: 'phone',&#10;                    t: 'Perubahan lewat korlas kelas',&#10;                    d: 'Jadwal yang sudah diumumkan tidak bisa diubah sendiri. Sampaikan ke korlas kelas atau admin sekolah bila ada keperluan mendadak.',&#10;                    g: 'Jangan diubah sendiri',&#10;                },&#10;            ].map((c, idx) =&gt; (&#10;                &lt;Box&#10;                    key={idx}&#10;                    style={{&#10;                        flex: 1,&#10;                        height: '100%',&#10;                        background: '#FFFFFF',&#10;                        borderRadius: 16,&#10;                        boxShadow: '0 4px 20px rgba(0,0,0,0.08)',&#10;                        padding: 24,&#10;                        borderTop: '8px solid #AFC440',&#10;                    }}&#10;                &gt;&#10;                    &lt;Box&#10;                        style={{&#10;                            width: 60,&#10;                            height: 60,&#10;                            borderRadius: 30,&#10;                            background: 'rgba(81,39,124,0.10)',&#10;                            justifyContent: 'center',&#10;                            alignItems: 'center',&#10;                        }}&#10;                    &gt;&#10;                        &lt;FAIcon name={c.i} style={{ fill: '#51277C', width: 30, height: 30 }} /&gt;&#10;                    &lt;/Box&gt;&#10;&#10;                    &lt;Text&#10;                        style={{&#10;                            marginTop: 16,&#10;                            fontSize: 23,&#10;                            fontWeight: 'bold',&#10;                            color: '#51277C',&#10;                            fontFamily: 'Trebuchet MS',&#10;                            lineHeight: 1.32,&#10;                        }}&#10;                    &gt;&#10;                        {c.t}&#10;                    &lt;/Text&gt;&#10;&#10;                    &lt;Box&#10;                        style={{&#10;                            marginTop: 12,&#10;                            width: 44,&#10;                            height: 3,&#10;                            borderRadius: 2,&#10;                            background: '#AFC440',&#10;                        }}&#10;                    /&gt;&#10;&#10;                    &lt;Text&#10;                        style={{&#10;                            marginTop: 12,&#10;                            fontSize: 18,&#10;                            color: '#6B6478',&#10;                            fontFamily: 'Verdana',&#10;                            lineHeight: 1.55,&#10;                        }}&#10;                    &gt;&#10;                        {c.d}&#10;                    &lt;/Text&gt;&#10;&#10;                    &lt;Box style={{ marginTop: 'auto' }}&gt;&#10;                        &lt;Text&#10;                            style={{&#10;                                fontSize: 16,&#10;                                color: '#51277C',&#10;                                fontFamily: 'Verdana',&#10;                                fontWeight: 'bold',&#10;                            }}&#10;                        &gt;&#10;                            {c.g}&#10;                        &lt;/Text&gt;&#10;                    &lt;/Box&gt;&#10;                &lt;/Box&gt;&#10;            ))}&#10;        &lt;/Box&gt;&#10;&#10;        {/* simpulan */}&#10;        &lt;Box&#10;            style={{&#10;                marginTop: 14,&#10;                height: 46,&#10;                background: '#51277C',&#10;                borderRadius: 14,&#10;                justifyContent: 'center',&#10;                alignItems: 'center',&#10;            }}&#10;        &gt;&#10;            &lt;Text&#10;                style={{&#10;                    fontSize: 19,&#10;                    color: '#FFFFFF',&#10;                    fontFamily: 'Verdana',&#10;                    fontWeight: 'bold',&#10;                }}&#10;            &gt;&#10;                Intinya: satu akun, satu aplikasi, dan semua perubahan disampaikan lewat korlas kelas.&#10;            &lt;/Text&gt;&#10;        &lt;/Box&gt;&#10;    &lt;/Box&gt;&#10;&#10;    {/* ── C · bilah kaki ── */}&#10;    &lt;Box&#10;        style={{&#10;            height: 40,&#10;            flexDirection: 'row',&#10;            alignItems: 'center',&#10;            justifyContent: 'space-between',&#10;        }}&#10;    &gt;&#10;        &lt;Text style={{ fontSize: 14, color: '#6B6478', fontFamily: 'Verdana' }}&gt;&#10;            Pizza Snack Play · Panduan Orang Tua&#10;        &lt;/Text&gt;&#10;        &lt;Text style={{ fontSize: 14, color: '#6B6478', fontFamily: 'Verdana' }}&gt;14 / 15&lt;/Text&gt;&#10;    &lt;/Box&gt;&#10;&lt;/Slide&gt;&#10;"/>
+        <p:cNvPr id="84" name="" descr="&lt;Slide&#13;&#10;    style={{&#13;&#10;        width: '1280px',&#13;&#10;        height: '720px',&#13;&#10;        background: '#FAF7F2',&#13;&#10;        paddingTop: 20,&#13;&#10;        paddingBottom: 20,&#13;&#10;        paddingLeft: 64,&#13;&#10;        paddingRight: 64,&#13;&#10;    }}&#13;&#10;&gt;&#13;&#10;    {/* ── A · blok judul ── */}&#13;&#10;    &lt;Box style={{ height: 110, justifyContent: 'center' }}&gt;&#13;&#10;        &lt;Text&#13;&#10;            style={{&#13;&#10;                fontSize: 34,&#13;&#10;                fontWeight: 'bold',&#13;&#10;                color: '#51277C',&#13;&#10;                fontFamily: 'Trebuchet MS',&#13;&#10;                lineHeight: 1.3,&#13;&#10;            }}&#13;&#10;        &gt;&#13;&#10;            Empat hal yang perlu diingat&#13;&#10;        &lt;/Text&gt;&#13;&#10;        &lt;Box style={{ marginTop: 10, width: 72, height: 6, borderRadius: 3, background: '#51277C' }} /&gt;&#13;&#10;    &lt;/Box&gt;&#13;&#10;&#13;&#10;    {/* ── B · area konten ── */}&#13;&#10;    &lt;Box style={{ height: 530 }}&gt;&#13;&#10;        &lt;Box style={{ height: 470, flexDirection: 'row', gap: 18 }}&gt;&#13;&#10;            {[&#13;&#10;                {&#13;&#10;                    vb: '0 0 512 512',&#13;&#10;                    d: 'M256 0a256 256 0 1 1 0 512A256 256 0 1 1 256 0zM232 120V256c0 8 4 15.5 10.7 20l96 64c11 7.4 25.9 4.4 33.3-6.7s4.4-25.9-6.7-33.3L280 243.2V120c0-13.3-10.7-24-24-24s-24 10.7-24 24z',&#13;&#10;                    t: 'Jadwal muncul setelah diumumkan',&#13;&#10;                    d: 'Jadwal baru tampil setelah korlas atau admin sekolah mengumumkannya. Kalau hari itu belum muncul, berarti belum diumumkan — bukan hilang.',&#13;&#10;                    g: 'Sabar menunggu',&#13;&#10;                },&#13;&#10;                {&#13;&#10;                    vb: '0 0 640 512',&#13;&#10;                    d: 'M144 0a80 80 0 1 1 0 160A80 80 0 1 1 144 0zM512 0a80 80 0 1 1 0 160A80 80 0 1 1 512 0zM0 298.7C0 239.8 47.8 192 106.7 192h42.7c15.9 0 31 3.5 44.6 9.7c-1.3 7.2-1.9 14.7-1.9 22.3c0 38.2 16.8 72.5 43.3 96c-.2 0-.4 0-.7 0H21.3C9.6 320 0 310.4 0 298.7zM405.3 320c-.2 0-.4 0-.7 0c26.6-23.5 43.3-57.8 43.3-96c0-7.6-.7-15-1.9-22.3c13.6-6.3 28.7-9.7 44.6-9.7h42.7C592.2 192 640 239.8 640 298.7c0 11.8-9.6 21.3-21.3 21.3H405.3zM224 224a96 96 0 1 1 192 0 96 96 0 1 1 -192 0zM128 485.3C128 411.7 187.7 352 261.3 352H378.7C452.3 352 512 411.7 512 485.3c0 14.7-11.9 26.7-26.7 26.7H154.7c-14.7 0-26.7-11.9-26.7-26.7z',&#13;&#10;                    t: 'Satu akun untuk beberapa anak',&#13;&#10;                    d: 'Punya dua anak di kelas berbeda tidak perlu akun tambahan. Pilih kelasnya di bagian atas layar, jadwalnya ikut berganti.',&#13;&#10;                    g: 'Tidak perlu daftar ulang',&#13;&#10;                },&#13;&#10;                {&#13;&#10;                    vb: '0 0 576 512',&#13;&#10;                    d: 'M575.8 255.5c0 18-15 32.1-32 32.1h-32l.7 160.2c0 2.7-.2 5.4-.5 8.1V472c0 22.1-17.9 40-40 40H456c-1.1 0-2.2 0-3.3-.1c-1.4 .1-2.8 .1-4.2 .1H416 392c-22.1 0-40-17.9-40-40V448 384c0-17.7-14.3-32-32-32H256c-17.7 0-32 14.3-32 32v64 24c0 22.1-17.9 40-40 40H160 128.1c-1.5 0-3-.1-4.5-.2c-1.2 .1-2.4 .2-3.6 .2H104c-22.1 0-40-17.9-40-40V360c0-.9 0-1.9 .1-2.8V287.6H32c-18 0-32-14-32-32.1c0-9 3-17 10-24L266.4 8c7-7 15-8 22-8s15 2 21 7L564.8 231.5c8 7 12 15 11 24z',&#13;&#10;                    t: 'Ambil tanggal di kelas anak sendiri',&#13;&#10;                    d: 'Setiap kelas punya baris jadwalnya sendiri. Mengambil tanggal di kelas lain tidak bisa, dan tanggal di kelas anak tidak tertutup oleh kelas lain.',&#13;&#10;                    g: 'Adil per kelas',&#13;&#10;                },&#13;&#10;                {&#13;&#10;                    vb: '0 0 512 512',&#13;&#10;                    d: 'M164.9 24.6c-7.7-18.6-28-28.5-47.4-23.2l-88 24C12.1 30.2 0 46 0 64C0 311.4 200.6 512 448 512c18 0 33.8-12.1 38.6-29.5l24-88c5.3-19.4-4.6-39.7-23.2-47.4l-96-40c-16.3-6.8-35.2-2.1-46.3 11.6L304.7 368C234.3 334.7 177.3 277.7 144 207.3L193.3 167c13.7-11.2 18.4-30 11.6-46.3l-40-96z',&#13;&#10;                    t: 'Perubahan lewat korlas kelas',&#13;&#10;                    d: 'Jadwal yang sudah diumumkan tidak bisa diubah sendiri. Sampaikan ke korlas kelas atau admin sekolah bila ada keperluan mendadak.',&#13;&#10;                    g: 'Jangan diubah sendiri',&#13;&#10;                },&#13;&#10;            ].map((c, idx) =&gt; (&#13;&#10;                &lt;Box&#13;&#10;                    key={idx}&#13;&#10;                    style={{&#13;&#10;                        flex: 1,&#13;&#10;                        height: '100%',&#13;&#10;                        background: '#FFFFFF',&#13;&#10;                        borderRadius: 16,&#13;&#10;                        boxShadow: '0 4px 20px rgba(0,0,0,0.08)',&#13;&#10;                        padding: 24,&#13;&#10;                        borderTop: '8px solid #AFC440',&#13;&#10;                    }}&#13;&#10;                &gt;&#13;&#10;                    &lt;Box&#13;&#10;                        style={{&#13;&#10;                            width: 60,&#13;&#10;                            height: 60,&#13;&#10;                            borderRadius: 30,&#13;&#10;                            background: 'rgba(81,39,124,0.10)',&#13;&#10;                            justifyContent: 'center',&#13;&#10;                            alignItems: 'center',&#13;&#10;                        }}&#13;&#10;                    &gt;&#13;&#10;                        &lt;svg width={30} height={30} viewBox={c.vb} xmlns=&quot;http://www.w3.org/2000/svg&quot;&gt;&lt;path fill=&quot;#51277C&quot; d={c.d} /&gt;&lt;/svg&gt;&#13;&#10;                    &lt;/Box&gt;&#13;&#10;&#13;&#10;                    &lt;Text&#13;&#10;                        style={{&#13;&#10;                            marginTop: 16,&#13;&#10;                            fontSize: 23,&#13;&#10;                            fontWeight: 'bold',&#13;&#10;                            color: '#51277C',&#13;&#10;                            fontFamily: 'Trebuchet MS',&#13;&#10;                            lineHeight: 1.32,&#13;&#10;                        }}&#13;&#10;                    &gt;&#13;&#10;                        {c.t}&#13;&#10;                    &lt;/Text&gt;&#13;&#10;&#13;&#10;                    &lt;Box&#13;&#10;                        style={{&#13;&#10;                            marginTop: 12,&#13;&#10;                            width: 44,&#13;&#10;                            height: 3,&#13;&#10;                            borderRadius: 2,&#13;&#10;                            background: '#AFC440',&#13;&#10;                        }}&#13;&#10;                    /&gt;&#13;&#10;&#13;&#10;                    &lt;Text&#13;&#10;                        style={{&#13;&#10;                            marginTop: 12,&#13;&#10;                            fontSize: 18,&#13;&#10;                            color: '#6B6478',&#13;&#10;                            fontFamily: 'Verdana',&#13;&#10;                            lineHeight: 1.55,&#13;&#10;                        }}&#13;&#10;                    &gt;&#13;&#10;                        {c.d}&#13;&#10;                    &lt;/Text&gt;&#13;&#10;&#13;&#10;                    &lt;Box style={{ marginTop: 'auto' }}&gt;&#13;&#10;                        &lt;Text&#13;&#10;                            style={{&#13;&#10;                                fontSize: 16,&#13;&#10;                                color: '#51277C',&#13;&#10;                                fontFamily: 'Verdana',&#13;&#10;                                fontWeight: 'bold',&#13;&#10;                            }}&#13;&#10;                        &gt;&#13;&#10;                            {c.g}&#13;&#10;                        &lt;/Text&gt;&#13;&#10;                    &lt;/Box&gt;&#13;&#10;                &lt;/Box&gt;&#13;&#10;            ))}&#13;&#10;        &lt;/Box&gt;&#13;&#10;&#13;&#10;        {/* simpulan */}&#13;&#10;        &lt;Box&#13;&#10;            style={{&#13;&#10;                marginTop: 14,&#13;&#10;                height: 46,&#13;&#10;                background: '#51277C',&#13;&#10;                borderRadius: 14,&#13;&#10;                justifyContent: 'center',&#13;&#10;                alignItems: 'center',&#13;&#10;            }}&#13;&#10;        &gt;&#13;&#10;            &lt;Text&#13;&#10;                style={{&#13;&#10;                    fontSize: 19,&#13;&#10;                    color: '#FFFFFF',&#13;&#10;                    fontFamily: 'Verdana',&#13;&#10;                    fontWeight: 'bold',&#13;&#10;                }}&#13;&#10;            &gt;&#13;&#10;                Intinya: satu akun, satu aplikasi, dan semua perubahan disampaikan lewat korlas kelas.&#13;&#10;            &lt;/Text&gt;&#13;&#10;        &lt;/Box&gt;&#13;&#10;    &lt;/Box&gt;&#13;&#10;&#13;&#10;    {/* ── C · bilah kaki ── */}&#13;&#10;    &lt;Box&#13;&#10;        style={{&#13;&#10;            height: 40,&#13;&#10;            flexDirection: 'row',&#13;&#10;            alignItems: 'center',&#13;&#10;            justifyContent: 'space-between',&#13;&#10;        }}&#13;&#10;    &gt;&#13;&#10;        &lt;Text style={{ fontSize: 14, color: '#6B6478', fontFamily: 'Verdana' }}&gt;&#13;&#10;            Pizza Snack Play · Panduan Orang Tua&#13;&#10;        &lt;/Text&gt;&#13;&#10;        &lt;Text style={{ fontSize: 14, color: '#6B6478', fontFamily: 'Verdana' }}&gt;14 / 15&lt;/Text&gt;&#13;&#10;    &lt;/Box&gt;&#13;&#10;&lt;/Slide&gt;"/>
         <p:cNvGrpSpPr/>
         <p:nvPr/>
       </p:nvGrpSpPr>
@@ -5211,7 +5211,7 @@
           <a:blip>
             <a:extLst>
               <a:ext uri="{96DAC541-7B7A-43D3-8B79-37D633B846F1}">
-                <asvg:svgBlip r:embed="rId1"/>
+                <asvg:svgBlip r:embed="rId2"/>
               </a:ext>
             </a:extLst>
           </a:blip>
@@ -5495,7 +5495,7 @@
           <a:blip>
             <a:extLst>
               <a:ext uri="{96DAC541-7B7A-43D3-8B79-37D633B846F1}">
-                <asvg:svgBlip r:embed="rId1"/>
+                <asvg:svgBlip r:embed="rId3"/>
               </a:ext>
             </a:extLst>
           </a:blip>
@@ -5779,7 +5779,7 @@
           <a:blip>
             <a:extLst>
               <a:ext uri="{96DAC541-7B7A-43D3-8B79-37D633B846F1}">
-                <asvg:svgBlip r:embed="rId1"/>
+                <asvg:svgBlip r:embed="rId4"/>
               </a:ext>
             </a:extLst>
           </a:blip>
@@ -6074,7 +6074,7 @@
   <p:cSld>
     <p:spTree>
       <p:nvGrpSpPr>
-        <p:cNvPr id="124" name="" descr="&lt;Slide&#10;    style={{&#10;        width: '1280px',&#10;        height: '720px',&#10;        background: '#FAF7F2',&#10;        justifyContent: 'center',&#10;        alignItems: 'center',&#10;        position: 'relative',&#10;        overflow: 'hidden',&#10;    }}&#10;&gt;&#10;    {/* cahaya latar */}&#10;    &lt;Box&#10;        style={{&#10;            position: 'absolute',&#10;            top: 90,&#10;            width: 520,&#10;            height: 520,&#10;            borderRadius: 260,&#10;            background: 'linear-gradient(135deg, #51277C 0%, #7A45A8 100%)',&#10;            opacity: 0.10,&#10;        }}&#10;    /&gt;&#10;    &lt;Box&#10;        style={{&#10;            position: 'absolute',&#10;            bottom: -80,&#10;            left: -80,&#10;            width: 320,&#10;            height: 320,&#10;            borderRadius: 160,&#10;            background: 'linear-gradient(135deg, #AFC440 0%, #F3B26C 100%)',&#10;            opacity: 0.18,&#10;        }}&#10;    /&gt;&#10;&#10;    &lt;Box style={{ position: 'relative', zIndex: 1, alignItems: 'center', paddingLeft: 72, paddingRight: 72 }}&gt;&#10;        &lt;Image&#10;            src=&quot;assets/app_logo.png&quot;&#10;            style={{ width: 200, height: 194, objectFit: 'contain' }}&#10;        /&gt;&#10;&#10;        &lt;Text&#10;            style={{&#10;                marginTop: 26,&#10;                fontSize: 60,&#10;                fontWeight: 'bold',&#10;                color: '#51277C',&#10;                fontFamily: 'Trebuchet MS',&#10;                lineHeight: 1.15,&#10;            }}&#10;        &gt;&#10;            Terima kasih&#10;        &lt;/Text&gt;&#10;&#10;        &lt;Box style={{ marginTop: 18, width: 96, height: 7, borderRadius: 4, background: '#AFC440' }} /&gt;&#10;&#10;        &lt;Text&#10;            style={{&#10;                marginTop: 22,&#10;                fontSize: 22,&#10;                color: '#2A2333',&#10;                fontFamily: 'Verdana',&#10;                lineHeight: 1.5,&#10;                textAlign: 'center',&#10;            }}&#10;        &gt;&#10;            Mari pasang aplikasinya hari ini juga.&#10;        &lt;/Text&gt;&#10;&#10;        &lt;Text&#10;            style={{&#10;                marginTop: 14,&#10;                fontSize: 19,&#10;                color: '#6B6478',&#10;                fontFamily: 'Verdana',&#10;                lineHeight: 1.5,&#10;                textAlign: 'center',&#10;            }}&#10;        &gt;&#10;            Ada pertanyaan? Sampaikan kepada korlas kelas atau admin sekolah.&#10;        &lt;/Text&gt;&#10;&#10;        &lt;Box&#10;            style={{&#10;                marginTop: 26,&#10;                flexDirection: 'row',&#10;                alignItems: 'center',&#10;                gap: 12,&#10;                background: '#F3B26C',&#10;                borderRadius: 999,&#10;                paddingTop: 13,&#10;                paddingBottom: 13,&#10;                paddingLeft: 28,&#10;                paddingRight: 30,&#10;            }}&#10;        &gt;&#10;            &lt;FAIcon name='star' style={{ fill: '#51277C', width: 22, height: 22 }} /&gt;&#10;            &lt;Text style={{ fontSize: 19, color: '#51277C', fontFamily: 'Trebuchet MS', fontWeight: 'bold' }}&gt;&#10;                Pizza Snack Play&#10;            &lt;/Text&gt;&#10;        &lt;/Box&gt;&#10;    &lt;/Box&gt;&#10;&lt;/Slide&gt;&#10;"/>
+        <p:cNvPr id="124" name="" descr="&lt;Slide&#13;&#10;    style={{&#13;&#10;        width: '1280px',&#13;&#10;        height: '720px',&#13;&#10;        background: '#FAF7F2',&#13;&#10;        justifyContent: 'center',&#13;&#10;        alignItems: 'center',&#13;&#10;        position: 'relative',&#13;&#10;        overflow: 'hidden',&#13;&#10;    }}&#13;&#10;&gt;&#13;&#10;    {/* cahaya latar */}&#13;&#10;    &lt;Box&#13;&#10;        style={{&#13;&#10;            position: 'absolute',&#13;&#10;            top: 90,&#13;&#10;            width: 520,&#13;&#10;            height: 520,&#13;&#10;            borderRadius: 260,&#13;&#10;            background: 'linear-gradient(135deg, #51277C 0%, #7A45A8 100%)',&#13;&#10;            opacity: 0.10,&#13;&#10;        }}&#13;&#10;    /&gt;&#13;&#10;    &lt;Box&#13;&#10;        style={{&#13;&#10;            position: 'absolute',&#13;&#10;            bottom: -80,&#13;&#10;            left: -80,&#13;&#10;            width: 320,&#13;&#10;            height: 320,&#13;&#10;            borderRadius: 160,&#13;&#10;            background: 'linear-gradient(135deg, #AFC440 0%, #F3B26C 100%)',&#13;&#10;            opacity: 0.18,&#13;&#10;        }}&#13;&#10;    /&gt;&#13;&#10;&#13;&#10;    &lt;Box style={{ position: 'relative', zIndex: 1, alignItems: 'center', paddingLeft: 72, paddingRight: 72 }}&gt;&#13;&#10;        &lt;Image&#13;&#10;            src=&quot;assets/app_logo.png&quot;&#13;&#10;            style={{ width: 200, height: 194, objectFit: 'contain' }}&#13;&#10;        /&gt;&#13;&#10;&#13;&#10;        &lt;Text&#13;&#10;            style={{&#13;&#10;                marginTop: 26,&#13;&#10;                fontSize: 60,&#13;&#10;                fontWeight: 'bold',&#13;&#10;                color: '#51277C',&#13;&#10;                fontFamily: 'Trebuchet MS',&#13;&#10;                lineHeight: 1.15,&#13;&#10;            }}&#13;&#10;        &gt;&#13;&#10;            Terima kasih&#13;&#10;        &lt;/Text&gt;&#13;&#10;&#13;&#10;        &lt;Box style={{ marginTop: 18, width: 96, height: 7, borderRadius: 4, background: '#AFC440' }} /&gt;&#13;&#10;&#13;&#10;        &lt;Text&#13;&#10;            style={{&#13;&#10;                marginTop: 22,&#13;&#10;                fontSize: 22,&#13;&#10;                color: '#2A2333',&#13;&#10;                fontFamily: 'Verdana',&#13;&#10;                lineHeight: 1.5,&#13;&#10;                textAlign: 'center',&#13;&#10;            }}&#13;&#10;        &gt;&#13;&#10;            Mari pasang aplikasinya hari ini juga.&#13;&#10;        &lt;/Text&gt;&#13;&#10;&#13;&#10;        &lt;Text&#13;&#10;            style={{&#13;&#10;                marginTop: 14,&#13;&#10;                fontSize: 19,&#13;&#10;                color: '#6B6478',&#13;&#10;                fontFamily: 'Verdana',&#13;&#10;                lineHeight: 1.5,&#13;&#10;                textAlign: 'center',&#13;&#10;            }}&#13;&#10;        &gt;&#13;&#10;            Ada pertanyaan? Sampaikan kepada korlas kelas atau admin sekolah.&#13;&#10;        &lt;/Text&gt;&#13;&#10;&#13;&#10;        &lt;Box&#13;&#10;            style={{&#13;&#10;                marginTop: 26,&#13;&#10;                flexDirection: 'row',&#13;&#10;                alignItems: 'center',&#13;&#10;                gap: 12,&#13;&#10;                background: '#F3B26C',&#13;&#10;                borderRadius: 999,&#13;&#10;                paddingTop: 13,&#13;&#10;                paddingBottom: 13,&#13;&#10;                paddingLeft: 28,&#13;&#10;                paddingRight: 30,&#13;&#10;            }}&#13;&#10;        &gt;&#13;&#10;            &lt;svg width={22} height={22} viewBox=&quot;0 0 576 512&quot; xmlns=&quot;http://www.w3.org/2000/svg&quot;&gt;&lt;path fill=&quot;#51277C&quot; d=&quot;M316.9 18C311.6 7 300.4 0 288.1 0s-23.4 7-28.8 18L195 150.3 51.4 171.5c-12 1.8-22 10.2-25.7 21.7s-.7 24.2 7.9 32.7L137.8 329 113.2 474.7c-2 12 3 24.2 12.9 31.3s23 8 33.8 2.3l128.3-68.5 128.3 68.5c10.8 5.7 23.9 4.9 33.8-2.3s14.9-19.3 12.9-31.3L438.5 329 542.7 225.9c8.6-8.5 11.7-21.2 7.9-32.7s-13.7-19.9-25.7-21.7L381.2 150.3 316.9 18z&quot; /&gt;&lt;/svg&gt;&#13;&#10;            &lt;Text style={{ fontSize: 19, color: '#51277C', fontFamily: 'Trebuchet MS', fontWeight: 'bold' }}&gt;&#13;&#10;                Pizza Snack Play&#13;&#10;            &lt;/Text&gt;&#13;&#10;        &lt;/Box&gt;&#13;&#10;    &lt;/Box&gt;&#13;&#10;&lt;/Slide&gt;"/>
         <p:cNvGrpSpPr/>
         <p:nvPr/>
       </p:nvGrpSpPr>
@@ -6471,7 +6471,7 @@
   <p:cSld>
     <p:spTree>
       <p:nvGrpSpPr>
-        <p:cNvPr id="136" name="" descr="&lt;Slide&#10;    style={{&#10;        width: '1280px',&#10;        height: '720px',&#10;        background: '#FAF7F2',&#10;        paddingTop: 20,&#10;        paddingBottom: 20,&#10;        paddingLeft: 64,&#10;        paddingRight: 64,&#10;    }}&#10;&gt;&#10;    {/* ── A · blok judul (20–130) ── */}&#10;    &lt;Box style={{ height: 110, justifyContent: 'center' }}&gt;&#10;        &lt;Text&#10;            style={{&#10;                fontSize: 34,&#10;                fontWeight: 'bold',&#10;                color: '#51277C',&#10;                fontFamily: 'Trebuchet MS',&#10;                lineHeight: 1.3,&#10;            }}&#10;        &gt;&#10;            Isi panduan ini&#10;        &lt;/Text&gt;&#10;        &lt;Box style={{ marginTop: 10, width: 72, height: 6, borderRadius: 3, background: '#51277C' }} /&gt;&#10;    &lt;/Box&gt;&#10;&#10;    {/* ── B · area konten (130–660) ── */}&#10;    &lt;Box style={{ height: 530, flexDirection: 'row', gap: 28 }}&gt;&#10;        {/* kolom kiri 32% — penanda jumlah bagian */}&#10;        &lt;Box&#10;            style={{&#10;                width: '32%',&#10;                height: '100%',&#10;                background: 'linear-gradient(135deg, #51277C 0%, #7A45A8 100%)',&#10;                borderRadius: 18,&#10;                padding: 28,&#10;                justifyContent: 'space-between',&#10;            }}&#10;        &gt;&#10;            &lt;Box&gt;&#10;                &lt;Text&#10;                    style={{&#10;                        fontSize: 96,&#10;                        fontWeight: 'bold',&#10;                        color: '#FFFFFF',&#10;                        fontFamily: 'Trebuchet MS',&#10;                        lineHeight: 1,&#10;                    }}&#10;                &gt;&#10;                    4&#10;                &lt;/Text&gt;&#10;                &lt;Text&#10;                    style={{&#10;                        marginTop: 6,&#10;                        fontSize: 24,&#10;                        fontWeight: 'bold',&#10;                        color: '#F3B26C',&#10;                        fontFamily: 'Trebuchet MS',&#10;                    }}&#10;                &gt;&#10;                    bagian&#10;                &lt;/Text&gt;&#10;            &lt;/Box&gt;&#10;            &lt;Text&#10;                style={{&#10;                    fontSize: 17,&#10;                    color: 'rgba(255,255,255,0.88)',&#10;                    fontFamily: 'Verdana',&#10;                    lineHeight: 1.5,&#10;                }}&#10;            &gt;&#10;                Singkat saja. Bagian 2 dan 3 yang paling sering dipakai sehari-hari.&#10;            &lt;/Text&gt;&#10;        &lt;/Box&gt;&#10;&#10;        {/* kolom kanan 68% — daftar bagian */}&#10;        &lt;Box style={{ width: '68%', height: '100%', justifyContent: 'space-between' }}&gt;&#10;            {[&#10;                {&#10;                    n: '01',&#10;                    t: 'Kenapa ada aplikasi ini',&#10;                    d: 'Masalah yang selama ini bikin repot, dan apa yang berubah.',&#10;                    p: '3–5',&#10;                },&#10;                {&#10;                    n: '02',&#10;                    t: 'Cara mulai',&#10;                    d: 'Memasang aplikasi di HP, lalu masuk memakai akun dari sekolah.',&#10;                    p: '6–8',&#10;                },&#10;                {&#10;                    n: '03',&#10;                    t: 'Dipakai tiap hari',&#10;                    d: 'Melihat jadwal snack, mengambil tanggal piket, mencari menu.',&#10;                    p: '9–12',&#10;                },&#10;                {&#10;                    n: '04',&#10;                    t: 'Yang perlu diingat',&#10;                    d: 'Empat aturan yang paling sering ditanyakan orang tua.',&#10;                    p: '13–14',&#10;                },&#10;            ].map((it, i) =&gt; (&#10;                &lt;Box&#10;                    key={i}&#10;                    style={{&#10;                        flexDirection: 'row',&#10;                        alignItems: 'center',&#10;                        gap: 20,&#10;                        height: 122,&#10;                        background: '#FFFFFF',&#10;                        borderRadius: 16,&#10;                        boxShadow: '0 4px 20px rgba(0,0,0,0.08)',&#10;                        paddingLeft: 24,&#10;                        paddingRight: 28,&#10;                        borderLeft: '8px solid #AFC440',&#10;                    }}&#10;                &gt;&#10;                    &lt;Box&#10;                        style={{&#10;                            width: 56,&#10;                            height: 56,&#10;                            borderRadius: 28,&#10;                            background: 'rgba(81,39,124,0.09)',&#10;                            justifyContent: 'center',&#10;                            alignItems: 'center',&#10;                        }}&#10;                    &gt;&#10;                        &lt;Text&#10;                            style={{&#10;                                fontSize: 24,&#10;                                fontWeight: 'bold',&#10;                                color: '#51277C',&#10;                                fontFamily: 'Trebuchet MS',&#10;                            }}&#10;                        &gt;&#10;                            {it.n}&#10;                        &lt;/Text&gt;&#10;                    &lt;/Box&gt;&#10;                    &lt;Box style={{ flex: 1 }}&gt;&#10;                        &lt;Text&#10;                            style={{&#10;                                fontSize: 25,&#10;                                fontWeight: 'bold',&#10;                                color: '#2A2333',&#10;                                fontFamily: 'Trebuchet MS',&#10;                                lineHeight: 1.3,&#10;                            }}&#10;                        &gt;&#10;                            {it.t}&#10;                        &lt;/Text&gt;&#10;                        &lt;Text&#10;                            style={{&#10;                                marginTop: 5,&#10;                                fontSize: 18,&#10;                                color: '#6B6478',&#10;                                fontFamily: 'Verdana',&#10;                                lineHeight: 1.45,&#10;                            }}&#10;                        &gt;&#10;                            {it.d}&#10;                        &lt;/Text&gt;&#10;                    &lt;/Box&gt;&#10;                    &lt;Text&#10;                        style={{&#10;                            fontSize: 17,&#10;                            color: '#51277C',&#10;                            fontFamily: 'Verdana',&#10;                            fontWeight: 'bold',&#10;                        }}&#10;                    &gt;&#10;                        {it.p}&#10;                    &lt;/Text&gt;&#10;                &lt;/Box&gt;&#10;            ))}&#10;        &lt;/Box&gt;&#10;    &lt;/Box&gt;&#10;&#10;    {/* ── C · bilah kaki (660–700) ── */}&#10;    &lt;Box&#10;        style={{&#10;            height: 40,&#10;            flexDirection: 'row',&#10;            alignItems: 'center',&#10;            justifyContent: 'space-between',&#10;        }}&#10;    &gt;&#10;        &lt;Text style={{ fontSize: 14, color: '#6B6478', fontFamily: 'Verdana' }}&gt;&#10;            Pizza Snack Play · Panduan Orang Tua&#10;        &lt;/Text&gt;&#10;        &lt;Text style={{ fontSize: 14, color: '#6B6478', fontFamily: 'Verdana' }}&gt;02 / 15&lt;/Text&gt;&#10;    &lt;/Box&gt;&#10;&lt;/Slide&gt;&#10;"/>
+        <p:cNvPr id="136" name="" descr="&lt;Slide&#10;    style={{&#10;        width: '1280px',&#10;        height: '720px',&#10;        background: '#FAF7F2',&#10;        paddingTop: 20,&#10;        paddingBottom: 20,&#10;        paddingLeft: 64,&#10;        paddingRight: 64,&#10;    }}&#10;&gt;&#10;    {/* ── A · blok judul (20–130) ── */}&#10;    &lt;Box style={{ height: 110, justifyContent: 'center' }}&gt;&#10;        &lt;Text&#10;            style={{&#10;                fontSize: 34,&#10;                fontWeight: 'bold',&#10;                color: '#51277C',&#10;                fontFamily: 'Trebuchet MS',&#10;                lineHeight: 1.3,&#10;            }}&#10;        &gt;&#10;            Isi panduan ini&#10;        &lt;/Text&gt;&#10;        &lt;Box style={{ marginTop: 10, width: 72, height: 6, borderRadius: 3, background: '#51277C' }} /&gt;&#10;    &lt;/Box&gt;&#10;&#10;    {/* ── B · area konten (130–660) ── */}&#10;    &lt;Box style={{ height: 530, flexDirection: 'row', gap: 28 }}&gt;&#10;        {/* kolom kiri 32% — penanda jumlah bagian */}&#10;        &lt;Box&#10;            style={{&#10;                width: '32%',&#10;                height: '100%',&#10;                background: 'linear-gradient(135deg, #51277C 0%, #7A45A8 100%)',&#10;                borderRadius: 18,&#10;                padding: 28,&#10;                justifyContent: 'space-between',&#10;            }}&#10;        &gt;&#10;            &lt;Box&gt;&#10;                &lt;Text&#10;                    style={{&#10;                        fontSize: 96,&#10;                        fontWeight: 'bold',&#10;                        color: '#FFFFFF',&#10;                        fontFamily: 'Trebuchet MS',&#10;                        lineHeight: 1,&#10;                    }}&#10;                &gt;&#10;                    4&#10;                &lt;/Text&gt;&#10;                &lt;Text&#10;                    style={{&#10;                        marginTop: 6,&#10;                        fontSize: 24,&#10;                        fontWeight: 'bold',&#10;                        color: '#F3B26C',&#10;                        fontFamily: 'Trebuchet MS',&#10;                    }}&#10;                &gt;&#10;                    bagian&#10;                &lt;/Text&gt;&#10;            &lt;/Box&gt;&#10;            &lt;Text&#10;                style={{&#10;                    fontSize: 17,&#10;                    color: 'rgba(255,255,255,0.88)',&#10;                    fontFamily: 'Verdana',&#10;                    lineHeight: 1.5,&#10;                }}&#10;            &gt;&#10;                Singkat saja. Bagian 2 dan 3 yang paling sering dipakai sehari-hari.&#10;            &lt;/Text&gt;&#10;        &lt;/Box&gt;&#10;&#10;        {/* kolom kanan 68% — daftar bagian */}&#10;        &lt;Box style={{ width: '68%', height: '100%', justifyContent: 'space-between' }}&gt;&#10;            {[&#10;                {&#10;                    n: '01',&#10;                    t: 'Kenapa ada aplikasi ini',&#10;                    d: 'Masalah yang selama ini bikin repot, dan apa yang berubah.',&#10;                    p: '3–5',&#10;                },&#10;                {&#10;                    n: '02',&#10;                    t: 'Cara mulai',&#10;                    d: 'Memasang aplikasi di HP, lalu masuk memakai akun dari sekolah.',&#10;                    p: '6–8',&#10;                },&#10;                {&#10;                    n: '03',&#10;                    t: 'Dipakai tiap hari',&#10;                    d: 'Melihat jadwal snack, mengambil tanggal piket, mencari menu.',&#10;                    p: '9–12',&#10;                },&#10;                {&#10;                    n: '04',&#10;                    t: 'Yang perlu diingat',&#10;                    d: 'Empat aturan yang paling sering ditanyakan orang tua.',&#10;                    p: '13–14',&#10;                },&#10;            ].map((it, i) =&gt; (&#10;                &lt;Box&#10;                    key={i}&#10;                    style={{&#10;                        flexDirection: 'row',&#10;                        alignItems: 'center',&#10;                        gap: 20,&#10;                        height: 122,&#10;                        background: '#FFFFFF',&#10;                        borderRadius: 16,&#10;                        boxShadow: '0 4px 20px rgba(0,0,0,0.08)',&#10;                        paddingLeft: 24,&#10;                        paddingRight: 28,&#10;                        borderLeft: '8px solid #AFC440',&#10;                    }}&#10;                &gt;&#10;                    &lt;Box&#10;                        style={{&#10;                            width: 56,&#10;                            height: 56,&#10;                            borderRadius: 28,&#10;                            background: 'rgba(81,39,124,0.09)',&#10;                            justifyContent: 'center',&#10;                            alignItems: 'center',&#10;                        }}&#10;                    &gt;&#10;                        &lt;Text&#10;                            style={{&#10;                                fontSize: 24,&#10;                                fontWeight: 'bold',&#10;                                color: '#51277C',&#10;                                fontFamily: 'Trebuchet MS',&#10;                            }}&#10;                        &gt;&#10;                            {it.n}&#10;                        &lt;/Text&gt;&#10;                    &lt;/Box&gt;&#10;                    &lt;Box style={{ flex: 1 }}&gt;&#10;                        &lt;Text&#10;                            style={{&#10;                                fontSize: 25,&#10;                                fontWeight: 'bold',&#10;                                color: '#2A2333',&#10;                                fontFamily: 'Trebuchet MS',&#10;                                lineHeight: 1.3,&#10;                            }}&#10;                        &gt;&#10;                            {it.t}&#10;                        &lt;/Text&gt;&#10;                        &lt;Text&#10;                            style={{&#10;                                marginTop: 5,&#10;                                fontSize: 18,&#10;                                color: '#6B6478',&#10;                                fontFamily: 'Verdana',&#10;                                lineHeight: 1.45,&#10;                            }}&#10;                        &gt;&#10;                            {it.d}&#10;                        &lt;/Text&gt;&#10;                    &lt;/Box&gt;&#10;                    &lt;Text&#10;                        style={{&#10;                            fontSize: 17,&#10;                            color: '#51277C',&#10;                            fontFamily: 'Verdana',&#10;                            fontWeight: 'bold',&#10;                        }}&#10;                    &gt;&#10;                        {it.p}&#10;                    &lt;/Text&gt;&#10;                &lt;/Box&gt;&#10;            ))}&#10;        &lt;/Box&gt;&#10;    &lt;/Box&gt;&#10;&#10;    {/* ── C · bilah kaki (660–700) ── */}&#10;    &lt;Box&#10;        style={{&#10;            height: 40,&#10;            flexDirection: 'row',&#10;            alignItems: 'center',&#10;            justifyContent: 'space-between',&#10;        }}&#10;    &gt;&#10;        &lt;Text style={{ fontSize: 14, color: '#6B6478', fontFamily: 'Verdana' }}&gt;&#10;            Pizza Snack Play · Panduan Orang Tua&#10;        &lt;/Text&gt;&#10;        &lt;Text style={{ fontSize: 14, color: '#6B6478', fontFamily: 'Verdana' }}&gt;02 / 15&lt;/Text&gt;&#10;    &lt;/Box&gt;&#10;&lt;/Slide&gt;"/>
         <p:cNvGrpSpPr/>
         <p:nvPr/>
       </p:nvGrpSpPr>
@@ -7827,7 +7827,7 @@
   <p:cSld>
     <p:spTree>
       <p:nvGrpSpPr>
-        <p:cNvPr id="174" name="" descr="&lt;Slide&#10;    style={{&#10;        width: '1280px',&#10;        height: '720px',&#10;        background: 'linear-gradient(135deg, #51277C 0%, #7A45A8 100%)',&#10;        paddingTop: 60,&#10;        paddingBottom: 60,&#10;        paddingLeft: 72,&#10;        paddingRight: 72,&#10;        justifyContent: 'center',&#10;        position: 'relative',&#10;        overflow: 'hidden',&#10;    }}&#10;&gt;&#10;    {/* dekorasi: lingkaran + kisi kalender */}&#10;    &lt;Box&#10;        style={{&#10;            position: 'absolute',&#10;            top: -100,&#10;            right: -60,&#10;            width: 420,&#10;            height: 420,&#10;            borderRadius: 210,&#10;            background: '#AFC440',&#10;            opacity: 0.14,&#10;        }}&#10;    /&gt;&#10;    &lt;Box style={{ position: 'absolute', bottom: 46, right: 78, opacity: 0.16 }}&gt;&#10;        &lt;svg width={240} height={190} viewBox='0 0 240 190'&gt;&#10;            &lt;rect x='10' y='26' width='220' height='156' rx='16' fill='none' stroke='#FFFFFF' strokeWidth='6' /&gt;&#10;            &lt;path d='M10 62h220' stroke='#FFFFFF' strokeWidth='6' /&gt;&#10;            &lt;path d='M60 8v30M180 8v30' stroke='#FFFFFF' strokeWidth='8' strokeLinecap='round' /&gt;&#10;            &lt;rect x='42' y='84' width='34' height='26' rx='6' fill='#FFFFFF' /&gt;&#10;            &lt;rect x='102' y='84' width='34' height='26' rx='6' fill='#FFFFFF' /&gt;&#10;            &lt;rect x='162' y='84' width='34' height='26' rx='6' fill='#FFFFFF' /&gt;&#10;            &lt;rect x='42' y='128' width='34' height='26' rx='6' fill='#FFFFFF' /&gt;&#10;            &lt;rect x='102' y='128' width='34' height='26' rx='6' fill='#FFFFFF' /&gt;&#10;            &lt;rect x='162' y='128' width='34' height='26' rx='6' fill='#F3B26C' /&gt;&#10;        &lt;/svg&gt;&#10;    &lt;/Box&gt;&#10;&#10;    {/* isi */}&#10;    &lt;Box style={{ position: 'relative', zIndex: 1, width: '62%' }}&gt;&#10;        &lt;Box&#10;            style={{&#10;                flexDirection: 'row',&#10;                alignItems: 'center',&#10;                gap: 14,&#10;                alignSelf: 'flex-start',&#10;            }}&#10;        &gt;&#10;            &lt;Text&#10;                style={{&#10;                    fontSize: 76,&#10;                    fontWeight: 'bold',&#10;                    color: '#F3B26C',&#10;                    fontFamily: 'Trebuchet MS',&#10;                    lineHeight: 1,&#10;                }}&#10;            &gt;&#10;                01&#10;            &lt;/Text&gt;&#10;            &lt;Box style={{ width: 3, height: 52, background: 'rgba(255,255,255,0.45)' }} /&gt;&#10;            &lt;Text&#10;                style={{&#10;                    fontSize: 19,&#10;                    color: 'rgba(255,255,255,0.8)',&#10;                    fontFamily: 'Verdana',&#10;                }}&#10;            &gt;&#10;                Bagian pertama&#10;            &lt;/Text&gt;&#10;        &lt;/Box&gt;&#10;&#10;        &lt;Text&#10;            style={{&#10;                marginTop: 26,&#10;                fontSize: 60,&#10;                fontWeight: 'bold',&#10;                color: '#FFFFFF',&#10;                fontFamily: 'Trebuchet MS',&#10;                lineHeight: 1.15,&#10;            }}&#10;        &gt;&#10;            Kenapa ada{'\n'}aplikasi ini&#10;        &lt;/Text&gt;&#10;&#10;        &lt;Text&#10;            style={{&#10;                marginTop: 24,&#10;                fontSize: 22,&#10;                color: 'rgba(255,255,255,0.88)',&#10;                fontFamily: 'Verdana',&#10;                lineHeight: 1.5,&#10;            }}&#10;        &gt;&#10;            Kita mulai dari keluhan yang paling sering terdengar.&#10;        &lt;/Text&gt;&#10;    &lt;/Box&gt;&#10;&lt;/Slide&gt;&#10;"/>
+        <p:cNvPr id="174" name="" descr="&lt;Slide&#10;    style={{&#10;        width: '1280px',&#10;        height: '720px',&#10;        background: 'linear-gradient(135deg, #51277C 0%, #7A45A8 100%)',&#10;        paddingTop: 60,&#10;        paddingBottom: 60,&#10;        paddingLeft: 72,&#10;        paddingRight: 72,&#10;        justifyContent: 'center',&#10;        position: 'relative',&#10;        overflow: 'hidden',&#10;    }}&#10;&gt;&#10;    {/* dekorasi: lingkaran + kisi kalender */}&#10;    &lt;Box&#10;        style={{&#10;            position: 'absolute',&#10;            top: -100,&#10;            right: -60,&#10;            width: 420,&#10;            height: 420,&#10;            borderRadius: 210,&#10;            background: '#AFC440',&#10;            opacity: 0.14,&#10;        }}&#10;    /&gt;&#10;    &lt;Box style={{ position: 'absolute', bottom: 46, right: 78, opacity: 0.16 }}&gt;&#10;        &lt;svg width={240} height={190} viewBox='0 0 240 190'&gt;&#10;            &lt;rect x='10' y='26' width='220' height='156' rx='16' fill='none' stroke='#FFFFFF' strokeWidth='6' /&gt;&#10;            &lt;path d='M10 62h220' stroke='#FFFFFF' strokeWidth='6' /&gt;&#10;            &lt;path d='M60 8v30M180 8v30' stroke='#FFFFFF' strokeWidth='8' strokeLinecap='round' /&gt;&#10;            &lt;rect x='42' y='84' width='34' height='26' rx='6' fill='#FFFFFF' /&gt;&#10;            &lt;rect x='102' y='84' width='34' height='26' rx='6' fill='#FFFFFF' /&gt;&#10;            &lt;rect x='162' y='84' width='34' height='26' rx='6' fill='#FFFFFF' /&gt;&#10;            &lt;rect x='42' y='128' width='34' height='26' rx='6' fill='#FFFFFF' /&gt;&#10;            &lt;rect x='102' y='128' width='34' height='26' rx='6' fill='#FFFFFF' /&gt;&#10;            &lt;rect x='162' y='128' width='34' height='26' rx='6' fill='#F3B26C' /&gt;&#10;        &lt;/svg&gt;&#10;    &lt;/Box&gt;&#10;&#10;    {/* isi */}&#10;    &lt;Box style={{ position: 'relative', zIndex: 1, width: '62%' }}&gt;&#10;        &lt;Box&#10;            style={{&#10;                flexDirection: 'row',&#10;                alignItems: 'center',&#10;                gap: 14,&#10;                alignSelf: 'flex-start',&#10;            }}&#10;        &gt;&#10;            &lt;Text&#10;                style={{&#10;                    fontSize: 76,&#10;                    fontWeight: 'bold',&#10;                    color: '#F3B26C',&#10;                    fontFamily: 'Trebuchet MS',&#10;                    lineHeight: 1,&#10;                }}&#10;            &gt;&#10;                01&#10;            &lt;/Text&gt;&#10;            &lt;Box style={{ width: 3, height: 52, background: 'rgba(255,255,255,0.45)' }} /&gt;&#10;            &lt;Text&#10;                style={{&#10;                    fontSize: 19,&#10;                    color: 'rgba(255,255,255,0.8)',&#10;                    fontFamily: 'Verdana',&#10;                }}&#10;            &gt;&#10;                Bagian pertama&#10;            &lt;/Text&gt;&#10;        &lt;/Box&gt;&#10;&#10;        &lt;Text&#10;            style={{&#10;                marginTop: 26,&#10;                fontSize: 60,&#10;                fontWeight: 'bold',&#10;                color: '#FFFFFF',&#10;                fontFamily: 'Trebuchet MS',&#10;                lineHeight: 1.15,&#10;            }}&#10;        &gt;&#10;            Kenapa ada{'\n'}aplikasi ini&#10;        &lt;/Text&gt;&#10;&#10;        &lt;Text&#10;            style={{&#10;                marginTop: 24,&#10;                fontSize: 22,&#10;                color: 'rgba(255,255,255,0.88)',&#10;                fontFamily: 'Verdana',&#10;                lineHeight: 1.5,&#10;            }}&#10;        &gt;&#10;            Kita mulai dari keluhan yang paling sering terdengar.&#10;        &lt;/Text&gt;&#10;    &lt;/Box&gt;&#10;&lt;/Slide&gt;"/>
         <p:cNvGrpSpPr/>
         <p:nvPr/>
       </p:nvGrpSpPr>
@@ -8497,7 +8497,7 @@
   <p:cSld>
     <p:spTree>
       <p:nvGrpSpPr>
-        <p:cNvPr id="183" name="" descr="&lt;Slide&#10;    style={{&#10;        width: '1280px',&#10;        height: '720px',&#10;        background: '#FAF7F2',&#10;        paddingTop: 20,&#10;        paddingBottom: 20,&#10;        paddingLeft: 64,&#10;        paddingRight: 64,&#10;    }}&#10;&gt;&#10;    {/* ── A · blok judul ── */}&#10;    &lt;Box style={{ height: 110, justifyContent: 'center' }}&gt;&#10;        &lt;Text&#10;            style={{&#10;                fontSize: 34,&#10;                fontWeight: 'bold',&#10;                color: '#51277C',&#10;                fontFamily: 'Trebuchet MS',&#10;                lineHeight: 1.3,&#10;            }}&#10;        &gt;&#10;            Dulu, begini masalahnya&#10;        &lt;/Text&gt;&#10;        &lt;Box style={{ marginTop: 10, width: 72, height: 6, borderRadius: 3, background: '#51277C' }} /&gt;&#10;    &lt;/Box&gt;&#10;&#10;    {/* ── B · area konten ── */}&#10;    &lt;Box style={{ height: 530, flexDirection: 'row', gap: 28 }}&gt;&#10;        {/* kiri 60% — ilustrasi grup &amp; kertas jadwal */}&#10;        &lt;Box&#10;            style={{&#10;                width: '60%',&#10;                height: '100%',&#10;                background: 'rgba(81,39,124,0.06)',&#10;                borderRadius: 20,&#10;                justifyContent: 'center',&#10;                alignItems: 'center',&#10;            }}&#10;        &gt;&#10;            &lt;svg width={620} height={430} viewBox='0 0 620 430'&gt;&#10;                {/* kertas jadwal cetak, miring */}&#10;                &lt;g transform='rotate(-7 150 215)'&gt;&#10;                    &lt;rect x='26' y='34' width='250' height='350' rx='12' fill='#FFFFFF' stroke='#DCD5C9' strokeWidth='3' /&gt;&#10;                    &lt;rect x='58' y='74' width='170' height='15' rx='7' fill='#51277C' opacity='0.55' /&gt;&#10;                    &lt;rect x='58' y='118' width='186' height='10' rx='5' fill='#E6E0D5' /&gt;&#10;                    &lt;rect x='58' y='146' width='150' height='10' rx='5' fill='#EFEAE1' /&gt;&#10;                    &lt;rect x='58' y='174' width='176' height='10' rx='5' fill='#EFEAE1' /&gt;&#10;                    &lt;rect x='58' y='202' width='132' height='10' rx='5' fill='#EFEAE1' /&gt;&#10;                    &lt;rect x='58' y='230' width='164' height='10' rx='5' fill='#EFEAE1' /&gt;&#10;                    &lt;rect x='58' y='258' width='120' height='10' rx='5' fill='#EFEAE1' /&gt;&#10;                    &lt;rect x='58' y='286' width='158' height='10' rx='5' fill='#EFEAE1' /&gt;&#10;                    &lt;rect x='58' y='314' width='140' height='10' rx='5' fill='#E6E0D5' /&gt;&#10;                &lt;/g&gt;&#10;&#10;                {/* gelembung chat bertumpuk */}&#10;                &lt;g&gt;&#10;                    &lt;rect x='296' y='46' width='300' height='92' rx='18' fill='#FFFFFF' stroke='#E3DCCF' strokeWidth='3' /&gt;&#10;                    &lt;path d='M320 138 l0 26 l26 -26 z' fill='#FFFFFF' stroke='#E3DCCF' strokeWidth='3' /&gt;&#10;                    &lt;rect x='322' y='70' width='230' height='12' rx='6' fill='#C9C1B4' /&gt;&#10;                    &lt;rect x='322' y='94' width='170' height='12' rx='6' fill='#DED7CB' /&gt;&#10;                &lt;/g&gt;&#10;                &lt;g&gt;&#10;                    &lt;rect x='330' y='166' width='286' height='92' rx='18' fill='#AFC440' opacity='0.30' /&gt;&#10;                    &lt;path d='M354 258 l0 24 l24 -24 z' fill='#AFC440' opacity='0.30' /&gt;&#10;                    &lt;rect x='356' y='190' width='210' height='12' rx='6' fill='#6E7A32' opacity='0.55' /&gt;&#10;                    &lt;rect x='356' y='214' width='150' height='12' rx='6' fill='#6E7A32' opacity='0.40' /&gt;&#10;                &lt;/g&gt;&#10;                &lt;g&gt;&#10;                    &lt;rect x='288' y='286' width='312' height='96' rx='18' fill='#FFFFFF' stroke='#E3DCCF' strokeWidth='3' /&gt;&#10;                    &lt;path d='M566 382 l0 24 l-24 -24 z' fill='#FFFFFF' stroke='#E3DCCF' strokeWidth='3' /&gt;&#10;                    &lt;rect x='314' y='310' width='200' height='12' rx='6' fill='#C9C1B4' /&gt;&#10;                    &lt;rect x='314' y='334' width='150' height='12' rx='6' fill='#DED7CB' /&gt;&#10;                &lt;/g&gt;&#10;&#10;                {/* tanda tanya besar */}&#10;                &lt;circle cx='546' cy='62' r='44' fill='#F3B26C' /&gt;&#10;                &lt;text&#10;                    x='546'&#10;                    y='82'&#10;                    fontFamily='Trebuchet MS'&#10;                    fontSize='54'&#10;                    fontWeight='bold'&#10;                    fill='#51277C'&#10;                    textAnchor='middle'&#10;                &gt;&#10;                    ?&#10;                &lt;/text&gt;&#10;            &lt;/svg&gt;&#10;        &lt;/Box&gt;&#10;&#10;        {/* kanan 40% — tiga masalah */}&#10;        &lt;Box style={{ width: '40%', height: '100%', justifyContent: 'space-between' }}&gt;&#10;            &lt;Box&#10;                style={{&#10;                    height: 166,&#10;                    background: '#FFFFFF',&#10;                    borderRadius: 16,&#10;                    boxShadow: '0 4px 20px rgba(0,0,0,0.08)',&#10;                    padding: 20,&#10;                }}&#10;            &gt;&#10;                &lt;Box style={{ flexDirection: 'row', gap: 14, alignItems: 'flex-start' }}&gt;&#10;                    &lt;Box&#10;                        style={{&#10;                            width: 48,&#10;                            height: 48,&#10;                            borderRadius: 24,&#10;                            background: 'rgba(81,39,124,0.10)',&#10;                            justifyContent: 'center',&#10;                            alignItems: 'center',&#10;                        }}&#10;                    &gt;&#10;                        &lt;FAIcon name='comment' style={{ fill: '#51277C', width: 26, height: 26 }} /&gt;&#10;                    &lt;/Box&gt;&#10;                    &lt;Box style={{ flex: 1 }}&gt;&#10;                        &lt;Text&#10;                            style={{&#10;                                fontSize: 24,&#10;                                fontWeight: 'bold',&#10;                                color: '#2A2333',&#10;                                fontFamily: 'Trebuchet MS',&#10;                                lineHeight: 1.3,&#10;                            }}&#10;                        &gt;&#10;                            Menu harus ditanya&#10;                        &lt;/Text&gt;&#10;                    &lt;/Box&gt;&#10;                &lt;/Box&gt;&#10;                &lt;Text&#10;                    style={{&#10;                        marginTop: 12,&#10;                        fontSize: 18,&#10;                        color: '#6B6478',&#10;                        fontFamily: 'Verdana',&#10;                        lineHeight: 1.45,&#10;                    }}&#10;                &gt;&#10;                    Tidak ada satu tempat yang jadi rujukan. Jawabannya kadang lambat, kadang beda-beda.&#10;                &lt;/Text&gt;&#10;                &lt;Box style={{ marginTop: 'auto' }}&gt;&#10;                    &lt;Text style={{ fontSize: 15, color: '#51277C', fontFamily: 'Verdana', fontWeight: 'bold' }}&gt;&#10;                        Setiap hari&#10;                    &lt;/Text&gt;&#10;                &lt;/Box&gt;&#10;            &lt;/Box&gt;&#10;&#10;            &lt;Box&#10;                style={{&#10;                    height: 166,&#10;                    background: '#FFFFFF',&#10;                    borderRadius: 16,&#10;                    boxShadow: '0 4px 20px rgba(0,0,0,0.08)',&#10;                    padding: 20,&#10;                }}&#10;            &gt;&#10;                &lt;Box style={{ flexDirection: 'row', gap: 14, alignItems: 'flex-start' }}&gt;&#10;                    &lt;Box&#10;                        style={{&#10;                            width: 48,&#10;                            height: 48,&#10;                            borderRadius: 24,&#10;                            background: 'rgba(81,39,124,0.10)',&#10;                            justifyContent: 'center',&#10;                            alignItems: 'center',&#10;                        }}&#10;                    &gt;&#10;                        &lt;FAIcon name='file' style={{ fill: '#51277C', width: 26, height: 26 }} /&gt;&#10;                    &lt;/Box&gt;&#10;                    &lt;Box style={{ flex: 1 }}&gt;&#10;                        &lt;Text&#10;                            style={{&#10;                                fontSize: 24,&#10;                                fontWeight: 'bold',&#10;                                color: '#2A2333',&#10;                                fontFamily: 'Trebuchet MS',&#10;                                lineHeight: 1.3,&#10;                            }}&#10;                        &gt;&#10;                            Riwayat hilang&#10;                        &lt;/Text&gt;&#10;                    &lt;/Box&gt;&#10;                &lt;/Box&gt;&#10;                &lt;Text&#10;                    style={{&#10;                        marginTop: 12,&#10;                        fontSize: 18,&#10;                        color: '#6B6478',&#10;                        fontFamily: 'Verdana',&#10;                        lineHeight: 1.45,&#10;                    }}&#10;                &gt;&#10;                    Menu bulan lalu tidak tersimpan rapi. Ingin tahu rotasinya, harus buka-buka lagi.&#10;                &lt;/Text&gt;&#10;                &lt;Box style={{ marginTop: 'auto' }}&gt;&#10;                    &lt;Text style={{ fontSize: 15, color: '#51277C', fontFamily: 'Verdana', fontWeight: 'bold' }}&gt;&#10;                        Tidak bisa dilacak&#10;                    &lt;/Text&gt;&#10;                &lt;/Box&gt;&#10;            &lt;/Box&gt;&#10;&#10;            &lt;Box&#10;                style={{&#10;                    height: 166,&#10;                    background: '#FFFFFF',&#10;                    borderRadius: 16,&#10;                    boxShadow: '0 4px 20px rgba(0,0,0,0.08)',&#10;                    padding: 20,&#10;                    borderLeft: '8px solid #F3B26C',&#10;                }}&#10;            &gt;&#10;                &lt;Box style={{ flexDirection: 'row', gap: 14, alignItems: 'flex-start' }}&gt;&#10;                    &lt;Box&#10;                        style={{&#10;                            width: 48,&#10;                            height: 48,&#10;                            borderRadius: 24,&#10;                            background: 'rgba(243,178,108,0.28)',&#10;                            justifyContent: 'center',&#10;                            alignItems: 'center',&#10;                        }}&#10;                    &gt;&#10;                        &lt;FAIcon name='exclamation-circle' style={{ fill: '#51277C', width: 26, height: 26 }} /&gt;&#10;                    &lt;/Box&gt;&#10;                    &lt;Box style={{ flex: 1 }}&gt;&#10;                        &lt;Text&#10;                            style={{&#10;                                fontSize: 24,&#10;                                fontWeight: 'bold',&#10;                                color: '#2A2333',&#10;                                fontFamily: 'Trebuchet MS',&#10;                                lineHeight: 1.3,&#10;                            }}&#10;                        &gt;&#10;                            Rebutan tanggal&#10;                        &lt;/Text&gt;&#10;                    &lt;/Box&gt;&#10;                &lt;/Box&gt;&#10;                &lt;Text&#10;                    style={{&#10;                        marginTop: 12,&#10;                        fontSize: 18,&#10;                        color: '#6B6478',&#10;                        fontFamily: 'Verdana',&#10;                        lineHeight: 1.45,&#10;                    }}&#10;                &gt;&#10;                    Dua orang bisa merasa sama-sama sudah mengambil tanggal yang sama.&#10;                &lt;/Text&gt;&#10;                &lt;Box style={{ marginTop: 'auto' }}&gt;&#10;                    &lt;Text style={{ fontSize: 15, color: '#51277C', fontFamily: 'Verdana', fontWeight: 'bold' }}&gt;&#10;                        Paling sering jadi masalah&#10;                    &lt;/Text&gt;&#10;                &lt;/Box&gt;&#10;            &lt;/Box&gt;&#10;        &lt;/Box&gt;&#10;    &lt;/Box&gt;&#10;&#10;    {/* ── C · bilah kaki ── */}&#10;    &lt;Box&#10;        style={{&#10;            height: 40,&#10;            flexDirection: 'row',&#10;            alignItems: 'center',&#10;            justifyContent: 'space-between',&#10;        }}&#10;    &gt;&#10;        &lt;Text style={{ fontSize: 14, color: '#6B6478', fontFamily: 'Verdana' }}&gt;&#10;            Pizza Snack Play · Panduan Orang Tua&#10;        &lt;/Text&gt;&#10;        &lt;Text style={{ fontSize: 14, color: '#6B6478', fontFamily: 'Verdana' }}&gt;04 / 15&lt;/Text&gt;&#10;    &lt;/Box&gt;&#10;&lt;/Slide&gt;&#10;"/>
+        <p:cNvPr id="183" name="" descr="&lt;Slide&#13;&#10;    style={{&#13;&#10;        width: '1280px',&#13;&#10;        height: '720px',&#13;&#10;        background: '#FAF7F2',&#13;&#10;        paddingTop: 20,&#13;&#10;        paddingBottom: 20,&#13;&#10;        paddingLeft: 64,&#13;&#10;        paddingRight: 64,&#13;&#10;    }}&#13;&#10;&gt;&#13;&#10;    {/* ── A · blok judul ── */}&#13;&#10;    &lt;Box style={{ height: 110, justifyContent: 'center' }}&gt;&#13;&#10;        &lt;Text&#13;&#10;            style={{&#13;&#10;                fontSize: 34,&#13;&#10;                fontWeight: 'bold',&#13;&#10;                color: '#51277C',&#13;&#10;                fontFamily: 'Trebuchet MS',&#13;&#10;                lineHeight: 1.3,&#13;&#10;            }}&#13;&#10;        &gt;&#13;&#10;            Dulu, begini masalahnya&#13;&#10;        &lt;/Text&gt;&#13;&#10;        &lt;Box style={{ marginTop: 10, width: 72, height: 6, borderRadius: 3, background: '#51277C' }} /&gt;&#13;&#10;    &lt;/Box&gt;&#13;&#10;&#13;&#10;    {/* ── B · area konten ── */}&#13;&#10;    &lt;Box style={{ height: 530, flexDirection: 'row', gap: 28 }}&gt;&#13;&#10;        {/* kiri 60% — ilustrasi grup &amp; kertas jadwal */}&#13;&#10;        &lt;Box&#13;&#10;            style={{&#13;&#10;                width: '60%',&#13;&#10;                height: '100%',&#13;&#10;                background: 'rgba(81,39,124,0.06)',&#13;&#10;                borderRadius: 20,&#13;&#10;                justifyContent: 'center',&#13;&#10;                alignItems: 'center',&#13;&#10;            }}&#13;&#10;        &gt;&#13;&#10;            &lt;svg width={620} height={430} viewBox='0 0 620 430'&gt;&#13;&#10;                {/* kertas jadwal cetak, miring */}&#13;&#10;                &lt;g transform='rotate(-7 150 215)'&gt;&#13;&#10;                    &lt;rect x='26' y='34' width='250' height='350' rx='12' fill='#FFFFFF' stroke='#DCD5C9' strokeWidth='3' /&gt;&#13;&#10;                    &lt;rect x='58' y='74' width='170' height='15' rx='7' fill='#51277C' opacity='0.55' /&gt;&#13;&#10;                    &lt;rect x='58' y='118' width='186' height='10' rx='5' fill='#E6E0D5' /&gt;&#13;&#10;                    &lt;rect x='58' y='146' width='150' height='10' rx='5' fill='#EFEAE1' /&gt;&#13;&#10;                    &lt;rect x='58' y='174' width='176' height='10' rx='5' fill='#EFEAE1' /&gt;&#13;&#10;                    &lt;rect x='58' y='202' width='132' height='10' rx='5' fill='#EFEAE1' /&gt;&#13;&#10;                    &lt;rect x='58' y='230' width='164' height='10' rx='5' fill='#EFEAE1' /&gt;&#13;&#10;                    &lt;rect x='58' y='258' width='120' height='10' rx='5' fill='#EFEAE1' /&gt;&#13;&#10;                    &lt;rect x='58' y='286' width='158' height='10' rx='5' fill='#EFEAE1' /&gt;&#13;&#10;                    &lt;rect x='58' y='314' width='140' height='10' rx='5' fill='#E6E0D5' /&gt;&#13;&#10;                &lt;/g&gt;&#13;&#10;&#13;&#10;                {/* gelembung chat bertumpuk */}&#13;&#10;                &lt;g&gt;&#13;&#10;                    &lt;rect x='296' y='46' width='300' height='92' rx='18' fill='#FFFFFF' stroke='#E3DCCF' strokeWidth='3' /&gt;&#13;&#10;                    &lt;path d='M320 138 l0 26 l26 -26 z' fill='#FFFFFF' stroke='#E3DCCF' strokeWidth='3' /&gt;&#13;&#10;                    &lt;rect x='322' y='70' width='230' height='12' rx='6' fill='#C9C1B4' /&gt;&#13;&#10;                    &lt;rect x='322' y='94' width='170' height='12' rx='6' fill='#DED7CB' /&gt;&#13;&#10;                &lt;/g&gt;&#13;&#10;                &lt;g&gt;&#13;&#10;                    &lt;rect x='330' y='166' width='286' height='92' rx='18' fill='#AFC440' opacity='0.30' /&gt;&#13;&#10;                    &lt;path d='M354 258 l0 24 l24 -24 z' fill='#AFC440' opacity='0.30' /&gt;&#13;&#10;                    &lt;rect x='356' y='190' width='210' height='12' rx='6' fill='#6E7A32' opacity='0.55' /&gt;&#13;&#10;                    &lt;rect x='356' y='214' width='150' height='12' rx='6' fill='#6E7A32' opacity='0.40' /&gt;&#13;&#10;                &lt;/g&gt;&#13;&#10;                &lt;g&gt;&#13;&#10;                    &lt;rect x='288' y='286' width='312' height='96' rx='18' fill='#FFFFFF' stroke='#E3DCCF' strokeWidth='3' /&gt;&#13;&#10;                    &lt;path d='M566 382 l0 24 l-24 -24 z' fill='#FFFFFF' stroke='#E3DCCF' strokeWidth='3' /&gt;&#13;&#10;                    &lt;rect x='314' y='310' width='200' height='12' rx='6' fill='#C9C1B4' /&gt;&#13;&#10;                    &lt;rect x='314' y='334' width='150' height='12' rx='6' fill='#DED7CB' /&gt;&#13;&#10;                &lt;/g&gt;&#13;&#10;&#13;&#10;                {/* tanda tanya besar */}&#13;&#10;                &lt;circle cx='546' cy='62' r='44' fill='#F3B26C' /&gt;&#13;&#10;                &lt;text&#13;&#10;                    x='546'&#13;&#10;                    y='82'&#13;&#10;                    fontFamily='Trebuchet MS'&#13;&#10;                    fontSize='54'&#13;&#10;                    fontWeight='bold'&#13;&#10;                    fill='#51277C'&#13;&#10;                    textAnchor='middle'&#13;&#10;                &gt;&#13;&#10;                    ?&#13;&#10;                &lt;/text&gt;&#13;&#10;            &lt;/svg&gt;&#13;&#10;        &lt;/Box&gt;&#13;&#10;&#13;&#10;        {/* kanan 40% — tiga masalah */}&#13;&#10;        &lt;Box style={{ width: '40%', height: '100%', justifyContent: 'space-between' }}&gt;&#13;&#10;            &lt;Box&#13;&#10;                style={{&#13;&#10;                    height: 166,&#13;&#10;                    background: '#FFFFFF',&#13;&#10;                    borderRadius: 16,&#13;&#10;                    boxShadow: '0 4px 20px rgba(0,0,0,0.08)',&#13;&#10;                    padding: 20,&#13;&#10;                }}&#13;&#10;            &gt;&#13;&#10;                &lt;Box style={{ flexDirection: 'row', gap: 14, alignItems: 'flex-start' }}&gt;&#13;&#10;                    &lt;Box&#13;&#10;                        style={{&#13;&#10;                            width: 48,&#13;&#10;                            height: 48,&#13;&#10;                            borderRadius: 24,&#13;&#10;                            background: 'rgba(81,39,124,0.10)',&#13;&#10;                            justifyContent: 'center',&#13;&#10;                            alignItems: 'center',&#13;&#10;                        }}&#13;&#10;                    &gt;&#13;&#10;                        &lt;svg width={26} height={26} viewBox=&quot;0 0 512 512&quot; xmlns=&quot;http://www.w3.org/2000/svg&quot;&gt;&lt;path fill=&quot;#51277C&quot; d=&quot;M512 240c0 114.9-114.6 208-256 208c-37.1 0-72.3-6.4-104.1-17.9c-11.9 8.7-31.3 20.6-54.3 30.6C73.6 471.1 44.7 480 16 480c-6.5 0-12.3-3.9-14.8-9.9c-2.5-6-1.1-12.8 3.4-17.4l0 0 0 0 0 0 0 0 .3-.3c.3-.3 .7-.7 1.3-1.4c1.1-1.2 2.8-3.1 4.9-5.7c4.1-5 9.6-12.4 15.2-21.6c10-16.6 19.5-38.4 21.4-62.9C17.7 326.8 0 285.1 0 240C0 125.1 114.6 32 256 32s256 93.1 256 208z&quot; /&gt;&lt;/svg&gt;&#13;&#10;                    &lt;/Box&gt;&#13;&#10;                    &lt;Box style={{ flex: 1 }}&gt;&#13;&#10;                        &lt;Text&#13;&#10;                            style={{&#13;&#10;                                fontSize: 24,&#13;&#10;                                fontWeight: 'bold',&#13;&#10;                                color: '#2A2333',&#13;&#10;                                fontFamily: 'Trebuchet MS',&#13;&#10;                                lineHeight: 1.3,&#13;&#10;                            }}&#13;&#10;                        &gt;&#13;&#10;                            Menu harus ditanya&#13;&#10;                        &lt;/Text&gt;&#13;&#10;                    &lt;/Box&gt;&#13;&#10;                &lt;/Box&gt;&#13;&#10;                &lt;Text&#13;&#10;                    style={{&#13;&#10;                        marginTop: 12,&#13;&#10;                        fontSize: 18,&#13;&#10;                        color: '#6B6478',&#13;&#10;                        fontFamily: 'Verdana',&#13;&#10;                        lineHeight: 1.45,&#13;&#10;                    }}&#13;&#10;                &gt;&#13;&#10;                    Tidak ada satu tempat yang jadi rujukan. Jawabannya kadang lambat, kadang beda-beda.&#13;&#10;                &lt;/Text&gt;&#13;&#10;                &lt;Box style={{ marginTop: 'auto' }}&gt;&#13;&#10;                    &lt;Text style={{ fontSize: 15, color: '#51277C', fontFamily: 'Verdana', fontWeight: 'bold' }}&gt;&#13;&#10;                        Setiap hari&#13;&#10;                    &lt;/Text&gt;&#13;&#10;                &lt;/Box&gt;&#13;&#10;            &lt;/Box&gt;&#13;&#10;&#13;&#10;            &lt;Box&#13;&#10;                style={{&#13;&#10;                    height: 166,&#13;&#10;                    background: '#FFFFFF',&#13;&#10;                    borderRadius: 16,&#13;&#10;                    boxShadow: '0 4px 20px rgba(0,0,0,0.08)',&#13;&#10;                    padding: 20,&#13;&#10;                }}&#13;&#10;            &gt;&#13;&#10;                &lt;Box style={{ flexDirection: 'row', gap: 14, alignItems: 'flex-start' }}&gt;&#13;&#10;                    &lt;Box&#13;&#10;                        style={{&#13;&#10;                            width: 48,&#13;&#10;                            height: 48,&#13;&#10;                            borderRadius: 24,&#13;&#10;                            background: 'rgba(81,39,124,0.10)',&#13;&#10;                            justifyContent: 'center',&#13;&#10;                            alignItems: 'center',&#13;&#10;                        }}&#13;&#10;                    &gt;&#13;&#10;                        &lt;svg width={26} height={26} viewBox=&quot;0 0 384 512&quot; xmlns=&quot;http://www.w3.org/2000/svg&quot;&gt;&lt;path fill=&quot;#51277C&quot; d=&quot;M0 64C0 28.7 28.7 0 64 0H224V128c0 17.7 14.3 32 32 32H384V448c0 35.3-28.7 64-64 64H64c-35.3 0-64-28.7-64-64V64zm384 64H256V0L384 128z&quot; /&gt;&lt;/svg&gt;&#13;&#10;                    &lt;/Box&gt;&#13;&#10;                    &lt;Box style={{ flex: 1 }}&gt;&#13;&#10;                        &lt;Text&#13;&#10;                            style={{&#13;&#10;                                fontSize: 24,&#13;&#10;                                fontWeight: 'bold',&#13;&#10;                                color: '#2A2333',&#13;&#10;                                fontFamily: 'Trebuchet MS',&#13;&#10;                                lineHeight: 1.3,&#13;&#10;                            }}&#13;&#10;                        &gt;&#13;&#10;                            Riwayat hilang&#13;&#10;                        &lt;/Text&gt;&#13;&#10;                    &lt;/Box&gt;&#13;&#10;                &lt;/Box&gt;&#13;&#10;                &lt;Text&#13;&#10;                    style={{&#13;&#10;                        marginTop: 12,&#13;&#10;                        fontSize: 18,&#13;&#10;                        color: '#6B6478',&#13;&#10;                        fontFamily: 'Verdana',&#13;&#10;                        lineHeight: 1.45,&#13;&#10;                    }}&#13;&#10;                &gt;&#13;&#10;                    Menu bulan lalu tidak tersimpan rapi. Ingin tahu rotasinya, harus buka-buka lagi.&#13;&#10;                &lt;/Text&gt;&#13;&#10;                &lt;Box style={{ marginTop: 'auto' }}&gt;&#13;&#10;                    &lt;Text style={{ fontSize: 15, color: '#51277C', fontFamily: 'Verdana', fontWeight: 'bold' }}&gt;&#13;&#10;                        Tidak bisa dilacak&#13;&#10;                    &lt;/Text&gt;&#13;&#10;                &lt;/Box&gt;&#13;&#10;            &lt;/Box&gt;&#13;&#10;&#13;&#10;            &lt;Box&#13;&#10;                style={{&#13;&#10;                    height: 166,&#13;&#10;                    background: '#FFFFFF',&#13;&#10;                    borderRadius: 16,&#13;&#10;                    boxShadow: '0 4px 20px rgba(0,0,0,0.08)',&#13;&#10;                    padding: 20,&#13;&#10;                    borderLeft: '8px solid #F3B26C',&#13;&#10;                }}&#13;&#10;            &gt;&#13;&#10;                &lt;Box style={{ flexDirection: 'row', gap: 14, alignItems: 'flex-start' }}&gt;&#13;&#10;                    &lt;Box&#13;&#10;                        style={{&#13;&#10;                            width: 48,&#13;&#10;                            height: 48,&#13;&#10;                            borderRadius: 24,&#13;&#10;                            background: 'rgba(243,178,108,0.28)',&#13;&#10;                            justifyContent: 'center',&#13;&#10;                            alignItems: 'center',&#13;&#10;                        }}&#13;&#10;                    &gt;&#13;&#10;                        &lt;svg width={26} height={26} viewBox=&quot;0 0 512 512&quot; xmlns=&quot;http://www.w3.org/2000/svg&quot;&gt;&lt;path fill=&quot;#51277C&quot; d=&quot;M256 512A256 256 0 1 0 256 0a256 256 0 1 0 0 512zm0-384c13.3 0 24 10.7 24 24V264c0 13.3-10.7 24-24 24s-24-10.7-24-24V152c0-13.3 10.7-24 24-24zM224 352a32 32 0 1 1 64 0 32 32 0 1 1 -64 0z&quot; /&gt;&lt;/svg&gt;&#13;&#10;                    &lt;/Box&gt;&#13;&#10;                    &lt;Box style={{ flex: 1 }}&gt;&#13;&#10;                        &lt;Text&#13;&#10;                            style={{&#13;&#10;                                fontSize: 24,&#13;&#10;                                fontWeight: 'bold',&#13;&#10;                                color: '#2A2333',&#13;&#10;                                fontFamily: 'Trebuchet MS',&#13;&#10;                                lineHeight: 1.3,&#13;&#10;                            }}&#13;&#10;                        &gt;&#13;&#10;                            Rebutan tanggal&#13;&#10;                        &lt;/Text&gt;&#13;&#10;                    &lt;/Box&gt;&#13;&#10;                &lt;/Box&gt;&#13;&#10;                &lt;Text&#13;&#10;                    style={{&#13;&#10;                        marginTop: 12,&#13;&#10;                        fontSize: 18,&#13;&#10;                        color: '#6B6478',&#13;&#10;                        fontFamily: 'Verdana',&#13;&#10;                        lineHeight: 1.45,&#13;&#10;                    }}&#13;&#10;                &gt;&#13;&#10;                    Dua orang bisa merasa sama-sama sudah mengambil tanggal yang sama.&#13;&#10;                &lt;/Text&gt;&#13;&#10;                &lt;Box style={{ marginTop: 'auto' }}&gt;&#13;&#10;                    &lt;Text style={{ fontSize: 15, color: '#51277C', fontFamily: 'Verdana', fontWeight: 'bold' }}&gt;&#13;&#10;                        Paling sering jadi masalah&#13;&#10;                    &lt;/Text&gt;&#13;&#10;                &lt;/Box&gt;&#13;&#10;            &lt;/Box&gt;&#13;&#10;        &lt;/Box&gt;&#13;&#10;    &lt;/Box&gt;&#13;&#10;&#13;&#10;    {/* ── C · bilah kaki ── */}&#13;&#10;    &lt;Box&#13;&#10;        style={{&#13;&#10;            height: 40,&#13;&#10;            flexDirection: 'row',&#13;&#10;            alignItems: 'center',&#13;&#10;            justifyContent: 'space-between',&#13;&#10;        }}&#13;&#10;    &gt;&#13;&#10;        &lt;Text style={{ fontSize: 14, color: '#6B6478', fontFamily: 'Verdana' }}&gt;&#13;&#10;            Pizza Snack Play · Panduan Orang Tua&#13;&#10;        &lt;/Text&gt;&#13;&#10;        &lt;Text style={{ fontSize: 14, color: '#6B6478', fontFamily: 'Verdana' }}&gt;04 / 15&lt;/Text&gt;&#13;&#10;    &lt;/Box&gt;&#13;&#10;&lt;/Slide&gt;"/>
         <p:cNvGrpSpPr/>
         <p:nvPr/>
       </p:nvGrpSpPr>
@@ -8925,7 +8925,7 @@
           <a:blip>
             <a:extLst>
               <a:ext uri="{96DAC541-7B7A-43D3-8B79-37D633B846F1}">
-                <asvg:svgBlip r:embed="rId2"/>
+                <asvg:svgBlip r:embed="rId3"/>
               </a:ext>
             </a:extLst>
           </a:blip>
@@ -9181,7 +9181,7 @@
           <a:blip>
             <a:extLst>
               <a:ext uri="{96DAC541-7B7A-43D3-8B79-37D633B846F1}">
-                <asvg:svgBlip r:embed="rId2"/>
+                <asvg:svgBlip r:embed="rId4"/>
               </a:ext>
             </a:extLst>
           </a:blip>
@@ -9387,7 +9387,7 @@
   <p:cSld>
     <p:spTree>
       <p:nvGrpSpPr>
-        <p:cNvPr id="210" name="" descr="&lt;Slide&#10;    style={{&#10;        width: '1280px',&#10;        height: '720px',&#10;        background: '#FAF7F2',&#10;        paddingTop: 20,&#10;        paddingBottom: 20,&#10;        paddingLeft: 64,&#10;        paddingRight: 64,&#10;    }}&#10;&gt;&#10;    {/* ── A · blok judul ── */}&#10;    &lt;Box style={{ height: 110, justifyContent: 'center' }}&gt;&#10;        &lt;Text&#10;            style={{&#10;                fontSize: 34,&#10;                fontWeight: 'bold',&#10;                color: '#51277C',&#10;                fontFamily: 'Trebuchet MS',&#10;                lineHeight: 1.3,&#10;            }}&#10;        &gt;&#10;            Sekarang: cukup satu aplikasi&#10;        &lt;/Text&gt;&#10;        &lt;Box style={{ marginTop: 10, width: 72, height: 6, borderRadius: 3, background: '#51277C' }} /&gt;&#10;    &lt;/Box&gt;&#10;&#10;    {/* ── B · area konten ── */}&#10;    &lt;Box style={{ height: 530, flexDirection: 'row', gap: 28 }}&gt;&#10;        {/* ── kiri 44% · teks ── */}&#10;        &lt;Box&#10;            style={{&#10;                width: '44%',&#10;                justifyContent: 'center',&#10;            }}&#10;        &gt;&#10;        &lt;Box&#10;            style={{&#10;                flexDirection: 'row',&#10;                alignItems: 'center',&#10;                gap: 10,&#10;                alignSelf: 'flex-start',&#10;                background: 'rgba(175,196,64,0.28)',&#10;                borderRadius: 999,&#10;                paddingTop: 8,&#10;                paddingBottom: 8,&#10;                paddingLeft: 18,&#10;                paddingRight: 20,&#10;            }}&#10;        &gt;&#10;            &lt;Text style={{ fontSize: 16, color: '#4F5A24', fontFamily: 'Verdana', fontWeight: 'bold' }}&gt;&#10;                Solusinya&#10;            &lt;/Text&gt;&#10;        &lt;/Box&gt;&#10;&#10;        &lt;Text&#10;            style={{&#10;                marginTop: 18,&#10;                fontSize: 46,&#10;                fontWeight: 'bold',&#10;                color: '#51277C',&#10;                fontFamily: 'Trebuchet MS',&#10;                lineHeight: 1.15,&#10;            }}&#10;        &gt;&#10;            Menu jelas,{'\n'}giliran jelas.&#10;        &lt;/Text&gt;&#10;&#10;        &lt;Text&#10;            style={{&#10;                marginTop: 16,&#10;                fontSize: 21,&#10;                color: '#2A2333',&#10;                fontFamily: 'Verdana',&#10;                lineHeight: 1.5,&#10;            }}&#10;        &gt;&#10;            Tidak perlu tanya-tanya lagi ke grup.&#10;        &lt;/Text&gt;&#10;&#10;        &lt;Box style={{ marginTop: 22, gap: 14 }}&gt;&#10;            {[&#10;                'Jadwal snack kelihatan kapan saja',&#10;                'Giliran piket anak tercatat rapi',&#10;                'Tanggal kosong bisa diambil sendiri',&#10;            ].map((t, i) =&gt; (&#10;                &lt;Box key={i} style={{ flexDirection: 'row', alignItems: 'center', gap: 14 }}&gt;&#10;                    &lt;Box&#10;                        style={{&#10;                            width: 34,&#10;                            height: 34,&#10;                            borderRadius: 17,&#10;                            background: '#AFC440',&#10;                            justifyContent: 'center',&#10;                            alignItems: 'center',&#10;                        }}&#10;                    &gt;&#10;                        &lt;FAIcon name='check' style={{ fill: '#FFFFFF', width: 18, height: 18 }} /&gt;&#10;                    &lt;/Box&gt;&#10;                    &lt;Text style={{ fontSize: 20, color: '#2A2333', fontFamily: 'Verdana' }}&gt;{t}&lt;/Text&gt;&#10;                &lt;/Box&gt;&#10;            ))}&#10;        &lt;/Box&gt;&#10;&#10;        &lt;Box&#10;            style={{&#10;                marginTop: 24,&#10;                alignSelf: 'flex-start',&#10;                background: '#F3B26C',&#10;                borderRadius: 14,&#10;                paddingTop: 13,&#10;                paddingBottom: 13,&#10;                paddingLeft: 24,&#10;                paddingRight: 26,&#10;            }}&#10;        &gt;&#10;            &lt;Text style={{ fontSize: 19, color: '#51277C', fontFamily: 'Trebuchet MS', fontWeight: 'bold' }}&gt;&#10;                Satu tempat. Satu rujukan.&#10;            &lt;/Text&gt;&#10;        &lt;/Box&gt;&#10;    &lt;/Box&gt;&#10;&#10;    {/* ── kanan 52% · panel ungu + ponsel ── */}&#10;    &lt;Box&#10;        style={{&#10;            width: '52%',&#10;            height: '100%',&#10;            background: 'linear-gradient(135deg, #51277C 0%, #7A45A8 100%)',&#10;            borderRadius: 20,&#10;            justifyContent: 'center',&#10;            alignItems: 'center',&#10;            position: 'relative',&#10;            overflow: 'hidden',&#10;        }}&#10;    &gt;&#10;        &lt;Box&#10;            style={{&#10;                position: 'absolute',&#10;                top: -110,&#10;                left: -90,&#10;                width: 340,&#10;                height: 340,&#10;                borderRadius: 170,&#10;                background: '#AFC440',&#10;                opacity: 0.16,&#10;            }}&#10;        /&gt;&#10;        &lt;Box style={{ position: 'relative', zIndex: 1 }}&gt;&#10;            &lt;svg width={376} height={490} viewBox='0 0 430 560'&gt;&#10;                {/* bingkai ponsel */}&#10;                &lt;rect x='12' y='10' width='406' height='540' rx='46' fill='#FFFFFF' stroke='#E3DCCF' strokeWidth='4' /&gt;&#10;                &lt;rect x='176' y='26' width='78' height='11' rx='6' fill='#DCD5C9' /&gt;&#10;&#10;                {/* bilah atas aplikasi */}&#10;                &lt;rect x='38' y='56' width='354' height='62' rx='14' fill='#51277C' /&gt;&#10;                &lt;text x='60' y='96' fontFamily='Trebuchet MS' fontSize='25' fontWeight='bold' fill='#FFFFFF'&gt;&#10;                    Hari Ini&#10;                &lt;/text&gt;&#10;                &lt;circle cx='366' cy='87' r='16' fill='#F3B26C' /&gt;&#10;&#10;                {/* kartu menu hari ini */}&#10;                &lt;rect x='38' y='136' width='354' height='128' rx='16' fill='#F7F3EC' stroke='#E6DFD2' strokeWidth='2' /&gt;&#10;                &lt;rect x='60' y='158' width='92' height='26' rx='13' fill='#AFC440' /&gt;&#10;                &lt;text x='74' y='177' fontFamily='Verdana' fontSize='15' fill='#3F4718'&gt;&#10;                    Selasa&#10;                &lt;/text&gt;&#10;                &lt;text x='60' y='218' fontFamily='Trebuchet MS' fontSize='26' fontWeight='bold' fill='#2A2333'&gt;&#10;                    Roti coklat&#10;                &lt;/text&gt;&#10;                &lt;text x='60' y='246' fontFamily='Verdana' fontSize='19' fill='#6B6478'&gt;&#10;                    + Jeruk manis&#10;                &lt;/text&gt;&#10;&#10;                {/* kartu minggu ini */}&#10;                &lt;rect x='38' y='280' width='354' height='166' rx='16' fill='#F7F3EC' stroke='#E6DFD2' strokeWidth='2' /&gt;&#10;                &lt;text x='60' y='310' fontFamily='Trebuchet MS' fontSize='21' fontWeight='bold' fill='#51277C'&gt;&#10;                    Minggu ini&#10;                &lt;/text&gt;&#10;                &lt;rect x='60' y='326' width='310' height='1' fill='#E6DFD2' /&gt;&#10;                &lt;circle cx='74' cy='352' r='7' fill='#AFC440' /&gt;&#10;                &lt;rect x='92' y='344' width='150' height='11' rx='5' fill='#C9C1B4' /&gt;&#10;                &lt;circle cx='74' cy='382' r='7' fill='#AFC440' /&gt;&#10;                &lt;rect x='92' y='374' width='120' height='11' rx='5' fill='#DED7CB' /&gt;&#10;                &lt;circle cx='74' cy='412' r='7' fill='#F3B26C' /&gt;&#10;                &lt;rect x='92' y='404' width='160' height='11' rx='5' fill='#DED7CB' /&gt;&#10;&#10;                {/* bilah navigasi bawah */}&#10;                &lt;rect x='52' y='470' width='326' height='60' rx='30' fill='#FFFFFF' stroke='#E6DFD2' strokeWidth='2' /&gt;&#10;                &lt;circle cx='100' cy='500' r='11' fill='#51277C' /&gt;&#10;                &lt;circle cx='160' cy='500' r='11' fill='#DED7CB' /&gt;&#10;                &lt;circle cx='270' cy='500' r='11' fill='#DED7CB' /&gt;&#10;                &lt;circle cx='330' cy='500' r='11' fill='#DED7CB' /&gt;&#10;                &lt;circle cx='215' cy='470' r='24' fill='#51277C' /&gt;&#10;                &lt;rect x='203' y='459' width='24' height='4' rx='2' fill='#FFFFFF' /&gt;&#10;                &lt;rect x='203' y='467' width='24' height='4' rx='2' fill='#FFFFFF' /&gt;&#10;                &lt;rect x='203' y='475' width='24' height='4' rx='2' fill='#FFFFFF' /&gt;&#10;            &lt;/svg&gt;&#10;        &lt;/Box&gt;&#10;    &lt;/Box&gt;&#10;    &lt;/Box&gt;&#10;&#10;    {/* ── C · bilah kaki ── */}&#10;    &lt;Box&#10;        style={{&#10;            height: 40,&#10;            flexDirection: 'row',&#10;            alignItems: 'center',&#10;            justifyContent: 'space-between',&#10;        }}&#10;    &gt;&#10;        &lt;Text style={{ fontSize: 14, color: '#6B6478', fontFamily: 'Verdana' }}&gt;&#10;            Pizza Snack Play · Panduan Orang Tua&#10;        &lt;/Text&gt;&#10;        &lt;Text style={{ fontSize: 14, color: '#6B6478', fontFamily: 'Verdana' }}&gt;05 / 15&lt;/Text&gt;&#10;    &lt;/Box&gt;&#10;&lt;/Slide&gt;&#10;"/>
+        <p:cNvPr id="210" name="" descr="&lt;Slide&#13;&#10;    style={{&#13;&#10;        width: '1280px',&#13;&#10;        height: '720px',&#13;&#10;        background: '#FAF7F2',&#13;&#10;        paddingTop: 20,&#13;&#10;        paddingBottom: 20,&#13;&#10;        paddingLeft: 64,&#13;&#10;        paddingRight: 64,&#13;&#10;    }}&#13;&#10;&gt;&#13;&#10;    {/* ── A · blok judul ── */}&#13;&#10;    &lt;Box style={{ height: 110, justifyContent: 'center' }}&gt;&#13;&#10;        &lt;Text&#13;&#10;            style={{&#13;&#10;                fontSize: 34,&#13;&#10;                fontWeight: 'bold',&#13;&#10;                color: '#51277C',&#13;&#10;                fontFamily: 'Trebuchet MS',&#13;&#10;                lineHeight: 1.3,&#13;&#10;            }}&#13;&#10;        &gt;&#13;&#10;            Sekarang: cukup satu aplikasi&#13;&#10;        &lt;/Text&gt;&#13;&#10;        &lt;Box style={{ marginTop: 10, width: 72, height: 6, borderRadius: 3, background: '#51277C' }} /&gt;&#13;&#10;    &lt;/Box&gt;&#13;&#10;&#13;&#10;    {/* ── B · area konten ── */}&#13;&#10;    &lt;Box style={{ height: 530, flexDirection: 'row', gap: 28 }}&gt;&#13;&#10;        {/* ── kiri 44% · teks ── */}&#13;&#10;        &lt;Box&#13;&#10;            style={{&#13;&#10;                width: '44%',&#13;&#10;                justifyContent: 'center',&#13;&#10;            }}&#13;&#10;        &gt;&#13;&#10;        &lt;Box&#13;&#10;            style={{&#13;&#10;                flexDirection: 'row',&#13;&#10;                alignItems: 'center',&#13;&#10;                gap: 10,&#13;&#10;                alignSelf: 'flex-start',&#13;&#10;                background: 'rgba(175,196,64,0.28)',&#13;&#10;                borderRadius: 999,&#13;&#10;                paddingTop: 8,&#13;&#10;                paddingBottom: 8,&#13;&#10;                paddingLeft: 18,&#13;&#10;                paddingRight: 20,&#13;&#10;            }}&#13;&#10;        &gt;&#13;&#10;            &lt;Text style={{ fontSize: 16, color: '#4F5A24', fontFamily: 'Verdana', fontWeight: 'bold' }}&gt;&#13;&#10;                Solusinya&#13;&#10;            &lt;/Text&gt;&#13;&#10;        &lt;/Box&gt;&#13;&#10;&#13;&#10;        &lt;Text&#13;&#10;            style={{&#13;&#10;                marginTop: 18,&#13;&#10;                fontSize: 46,&#13;&#10;                fontWeight: 'bold',&#13;&#10;                color: '#51277C',&#13;&#10;                fontFamily: 'Trebuchet MS',&#13;&#10;                lineHeight: 1.15,&#13;&#10;            }}&#13;&#10;        &gt;&#13;&#10;            Menu jelas,{'\n'}giliran jelas.&#13;&#10;        &lt;/Text&gt;&#13;&#10;&#13;&#10;        &lt;Text&#13;&#10;            style={{&#13;&#10;                marginTop: 16,&#13;&#10;                fontSize: 21,&#13;&#10;                color: '#2A2333',&#13;&#10;                fontFamily: 'Verdana',&#13;&#10;                lineHeight: 1.5,&#13;&#10;            }}&#13;&#10;        &gt;&#13;&#10;            Tidak perlu tanya-tanya lagi ke grup.&#13;&#10;        &lt;/Text&gt;&#13;&#10;&#13;&#10;        &lt;Box style={{ marginTop: 22, gap: 14 }}&gt;&#13;&#10;            {[&#13;&#10;                'Jadwal snack kelihatan kapan saja',&#13;&#10;                'Giliran piket anak tercatat rapi',&#13;&#10;                'Tanggal kosong bisa diambil sendiri',&#13;&#10;            ].map((t, i) =&gt; (&#13;&#10;                &lt;Box key={i} style={{ flexDirection: 'row', alignItems: 'center', gap: 14 }}&gt;&#13;&#10;                    &lt;Box&#13;&#10;                        style={{&#13;&#10;                            width: 34,&#13;&#10;                            height: 34,&#13;&#10;                            borderRadius: 17,&#13;&#10;                            background: '#AFC440',&#13;&#10;                            justifyContent: 'center',&#13;&#10;                            alignItems: 'center',&#13;&#10;                        }}&#13;&#10;                    &gt;&#13;&#10;                        &lt;svg width={18} height={18} viewBox=&quot;0 0 448 512&quot; xmlns=&quot;http://www.w3.org/2000/svg&quot;&gt;&lt;path fill=&quot;#FFFFFF&quot; d=&quot;M438.6 105.4c12.5 12.5 12.5 32.8 0 45.3l-256 256c-12.5 12.5-32.8 12.5-45.3 0l-128-128c-12.5-12.5-12.5-32.8 0-45.3s32.8-12.5 45.3 0L160 338.7 393.4 105.4c12.5-12.5 32.8-12.5 45.3 0z&quot; /&gt;&lt;/svg&gt;&#13;&#10;                    &lt;/Box&gt;&#13;&#10;                    &lt;Text style={{ fontSize: 20, color: '#2A2333', fontFamily: 'Verdana' }}&gt;{t}&lt;/Text&gt;&#13;&#10;                &lt;/Box&gt;&#13;&#10;            ))}&#13;&#10;        &lt;/Box&gt;&#13;&#10;&#13;&#10;        &lt;Box&#13;&#10;            style={{&#13;&#10;                marginTop: 24,&#13;&#10;                alignSelf: 'flex-start',&#13;&#10;                background: '#F3B26C',&#13;&#10;                borderRadius: 14,&#13;&#10;                paddingTop: 13,&#13;&#10;                paddingBottom: 13,&#13;&#10;                paddingLeft: 24,&#13;&#10;                paddingRight: 26,&#13;&#10;            }}&#13;&#10;        &gt;&#13;&#10;            &lt;Text style={{ fontSize: 19, color: '#51277C', fontFamily: 'Trebuchet MS', fontWeight: 'bold' }}&gt;&#13;&#10;                Satu tempat. Satu rujukan.&#13;&#10;            &lt;/Text&gt;&#13;&#10;        &lt;/Box&gt;&#13;&#10;    &lt;/Box&gt;&#13;&#10;&#13;&#10;    {/* ── kanan 52% · panel ungu + ponsel ── */}&#13;&#10;    &lt;Box&#13;&#10;        style={{&#13;&#10;            width: '52%',&#13;&#10;            height: '100%',&#13;&#10;            background: 'linear-gradient(135deg, #51277C 0%, #7A45A8 100%)',&#13;&#10;            borderRadius: 20,&#13;&#10;            justifyContent: 'center',&#13;&#10;            alignItems: 'center',&#13;&#10;            position: 'relative',&#13;&#10;            overflow: 'hidden',&#13;&#10;        }}&#13;&#10;    &gt;&#13;&#10;        &lt;Box&#13;&#10;            style={{&#13;&#10;                position: 'absolute',&#13;&#10;                top: -110,&#13;&#10;                left: -90,&#13;&#10;                width: 340,&#13;&#10;                height: 340,&#13;&#10;                borderRadius: 170,&#13;&#10;                background: '#AFC440',&#13;&#10;                opacity: 0.16,&#13;&#10;            }}&#13;&#10;        /&gt;&#13;&#10;        &lt;Box style={{ position: 'relative', zIndex: 1 }}&gt;&#13;&#10;            &lt;svg width={376} height={490} viewBox='0 0 430 560'&gt;&#13;&#10;                {/* bingkai ponsel */}&#13;&#10;                &lt;rect x='12' y='10' width='406' height='540' rx='46' fill='#FFFFFF' stroke='#E3DCCF' strokeWidth='4' /&gt;&#13;&#10;                &lt;rect x='176' y='26' width='78' height='11' rx='6' fill='#DCD5C9' /&gt;&#13;&#10;&#13;&#10;                {/* bilah atas aplikasi */}&#13;&#10;                &lt;rect x='38' y='56' width='354' height='62' rx='14' fill='#51277C' /&gt;&#13;&#10;                &lt;text x='60' y='96' fontFamily='Trebuchet MS' fontSize='25' fontWeight='bold' fill='#FFFFFF'&gt;&#13;&#10;                    Hari Ini&#13;&#10;                &lt;/text&gt;&#13;&#10;                &lt;circle cx='366' cy='87' r='16' fill='#F3B26C' /&gt;&#13;&#10;&#13;&#10;                {/* kartu menu hari ini */}&#13;&#10;                &lt;rect x='38' y='136' width='354' height='128' rx='16' fill='#F7F3EC' stroke='#E6DFD2' strokeWidth='2' /&gt;&#13;&#10;                &lt;rect x='60' y='158' width='92' height='26' rx='13' fill='#AFC440' /&gt;&#13;&#10;                &lt;text x='74' y='177' fontFamily='Verdana' fontSize='15' fill='#3F4718'&gt;&#13;&#10;                    Selasa&#13;&#10;                &lt;/text&gt;&#13;&#10;                &lt;text x='60' y='218' fontFamily='Trebuchet MS' fontSize='26' fontWeight='bold' fill='#2A2333'&gt;&#13;&#10;                    Roti coklat&#13;&#10;                &lt;/text&gt;&#13;&#10;                &lt;text x='60' y='246' fontFamily='Verdana' fontSize='19' fill='#6B6478'&gt;&#13;&#10;                    + Jeruk manis&#13;&#10;                &lt;/text&gt;&#13;&#10;&#13;&#10;                {/* kartu minggu ini */}&#13;&#10;                &lt;rect x='38' y='280' width='354' height='166' rx='16' fill='#F7F3EC' stroke='#E6DFD2' strokeWidth='2' /&gt;&#13;&#10;                &lt;text x='60' y='310' fontFamily='Trebuchet MS' fontSize='21' fontWeight='bold' fill='#51277C'&gt;&#13;&#10;                    Minggu ini&#13;&#10;                &lt;/text&gt;&#13;&#10;                &lt;rect x='60' y='326' width='310' height='1' fill='#E6DFD2' /&gt;&#13;&#10;                &lt;circle cx='74' cy='352' r='7' fill='#AFC440' /&gt;&#13;&#10;                &lt;rect x='92' y='344' width='150' height='11' rx='5' fill='#C9C1B4' /&gt;&#13;&#10;                &lt;circle cx='74' cy='382' r='7' fill='#AFC440' /&gt;&#13;&#10;                &lt;rect x='92' y='374' width='120' height='11' rx='5' fill='#DED7CB' /&gt;&#13;&#10;                &lt;circle cx='74' cy='412' r='7' fill='#F3B26C' /&gt;&#13;&#10;                &lt;rect x='92' y='404' width='160' height='11' rx='5' fill='#DED7CB' /&gt;&#13;&#10;&#13;&#10;                {/* bilah navigasi bawah */}&#13;&#10;                &lt;rect x='52' y='470' width='326' height='60' rx='30' fill='#FFFFFF' stroke='#E6DFD2' strokeWidth='2' /&gt;&#13;&#10;                &lt;circle cx='100' cy='500' r='11' fill='#51277C' /&gt;&#13;&#10;                &lt;circle cx='160' cy='500' r='11' fill='#DED7CB' /&gt;&#13;&#10;                &lt;circle cx='270' cy='500' r='11' fill='#DED7CB' /&gt;&#13;&#10;                &lt;circle cx='330' cy='500' r='11' fill='#DED7CB' /&gt;&#13;&#10;                &lt;circle cx='215' cy='470' r='24' fill='#51277C' /&gt;&#13;&#10;                &lt;rect x='203' y='459' width='24' height='4' rx='2' fill='#FFFFFF' /&gt;&#13;&#10;                &lt;rect x='203' y='467' width='24' height='4' rx='2' fill='#FFFFFF' /&gt;&#13;&#10;                &lt;rect x='203' y='475' width='24' height='4' rx='2' fill='#FFFFFF' /&gt;&#13;&#10;            &lt;/svg&gt;&#13;&#10;        &lt;/Box&gt;&#13;&#10;    &lt;/Box&gt;&#13;&#10;    &lt;/Box&gt;&#13;&#10;&#13;&#10;    {/* ── C · bilah kaki ── */}&#13;&#10;    &lt;Box&#13;&#10;        style={{&#13;&#10;            height: 40,&#13;&#10;            flexDirection: 'row',&#13;&#10;            alignItems: 'center',&#13;&#10;            justifyContent: 'space-between',&#13;&#10;        }}&#13;&#10;    &gt;&#13;&#10;        &lt;Text style={{ fontSize: 14, color: '#6B6478', fontFamily: 'Verdana' }}&gt;&#13;&#10;            Pizza Snack Play · Panduan Orang Tua&#13;&#10;        &lt;/Text&gt;&#13;&#10;        &lt;Text style={{ fontSize: 14, color: '#6B6478', fontFamily: 'Verdana' }}&gt;05 / 15&lt;/Text&gt;&#13;&#10;    &lt;/Box&gt;&#13;&#10;&lt;/Slide&gt;"/>
         <p:cNvGrpSpPr/>
         <p:nvPr/>
       </p:nvGrpSpPr>
@@ -10171,7 +10171,7 @@
   <p:cSld>
     <p:spTree>
       <p:nvGrpSpPr>
-        <p:cNvPr id="234" name="" descr="&lt;Slide&#10;    style={{&#10;        width: '1280px',&#10;        height: '720px',&#10;        background: 'linear-gradient(135deg, #51277C 0%, #7A45A8 100%)',&#10;        paddingTop: 60,&#10;        paddingBottom: 60,&#10;        paddingLeft: 72,&#10;        paddingRight: 72,&#10;        justifyContent: 'center',&#10;        position: 'relative',&#10;        overflow: 'hidden',&#10;    }}&#10;&gt;&#10;    {/* dekorasi: ponsel + panah unduh */}&#10;    &lt;Box&#10;        style={{&#10;            position: 'absolute',&#10;            bottom: -120,&#10;            right: -70,&#10;            width: 440,&#10;            height: 440,&#10;            borderRadius: 220,&#10;            background: '#AFC440',&#10;            opacity: 0.14,&#10;        }}&#10;    /&gt;&#10;    &lt;Box style={{ position: 'absolute', top: 74, right: 92, opacity: 0.20 }}&gt;&#10;        &lt;svg width={230} height={250} viewBox='0 0 230 250'&gt;&#10;            &lt;rect x='52' y='10' width='126' height='210' rx='22' fill='none' stroke='#FFFFFF' strokeWidth='6' /&gt;&#10;            &lt;rect x='96' y='24' width='38' height='7' rx='4' fill='#FFFFFF' /&gt;&#10;            &lt;path d='M92 150 v46 M74 180 l18 18 l18 -18' fill='none' stroke='#FFFFFF' strokeWidth='8' strokeLinecap='round' strokeLinejoin='round' /&gt;&#10;            &lt;path d='M52 196 h126' stroke='#FFFFFF' strokeWidth='6' /&gt;&#10;        &lt;/svg&gt;&#10;    &lt;/Box&gt;&#10;&#10;    {/* isi */}&#10;    &lt;Box style={{ position: 'relative', zIndex: 1, width: '62%' }}&gt;&#10;        &lt;Box style={{ flexDirection: 'row', alignItems: 'center', gap: 14, alignSelf: 'flex-start' }}&gt;&#10;            &lt;Text&#10;                style={{&#10;                    fontSize: 76,&#10;                    fontWeight: 'bold',&#10;                    color: '#F3B26C',&#10;                    fontFamily: 'Trebuchet MS',&#10;                    lineHeight: 1,&#10;                }}&#10;            &gt;&#10;                02&#10;            &lt;/Text&gt;&#10;            &lt;Box style={{ width: 3, height: 52, background: 'rgba(255,255,255,0.45)' }} /&gt;&#10;            &lt;Text style={{ fontSize: 19, color: 'rgba(255,255,255,0.8)', fontFamily: 'Verdana' }}&gt;&#10;                Bagian kedua&#10;            &lt;/Text&gt;&#10;        &lt;/Box&gt;&#10;&#10;        &lt;Text&#10;            style={{&#10;                marginTop: 26,&#10;                fontSize: 60,&#10;                fontWeight: 'bold',&#10;                color: '#FFFFFF',&#10;                fontFamily: 'Trebuchet MS',&#10;                lineHeight: 1.15,&#10;            }}&#10;        &gt;&#10;            Cara mulai&#10;        &lt;/Text&gt;&#10;&#10;        &lt;Text&#10;            style={{&#10;                marginTop: 24,&#10;                fontSize: 22,&#10;                color: 'rgba(255,255,255,0.88)',&#10;                fontFamily: 'Verdana',&#10;                lineHeight: 1.5,&#10;            }}&#10;        &gt;&#10;            Dua langkah saja, lalu aplikasinya siap dipakai.&#10;        &lt;/Text&gt;&#10;    &lt;/Box&gt;&#10;&lt;/Slide&gt;&#10;"/>
+        <p:cNvPr id="234" name="" descr="&lt;Slide&#10;    style={{&#10;        width: '1280px',&#10;        height: '720px',&#10;        background: 'linear-gradient(135deg, #51277C 0%, #7A45A8 100%)',&#10;        paddingTop: 60,&#10;        paddingBottom: 60,&#10;        paddingLeft: 72,&#10;        paddingRight: 72,&#10;        justifyContent: 'center',&#10;        position: 'relative',&#10;        overflow: 'hidden',&#10;    }}&#10;&gt;&#10;    {/* dekorasi: ponsel + panah unduh */}&#10;    &lt;Box&#10;        style={{&#10;            position: 'absolute',&#10;            bottom: -120,&#10;            right: -70,&#10;            width: 440,&#10;            height: 440,&#10;            borderRadius: 220,&#10;            background: '#AFC440',&#10;            opacity: 0.14,&#10;        }}&#10;    /&gt;&#10;    &lt;Box style={{ position: 'absolute', top: 74, right: 92, opacity: 0.20 }}&gt;&#10;        &lt;svg width={230} height={250} viewBox='0 0 230 250'&gt;&#10;            &lt;rect x='52' y='10' width='126' height='210' rx='22' fill='none' stroke='#FFFFFF' strokeWidth='6' /&gt;&#10;            &lt;rect x='96' y='24' width='38' height='7' rx='4' fill='#FFFFFF' /&gt;&#10;            &lt;path d='M92 150 v46 M74 180 l18 18 l18 -18' fill='none' stroke='#FFFFFF' strokeWidth='8' strokeLinecap='round' strokeLinejoin='round' /&gt;&#10;            &lt;path d='M52 196 h126' stroke='#FFFFFF' strokeWidth='6' /&gt;&#10;        &lt;/svg&gt;&#10;    &lt;/Box&gt;&#10;&#10;    {/* isi */}&#10;    &lt;Box style={{ position: 'relative', zIndex: 1, width: '62%' }}&gt;&#10;        &lt;Box style={{ flexDirection: 'row', alignItems: 'center', gap: 14, alignSelf: 'flex-start' }}&gt;&#10;            &lt;Text&#10;                style={{&#10;                    fontSize: 76,&#10;                    fontWeight: 'bold',&#10;                    color: '#F3B26C',&#10;                    fontFamily: 'Trebuchet MS',&#10;                    lineHeight: 1,&#10;                }}&#10;            &gt;&#10;                02&#10;            &lt;/Text&gt;&#10;            &lt;Box style={{ width: 3, height: 52, background: 'rgba(255,255,255,0.45)' }} /&gt;&#10;            &lt;Text style={{ fontSize: 19, color: 'rgba(255,255,255,0.8)', fontFamily: 'Verdana' }}&gt;&#10;                Bagian kedua&#10;            &lt;/Text&gt;&#10;        &lt;/Box&gt;&#10;&#10;        &lt;Text&#10;            style={{&#10;                marginTop: 26,&#10;                fontSize: 60,&#10;                fontWeight: 'bold',&#10;                color: '#FFFFFF',&#10;                fontFamily: 'Trebuchet MS',&#10;                lineHeight: 1.15,&#10;            }}&#10;        &gt;&#10;            Cara mulai&#10;        &lt;/Text&gt;&#10;&#10;        &lt;Text&#10;            style={{&#10;                marginTop: 24,&#10;                fontSize: 22,&#10;                color: 'rgba(255,255,255,0.88)',&#10;                fontFamily: 'Verdana',&#10;                lineHeight: 1.5,&#10;            }}&#10;        &gt;&#10;            Dua langkah saja, lalu aplikasinya siap dipakai.&#10;        &lt;/Text&gt;&#10;    &lt;/Box&gt;&#10;&lt;/Slide&gt;"/>
         <p:cNvGrpSpPr/>
         <p:nvPr/>
       </p:nvGrpSpPr>
@@ -10805,7 +10805,7 @@
   <p:cSld>
     <p:spTree>
       <p:nvGrpSpPr>
-        <p:cNvPr id="243" name="" descr="&lt;Slide&#10;    style={{&#10;        width: '1280px',&#10;        height: '720px',&#10;        background: '#FAF7F2',&#10;        paddingTop: 20,&#10;        paddingBottom: 20,&#10;        paddingLeft: 64,&#10;        paddingRight: 64,&#10;    }}&#10;&gt;&#10;    {/* ── A · blok judul ── */}&#10;    &lt;Box style={{ height: 110, justifyContent: 'center' }}&gt;&#10;        &lt;Text&#10;            style={{&#10;                fontSize: 34,&#10;                fontWeight: 'bold',&#10;                color: '#51277C',&#10;                fontFamily: 'Trebuchet MS',&#10;                lineHeight: 1.3,&#10;            }}&#10;        &gt;&#10;            Pasang ke layar utama HP&#10;        &lt;/Text&gt;&#10;        &lt;Box style={{ marginTop: 10, width: 72, height: 6, borderRadius: 3, background: '#51277C' }} /&gt;&#10;    &lt;/Box&gt;&#10;&#10;    {/* ── B · area konten ── */}&#10;    &lt;Box style={{ height: 530, flexDirection: 'row', gap: 30 }}&gt;&#10;        {/* kiri 55% · ilustrasi */}&#10;        &lt;Box&#10;            style={{&#10;                width: '55%',&#10;                height: '100%',&#10;                background: 'rgba(81,39,124,0.06)',&#10;                borderRadius: 20,&#10;                justifyContent: 'center',&#10;                alignItems: 'center',&#10;            }}&#10;        &gt;&#10;            &lt;svg width={600} height={430} viewBox='0 0 600 430'&gt;&#10;                {/* ponsel kiri — browser */}&#10;                &lt;rect x='24' y='34' width='204' height='362' rx='30' fill='#FFFFFF' stroke='#E3DCCF' strokeWidth='4' /&gt;&#10;                &lt;rect x='104' y='50' width='44' height='9' rx='5' fill='#DCD5C9' /&gt;&#10;                &lt;rect x='48' y='76' width='156' height='34' rx='10' fill='#EFEAE1' /&gt;&#10;                &lt;rect x='48' y='126' width='156' height='10' rx='5' fill='#DED7CB' /&gt;&#10;                &lt;rect x='48' y='148' width='118' height='10' rx='5' fill='#EDE8DF' /&gt;&#10;                &lt;rect x='48' y='186' width='156' height='10' rx='5' fill='#EDE8DF' /&gt;&#10;                &lt;rect x='48' y='208' width='132' height='10' rx='5' fill='#EDE8DF' /&gt;&#10;                &lt;rect x='48' y='246' width='156' height='10' rx='5' fill='#EDE8DF' /&gt;&#10;                {/* tombol Pasang */}&#10;                &lt;rect x='48' y='292' width='156' height='54' rx='14' fill='#F3B26C' /&gt;&#10;                &lt;text x='126' y='326' fontFamily='Trebuchet MS' fontSize='24' fontWeight='bold' fill='#51277C' textAnchor='middle'&gt;&#10;                    Pasang&#10;                &lt;/text&gt;&#10;&#10;                {/* panah */}&#10;                &lt;path&#10;                    d='M248 215 h60 M292 195 l20 20 l-20 20'&#10;                    fill='none'&#10;                    stroke='#51277C'&#10;                    strokeWidth='7'&#10;                    strokeLinecap='round'&#10;                    strokeLinejoin='round'&#10;                /&gt;&#10;&#10;                {/* ponsel kanan — layar utama */}&#10;                &lt;rect x='330' y='54' width='244' height='322' rx='30' fill='#FFFFFF' stroke='#E3DCCF' strokeWidth='4' /&gt;&#10;                &lt;rect x='430' y='70' width='44' height='9' rx='5' fill='#DCD5C9' /&gt;&#10;                {/* ikon-ikon lain */}&#10;                &lt;rect x='358' y='100' width='48' height='48' rx='13' fill='#EFEAE1' /&gt;&#10;                &lt;rect x='424' y='100' width='48' height='48' rx='13' fill='#EFEAE1' /&gt;&#10;                &lt;rect x='490' y='100' width='48' height='48' rx='13' fill='#EFEAE1' /&gt;&#10;                &lt;rect x='358' y='170' width='48' height='48' rx='13' fill='#EFEAE1' /&gt;&#10;                &lt;rect x='424' y='170' width='48' height='48' rx='13' fill='#EFEAE1' /&gt;&#10;                &lt;rect x='490' y='170' width='48' height='48' rx='13' fill='#EFEAE1' /&gt;&#10;                &lt;rect x='358' y='240' width='48' height='48' rx='13' fill='#EFEAE1' /&gt;&#10;                &lt;rect x='490' y='240' width='48' height='48' rx='13' fill='#EFEAE1' /&gt;&#10;                {/* ikon aplikasi — baru muncul */}&#10;                &lt;rect x='418' y='234' width='64' height='64' rx='16' fill='#B6E9EC' /&gt;&#10;                &lt;rect x='430' y='246' width='30' height='26' rx='5' fill='#FFFFFF' /&gt;&#10;                &lt;path d='M430 246 h30' stroke='#51277C' strokeWidth='4' /&gt;&#10;                &lt;path d='M472 288 l-14 -14 a20 20 0 0 1 14 -6 z' fill='#F3B26C' /&gt;&#10;                &lt;circle cx='404' cy='228' r='13' fill='#AFC440' /&gt;&#10;                &lt;text x='404' y='235' fontFamily='Verdana' fontSize='14' fontWeight='bold' fill='#FFFFFF' textAnchor='middle'&gt;&#10;                    1&#10;                &lt;/text&gt;&#10;            &lt;/svg&gt;&#10;        &lt;/Box&gt;&#10;&#10;        {/* kanan 45% · langkah */}&#10;        &lt;Box style={{ width: '45%', height: '100%' }}&gt;&#10;            &lt;Box style={{ gap: 10 }}&gt;&#10;                {[&#10;                    { a: 'Buka alamat aplikasi', d: 'Lewat browser HP — Chrome atau Edge.' },&#10;                    { a: 'Ketuk tombol &quot;Pasang&quot;', d: 'Muncul sendiri di bagian bawah layar.' },&#10;                    { a: 'Ikon muncul di layar utama', d: 'Berciri pizza dan kalender, warna hijau muda.' },&#10;                    { a: 'Ketuk ikonnya', d: 'Terbuka seperti aplikasi biasa. Tidak perlu mengetik alamat lagi.' },&#10;                ].map((s, i) =&gt; (&#10;                    &lt;Box&#10;                        key={i}&#10;                        style={{&#10;                            height: 96,&#10;                            flexDirection: 'row',&#10;                            alignItems: 'center',&#10;                            gap: 16,&#10;                            background: '#FFFFFF',&#10;                            borderRadius: 14,&#10;                            boxShadow: '0 4px 20px rgba(0,0,0,0.08)',&#10;                            paddingLeft: 18,&#10;                            paddingRight: 20,&#10;                        }}&#10;                    &gt;&#10;                        &lt;Box&#10;                            style={{&#10;                                width: 44,&#10;                                height: 44,&#10;                                borderRadius: 22,&#10;                                background: '#51277C',&#10;                                justifyContent: 'center',&#10;                                alignItems: 'center',&#10;                            }}&#10;                        &gt;&#10;                            &lt;Text&#10;                                style={{&#10;                                    fontSize: 22,&#10;                                    fontWeight: 'bold',&#10;                                    color: '#FFFFFF',&#10;                                    fontFamily: 'Trebuchet MS',&#10;                                }}&#10;                            &gt;&#10;                                {i + 1}&#10;                            &lt;/Text&gt;&#10;                        &lt;/Box&gt;&#10;                        &lt;Box style={{ flex: 1 }}&gt;&#10;                            &lt;Text&#10;                                style={{&#10;                                    fontSize: 20,&#10;                                    fontWeight: 'bold',&#10;                                    color: '#2A2333',&#10;                                    fontFamily: 'Trebuchet MS',&#10;                                    lineHeight: 1.3,&#10;                                }}&#10;                            &gt;&#10;                                {s.a}&#10;                            &lt;/Text&gt;&#10;                            &lt;Text&#10;                                style={{&#10;                                    marginTop: 3,&#10;                                    fontSize: 17,&#10;                                    color: '#6B6478',&#10;                                    fontFamily: 'Verdana',&#10;                                    lineHeight: 1.4,&#10;                                }}&#10;                            &gt;&#10;                                {s.d}&#10;                            &lt;/Text&gt;&#10;                        &lt;/Box&gt;&#10;                    &lt;/Box&gt;&#10;                ))}&#10;            &lt;/Box&gt;&#10;&#10;            {/* catatan iOS */}&#10;            &lt;Box&#10;                style={{&#10;                    marginTop: 20,&#10;                    height: 96,&#10;                    background: '#FFFFFF',&#10;                    borderLeft: '8px solid #F3B26C',&#10;                    borderRadius: 14,&#10;                    boxShadow: '0 4px 20px rgba(0,0,0,0.08)',&#10;                    paddingTop: 16,&#10;                    paddingBottom: 16,&#10;                    paddingLeft: 20,&#10;                    paddingRight: 20,&#10;                    justifyContent: 'center',&#10;                }}&#10;            &gt;&#10;                &lt;Text&#10;                    style={{&#10;                        fontSize: 18,&#10;                        fontWeight: 'bold',&#10;                        color: '#51277C',&#10;                        fontFamily: 'Trebuchet MS',&#10;                    }}&#10;                &gt;&#10;                    Kalau memakai iPhone&#10;                &lt;/Text&gt;&#10;                &lt;Text&#10;                    style={{&#10;                        marginTop: 5,&#10;                        fontSize: 17,&#10;                        color: '#6B6478',&#10;                        fontFamily: 'Verdana',&#10;                        lineHeight: 1.4,&#10;                    }}&#10;                &gt;&#10;                    Tombol Bagikan, lalu pilih &quot;Add to Home Screen&quot;.&#10;                &lt;/Text&gt;&#10;            &lt;/Box&gt;&#10;        &lt;/Box&gt;&#10;    &lt;/Box&gt;&#10;&#10;    {/* ── C · bilah kaki ── */}&#10;    &lt;Box&#10;        style={{&#10;            height: 40,&#10;            flexDirection: 'row',&#10;            alignItems: 'center',&#10;            justifyContent: 'space-between',&#10;        }}&#10;    &gt;&#10;        &lt;Text style={{ fontSize: 14, color: '#6B6478', fontFamily: 'Verdana' }}&gt;&#10;            Pizza Snack Play · Panduan Orang Tua&#10;        &lt;/Text&gt;&#10;        &lt;Text style={{ fontSize: 14, color: '#6B6478', fontFamily: 'Verdana' }}&gt;07 / 15&lt;/Text&gt;&#10;    &lt;/Box&gt;&#10;&lt;/Slide&gt;&#10;"/>
+        <p:cNvPr id="243" name="" descr="&lt;Slide&#10;    style={{&#10;        width: '1280px',&#10;        height: '720px',&#10;        background: '#FAF7F2',&#10;        paddingTop: 20,&#10;        paddingBottom: 20,&#10;        paddingLeft: 64,&#10;        paddingRight: 64,&#10;    }}&#10;&gt;&#10;    {/* ── A · blok judul ── */}&#10;    &lt;Box style={{ height: 110, justifyContent: 'center' }}&gt;&#10;        &lt;Text&#10;            style={{&#10;                fontSize: 34,&#10;                fontWeight: 'bold',&#10;                color: '#51277C',&#10;                fontFamily: 'Trebuchet MS',&#10;                lineHeight: 1.3,&#10;            }}&#10;        &gt;&#10;            Pasang ke layar utama HP&#10;        &lt;/Text&gt;&#10;        &lt;Box style={{ marginTop: 10, width: 72, height: 6, borderRadius: 3, background: '#51277C' }} /&gt;&#10;    &lt;/Box&gt;&#10;&#10;    {/* ── B · area konten ── */}&#10;    &lt;Box style={{ height: 530, flexDirection: 'row', gap: 30 }}&gt;&#10;        {/* kiri 55% · ilustrasi */}&#10;        &lt;Box&#10;            style={{&#10;                width: '55%',&#10;                height: '100%',&#10;                background: 'rgba(81,39,124,0.06)',&#10;                borderRadius: 20,&#10;                justifyContent: 'center',&#10;                alignItems: 'center',&#10;            }}&#10;        &gt;&#10;            &lt;svg width={600} height={430} viewBox='0 0 600 430'&gt;&#10;                {/* ponsel kiri — browser */}&#10;                &lt;rect x='24' y='34' width='204' height='362' rx='30' fill='#FFFFFF' stroke='#E3DCCF' strokeWidth='4' /&gt;&#10;                &lt;rect x='104' y='50' width='44' height='9' rx='5' fill='#DCD5C9' /&gt;&#10;                &lt;rect x='48' y='76' width='156' height='34' rx='10' fill='#EFEAE1' /&gt;&#10;                &lt;rect x='48' y='126' width='156' height='10' rx='5' fill='#DED7CB' /&gt;&#10;                &lt;rect x='48' y='148' width='118' height='10' rx='5' fill='#EDE8DF' /&gt;&#10;                &lt;rect x='48' y='186' width='156' height='10' rx='5' fill='#EDE8DF' /&gt;&#10;                &lt;rect x='48' y='208' width='132' height='10' rx='5' fill='#EDE8DF' /&gt;&#10;                &lt;rect x='48' y='246' width='156' height='10' rx='5' fill='#EDE8DF' /&gt;&#10;                {/* tombol Pasang */}&#10;                &lt;rect x='48' y='292' width='156' height='54' rx='14' fill='#F3B26C' /&gt;&#10;                &lt;text x='126' y='326' fontFamily='Trebuchet MS' fontSize='24' fontWeight='bold' fill='#51277C' textAnchor='middle'&gt;&#10;                    Pasang&#10;                &lt;/text&gt;&#10;&#10;                {/* panah */}&#10;                &lt;path&#10;                    d='M248 215 h60 M292 195 l20 20 l-20 20'&#10;                    fill='none'&#10;                    stroke='#51277C'&#10;                    strokeWidth='7'&#10;                    strokeLinecap='round'&#10;                    strokeLinejoin='round'&#10;                /&gt;&#10;&#10;                {/* ponsel kanan — layar utama */}&#10;                &lt;rect x='330' y='54' width='244' height='322' rx='30' fill='#FFFFFF' stroke='#E3DCCF' strokeWidth='4' /&gt;&#10;                &lt;rect x='430' y='70' width='44' height='9' rx='5' fill='#DCD5C9' /&gt;&#10;                {/* ikon-ikon lain */}&#10;                &lt;rect x='358' y='100' width='48' height='48' rx='13' fill='#EFEAE1' /&gt;&#10;                &lt;rect x='424' y='100' width='48' height='48' rx='13' fill='#EFEAE1' /&gt;&#10;                &lt;rect x='490' y='100' width='48' height='48' rx='13' fill='#EFEAE1' /&gt;&#10;                &lt;rect x='358' y='170' width='48' height='48' rx='13' fill='#EFEAE1' /&gt;&#10;                &lt;rect x='424' y='170' width='48' height='48' rx='13' fill='#EFEAE1' /&gt;&#10;                &lt;rect x='490' y='170' width='48' height='48' rx='13' fill='#EFEAE1' /&gt;&#10;                &lt;rect x='358' y='240' width='48' height='48' rx='13' fill='#EFEAE1' /&gt;&#10;                &lt;rect x='490' y='240' width='48' height='48' rx='13' fill='#EFEAE1' /&gt;&#10;                {/* ikon aplikasi — baru muncul */}&#10;                &lt;rect x='418' y='234' width='64' height='64' rx='16' fill='#B6E9EC' /&gt;&#10;                &lt;rect x='430' y='246' width='30' height='26' rx='5' fill='#FFFFFF' /&gt;&#10;                &lt;path d='M430 246 h30' stroke='#51277C' strokeWidth='4' /&gt;&#10;                &lt;path d='M472 288 l-14 -14 a20 20 0 0 1 14 -6 z' fill='#F3B26C' /&gt;&#10;                &lt;circle cx='404' cy='228' r='13' fill='#AFC440' /&gt;&#10;                &lt;text x='404' y='235' fontFamily='Verdana' fontSize='14' fontWeight='bold' fill='#FFFFFF' textAnchor='middle'&gt;&#10;                    1&#10;                &lt;/text&gt;&#10;            &lt;/svg&gt;&#10;        &lt;/Box&gt;&#10;&#10;        {/* kanan 45% · langkah */}&#10;        &lt;Box style={{ width: '45%', height: '100%' }}&gt;&#10;            &lt;Box style={{ gap: 10 }}&gt;&#10;                {[&#10;                    { a: 'Buka alamat aplikasi', d: 'Lewat browser HP — Chrome atau Edge.' },&#10;                    { a: 'Ketuk tombol &quot;Pasang&quot;', d: 'Muncul sendiri di bagian bawah layar.' },&#10;                    { a: 'Ikon muncul di layar utama', d: 'Berciri pizza dan kalender, warna hijau muda.' },&#10;                    { a: 'Ketuk ikonnya', d: 'Terbuka seperti aplikasi biasa. Tidak perlu mengetik alamat lagi.' },&#10;                ].map((s, i) =&gt; (&#10;                    &lt;Box&#10;                        key={i}&#10;                        style={{&#10;                            height: 96,&#10;                            flexDirection: 'row',&#10;                            alignItems: 'center',&#10;                            gap: 16,&#10;                            background: '#FFFFFF',&#10;                            borderRadius: 14,&#10;                            boxShadow: '0 4px 20px rgba(0,0,0,0.08)',&#10;                            paddingLeft: 18,&#10;                            paddingRight: 20,&#10;                        }}&#10;                    &gt;&#10;                        &lt;Box&#10;                            style={{&#10;                                width: 44,&#10;                                height: 44,&#10;                                borderRadius: 22,&#10;                                background: '#51277C',&#10;                                justifyContent: 'center',&#10;                                alignItems: 'center',&#10;                            }}&#10;                        &gt;&#10;                            &lt;Text&#10;                                style={{&#10;                                    fontSize: 22,&#10;                                    fontWeight: 'bold',&#10;                                    color: '#FFFFFF',&#10;                                    fontFamily: 'Trebuchet MS',&#10;                                }}&#10;                            &gt;&#10;                                {i + 1}&#10;                            &lt;/Text&gt;&#10;                        &lt;/Box&gt;&#10;                        &lt;Box style={{ flex: 1 }}&gt;&#10;                            &lt;Text&#10;                                style={{&#10;                                    fontSize: 20,&#10;                                    fontWeight: 'bold',&#10;                                    color: '#2A2333',&#10;                                    fontFamily: 'Trebuchet MS',&#10;                                    lineHeight: 1.3,&#10;                                }}&#10;                            &gt;&#10;                                {s.a}&#10;                            &lt;/Text&gt;&#10;                            &lt;Text&#10;                                style={{&#10;                                    marginTop: 3,&#10;                                    fontSize: 17,&#10;                                    color: '#6B6478',&#10;                                    fontFamily: 'Verdana',&#10;                                    lineHeight: 1.4,&#10;                                }}&#10;                            &gt;&#10;                                {s.d}&#10;                            &lt;/Text&gt;&#10;                        &lt;/Box&gt;&#10;                    &lt;/Box&gt;&#10;                ))}&#10;            &lt;/Box&gt;&#10;&#10;            {/* catatan iOS */}&#10;            &lt;Box&#10;                style={{&#10;                    marginTop: 20,&#10;                    height: 96,&#10;                    background: '#FFFFFF',&#10;                    borderLeft: '8px solid #F3B26C',&#10;                    borderRadius: 14,&#10;                    boxShadow: '0 4px 20px rgba(0,0,0,0.08)',&#10;                    paddingTop: 16,&#10;                    paddingBottom: 16,&#10;                    paddingLeft: 20,&#10;                    paddingRight: 20,&#10;                    justifyContent: 'center',&#10;                }}&#10;            &gt;&#10;                &lt;Text&#10;                    style={{&#10;                        fontSize: 18,&#10;                        fontWeight: 'bold',&#10;                        color: '#51277C',&#10;                        fontFamily: 'Trebuchet MS',&#10;                    }}&#10;                &gt;&#10;                    Kalau memakai iPhone&#10;                &lt;/Text&gt;&#10;                &lt;Text&#10;                    style={{&#10;                        marginTop: 5,&#10;                        fontSize: 17,&#10;                        color: '#6B6478',&#10;                        fontFamily: 'Verdana',&#10;                        lineHeight: 1.4,&#10;                    }}&#10;                &gt;&#10;                    Tombol Bagikan, lalu pilih &quot;Add to Home Screen&quot;.&#10;                &lt;/Text&gt;&#10;            &lt;/Box&gt;&#10;        &lt;/Box&gt;&#10;    &lt;/Box&gt;&#10;&#10;    {/* ── C · bilah kaki ── */}&#10;    &lt;Box&#10;        style={{&#10;            height: 40,&#10;            flexDirection: 'row',&#10;            alignItems: 'center',&#10;            justifyContent: 'space-between',&#10;        }}&#10;    &gt;&#10;        &lt;Text style={{ fontSize: 14, color: '#6B6478', fontFamily: 'Verdana' }}&gt;&#10;            Pizza Snack Play · Panduan Orang Tua&#10;        &lt;/Text&gt;&#10;        &lt;Text style={{ fontSize: 14, color: '#6B6478', fontFamily: 'Verdana' }}&gt;07 / 15&lt;/Text&gt;&#10;    &lt;/Box&gt;&#10;&lt;/Slide&gt;"/>
         <p:cNvGrpSpPr/>
         <p:nvPr/>
       </p:nvGrpSpPr>
@@ -11859,7 +11859,7 @@
   <p:cSld>
     <p:spTree>
       <p:nvGrpSpPr>
-        <p:cNvPr id="275" name="" descr="&lt;Slide&#10;    style={{&#10;        width: '1280px',&#10;        height: '720px',&#10;        background: '#FAF7F2',&#10;        paddingTop: 20,&#10;        paddingBottom: 20,&#10;        paddingLeft: 64,&#10;        paddingRight: 64,&#10;    }}&#10;&gt;&#10;    {/* ── A · blok judul ── */}&#10;    &lt;Box style={{ height: 110, justifyContent: 'center' }}&gt;&#10;        &lt;Text&#10;            style={{&#10;                fontSize: 34,&#10;                fontWeight: 'bold',&#10;                color: '#51277C',&#10;                fontFamily: 'Trebuchet MS',&#10;                lineHeight: 1.3,&#10;            }}&#10;        &gt;&#10;            Masuk memakai akun dari sekolah&#10;        &lt;/Text&gt;&#10;        &lt;Box style={{ marginTop: 10, width: 72, height: 6, borderRadius: 3, background: '#51277C' }} /&gt;&#10;    &lt;/Box&gt;&#10;&#10;    {/* ── B · area konten ── */}&#10;    &lt;Box style={{ height: 530, flexDirection: 'row', gap: 28 }}&gt;&#10;        {/* kiri 30% · panel ungu */}&#10;        &lt;Box&#10;            style={{&#10;                width: '30%',&#10;                height: '100%',&#10;                background: 'linear-gradient(135deg, #51277C 0%, #7A45A8 100%)',&#10;                borderRadius: 20,&#10;                padding: 26,&#10;                justifyContent: 'space-between',&#10;                alignItems: 'center',&#10;            }}&#10;        &gt;&#10;            &lt;Box style={{ alignItems: 'center' }}&gt;&#10;                &lt;Text&#10;                    style={{&#10;                        fontSize: 16,&#10;                        color: 'rgba(255,255,255,0.75)',&#10;                        fontFamily: 'Verdana',&#10;                    }}&#10;                &gt;&#10;                    Langkah 2&#10;                &lt;/Text&gt;&#10;                &lt;Text&#10;                    style={{&#10;                        marginTop: 8,&#10;                        fontSize: 40,&#10;                        fontWeight: 'bold',&#10;                        color: '#FFFFFF',&#10;                        fontFamily: 'Trebuchet MS',&#10;                    }}&#10;                &gt;&#10;                    Masuk&#10;                &lt;/Text&gt;&#10;            &lt;/Box&gt;&#10;&#10;            &lt;svg width={170} height={170} viewBox='0 0 170 170'&gt;&#10;                &lt;rect x='34' y='74' width='102' height='80' rx='14' fill='#F3B26C' /&gt;&#10;                &lt;path&#10;                    d='M58 74 v-20 a27 27 0 0 1 54 0 v20'&#10;                    fill='none'&#10;                    stroke='#FFFFFF'&#10;                    strokeWidth='10'&#10;                    strokeLinecap='round'&#10;                /&gt;&#10;                &lt;circle cx='85' cy='108' r='10' fill='#51277C' /&gt;&#10;                &lt;rect x='81' y='114' width='8' height='20' rx='4' fill='#51277C' /&gt;&#10;                &lt;circle cx='132' cy='44' r='22' fill='none' stroke='#AFC440' strokeWidth='8' /&gt;&#10;                &lt;path d='M148 60 l16 16' stroke='#AFC440' strokeWidth='8' strokeLinecap='round' /&gt;&#10;            &lt;/svg&gt;&#10;&#10;            &lt;Text&#10;                style={{&#10;                    fontSize: 17,&#10;                    color: 'rgba(255,255,255,0.9)',&#10;                    fontFamily: 'Verdana',&#10;                    lineHeight: 1.5,&#10;                    textAlign: 'center',&#10;                }}&#10;            &gt;&#10;                Wajib masuk dulu sebelum jadwal bisa dilihat.&#10;            &lt;/Text&gt;&#10;        &lt;/Box&gt;&#10;&#10;        {/* kanan 70% · empat keterangan */}&#10;        &lt;Box style={{ width: '70%', height: '100%', justifyContent: 'space-between' }}&gt;&#10;            {[&#10;                {&#10;                    i: 'user',&#10;                    t: 'Akunnya dibuatkan sekolah',&#10;                    d: 'Username dan password diberikan oleh admin sekolah. Bapak/Ibu tidak perlu mendaftar sendiri.',&#10;                },&#10;                {&#10;                    i: 'users',&#10;                    t: 'Satu akun bisa untuk beberapa anak',&#10;                    d: 'Punya dua anak di kelas berbeda? Cukup satu akun — pilih kelasnya di bagian atas layar.',&#10;                },&#10;                {&#10;                    i: 'key',&#10;                    t: 'Password bisa diganti sendiri',&#10;                    d: 'Ada menu Profil di dalam aplikasi. Kalau lupa, minta reset kepada admin sekolah.',&#10;                },&#10;                {&#10;                    i: 'shield',&#10;                    t: 'Kenapa harus masuk?',&#10;                    d: 'Supaya jadwal dan nama anak hanya dilihat oleh orang tuanya sendiri, bukan orang lain.',&#10;                },&#10;            ].map((c, idx) =&gt; (&#10;                &lt;Box&#10;                    key={idx}&#10;                    style={{&#10;                        height: 123,&#10;                        flexDirection: 'row',&#10;                        alignItems: 'center',&#10;                        gap: 20,&#10;                        background: '#FFFFFF',&#10;                        borderRadius: 16,&#10;                        boxShadow: '0 4px 20px rgba(0,0,0,0.08)',&#10;                        paddingLeft: 24,&#10;                        paddingRight: 26,&#10;                        borderLeft: '8px solid #AFC440',&#10;                    }}&#10;                &gt;&#10;                    &lt;Box&#10;                        style={{&#10;                            width: 54,&#10;                            height: 54,&#10;                            borderRadius: 27,&#10;                            background: 'rgba(81,39,124,0.10)',&#10;                            justifyContent: 'center',&#10;                            alignItems: 'center',&#10;                        }}&#10;                    &gt;&#10;                        &lt;FAIcon name={c.i} style={{ fill: '#51277C', width: 28, height: 28 }} /&gt;&#10;                    &lt;/Box&gt;&#10;                    &lt;Box style={{ flex: 1 }}&gt;&#10;                        &lt;Text&#10;                            style={{&#10;                                fontSize: 24,&#10;                                fontWeight: 'bold',&#10;                                color: '#2A2333',&#10;                                fontFamily: 'Trebuchet MS',&#10;                                lineHeight: 1.3,&#10;                            }}&#10;                        &gt;&#10;                            {c.t}&#10;                        &lt;/Text&gt;&#10;                        &lt;Text&#10;                            style={{&#10;                                marginTop: 5,&#10;                                fontSize: 18,&#10;                                color: '#6B6478',&#10;                                fontFamily: 'Verdana',&#10;                                lineHeight: 1.45,&#10;                            }}&#10;                        &gt;&#10;                            {c.d}&#10;                        &lt;/Text&gt;&#10;                    &lt;/Box&gt;&#10;                &lt;/Box&gt;&#10;            ))}&#10;        &lt;/Box&gt;&#10;    &lt;/Box&gt;&#10;&#10;    {/* ── C · bilah kaki ── */}&#10;    &lt;Box&#10;        style={{&#10;            height: 40,&#10;            flexDirection: 'row',&#10;            alignItems: 'center',&#10;            justifyContent: 'space-between',&#10;        }}&#10;    &gt;&#10;        &lt;Text style={{ fontSize: 14, color: '#6B6478', fontFamily: 'Verdana' }}&gt;&#10;            Pizza Snack Play · Panduan Orang Tua&#10;        &lt;/Text&gt;&#10;        &lt;Text style={{ fontSize: 14, color: '#6B6478', fontFamily: 'Verdana' }}&gt;08 / 15&lt;/Text&gt;&#10;    &lt;/Box&gt;&#10;&lt;/Slide&gt;&#10;"/>
+        <p:cNvPr id="275" name="" descr="&lt;Slide&#13;&#10;    style={{&#13;&#10;        width: '1280px',&#13;&#10;        height: '720px',&#13;&#10;        background: '#FAF7F2',&#13;&#10;        paddingTop: 20,&#13;&#10;        paddingBottom: 20,&#13;&#10;        paddingLeft: 64,&#13;&#10;        paddingRight: 64,&#13;&#10;    }}&#13;&#10;&gt;&#13;&#10;    {/* ── A · blok judul ── */}&#13;&#10;    &lt;Box style={{ height: 110, justifyContent: 'center' }}&gt;&#13;&#10;        &lt;Text&#13;&#10;            style={{&#13;&#10;                fontSize: 34,&#13;&#10;                fontWeight: 'bold',&#13;&#10;                color: '#51277C',&#13;&#10;                fontFamily: 'Trebuchet MS',&#13;&#10;                lineHeight: 1.3,&#13;&#10;            }}&#13;&#10;        &gt;&#13;&#10;            Masuk memakai akun dari sekolah&#13;&#10;        &lt;/Text&gt;&#13;&#10;        &lt;Box style={{ marginTop: 10, width: 72, height: 6, borderRadius: 3, background: '#51277C' }} /&gt;&#13;&#10;    &lt;/Box&gt;&#13;&#10;&#13;&#10;    {/* ── B · area konten ── */}&#13;&#10;    &lt;Box style={{ height: 530, flexDirection: 'row', gap: 28 }}&gt;&#13;&#10;        {/* kiri 30% · panel ungu */}&#13;&#10;        &lt;Box&#13;&#10;            style={{&#13;&#10;                width: '30%',&#13;&#10;                height: '100%',&#13;&#10;                background: 'linear-gradient(135deg, #51277C 0%, #7A45A8 100%)',&#13;&#10;                borderRadius: 20,&#13;&#10;                padding: 26,&#13;&#10;                justifyContent: 'space-between',&#13;&#10;                alignItems: 'center',&#13;&#10;            }}&#13;&#10;        &gt;&#13;&#10;            &lt;Box style={{ alignItems: 'center' }}&gt;&#13;&#10;                &lt;Text&#13;&#10;                    style={{&#13;&#10;                        fontSize: 16,&#13;&#10;                        color: 'rgba(255,255,255,0.75)',&#13;&#10;                        fontFamily: 'Verdana',&#13;&#10;                    }}&#13;&#10;                &gt;&#13;&#10;                    Langkah 2&#13;&#10;                &lt;/Text&gt;&#13;&#10;                &lt;Text&#13;&#10;                    style={{&#13;&#10;                        marginTop: 8,&#13;&#10;                        fontSize: 40,&#13;&#10;                        fontWeight: 'bold',&#13;&#10;                        color: '#FFFFFF',&#13;&#10;                        fontFamily: 'Trebuchet MS',&#13;&#10;                    }}&#13;&#10;                &gt;&#13;&#10;                    Masuk&#13;&#10;                &lt;/Text&gt;&#13;&#10;            &lt;/Box&gt;&#13;&#10;&#13;&#10;            &lt;svg width={170} height={170} viewBox='0 0 170 170'&gt;&#13;&#10;                &lt;rect x='34' y='74' width='102' height='80' rx='14' fill='#F3B26C' /&gt;&#13;&#10;                &lt;path&#13;&#10;                    d='M58 74 v-20 a27 27 0 0 1 54 0 v20'&#13;&#10;                    fill='none'&#13;&#10;                    stroke='#FFFFFF'&#13;&#10;                    strokeWidth='10'&#13;&#10;                    strokeLinecap='round'&#13;&#10;                /&gt;&#13;&#10;                &lt;circle cx='85' cy='108' r='10' fill='#51277C' /&gt;&#13;&#10;                &lt;rect x='81' y='114' width='8' height='20' rx='4' fill='#51277C' /&gt;&#13;&#10;                &lt;circle cx='132' cy='44' r='22' fill='none' stroke='#AFC440' strokeWidth='8' /&gt;&#13;&#10;                &lt;path d='M148 60 l16 16' stroke='#AFC440' strokeWidth='8' strokeLinecap='round' /&gt;&#13;&#10;            &lt;/svg&gt;&#13;&#10;&#13;&#10;            &lt;Text&#13;&#10;                style={{&#13;&#10;                    fontSize: 17,&#13;&#10;                    color: 'rgba(255,255,255,0.9)',&#13;&#10;                    fontFamily: 'Verdana',&#13;&#10;                    lineHeight: 1.5,&#13;&#10;                    textAlign: 'center',&#13;&#10;                }}&#13;&#10;            &gt;&#13;&#10;                Wajib masuk dulu sebelum jadwal bisa dilihat.&#13;&#10;            &lt;/Text&gt;&#13;&#10;        &lt;/Box&gt;&#13;&#10;&#13;&#10;        {/* kanan 70% · empat keterangan */}&#13;&#10;        &lt;Box style={{ width: '70%', height: '100%', justifyContent: 'space-between' }}&gt;&#13;&#10;            {[&#13;&#10;                {&#13;&#10;                    vb: '0 0 448 512',&#13;&#10;                    d: 'M224 256A128 128 0 1 0 224 0a128 128 0 1 0 0 256zm-45.7 48C79.8 304 0 383.8 0 482.3C0 498.7 13.3 512 29.7 512H418.3c16.4 0 29.7-13.3 29.7-29.7C448 383.8 368.2 304 269.7 304H178.3z',&#13;&#10;                    t: 'Akunnya dibuatkan sekolah',&#13;&#10;                    d: 'Username dan password diberikan oleh admin sekolah. Bapak/Ibu tidak perlu mendaftar sendiri.',&#13;&#10;                },&#13;&#10;                {&#13;&#10;                    vb: '0 0 640 512',&#13;&#10;                    d: 'M144 0a80 80 0 1 1 0 160A80 80 0 1 1 144 0zM512 0a80 80 0 1 1 0 160A80 80 0 1 1 512 0zM0 298.7C0 239.8 47.8 192 106.7 192h42.7c15.9 0 31 3.5 44.6 9.7c-1.3 7.2-1.9 14.7-1.9 22.3c0 38.2 16.8 72.5 43.3 96c-.2 0-.4 0-.7 0H21.3C9.6 320 0 310.4 0 298.7zM405.3 320c-.2 0-.4 0-.7 0c26.6-23.5 43.3-57.8 43.3-96c0-7.6-.7-15-1.9-22.3c13.6-6.3 28.7-9.7 44.6-9.7h42.7C592.2 192 640 239.8 640 298.7c0 11.8-9.6 21.3-21.3 21.3H405.3zM224 224a96 96 0 1 1 192 0 96 96 0 1 1 -192 0zM128 485.3C128 411.7 187.7 352 261.3 352H378.7C452.3 352 512 411.7 512 485.3c0 14.7-11.9 26.7-26.7 26.7H154.7c-14.7 0-26.7-11.9-26.7-26.7z',&#13;&#10;                    t: 'Satu akun bisa untuk beberapa anak',&#13;&#10;                    d: 'Punya dua anak di kelas berbeda? Cukup satu akun — pilih kelasnya di bagian atas layar. Anak bisa ditambah di menu Profil.',&#13;&#10;                },&#13;&#10;                {&#13;&#10;                    vb: '0 0 512 512',&#13;&#10;                    d: 'M336 352c97.2 0 176-78.8 176-176S433.2 0 336 0S160 78.8 160 176c0 18.7 2.9 36.8 8.3 53.7L7 391c-4.5 4.5-7 10.6-7 17v80c0 13.3 10.7 24 24 24h80c13.3 0 24-10.7 24-24V448h40c13.3 0 24-10.7 24-24V384h40c6.4 0 12.5-2.5 17-7l33.3-33.3c16.9 5.4 35 8.3 53.7 8.3zM376 96a40 40 0 1 1 0 80 40 40 0 1 1 0-80z',&#13;&#10;                    t: 'Password bisa diganti sendiri',&#13;&#10;                    d: 'Ada menu Profil di dalam aplikasi. Kalau lupa, minta reset kepada admin sekolah sebelum salah mencoba berulang kali.',&#13;&#10;                },&#13;&#10;                {&#13;&#10;                    vb: '0 0 448 512',&#13;&#10;                    d: 'M144 144v48H304V144c0-44.2-35.8-80-80-80s-80 35.8-80 80zM80 192V144C80 64.5 144.5 0 224 0s144 64.5 144 144v48h16c35.3 0 64 28.7 64 64V448c0 35.3-28.7 64-64 64H64c-35.3 0-64-28.7-64-64V256c0-35.3 28.7-64 64-64H80z',&#13;&#10;                    t: 'Hati-hati: 5 kali salah, akun terkunci',&#13;&#10;                    d: 'Salah password 5 kali berturut-turut mengunci akun. Tidak bisa dibuka sendiri — hubungi admin sekolah, nanti dibukakan.',&#13;&#10;                    warn: true,&#13;&#10;                },&#13;&#10;                {&#13;&#10;                    vb: '0 0 512 512',&#13;&#10;                    d: 'M256 0c4.6 0 9.2 1 13.4 2.9L457.7 82.8c22 9.3 38.4 31 38.3 57.2c-.5 99.2-41.3 280.7-213.6 363.2c-16.7 8-36.1 8-52.8 0C57.3 420.7 16.5 239.2 16 140c-.1-26.2 16.3-47.9 38.3-57.2L242.7 2.9C246.8 1 251.4 0 256 0z',&#13;&#10;                    t: 'Kenapa harus masuk?',&#13;&#10;                    d: 'Supaya jadwal dan nama anak hanya dilihat oleh orang tuanya sendiri, bukan orang lain.',&#13;&#10;                },&#13;&#10;            ].map((c, idx) =&gt; (&#13;&#10;                &lt;Box&#13;&#10;                    key={idx}&#13;&#10;                    style={{&#13;&#10;                        height: 100,&#13;&#10;                        flexDirection: 'row',&#13;&#10;                        alignItems: 'center',&#13;&#10;                        gap: 20,&#13;&#10;                        background: '#FFFFFF',&#13;&#10;                        borderRadius: 16,&#13;&#10;                        boxShadow: '0 4px 20px rgba(0,0,0,0.08)',&#13;&#10;                        paddingLeft: 24,&#13;&#10;                        paddingRight: 26,&#13;&#10;                        borderLeft: c.warn ? '8px solid #F3B26C' : '8px solid #AFC440',&#13;&#10;                    }}&#13;&#10;                &gt;&#13;&#10;                    &lt;Box&#13;&#10;                        style={{&#13;&#10;                            width: 54,&#13;&#10;                            height: 54,&#13;&#10;                            borderRadius: 27,&#13;&#10;                            background: 'rgba(81,39,124,0.10)',&#13;&#10;                            justifyContent: 'center',&#13;&#10;                            alignItems: 'center',&#13;&#10;                        }}&#13;&#10;                    &gt;&#13;&#10;                        &lt;svg width={28} height={28} viewBox={c.vb} xmlns=&quot;http://www.w3.org/2000/svg&quot;&gt;&lt;path fill=&quot;#51277C&quot; d={c.d} /&gt;&lt;/svg&gt;&#13;&#10;                    &lt;/Box&gt;&#13;&#10;                    &lt;Box style={{ flex: 1 }}&gt;&#13;&#10;                        &lt;Text&#13;&#10;                            style={{&#13;&#10;                                fontSize: 24,&#13;&#10;                                fontWeight: 'bold',&#13;&#10;                                color: '#2A2333',&#13;&#10;                                fontFamily: 'Trebuchet MS',&#13;&#10;                                lineHeight: 1.3,&#13;&#10;                            }}&#13;&#10;                        &gt;&#13;&#10;                            {c.t}&#13;&#10;                        &lt;/Text&gt;&#13;&#10;                        &lt;Text&#13;&#10;                            style={{&#13;&#10;                                marginTop: 5,&#13;&#10;                                fontSize: 18,&#13;&#10;                                color: '#6B6478',&#13;&#10;                                fontFamily: 'Verdana',&#13;&#10;                                lineHeight: 1.45,&#13;&#10;                            }}&#13;&#10;                        &gt;&#13;&#10;                            {c.d}&#13;&#10;                        &lt;/Text&gt;&#13;&#10;                    &lt;/Box&gt;&#13;&#10;                &lt;/Box&gt;&#13;&#10;            ))}&#13;&#10;        &lt;/Box&gt;&#13;&#10;    &lt;/Box&gt;&#13;&#10;&#13;&#10;    {/* ── C · bilah kaki ── */}&#13;&#10;    &lt;Box&#13;&#10;        style={{&#13;&#10;            height: 40,&#13;&#10;            flexDirection: 'row',&#13;&#10;            alignItems: 'center',&#13;&#10;            justifyContent: 'space-between',&#13;&#10;        }}&#13;&#10;    &gt;&#13;&#10;        &lt;Text style={{ fontSize: 14, color: '#6B6478', fontFamily: 'Verdana' }}&gt;&#13;&#10;            Pizza Snack Play · Panduan Orang Tua&#13;&#10;        &lt;/Text&gt;&#13;&#10;        &lt;Text style={{ fontSize: 14, color: '#6B6478', fontFamily: 'Verdana' }}&gt;08 / 15&lt;/Text&gt;&#13;&#10;    &lt;/Box&gt;&#13;&#10;&lt;/Slide&gt;&#13;&#10;"/>
         <p:cNvGrpSpPr/>
         <p:nvPr/>
       </p:nvGrpSpPr>
@@ -12141,11 +12141,11 @@
         <p:spPr>
           <a:xfrm rot="0" flipH="0" flipV="0">
             <a:off x="4162425" y="1238250"/>
-            <a:ext cx="7496175" cy="1171575"/>
+            <a:ext cx="7496175" cy="952500"/>
           </a:xfrm>
           <a:prstGeom prst="roundRect">
             <a:avLst>
-              <a:gd name="adj" fmla="val 13008"/>
+              <a:gd name="adj" fmla="val 16000"/>
             </a:avLst>
           </a:prstGeom>
           <a:solidFill>
@@ -12174,11 +12174,11 @@
         <p:spPr>
           <a:xfrm rot="0" flipH="0" flipV="0">
             <a:off x="4162425" y="1238250"/>
-            <a:ext cx="7496175" cy="1171575"/>
+            <a:ext cx="7496175" cy="952500"/>
           </a:xfrm>
           <a:custGeom>
             <a:pathLst>
-              <a:path w="787" h="123">
+              <a:path w="787" h="100">
                 <a:moveTo>
                   <a:pt x="15" y="0"/>
                 </a:moveTo>
@@ -12188,17 +12188,17 @@
                   <a:pt x="8" y="8"/>
                 </a:cubicBezTo>
                 <a:lnTo>
-                  <a:pt x="8" y="115"/>
+                  <a:pt x="8" y="92"/>
                 </a:lnTo>
                 <a:cubicBezTo>
-                  <a:pt x="8" y="119"/>
-                  <a:pt x="11" y="122"/>
-                  <a:pt x="14" y="123"/>
+                  <a:pt x="8" y="96"/>
+                  <a:pt x="11" y="99"/>
+                  <a:pt x="14" y="100"/>
                 </a:cubicBezTo>
                 <a:cubicBezTo>
-                  <a:pt x="6" y="122"/>
-                  <a:pt x="0" y="115"/>
-                  <a:pt x="0" y="107"/>
+                  <a:pt x="6" y="99"/>
+                  <a:pt x="0" y="92"/>
+                  <a:pt x="0" y="84"/>
                 </a:cubicBezTo>
                 <a:lnTo>
                   <a:pt x="0" y="16"/>
@@ -12230,7 +12230,7 @@
         </p:nvSpPr>
         <p:spPr>
           <a:xfrm rot="0" flipH="0" flipV="0">
-            <a:off x="4391025" y="1571625"/>
+            <a:off x="4391025" y="1457325"/>
             <a:ext cx="514350" cy="514350"/>
           </a:xfrm>
           <a:prstGeom prst="roundRect">
@@ -12272,7 +12272,7 @@
         </p:blipFill>
         <p:spPr>
           <a:xfrm rot="0" flipH="0" flipV="0">
-            <a:off x="4514850" y="1695450"/>
+            <a:off x="4514850" y="1581150"/>
             <a:ext cx="266700" cy="266700"/>
           </a:xfrm>
           <a:prstGeom prst="rect">
@@ -12289,7 +12289,7 @@
         </p:nvSpPr>
         <p:spPr>
           <a:xfrm rot="0" flipH="0" flipV="0">
-            <a:off x="5095875" y="1323975"/>
+            <a:off x="5095875" y="1209675"/>
             <a:ext cx="6238875" cy="361950"/>
           </a:xfrm>
           <a:prstGeom prst="rect"/>
@@ -12324,7 +12324,7 @@
         </p:nvSpPr>
         <p:spPr>
           <a:xfrm rot="0" flipH="0" flipV="0">
-            <a:off x="5095875" y="1733550"/>
+            <a:off x="5095875" y="1619250"/>
             <a:ext cx="6238875" cy="600075"/>
           </a:xfrm>
           <a:prstGeom prst="rect"/>
@@ -12361,12 +12361,12 @@
         </p:nvSpPr>
         <p:spPr>
           <a:xfrm rot="0" flipH="0" flipV="0">
-            <a:off x="4162425" y="2533650"/>
-            <a:ext cx="7496175" cy="1171575"/>
+            <a:off x="4162425" y="2266950"/>
+            <a:ext cx="7496175" cy="952500"/>
           </a:xfrm>
           <a:prstGeom prst="roundRect">
             <a:avLst>
-              <a:gd name="adj" fmla="val 13008"/>
+              <a:gd name="adj" fmla="val 16000"/>
             </a:avLst>
           </a:prstGeom>
           <a:solidFill>
@@ -12394,12 +12394,12 @@
         </p:nvSpPr>
         <p:spPr>
           <a:xfrm rot="0" flipH="0" flipV="0">
-            <a:off x="4162425" y="2533650"/>
-            <a:ext cx="7496175" cy="1171575"/>
+            <a:off x="4162425" y="2266950"/>
+            <a:ext cx="7496175" cy="952500"/>
           </a:xfrm>
           <a:custGeom>
             <a:pathLst>
-              <a:path w="787" h="123">
+              <a:path w="787" h="100">
                 <a:moveTo>
                   <a:pt x="15" y="0"/>
                 </a:moveTo>
@@ -12409,17 +12409,17 @@
                   <a:pt x="8" y="8"/>
                 </a:cubicBezTo>
                 <a:lnTo>
-                  <a:pt x="8" y="115"/>
+                  <a:pt x="8" y="92"/>
                 </a:lnTo>
                 <a:cubicBezTo>
-                  <a:pt x="8" y="119"/>
-                  <a:pt x="11" y="122"/>
-                  <a:pt x="14" y="123"/>
+                  <a:pt x="8" y="96"/>
+                  <a:pt x="11" y="99"/>
+                  <a:pt x="14" y="100"/>
                 </a:cubicBezTo>
                 <a:cubicBezTo>
-                  <a:pt x="6" y="122"/>
-                  <a:pt x="0" y="115"/>
-                  <a:pt x="0" y="107"/>
+                  <a:pt x="6" y="99"/>
+                  <a:pt x="0" y="92"/>
+                  <a:pt x="0" y="84"/>
                 </a:cubicBezTo>
                 <a:lnTo>
                   <a:pt x="0" y="16"/>
@@ -12451,7 +12451,7 @@
         </p:nvSpPr>
         <p:spPr>
           <a:xfrm rot="0" flipH="0" flipV="0">
-            <a:off x="4391025" y="2867025"/>
+            <a:off x="4391025" y="2486025"/>
             <a:ext cx="514350" cy="514350"/>
           </a:xfrm>
           <a:prstGeom prst="roundRect">
@@ -12483,7 +12483,7 @@
           <a:blip>
             <a:extLst>
               <a:ext uri="{96DAC541-7B7A-43D3-8B79-37D633B846F1}">
-                <asvg:svgBlip r:embed="rId2"/>
+                <asvg:svgBlip r:embed="rId3"/>
               </a:ext>
             </a:extLst>
           </a:blip>
@@ -12493,7 +12493,7 @@
         </p:blipFill>
         <p:spPr>
           <a:xfrm rot="0" flipH="0" flipV="0">
-            <a:off x="4514850" y="2990850"/>
+            <a:off x="4514850" y="2609850"/>
             <a:ext cx="266700" cy="266700"/>
           </a:xfrm>
           <a:prstGeom prst="rect">
@@ -12510,7 +12510,7 @@
         </p:nvSpPr>
         <p:spPr>
           <a:xfrm rot="0" flipH="0" flipV="0">
-            <a:off x="5095875" y="2619375"/>
+            <a:off x="5095875" y="2238375"/>
             <a:ext cx="6238875" cy="361950"/>
           </a:xfrm>
           <a:prstGeom prst="rect"/>
@@ -12545,7 +12545,7 @@
         </p:nvSpPr>
         <p:spPr>
           <a:xfrm rot="0" flipH="0" flipV="0">
-            <a:off x="5095875" y="3028950"/>
+            <a:off x="5095875" y="2647950"/>
             <a:ext cx="6238875" cy="600075"/>
           </a:xfrm>
           <a:prstGeom prst="rect"/>
@@ -12568,7 +12568,7 @@
                 <a:latin typeface="Verdana"/>
                 <a:ea typeface="Verdana"/>
               </a:rPr>
-              <a:t>Punya dua anak di kelas berbeda? Cukup satu akun — pilih kelasnya di bagian atas layar.</a:t>
+              <a:t>Punya dua anak di kelas berbeda? Cukup satu akun — pilih kelasnya di bagian atas layar. Anak bisa ditambah di menu Profil.</a:t>
             </a:r>
             <a:endParaRPr/>
           </a:p>
@@ -12582,12 +12582,12 @@
         </p:nvSpPr>
         <p:spPr>
           <a:xfrm rot="0" flipH="0" flipV="0">
-            <a:off x="4162425" y="3819525"/>
-            <a:ext cx="7496175" cy="1171575"/>
+            <a:off x="4162425" y="3286125"/>
+            <a:ext cx="7496175" cy="952500"/>
           </a:xfrm>
           <a:prstGeom prst="roundRect">
             <a:avLst>
-              <a:gd name="adj" fmla="val 13008"/>
+              <a:gd name="adj" fmla="val 16000"/>
             </a:avLst>
           </a:prstGeom>
           <a:solidFill>
@@ -12615,12 +12615,12 @@
         </p:nvSpPr>
         <p:spPr>
           <a:xfrm rot="0" flipH="0" flipV="0">
-            <a:off x="4162425" y="3819525"/>
-            <a:ext cx="7496175" cy="1171575"/>
+            <a:off x="4162425" y="3286125"/>
+            <a:ext cx="7496175" cy="952500"/>
           </a:xfrm>
           <a:custGeom>
             <a:pathLst>
-              <a:path w="787" h="123">
+              <a:path w="787" h="100">
                 <a:moveTo>
                   <a:pt x="15" y="0"/>
                 </a:moveTo>
@@ -12630,17 +12630,17 @@
                   <a:pt x="8" y="8"/>
                 </a:cubicBezTo>
                 <a:lnTo>
-                  <a:pt x="8" y="115"/>
+                  <a:pt x="8" y="92"/>
                 </a:lnTo>
                 <a:cubicBezTo>
-                  <a:pt x="8" y="119"/>
-                  <a:pt x="11" y="122"/>
-                  <a:pt x="14" y="123"/>
+                  <a:pt x="8" y="96"/>
+                  <a:pt x="11" y="99"/>
+                  <a:pt x="14" y="100"/>
                 </a:cubicBezTo>
                 <a:cubicBezTo>
-                  <a:pt x="6" y="122"/>
-                  <a:pt x="0" y="115"/>
-                  <a:pt x="0" y="107"/>
+                  <a:pt x="6" y="99"/>
+                  <a:pt x="0" y="92"/>
+                  <a:pt x="0" y="84"/>
                 </a:cubicBezTo>
                 <a:lnTo>
                   <a:pt x="0" y="16"/>
@@ -12672,7 +12672,7 @@
         </p:nvSpPr>
         <p:spPr>
           <a:xfrm rot="0" flipH="0" flipV="0">
-            <a:off x="4391025" y="4152900"/>
+            <a:off x="4391025" y="3505200"/>
             <a:ext cx="514350" cy="514350"/>
           </a:xfrm>
           <a:prstGeom prst="roundRect">
@@ -12704,7 +12704,7 @@
           <a:blip>
             <a:extLst>
               <a:ext uri="{96DAC541-7B7A-43D3-8B79-37D633B846F1}">
-                <asvg:svgBlip r:embed="rId2"/>
+                <asvg:svgBlip r:embed="rId4"/>
               </a:ext>
             </a:extLst>
           </a:blip>
@@ -12714,7 +12714,7 @@
         </p:blipFill>
         <p:spPr>
           <a:xfrm rot="0" flipH="0" flipV="0">
-            <a:off x="4514850" y="4276725"/>
+            <a:off x="4514850" y="3629025"/>
             <a:ext cx="266700" cy="266700"/>
           </a:xfrm>
           <a:prstGeom prst="rect">
@@ -12731,7 +12731,7 @@
         </p:nvSpPr>
         <p:spPr>
           <a:xfrm rot="0" flipH="0" flipV="0">
-            <a:off x="5095875" y="3905250"/>
+            <a:off x="5095875" y="3257550"/>
             <a:ext cx="6238875" cy="361950"/>
           </a:xfrm>
           <a:prstGeom prst="rect"/>
@@ -12766,7 +12766,7 @@
         </p:nvSpPr>
         <p:spPr>
           <a:xfrm rot="0" flipH="0" flipV="0">
-            <a:off x="5095875" y="4314825"/>
+            <a:off x="5095875" y="3667125"/>
             <a:ext cx="6238875" cy="600075"/>
           </a:xfrm>
           <a:prstGeom prst="rect"/>
@@ -12789,7 +12789,7 @@
                 <a:latin typeface="Verdana"/>
                 <a:ea typeface="Verdana"/>
               </a:rPr>
-              <a:t>Ada menu Profil di dalam aplikasi. Kalau lupa, minta reset kepada admin sekolah.</a:t>
+              <a:t>Ada menu Profil di dalam aplikasi. Kalau lupa, minta reset kepada admin sekolah sebelum salah mencoba berulang kali.</a:t>
             </a:r>
             <a:endParaRPr/>
           </a:p>
@@ -12803,12 +12803,12 @@
         </p:nvSpPr>
         <p:spPr>
           <a:xfrm rot="0" flipH="0" flipV="0">
-            <a:off x="4162425" y="5114925"/>
-            <a:ext cx="7496175" cy="1171575"/>
+            <a:off x="4162425" y="4314825"/>
+            <a:ext cx="7496175" cy="952500"/>
           </a:xfrm>
           <a:prstGeom prst="roundRect">
             <a:avLst>
-              <a:gd name="adj" fmla="val 13008"/>
+              <a:gd name="adj" fmla="val 16000"/>
             </a:avLst>
           </a:prstGeom>
           <a:solidFill>
@@ -12836,12 +12836,12 @@
         </p:nvSpPr>
         <p:spPr>
           <a:xfrm rot="0" flipH="0" flipV="0">
-            <a:off x="4162425" y="5114925"/>
-            <a:ext cx="7496175" cy="1171575"/>
+            <a:off x="4162425" y="4314825"/>
+            <a:ext cx="7496175" cy="952500"/>
           </a:xfrm>
           <a:custGeom>
             <a:pathLst>
-              <a:path w="787" h="123">
+              <a:path w="787" h="100">
                 <a:moveTo>
                   <a:pt x="15" y="0"/>
                 </a:moveTo>
@@ -12851,17 +12851,238 @@
                   <a:pt x="8" y="8"/>
                 </a:cubicBezTo>
                 <a:lnTo>
-                  <a:pt x="8" y="115"/>
+                  <a:pt x="8" y="92"/>
                 </a:lnTo>
                 <a:cubicBezTo>
-                  <a:pt x="8" y="119"/>
-                  <a:pt x="11" y="122"/>
-                  <a:pt x="14" y="123"/>
+                  <a:pt x="8" y="96"/>
+                  <a:pt x="11" y="99"/>
+                  <a:pt x="14" y="100"/>
                 </a:cubicBezTo>
                 <a:cubicBezTo>
-                  <a:pt x="6" y="122"/>
-                  <a:pt x="0" y="115"/>
-                  <a:pt x="0" y="107"/>
+                  <a:pt x="6" y="99"/>
+                  <a:pt x="0" y="92"/>
+                  <a:pt x="0" y="84"/>
+                </a:cubicBezTo>
+                <a:lnTo>
+                  <a:pt x="0" y="16"/>
+                </a:lnTo>
+                <a:cubicBezTo>
+                  <a:pt x="0" y="7"/>
+                  <a:pt x="7" y="0"/>
+                  <a:pt x="16" y="0"/>
+                </a:cubicBezTo>
+                <a:close/>
+              </a:path>
+            </a:pathLst>
+          </a:custGeom>
+          <a:solidFill>
+            <a:srgbClr val="F3B26C"/>
+          </a:solidFill>
+          <a:ln/>
+        </p:spPr>
+        <p:txBody>
+          <a:bodyPr/>
+          <a:p/>
+        </p:txBody>
+      </p:sp>
+      <p:sp>
+        <p:nvSpPr>
+          <p:cNvPr id="304" name=""/>
+          <p:cNvSpPr/>
+          <p:nvPr/>
+        </p:nvSpPr>
+        <p:spPr>
+          <a:xfrm rot="0" flipH="0" flipV="0">
+            <a:off x="4391025" y="4533900"/>
+            <a:ext cx="514350" cy="514350"/>
+          </a:xfrm>
+          <a:prstGeom prst="roundRect">
+            <a:avLst>
+              <a:gd name="adj" fmla="val 50000"/>
+            </a:avLst>
+          </a:prstGeom>
+          <a:solidFill>
+            <a:srgbClr val="51277C">
+              <a:alpha val="10000"/>
+            </a:srgbClr>
+          </a:solidFill>
+          <a:ln/>
+        </p:spPr>
+        <p:txBody>
+          <a:bodyPr/>
+          <a:p/>
+        </p:txBody>
+      </p:sp>
+      <p:pic>
+        <p:nvPicPr>
+          <p:cNvPr id="305" name=""/>
+          <p:cNvPicPr>
+            <a:picLocks noChangeAspect="1"/>
+          </p:cNvPicPr>
+          <p:nvPr/>
+        </p:nvPicPr>
+        <p:blipFill>
+          <a:blip>
+            <a:extLst>
+              <a:ext uri="{96DAC541-7B7A-43D3-8B79-37D633B846F1}">
+                <asvg:svgBlip r:embed="rId5"/>
+              </a:ext>
+            </a:extLst>
+          </a:blip>
+          <a:stretch>
+            <a:fillRect/>
+          </a:stretch>
+        </p:blipFill>
+        <p:spPr>
+          <a:xfrm rot="0" flipH="0" flipV="0">
+            <a:off x="4514850" y="4657725"/>
+            <a:ext cx="266700" cy="266700"/>
+          </a:xfrm>
+          <a:prstGeom prst="rect">
+            <a:avLst/>
+          </a:prstGeom>
+          <a:ln/>
+        </p:spPr>
+      </p:pic>
+      <p:sp>
+        <p:nvSpPr>
+          <p:cNvPr id="306" name="" descr="{&quot;isTemplate&quot;:true,&quot;type&quot;:&quot;text&quot;}"/>
+          <p:cNvSpPr txBox="1"/>
+          <p:nvPr/>
+        </p:nvSpPr>
+        <p:spPr>
+          <a:xfrm rot="0" flipH="0" flipV="0">
+            <a:off x="5095875" y="4286250"/>
+            <a:ext cx="6238875" cy="361950"/>
+          </a:xfrm>
+          <a:prstGeom prst="rect"/>
+        </p:spPr>
+        <p:txBody>
+          <a:bodyPr wrap="none" lIns="0" tIns="0" rIns="0" bIns="0"/>
+          <a:p>
+            <a:pPr>
+              <a:lnSpc>
+                <a:spcPct val="130000"/>
+              </a:lnSpc>
+            </a:pPr>
+            <a:r>
+              <a:rPr lang="en-US" sz="1800" b="1">
+                <a:solidFill>
+                  <a:srgbClr val="2A2333"/>
+                </a:solidFill>
+                <a:latin typeface="Trebuchet MS"/>
+                <a:ea typeface="Trebuchet MS"/>
+              </a:rPr>
+              <a:t>Hati-hati: 5 kali salah, akun terkunci</a:t>
+            </a:r>
+            <a:endParaRPr/>
+          </a:p>
+        </p:txBody>
+      </p:sp>
+      <p:sp>
+        <p:nvSpPr>
+          <p:cNvPr id="307" name="" descr="{&quot;isTemplate&quot;:true,&quot;type&quot;:&quot;text&quot;}"/>
+          <p:cNvSpPr txBox="1"/>
+          <p:nvPr/>
+        </p:nvSpPr>
+        <p:spPr>
+          <a:xfrm rot="0" flipH="0" flipV="0">
+            <a:off x="5095875" y="4695825"/>
+            <a:ext cx="6238875" cy="600075"/>
+          </a:xfrm>
+          <a:prstGeom prst="rect"/>
+        </p:spPr>
+        <p:txBody>
+          <a:bodyPr wrap="square" lIns="0" tIns="0" rIns="0" bIns="0">
+            <a:normAutofit/>
+          </a:bodyPr>
+          <a:p>
+            <a:pPr>
+              <a:lnSpc>
+                <a:spcPct val="145000"/>
+              </a:lnSpc>
+            </a:pPr>
+            <a:r>
+              <a:rPr lang="en-US" sz="1350">
+                <a:solidFill>
+                  <a:srgbClr val="6B6478"/>
+                </a:solidFill>
+                <a:latin typeface="Verdana"/>
+                <a:ea typeface="Verdana"/>
+              </a:rPr>
+              <a:t>Salah password 5 kali berturut-turut mengunci akun. Tidak bisa dibuka sendiri — hubungi admin sekolah, nanti dibukakan.</a:t>
+            </a:r>
+            <a:endParaRPr/>
+          </a:p>
+        </p:txBody>
+      </p:sp>
+      <p:sp>
+        <p:nvSpPr>
+          <p:cNvPr id="308" name=""/>
+          <p:cNvSpPr/>
+          <p:nvPr/>
+        </p:nvSpPr>
+        <p:spPr>
+          <a:xfrm rot="0" flipH="0" flipV="0">
+            <a:off x="4162425" y="5334000"/>
+            <a:ext cx="7496175" cy="952500"/>
+          </a:xfrm>
+          <a:prstGeom prst="roundRect">
+            <a:avLst>
+              <a:gd name="adj" fmla="val 16000"/>
+            </a:avLst>
+          </a:prstGeom>
+          <a:solidFill>
+            <a:srgbClr val="FFFFFF"/>
+          </a:solidFill>
+          <a:ln/>
+          <a:effectLst>
+            <a:outerShdw blurRad="190500" dist="38100" dir="5400000">
+              <a:srgbClr val="000000">
+                <a:alpha val="8000"/>
+              </a:srgbClr>
+            </a:outerShdw>
+          </a:effectLst>
+        </p:spPr>
+        <p:txBody>
+          <a:bodyPr/>
+          <a:p/>
+        </p:txBody>
+      </p:sp>
+      <p:sp>
+        <p:nvSpPr>
+          <p:cNvPr id="309" name=""/>
+          <p:cNvSpPr/>
+          <p:nvPr/>
+        </p:nvSpPr>
+        <p:spPr>
+          <a:xfrm rot="0" flipH="0" flipV="0">
+            <a:off x="4162425" y="5334000"/>
+            <a:ext cx="7496175" cy="952500"/>
+          </a:xfrm>
+          <a:custGeom>
+            <a:pathLst>
+              <a:path w="787" h="100">
+                <a:moveTo>
+                  <a:pt x="15" y="0"/>
+                </a:moveTo>
+                <a:cubicBezTo>
+                  <a:pt x="11" y="0"/>
+                  <a:pt x="8" y="4"/>
+                  <a:pt x="8" y="8"/>
+                </a:cubicBezTo>
+                <a:lnTo>
+                  <a:pt x="8" y="92"/>
+                </a:lnTo>
+                <a:cubicBezTo>
+                  <a:pt x="8" y="96"/>
+                  <a:pt x="11" y="99"/>
+                  <a:pt x="14" y="100"/>
+                </a:cubicBezTo>
+                <a:cubicBezTo>
+                  <a:pt x="6" y="99"/>
+                  <a:pt x="0" y="92"/>
+                  <a:pt x="0" y="84"/>
                 </a:cubicBezTo>
                 <a:lnTo>
                   <a:pt x="0" y="16"/>
@@ -12887,13 +13108,13 @@
       </p:sp>
       <p:sp>
         <p:nvSpPr>
-          <p:cNvPr id="304" name=""/>
+          <p:cNvPr id="310" name=""/>
           <p:cNvSpPr/>
           <p:nvPr/>
         </p:nvSpPr>
         <p:spPr>
           <a:xfrm rot="0" flipH="0" flipV="0">
-            <a:off x="4391025" y="5448300"/>
+            <a:off x="4391025" y="5553075"/>
             <a:ext cx="514350" cy="514350"/>
           </a:xfrm>
           <a:prstGeom prst="roundRect">
@@ -12915,7 +13136,7 @@
       </p:sp>
       <p:pic>
         <p:nvPicPr>
-          <p:cNvPr id="305" name=""/>
+          <p:cNvPr id="311" name=""/>
           <p:cNvPicPr>
             <a:picLocks noChangeAspect="1"/>
           </p:cNvPicPr>
@@ -12925,7 +13146,7 @@
           <a:blip>
             <a:extLst>
               <a:ext uri="{96DAC541-7B7A-43D3-8B79-37D633B846F1}">
-                <asvg:svgBlip r:embed="rId2"/>
+                <asvg:svgBlip r:embed="rId6"/>
               </a:ext>
             </a:extLst>
           </a:blip>
@@ -12935,7 +13156,7 @@
         </p:blipFill>
         <p:spPr>
           <a:xfrm rot="0" flipH="0" flipV="0">
-            <a:off x="4514850" y="5572125"/>
+            <a:off x="4514850" y="5676900"/>
             <a:ext cx="266700" cy="266700"/>
           </a:xfrm>
           <a:prstGeom prst="rect">
@@ -12946,13 +13167,13 @@
       </p:pic>
       <p:sp>
         <p:nvSpPr>
-          <p:cNvPr id="306" name="" descr="{&quot;isTemplate&quot;:true,&quot;type&quot;:&quot;text&quot;}"/>
-          <p:cNvSpPr txBox="1"/>
-          <p:nvPr/>
-        </p:nvSpPr>
-        <p:spPr>
-          <a:xfrm rot="0" flipH="0" flipV="0">
-            <a:off x="5095875" y="5200650"/>
+          <p:cNvPr id="312" name="" descr="{&quot;isTemplate&quot;:true,&quot;type&quot;:&quot;text&quot;}"/>
+          <p:cNvSpPr txBox="1"/>
+          <p:nvPr/>
+        </p:nvSpPr>
+        <p:spPr>
+          <a:xfrm rot="0" flipH="0" flipV="0">
+            <a:off x="5095875" y="5305425"/>
             <a:ext cx="6238875" cy="361950"/>
           </a:xfrm>
           <a:prstGeom prst="rect"/>
@@ -12981,13 +13202,13 @@
       </p:sp>
       <p:sp>
         <p:nvSpPr>
-          <p:cNvPr id="307" name="" descr="{&quot;isTemplate&quot;:true,&quot;type&quot;:&quot;text&quot;}"/>
-          <p:cNvSpPr txBox="1"/>
-          <p:nvPr/>
-        </p:nvSpPr>
-        <p:spPr>
-          <a:xfrm rot="0" flipH="0" flipV="0">
-            <a:off x="5095875" y="5610225"/>
+          <p:cNvPr id="313" name="" descr="{&quot;isTemplate&quot;:true,&quot;type&quot;:&quot;text&quot;}"/>
+          <p:cNvSpPr txBox="1"/>
+          <p:nvPr/>
+        </p:nvSpPr>
+        <p:spPr>
+          <a:xfrm rot="0" flipH="0" flipV="0">
+            <a:off x="5095875" y="5715000"/>
             <a:ext cx="6238875" cy="600075"/>
           </a:xfrm>
           <a:prstGeom prst="rect"/>
@@ -13018,7 +13239,7 @@
       </p:sp>
       <p:sp>
         <p:nvSpPr>
-          <p:cNvPr id="308" name="" descr="{&quot;isTemplate&quot;:true,&quot;type&quot;:&quot;text&quot;}"/>
+          <p:cNvPr id="314" name="" descr="{&quot;isTemplate&quot;:true,&quot;type&quot;:&quot;text&quot;}"/>
           <p:cNvSpPr txBox="1"/>
           <p:nvPr/>
         </p:nvSpPr>
@@ -13053,7 +13274,7 @@
       </p:sp>
       <p:sp>
         <p:nvSpPr>
-          <p:cNvPr id="309" name="" descr="{&quot;isTemplate&quot;:true,&quot;type&quot;:&quot;text&quot;}"/>
+          <p:cNvPr id="315" name="" descr="{&quot;isTemplate&quot;:true,&quot;type&quot;:&quot;text&quot;}"/>
           <p:cNvSpPr txBox="1"/>
           <p:nvPr/>
         </p:nvSpPr>
@@ -13096,7 +13317,7 @@
   <p:cSld>
     <p:spTree>
       <p:nvGrpSpPr>
-        <p:cNvPr id="310" name="" descr="&lt;Slide&#10;    style={{&#10;        width: '1280px',&#10;        height: '720px',&#10;        background: 'linear-gradient(135deg, #51277C 0%, #7A45A8 100%)',&#10;        paddingTop: 60,&#10;        paddingBottom: 60,&#10;        paddingLeft: 72,&#10;        paddingRight: 72,&#10;        justifyContent: 'center',&#10;        position: 'relative',&#10;        overflow: 'hidden',&#10;    }}&#10;&gt;&#10;    {/* dekorasi: kalender + centang */}&#10;    &lt;Box&#10;        style={{&#10;            position: 'absolute',&#10;            top: -110,&#10;            right: 140,&#10;            width: 380,&#10;            height: 380,&#10;            borderRadius: 190,&#10;            background: '#F3B26C',&#10;            opacity: 0.16,&#10;        }}&#10;    /&gt;&#10;    &lt;Box style={{ position: 'absolute', bottom: 62, right: 84, opacity: 0.20 }}&gt;&#10;        &lt;svg width={250} height={210} viewBox='0 0 250 210'&gt;&#10;            &lt;rect x='14' y='30' width='222' height='166' rx='18' fill='none' stroke='#FFFFFF' strokeWidth='6' /&gt;&#10;            &lt;path d='M14 74 h222' stroke='#FFFFFF' strokeWidth='6' /&gt;&#10;            &lt;path d='M64 10 v34M186 10 v34' stroke='#FFFFFF' strokeWidth='8' strokeLinecap='round' /&gt;&#10;            &lt;path d='M52 152 l30 32 l66 -74' fill='none' stroke='#AFC440' strokeWidth='14' strokeLinecap='round' strokeLinejoin='round' /&gt;&#10;        &lt;/svg&gt;&#10;    &lt;/Box&gt;&#10;&#10;    {/* isi */}&#10;    &lt;Box style={{ position: 'relative', zIndex: 1, width: '62%' }}&gt;&#10;        &lt;Box style={{ flexDirection: 'row', alignItems: 'center', gap: 14, alignSelf: 'flex-start' }}&gt;&#10;            &lt;Text&#10;                style={{&#10;                    fontSize: 76,&#10;                    fontWeight: 'bold',&#10;                    color: '#F3B26C',&#10;                    fontFamily: 'Trebuchet MS',&#10;                    lineHeight: 1,&#10;                }}&#10;            &gt;&#10;                03&#10;            &lt;/Text&gt;&#10;            &lt;Box style={{ width: 3, height: 52, background: 'rgba(255,255,255,0.45)' }} /&gt;&#10;            &lt;Text style={{ fontSize: 19, color: 'rgba(255,255,255,0.8)', fontFamily: 'Verdana' }}&gt;&#10;                Bagian ketiga&#10;            &lt;/Text&gt;&#10;        &lt;/Box&gt;&#10;&#10;        &lt;Text&#10;            style={{&#10;                marginTop: 26,&#10;                fontSize: 60,&#10;                fontWeight: 'bold',&#10;                color: '#FFFFFF',&#10;                fontFamily: 'Trebuchet MS',&#10;                lineHeight: 1.15,&#10;            }}&#10;        &gt;&#10;            Dipakai{'\n'}tiap hari&#10;        &lt;/Text&gt;&#10;&#10;        &lt;Text&#10;            style={{&#10;                marginTop: 24,&#10;                fontSize: 22,&#10;                color: 'rgba(255,255,255,0.88)',&#10;                fontFamily: 'Verdana',&#10;                lineHeight: 1.5,&#10;            }}&#10;        &gt;&#10;            Tiga hal yang paling sering dibuka orang tua.&#10;        &lt;/Text&gt;&#10;    &lt;/Box&gt;&#10;&lt;/Slide&gt;&#10;"/>
+        <p:cNvPr id="316" name="" descr="&lt;Slide&#10;    style={{&#10;        width: '1280px',&#10;        height: '720px',&#10;        background: 'linear-gradient(135deg, #51277C 0%, #7A45A8 100%)',&#10;        paddingTop: 60,&#10;        paddingBottom: 60,&#10;        paddingLeft: 72,&#10;        paddingRight: 72,&#10;        justifyContent: 'center',&#10;        position: 'relative',&#10;        overflow: 'hidden',&#10;    }}&#10;&gt;&#10;    {/* dekorasi: kalender + centang */}&#10;    &lt;Box&#10;        style={{&#10;            position: 'absolute',&#10;            top: -110,&#10;            right: 140,&#10;            width: 380,&#10;            height: 380,&#10;            borderRadius: 190,&#10;            background: '#F3B26C',&#10;            opacity: 0.16,&#10;        }}&#10;    /&gt;&#10;    &lt;Box style={{ position: 'absolute', bottom: 62, right: 84, opacity: 0.20 }}&gt;&#10;        &lt;svg width={250} height={210} viewBox='0 0 250 210'&gt;&#10;            &lt;rect x='14' y='30' width='222' height='166' rx='18' fill='none' stroke='#FFFFFF' strokeWidth='6' /&gt;&#10;            &lt;path d='M14 74 h222' stroke='#FFFFFF' strokeWidth='6' /&gt;&#10;            &lt;path d='M64 10 v34M186 10 v34' stroke='#FFFFFF' strokeWidth='8' strokeLinecap='round' /&gt;&#10;            &lt;path d='M52 152 l30 32 l66 -74' fill='none' stroke='#AFC440' strokeWidth='14' strokeLinecap='round' strokeLinejoin='round' /&gt;&#10;        &lt;/svg&gt;&#10;    &lt;/Box&gt;&#10;&#10;    {/* isi */}&#10;    &lt;Box style={{ position: 'relative', zIndex: 1, width: '62%' }}&gt;&#10;        &lt;Box style={{ flexDirection: 'row', alignItems: 'center', gap: 14, alignSelf: 'flex-start' }}&gt;&#10;            &lt;Text&#10;                style={{&#10;                    fontSize: 76,&#10;                    fontWeight: 'bold',&#10;                    color: '#F3B26C',&#10;                    fontFamily: 'Trebuchet MS',&#10;                    lineHeight: 1,&#10;                }}&#10;            &gt;&#10;                03&#10;            &lt;/Text&gt;&#10;            &lt;Box style={{ width: 3, height: 52, background: 'rgba(255,255,255,0.45)' }} /&gt;&#10;            &lt;Text style={{ fontSize: 19, color: 'rgba(255,255,255,0.8)', fontFamily: 'Verdana' }}&gt;&#10;                Bagian ketiga&#10;            &lt;/Text&gt;&#10;        &lt;/Box&gt;&#10;&#10;        &lt;Text&#10;            style={{&#10;                marginTop: 26,&#10;                fontSize: 60,&#10;                fontWeight: 'bold',&#10;                color: '#FFFFFF',&#10;                fontFamily: 'Trebuchet MS',&#10;                lineHeight: 1.15,&#10;            }}&#10;        &gt;&#10;            Dipakai{'\n'}tiap hari&#10;        &lt;/Text&gt;&#10;&#10;        &lt;Text&#10;            style={{&#10;                marginTop: 24,&#10;                fontSize: 22,&#10;                color: 'rgba(255,255,255,0.88)',&#10;                fontFamily: 'Verdana',&#10;                lineHeight: 1.5,&#10;            }}&#10;        &gt;&#10;            Tiga hal yang paling sering dibuka orang tua.&#10;        &lt;/Text&gt;&#10;    &lt;/Box&gt;&#10;&lt;/Slide&gt;"/>
         <p:cNvGrpSpPr/>
         <p:nvPr/>
       </p:nvGrpSpPr>
@@ -13110,7 +13331,7 @@
       </p:grpSpPr>
       <p:sp>
         <p:nvSpPr>
-          <p:cNvPr id="311" name=""/>
+          <p:cNvPr id="317" name=""/>
           <p:cNvSpPr/>
           <p:nvPr/>
         </p:nvSpPr>
@@ -13142,7 +13363,7 @@
       </p:sp>
       <p:sp>
         <p:nvSpPr>
-          <p:cNvPr id="312" name=""/>
+          <p:cNvPr id="318" name=""/>
           <p:cNvSpPr/>
           <p:nvPr/>
         </p:nvSpPr>
@@ -13193,7 +13414,7 @@
       </p:sp>
       <p:pic>
         <p:nvPicPr>
-          <p:cNvPr id="313" name=""/>
+          <p:cNvPr id="319" name=""/>
           <p:cNvPicPr>
             <a:picLocks noChangeAspect="1"/>
           </p:cNvPicPr>
@@ -13225,7 +13446,7 @@
       </p:pic>
       <p:sp>
         <p:nvSpPr>
-          <p:cNvPr id="314" name="" descr="{&quot;isTemplate&quot;:true,&quot;type&quot;:&quot;text&quot;}"/>
+          <p:cNvPr id="320" name="" descr="{&quot;isTemplate&quot;:true,&quot;type&quot;:&quot;text&quot;}"/>
           <p:cNvSpPr txBox="1"/>
           <p:nvPr/>
         </p:nvSpPr>
@@ -13260,7 +13481,7 @@
       </p:sp>
       <p:sp>
         <p:nvSpPr>
-          <p:cNvPr id="315" name=""/>
+          <p:cNvPr id="321" name=""/>
           <p:cNvSpPr/>
           <p:nvPr/>
         </p:nvSpPr>
@@ -13286,7 +13507,7 @@
       </p:sp>
       <p:sp>
         <p:nvSpPr>
-          <p:cNvPr id="316" name="" descr="{&quot;isTemplate&quot;:true,&quot;type&quot;:&quot;text&quot;}"/>
+          <p:cNvPr id="322" name="" descr="{&quot;isTemplate&quot;:true,&quot;type&quot;:&quot;text&quot;}"/>
           <p:cNvSpPr txBox="1"/>
           <p:nvPr/>
         </p:nvSpPr>
@@ -13323,7 +13544,7 @@
       </p:sp>
       <p:sp>
         <p:nvSpPr>
-          <p:cNvPr id="317" name="" descr="{&quot;isTemplate&quot;:true,&quot;type&quot;:&quot;text&quot;}"/>
+          <p:cNvPr id="323" name="" descr="{&quot;isTemplate&quot;:true,&quot;type&quot;:&quot;text&quot;}"/>
           <p:cNvSpPr txBox="1"/>
           <p:nvPr/>
         </p:nvSpPr>
@@ -13376,7 +13597,7 @@
       </p:sp>
       <p:sp>
         <p:nvSpPr>
-          <p:cNvPr id="318" name="" descr="{&quot;isTemplate&quot;:true,&quot;type&quot;:&quot;text&quot;}"/>
+          <p:cNvPr id="324" name="" descr="{&quot;isTemplate&quot;:true,&quot;type&quot;:&quot;text&quot;}"/>
           <p:cNvSpPr txBox="1"/>
           <p:nvPr/>
         </p:nvSpPr>

--- a/Panduan Orang Tua Pizza Snack Play/Panduan Orang Tua Pizza Snack Play.pptx
+++ b/Panduan Orang Tua Pizza Snack Play/Panduan Orang Tua Pizza Snack Play.pptx
@@ -1,6 +1,6 @@
 
 <file path=ppt/presentation.xml><?xml version="1.0" encoding="utf-8"?>
-<p:presentation xmlns:p="http://schemas.openxmlformats.org/presentationml/2006/main" xmlns:r="http://schemas.openxmlformats.org/officeDocument/2006/relationships" xmlns:a="http://schemas.openxmlformats.org/drawingml/2006/main" firstSlideNum="1">
+<p:presentation xmlns:p="http://schemas.openxmlformats.org/presentationml/2006/main" xmlns:a="http://schemas.openxmlformats.org/drawingml/2006/main" xmlns:r="http://schemas.openxmlformats.org/officeDocument/2006/relationships" firstSlideNum="1">
   <p:sldMasterIdLst>
     <p:sldMasterId id="2147483648" r:id="rId0"/>
   </p:sldMasterIdLst>
@@ -272,7 +272,7 @@
 </file>
 
 <file path=ppt/slideMasters/slideMaster1.xml><?xml version="1.0" encoding="utf-8"?>
-<p:sldMaster xmlns:p="http://schemas.openxmlformats.org/presentationml/2006/main" xmlns:r="http://schemas.openxmlformats.org/officeDocument/2006/relationships" xmlns:a="http://schemas.openxmlformats.org/drawingml/2006/main">
+<p:sldMaster xmlns:p="http://schemas.openxmlformats.org/presentationml/2006/main" xmlns:a="http://schemas.openxmlformats.org/drawingml/2006/main" xmlns:r="http://schemas.openxmlformats.org/officeDocument/2006/relationships">
   <p:cSld>
     <p:bg>
       <p:bgRef idx="1001">
@@ -554,11 +554,11 @@
 </file>
 
 <file path=ppt/slides/slide1.xml><?xml version="1.0" encoding="utf-8"?>
-<p:sld xmlns:p="http://schemas.openxmlformats.org/presentationml/2006/main" xmlns:r="http://schemas.openxmlformats.org/officeDocument/2006/relationships" xmlns:a="http://schemas.openxmlformats.org/drawingml/2006/main" xmlns:asvg="http://schemas.microsoft.com/office/drawing/2016/SVG/main" xmlns:mc="http://schemas.openxmlformats.org/markup-compatibility/2006" mc:Ignorable="asvg">
+<p:sld xmlns:p="http://schemas.openxmlformats.org/presentationml/2006/main" xmlns:a="http://schemas.openxmlformats.org/drawingml/2006/main" xmlns:asvg="http://schemas.microsoft.com/office/drawing/2016/SVG/main" xmlns:r="http://schemas.openxmlformats.org/officeDocument/2006/relationships" xmlns:mc="http://schemas.openxmlformats.org/markup-compatibility/2006" mc:Ignorable="asvg">
   <p:cSld>
     <p:spTree>
       <p:nvGrpSpPr>
-        <p:cNvPr id="1" name="" descr="&lt;Slide&#13;&#10;    style={{&#13;&#10;        width: '1280px',&#13;&#10;        height: '720px',&#13;&#10;        background: '#FAF7F2',&#13;&#10;        flexDirection: 'row',&#13;&#10;        padding: 0,&#13;&#10;        position: 'relative',&#13;&#10;        overflow: 'hidden',&#13;&#10;    }}&#13;&#10;&gt;&#13;&#10;    {/* dekorasi latar — lingkaran besar semi-transparan */}&#13;&#10;    &lt;Box&#13;&#10;        style={{&#13;&#10;            position: 'absolute',&#13;&#10;            top: -140,&#13;&#10;            right: -120,&#13;&#10;            width: 520,&#13;&#10;            height: 520,&#13;&#10;            borderRadius: 260,&#13;&#10;            background: 'linear-gradient(135deg, #51277C 0%, #7A45A8 100%)',&#13;&#10;            opacity: 0.10,&#13;&#10;        }}&#13;&#10;    /&gt;&#13;&#10;    &lt;Box&#13;&#10;        style={{&#13;&#10;            position: 'absolute',&#13;&#10;            bottom: -90,&#13;&#10;            left: -80,&#13;&#10;            width: 360,&#13;&#10;            height: 360,&#13;&#10;            borderRadius: 180,&#13;&#10;            background: 'linear-gradient(135deg, #AFC440 0%, #F3B26C 100%)',&#13;&#10;            opacity: 0.14,&#13;&#10;        }}&#13;&#10;    /&gt;&#13;&#10;&#13;&#10;    {/* ── kolom kiri: judul ── */}&#13;&#10;    &lt;Box&#13;&#10;        style={{&#13;&#10;            position: 'relative',&#13;&#10;            zIndex: 1,&#13;&#10;            width: '56%',&#13;&#10;            paddingTop: 96,&#13;&#10;            paddingBottom: 96,&#13;&#10;            paddingLeft: 64,&#13;&#10;            paddingRight: 32,&#13;&#10;            justifyContent: 'center',&#13;&#10;        }}&#13;&#10;    &gt;&#13;&#10;        &lt;Box&#13;&#10;            style={{&#13;&#10;                flexDirection: 'row',&#13;&#10;                alignItems: 'center',&#13;&#10;                gap: 10,&#13;&#10;                alignSelf: 'flex-start',&#13;&#10;                background: '#51277C',&#13;&#10;                borderRadius: 999,&#13;&#10;                paddingTop: 9,&#13;&#10;                paddingBottom: 9,&#13;&#10;                paddingLeft: 20,&#13;&#10;                paddingRight: 22,&#13;&#10;            }}&#13;&#10;        &gt;&#13;&#10;            &lt;svg width={20} height={20} viewBox=&quot;0 0 640 512&quot; xmlns=&quot;http://www.w3.org/2000/svg&quot;&gt;&lt;path fill=&quot;#F3B26C&quot; d=&quot;M144 0a80 80 0 1 1 0 160A80 80 0 1 1 144 0zM512 0a80 80 0 1 1 0 160A80 80 0 1 1 512 0zM0 298.7C0 239.8 47.8 192 106.7 192h42.7c15.9 0 31 3.5 44.6 9.7c-1.3 7.2-1.9 14.7-1.9 22.3c0 38.2 16.8 72.5 43.3 96c-.2 0-.4 0-.7 0H21.3C9.6 320 0 310.4 0 298.7zM405.3 320c-.2 0-.4 0-.7 0c26.6-23.5 43.3-57.8 43.3-96c0-7.6-.7-15-1.9-22.3c13.6-6.3 28.7-9.7 44.6-9.7h42.7C592.2 192 640 239.8 640 298.7c0 11.8-9.6 21.3-21.3 21.3H405.3zM224 224a96 96 0 1 1 192 0 96 96 0 1 1 -192 0zM128 485.3C128 411.7 187.7 352 261.3 352H378.7C452.3 352 512 411.7 512 485.3c0 14.7-11.9 26.7-26.7 26.7H154.7c-14.7 0-26.7-11.9-26.7-26.7z&quot; /&gt;&lt;/svg&gt;&#13;&#10;            &lt;Text style={{ fontSize: 17, color: '#FFFFFF', fontFamily: 'Verdana', fontWeight: 'bold' }}&gt;&#13;&#10;                Panduan Orang Tua Murid&#13;&#10;            &lt;/Text&gt;&#13;&#10;        &lt;/Box&gt;&#13;&#10;&#13;&#10;        &lt;Text&#13;&#10;            style={{&#13;&#10;                marginTop: 26,&#13;&#10;                fontSize: 66,&#13;&#10;                fontWeight: 'bold',&#13;&#10;                color: '#51277C',&#13;&#10;                fontFamily: 'Trebuchet MS',&#13;&#10;                lineHeight: 1.15,&#13;&#10;            }}&#13;&#10;        &gt;&#13;&#10;            Pizza Snack Play&#13;&#10;        &lt;/Text&gt;&#13;&#10;&#13;&#10;        &lt;Box style={{ marginTop: 18, width: 96, height: 7, borderRadius: 4, background: '#AFC440' }} /&gt;&#13;&#10;&#13;&#10;        &lt;Text&#13;&#10;            style={{&#13;&#10;                marginTop: 26,&#13;&#10;                fontSize: 23,&#13;&#10;                color: '#2A2333',&#13;&#10;                fontFamily: 'Verdana',&#13;&#10;                lineHeight: 1.55,&#13;&#10;            }}&#13;&#10;        &gt;&#13;&#10;            Jadwal snack anak, giliran piket, dan menu hari ini —&#13;&#10;            &lt;span style={{ fontWeight: 'bold', color: '#51277C' }}&gt; semuanya langsung kelihatan di HP&lt;/span&gt;&#13;&#10;            {' '}Bapak dan Ibu.&#13;&#10;        &lt;/Text&gt;&#13;&#10;&#13;&#10;        &lt;Text&#13;&#10;            style={{&#13;&#10;                marginTop: 22,&#13;&#10;                fontSize: 19,&#13;&#10;                color: '#6B6478',&#13;&#10;                fontFamily: 'Verdana',&#13;&#10;                lineHeight: 1.5,&#13;&#10;            }}&#13;&#10;        &gt;&#13;&#10;            Tidak perlu lagi tanya-tanya ke grup.&#13;&#10;        &lt;/Text&gt;&#13;&#10;    &lt;/Box&gt;&#13;&#10;&#13;&#10;    {/* ── kolom kanan: logo + ilustrasi ── */}&#13;&#10;    &lt;Box&#13;&#10;        style={{&#13;&#10;            position: 'relative',&#13;&#10;            zIndex: 1,&#13;&#10;            width: '44%',&#13;&#10;            justifyContent: 'center',&#13;&#10;            alignItems: 'center',&#13;&#10;        }}&#13;&#10;    &gt;&#13;&#10;        &lt;Image&#13;&#10;            src=&quot;assets/app_logo.png&quot;&#13;&#10;            style={{ width: 400, height: 388, objectFit: 'contain' }}&#13;&#10;        /&gt;&#13;&#10;&#13;&#10;        &lt;Box&#13;&#10;            style={{&#13;&#10;                marginTop: 18,&#13;&#10;                flexDirection: 'row',&#13;&#10;                alignItems: 'center',&#13;&#10;                gap: 12,&#13;&#10;                background: 'rgba(81,39,124,0.07)',&#13;&#10;                borderRadius: 14,&#13;&#10;                paddingTop: 12,&#13;&#10;                paddingBottom: 12,&#13;&#10;                paddingLeft: 22,&#13;&#10;                paddingRight: 22,&#13;&#10;            }}&#13;&#10;        &gt;&#13;&#10;            &lt;svg width={34} height={34} viewBox='0 0 24 24'&gt;&#13;&#10;                &lt;path&#13;&#10;                    d='M7 2v3M17 2v3M3 9h18M5 5h14a2 2 0 0 1 2 2v12a2 2 0 0 1-2 2H5a2 2 0 0 1-2-2V7a2 2 0 0 1 2-2z'&#13;&#10;                    fill='none'&#13;&#10;                    stroke='#51277C'&#13;&#10;                    strokeWidth='2'&#13;&#10;                    strokeLinecap='round'&#13;&#10;                /&gt;&#13;&#10;            &lt;/svg&gt;&#13;&#10;            &lt;Text style={{ fontSize: 18, color: '#51277C', fontFamily: 'Verdana', fontWeight: 'bold' }}&gt;&#13;&#10;                Senin sampai Jumat&#13;&#10;            &lt;/Text&gt;&#13;&#10;        &lt;/Box&gt;&#13;&#10;    &lt;/Box&gt;&#13;&#10;&lt;/Slide&gt;"/>
+        <p:cNvPr id="1" name=""/>
         <p:cNvGrpSpPr/>
         <p:nvPr/>
       </p:nvGrpSpPr>
@@ -591,7 +591,10 @@
         </p:spPr>
         <p:txBody>
           <a:bodyPr/>
-          <a:p/>
+          <a:p>
+            <a:pPr/>
+            <a:endParaRPr/>
+          </a:p>
         </p:txBody>
       </p:sp>
       <p:sp>
@@ -958,7 +961,10 @@
         </p:spPr>
         <p:txBody>
           <a:bodyPr/>
-          <a:p/>
+          <a:p>
+            <a:pPr/>
+            <a:endParaRPr/>
+          </a:p>
         </p:txBody>
       </p:sp>
       <p:sp>
@@ -1022,7 +1028,10 @@
         </p:spPr>
         <p:txBody>
           <a:bodyPr/>
-          <a:p/>
+          <a:p>
+            <a:pPr/>
+            <a:endParaRPr/>
+          </a:p>
         </p:txBody>
       </p:sp>
       <p:sp>
@@ -1048,7 +1057,10 @@
         </p:spPr>
         <p:txBody>
           <a:bodyPr/>
-          <a:p/>
+          <a:p>
+            <a:pPr/>
+            <a:endParaRPr/>
+          </a:p>
         </p:txBody>
       </p:sp>
       <p:pic>
@@ -1060,7 +1072,7 @@
           <p:nvPr/>
         </p:nvPicPr>
         <p:blipFill>
-          <a:blip>
+          <a:blip r:embed="rId1">
             <a:extLst>
               <a:ext uri="{96DAC541-7B7A-43D3-8B79-37D633B846F1}">
                 <asvg:svgBlip r:embed="rId1"/>
@@ -1175,7 +1187,10 @@
         </p:spPr>
         <p:txBody>
           <a:bodyPr/>
-          <a:p/>
+          <a:p>
+            <a:pPr/>
+            <a:endParaRPr/>
+          </a:p>
         </p:txBody>
       </p:sp>
       <p:sp>
@@ -1219,7 +1234,7 @@
                 <a:latin typeface="Verdana"/>
                 <a:ea typeface="Verdana"/>
               </a:rPr>
-              <a:t> semuanya langsung kelihatan di HP</a:t>
+              <a:t xml:space="preserve"> semuanya langsung kelihatan di HP</a:t>
             </a:r>
             <a:r>
               <a:rPr lang="en-US" sz="1725">
@@ -1229,7 +1244,7 @@
                 <a:latin typeface="Verdana"/>
                 <a:ea typeface="Verdana"/>
               </a:rPr>
-              <a:t> </a:t>
+              <a:t xml:space="preserve"> </a:t>
             </a:r>
             <a:r>
               <a:rPr lang="en-US" sz="1725">
@@ -1331,7 +1346,10 @@
         </p:spPr>
         <p:txBody>
           <a:bodyPr/>
-          <a:p/>
+          <a:p>
+            <a:pPr/>
+            <a:endParaRPr/>
+          </a:p>
         </p:txBody>
       </p:sp>
       <p:pic>
@@ -1343,7 +1361,7 @@
           <p:nvPr/>
         </p:nvPicPr>
         <p:blipFill>
-          <a:blip>
+          <a:blip r:embed="rId3">
             <a:extLst>
               <a:ext uri="{96DAC541-7B7A-43D3-8B79-37D633B846F1}">
                 <asvg:svgBlip r:embed="rId3"/>
@@ -1406,11 +1424,11 @@
 </file>
 
 <file path=ppt/slides/slide10.xml><?xml version="1.0" encoding="utf-8"?>
-<p:sld xmlns:p="http://schemas.openxmlformats.org/presentationml/2006/main" xmlns:r="http://schemas.openxmlformats.org/officeDocument/2006/relationships" xmlns:a="http://schemas.openxmlformats.org/drawingml/2006/main" xmlns:asvg="http://schemas.microsoft.com/office/drawing/2016/SVG/main" xmlns:mc="http://schemas.openxmlformats.org/markup-compatibility/2006" mc:Ignorable="asvg">
+<p:sld xmlns:p="http://schemas.openxmlformats.org/presentationml/2006/main" xmlns:a="http://schemas.openxmlformats.org/drawingml/2006/main" xmlns:asvg="http://schemas.microsoft.com/office/drawing/2016/SVG/main" xmlns:r="http://schemas.openxmlformats.org/officeDocument/2006/relationships" xmlns:mc="http://schemas.openxmlformats.org/markup-compatibility/2006" mc:Ignorable="asvg">
   <p:cSld>
     <p:spTree>
       <p:nvGrpSpPr>
-        <p:cNvPr id="16" name="" descr="&lt;Slide&#10;    style={{&#10;        width: '1280px',&#10;        height: '720px',&#10;        background: '#FAF7F2',&#10;        paddingTop: 20,&#10;        paddingBottom: 20,&#10;        paddingLeft: 64,&#10;        paddingRight: 64,&#10;    }}&#10;&gt;&#10;    {/* ── A · blok judul ── */}&#10;    &lt;Box style={{ height: 110, justifyContent: 'center' }}&gt;&#10;        &lt;Text&#10;            style={{&#10;                fontSize: 34,&#10;                fontWeight: 'bold',&#10;                color: '#51277C',&#10;                fontFamily: 'Trebuchet MS',&#10;                lineHeight: 1.3,&#10;            }}&#10;        &gt;&#10;            Lihat jadwal snack&#10;        &lt;/Text&gt;&#10;        &lt;Box style={{ marginTop: 10, width: 72, height: 6, borderRadius: 3, background: '#51277C' }} /&gt;&#10;    &lt;/Box&gt;&#10;&#10;    {/* ── B · area konten ── */}&#10;    &lt;Box style={{ height: 530 }}&gt;&#10;        {/* atas 64% · ilustrasi jadwal sepekan */}&#10;        &lt;Box&#10;            style={{&#10;                height: 340,&#10;                background: 'rgba(81,39,124,0.06)',&#10;                borderRadius: 20,&#10;                justifyContent: 'center',&#10;                alignItems: 'center',&#10;            }}&#10;        &gt;&#10;            &lt;svg width={1100} height={300} viewBox='0 0 1100 300'&gt;&#10;                {/* Senin */}&#10;                &lt;rect x='6' y='8' width='208' height='284' rx='16' fill='#FFFFFF' stroke='#E6DFD2' strokeWidth='2' /&gt;&#10;                &lt;rect x='6' y='8' width='208' height='58' rx='16' fill='#EFEAE1' /&gt;&#10;                &lt;rect x='6' y='44' width='208' height='22' fill='#EFEAE1' /&gt;&#10;                &lt;text x='110' y='46' fontFamily='Trebuchet MS' fontSize='24' fontWeight='bold' fill='#51277C' textAnchor='middle'&gt;&#10;                    Senin&#10;                &lt;/text&gt;&#10;                &lt;rect x='28' y='92' width='164' height='16' rx='8' fill='#DED7CB' /&gt;&#10;                &lt;rect x='28' y='124' width='128' height='14' rx='7' fill='#EDE8DF' /&gt;&#10;                &lt;rect x='28' y='158' width='72' height='28' rx='14' fill='#AFC440' /&gt;&#10;                &lt;text x='64' y='178' fontFamily='Verdana' fontSize='15' fill='#3F4718' textAnchor='middle'&gt;&#10;                    Jeruk&#10;                &lt;/text&gt;&#10;                &lt;rect x='28' y='214' width='164' height='1' fill='#EFEAE1' /&gt;&#10;                &lt;circle cx='44' cy='240' r='12' fill='#DED7CB' /&gt;&#10;                &lt;rect x='64' y='233' width='104' height='12' rx='6' fill='#EDE8DF' /&gt;&#10;&#10;                {/* Selasa */}&#10;                &lt;rect x='226' y='8' width='208' height='284' rx='16' fill='#FFFFFF' stroke='#E6DFD2' strokeWidth='2' /&gt;&#10;                &lt;rect x='226' y='8' width='208' height='58' rx='16' fill='#EFEAE1' /&gt;&#10;                &lt;rect x='226' y='44' width='208' height='22' fill='#EFEAE1' /&gt;&#10;                &lt;text x='330' y='46' fontFamily='Trebuchet MS' fontSize='24' fontWeight='bold' fill='#51277C' textAnchor='middle'&gt;&#10;                    Selasa&#10;                &lt;/text&gt;&#10;                &lt;rect x='248' y='92' width='164' height='16' rx='8' fill='#DED7CB' /&gt;&#10;                &lt;rect x='248' y='124' width='112' height='14' rx='7' fill='#EDE8DF' /&gt;&#10;                &lt;rect x='248' y='158' width='72' height='28' rx='14' fill='#AFC440' /&gt;&#10;                &lt;text x='284' y='178' fontFamily='Verdana' fontSize='15' fill='#3F4718' textAnchor='middle'&gt;&#10;                    Pisang&#10;                &lt;/text&gt;&#10;                &lt;rect x='248' y='214' width='164' height='1' fill='#EFEAE1' /&gt;&#10;                &lt;circle cx='264' cy='240' r='12' fill='#DED7CB' /&gt;&#10;                &lt;rect x='284' y='233' width='96' height='12' rx='6' fill='#EDE8DF' /&gt;&#10;&#10;                {/* Rabu — hari ini, disorot */}&#10;                &lt;rect x='446' y='0' width='208' height='300' rx='16' fill='#FFFFFF' stroke='#F3B26C' strokeWidth='5' /&gt;&#10;                &lt;rect x='446' y='0' width='208' height='62' rx='16' fill='#51277C' /&gt;&#10;                &lt;rect x='446' y='40' width='208' height='22' fill='#51277C' /&gt;&#10;                &lt;text x='550' y='42' fontFamily='Trebuchet MS' fontSize='24' fontWeight='bold' fill='#FFFFFF' textAnchor='middle'&gt;&#10;                    Rabu&#10;                &lt;/text&gt;&#10;                &lt;rect x='468' y='92' width='164' height='16' rx='8' fill='#51277C' opacity='0.65' /&gt;&#10;                &lt;rect x='468' y='124' width='136' height='14' rx='7' fill='#EDE8DF' /&gt;&#10;                &lt;rect x='468' y='158' width='92' height='28' rx='14' fill='#F3B26C' /&gt;&#10;                &lt;text x='514' y='178' fontFamily='Verdana' fontSize='15' fill='#51277C' textAnchor='middle'&gt;&#10;                    Semangka&#10;                &lt;/text&gt;&#10;                &lt;rect x='468' y='214' width='164' height='1' fill='#EFEAE1' /&gt;&#10;                &lt;circle cx='484' cy='240' r='12' fill='#51277C' opacity='0.25' /&gt;&#10;                &lt;rect x='504' y='233' width='118' height='12' rx='6' fill='#DED7CB' /&gt;&#10;                &lt;circle cx='654' cy='16' r='13' fill='#F3B26C' /&gt;&#10;                &lt;text x='654' y='22' fontFamily='Verdana' fontSize='13' fontWeight='bold' fill='#51277C' textAnchor='middle'&gt;&#10;                    !&#10;                &lt;/text&gt;&#10;&#10;                {/* Kamis */}&#10;                &lt;rect x='666' y='8' width='208' height='284' rx='16' fill='#FFFFFF' stroke='#E6DFD2' strokeWidth='2' /&gt;&#10;                &lt;rect x='666' y='8' width='208' height='58' rx='16' fill='#EFEAE1' /&gt;&#10;                &lt;rect x='666' y='44' width='208' height='22' fill='#EFEAE1' /&gt;&#10;                &lt;text x='770' y='46' fontFamily='Trebuchet MS' fontSize='24' fontWeight='bold' fill='#51277C' textAnchor='middle'&gt;&#10;                    Kamis&#10;                &lt;/text&gt;&#10;                &lt;rect x='688' y='92' width='164' height='16' rx='8' fill='#DED7CB' /&gt;&#10;                &lt;rect x='688' y='124' width='120' height='14' rx='7' fill='#EDE8DF' /&gt;&#10;                &lt;rect x='688' y='158' width='64' height='28' rx='14' fill='#AFC440' /&gt;&#10;                &lt;text x='720' y='178' fontFamily='Verdana' fontSize='15' fill='#3F4718' textAnchor='middle'&gt;&#10;                    Apel&#10;                &lt;/text&gt;&#10;                &lt;rect x='688' y='214' width='164' height='1' fill='#EFEAE1' /&gt;&#10;                &lt;circle cx='704' cy='240' r='12' fill='#DED7CB' /&gt;&#10;                &lt;rect x='724' y='233' width='88' height='12' rx='6' fill='#EDE8DF' /&gt;&#10;&#10;                {/* Jumat */}&#10;                &lt;rect x='886' y='8' width='208' height='284' rx='16' fill='#FFFFFF' stroke='#E6DFD2' strokeWidth='2' /&gt;&#10;                &lt;rect x='886' y='8' width='208' height='58' rx='16' fill='#EFEAE1' /&gt;&#10;                &lt;rect x='886' y='44' width='208' height='22' fill='#EFEAE1' /&gt;&#10;                &lt;text x='990' y='46' fontFamily='Trebuchet MS' fontSize='24' fontWeight='bold' fill='#51277C' textAnchor='middle'&gt;&#10;                    Jumat&#10;                &lt;/text&gt;&#10;                &lt;rect x='908' y='92' width='164' height='16' rx='8' fill='#DED7CB' /&gt;&#10;                &lt;rect x='908' y='124' width='132' height='14' rx='7' fill='#EDE8DF' /&gt;&#10;                &lt;rect x='908' y='158' width='70' height='28' rx='14' fill='#AFC440' /&gt;&#10;                &lt;text x='943' y='178' fontFamily='Verdana' fontSize='15' fill='#3F4718' textAnchor='middle'&gt;&#10;                    Melon&#10;                &lt;/text&gt;&#10;                &lt;rect x='908' y='214' width='164' height='1' fill='#EFEAE1' /&gt;&#10;                &lt;circle cx='924' cy='240' r='12' fill='#DED7CB' /&gt;&#10;                &lt;rect x='944' y='233' width='106' height='12' rx='6' fill='#EDE8DF' /&gt;&#10;            &lt;/svg&gt;&#10;        &lt;/Box&gt;&#10;&#10;        {/* bawah · dua kartu 60:40 */}&#10;        &lt;Box style={{ marginTop: 18, height: 172, flexDirection: 'row', gap: 24 }}&gt;&#10;            &lt;Box&#10;                style={{&#10;                    width: '60%',&#10;                    background: '#FFFFFF',&#10;                    borderRadius: 16,&#10;                    boxShadow: '0 4px 20px rgba(0,0,0,0.08)',&#10;                    padding: 24,&#10;                    borderLeft: '8px solid #F3B26C',&#10;                }}&#10;            &gt;&#10;                &lt;Text&#10;                    style={{&#10;                        fontSize: 26,&#10;                        fontWeight: 'bold',&#10;                        color: '#51277C',&#10;                        fontFamily: 'Trebuchet MS',&#10;                    }}&#10;                &gt;&#10;                    Hari ini &amp;amp; minggu ini&#10;                &lt;/Text&gt;&#10;                &lt;Text&#10;                    style={{&#10;                        marginTop: 10,&#10;                        fontSize: 19,&#10;                        color: '#6B6478',&#10;                        fontFamily: 'Verdana',&#10;                        lineHeight: 1.5,&#10;                    }}&#10;                &gt;&#10;                    Begitu aplikasi dibuka, makanan dan buahnya langsung kelihatan. Hari yang sedang berjalan ditandai, jadi tidak salah lihat.&#10;                &lt;/Text&gt;&#10;            &lt;/Box&gt;&#10;&#10;            &lt;Box&#10;                style={{&#10;                    width: '40%',&#10;                    background: '#FFFFFF',&#10;                    borderRadius: 16,&#10;                    boxShadow: '0 4px 20px rgba(0,0,0,0.08)',&#10;                    padding: 24,&#10;                    borderLeft: '8px solid #AFC440',&#10;                }}&#10;            &gt;&#10;                &lt;Text&#10;                    style={{&#10;                        fontSize: 26,&#10;                        fontWeight: 'bold',&#10;                        color: '#51277C',&#10;                        fontFamily: 'Trebuchet MS',&#10;                    }}&#10;                &gt;&#10;                    Bulan ini&#10;                &lt;/Text&gt;&#10;                &lt;Text&#10;                    style={{&#10;                        marginTop: 10,&#10;                        fontSize: 19,&#10;                        color: '#6B6478',&#10;                        fontFamily: 'Verdana',&#10;                        lineHeight: 1.5,&#10;                    }}&#10;                &gt;&#10;                    Kalender penuh satu bulan — bisa melihat jadwal jauh hari sebelumnya.&#10;                &lt;/Text&gt;&#10;            &lt;/Box&gt;&#10;        &lt;/Box&gt;&#10;    &lt;/Box&gt;&#10;&#10;    {/* ── C · bilah kaki ── */}&#10;    &lt;Box&#10;        style={{&#10;            height: 40,&#10;            flexDirection: 'row',&#10;            alignItems: 'center',&#10;            justifyContent: 'space-between',&#10;        }}&#10;    &gt;&#10;        &lt;Text style={{ fontSize: 14, color: '#6B6478', fontFamily: 'Verdana' }}&gt;&#10;            Pizza Snack Play · Panduan Orang Tua&#10;        &lt;/Text&gt;&#10;        &lt;Text style={{ fontSize: 14, color: '#6B6478', fontFamily: 'Verdana' }}&gt;10 / 15&lt;/Text&gt;&#10;    &lt;/Box&gt;&#10;&lt;/Slide&gt;"/>
+        <p:cNvPr id="16" name="" descr="&lt;Slide&#13;&#10;    style={{&#13;&#10;        width: '1280px',&#13;&#10;        height: '720px',&#13;&#10;        background: '#FAF7F2',&#13;&#10;        paddingTop: 20,&#13;&#10;        paddingBottom: 20,&#13;&#10;        paddingLeft: 64,&#13;&#10;        paddingRight: 64,&#13;&#10;    }}&#13;&#10;&gt;&#13;&#10;    {/* ── A · blok judul ── */}&#13;&#10;    &lt;Box style={{ height: 110, justifyContent: 'center' }}&gt;&#13;&#10;        &lt;Text&#13;&#10;            style={{&#13;&#10;                fontSize: 34,&#13;&#10;                fontWeight: 'bold',&#13;&#10;                color: '#51277C',&#13;&#10;                fontFamily: 'Trebuchet MS',&#13;&#10;                lineHeight: 1.3,&#13;&#10;            }}&#13;&#10;        &gt;&#13;&#10;            Lihat jadwal snack&#13;&#10;        &lt;/Text&gt;&#13;&#10;        &lt;Box style={{ marginTop: 10, width: 72, height: 6, borderRadius: 3, background: '#51277C' }} /&gt;&#13;&#10;    &lt;/Box&gt;&#13;&#10;&#13;&#10;    {/* ── B · area konten ── */}&#13;&#10;    &lt;Box style={{ height: 530 }}&gt;&#13;&#10;        {/* atas 64% · ilustrasi jadwal sepekan */}&#13;&#10;        &lt;Box&#13;&#10;            style={{&#13;&#10;                height: 340,&#13;&#10;                background: 'rgba(81,39,124,0.06)',&#13;&#10;                borderRadius: 20,&#13;&#10;                justifyContent: 'center',&#13;&#10;                alignItems: 'center',&#13;&#10;            }}&#13;&#10;        &gt;&#13;&#10;            &lt;svg width={1100} height={300} viewBox='0 0 1100 300'&gt;&#13;&#10;                {/* Senin */}&#13;&#10;                &lt;rect x='6' y='8' width='208' height='284' rx='16' fill='#FFFFFF' stroke='#E6DFD2' strokeWidth='2' /&gt;&#13;&#10;                &lt;rect x='6' y='8' width='208' height='58' rx='16' fill='#EFEAE1' /&gt;&#13;&#10;                &lt;rect x='6' y='44' width='208' height='22' fill='#EFEAE1' /&gt;&#13;&#10;                &lt;text x='110' y='46' fontFamily='Trebuchet MS' fontSize='24' fontWeight='bold' fill='#51277C' textAnchor='middle'&gt;&#13;&#10;                    Senin&#13;&#10;                &lt;/text&gt;&#13;&#10;                &lt;rect x='28' y='92' width='164' height='16' rx='8' fill='#DED7CB' /&gt;&#13;&#10;                &lt;rect x='28' y='124' width='128' height='14' rx='7' fill='#EDE8DF' /&gt;&#13;&#10;                &lt;rect x='28' y='158' width='72' height='28' rx='14' fill='#AFC440' /&gt;&#13;&#10;                &lt;text x='64' y='178' fontFamily='Verdana' fontSize='15' fill='#3F4718' textAnchor='middle'&gt;&#13;&#10;                    Jeruk&#13;&#10;                &lt;/text&gt;&#13;&#10;                &lt;rect x='28' y='214' width='164' height='1' fill='#EFEAE1' /&gt;&#13;&#10;                &lt;circle cx='44' cy='240' r='12' fill='#DED7CB' /&gt;&#13;&#10;                &lt;rect x='64' y='233' width='104' height='12' rx='6' fill='#EDE8DF' /&gt;&#13;&#10;&#13;&#10;                {/* Selasa */}&#13;&#10;                &lt;rect x='226' y='8' width='208' height='284' rx='16' fill='#FFFFFF' stroke='#E6DFD2' strokeWidth='2' /&gt;&#13;&#10;                &lt;rect x='226' y='8' width='208' height='58' rx='16' fill='#EFEAE1' /&gt;&#13;&#10;                &lt;rect x='226' y='44' width='208' height='22' fill='#EFEAE1' /&gt;&#13;&#10;                &lt;text x='330' y='46' fontFamily='Trebuchet MS' fontSize='24' fontWeight='bold' fill='#51277C' textAnchor='middle'&gt;&#13;&#10;                    Selasa&#13;&#10;                &lt;/text&gt;&#13;&#10;                &lt;rect x='248' y='92' width='164' height='16' rx='8' fill='#DED7CB' /&gt;&#13;&#10;                &lt;rect x='248' y='124' width='112' height='14' rx='7' fill='#EDE8DF' /&gt;&#13;&#10;                &lt;rect x='248' y='158' width='72' height='28' rx='14' fill='#AFC440' /&gt;&#13;&#10;                &lt;text x='284' y='178' fontFamily='Verdana' fontSize='15' fill='#3F4718' textAnchor='middle'&gt;&#13;&#10;                    Pisang&#13;&#10;                &lt;/text&gt;&#13;&#10;                &lt;rect x='248' y='214' width='164' height='1' fill='#EFEAE1' /&gt;&#13;&#10;                &lt;circle cx='264' cy='240' r='12' fill='#DED7CB' /&gt;&#13;&#10;                &lt;rect x='284' y='233' width='96' height='12' rx='6' fill='#EDE8DF' /&gt;&#13;&#10;&#13;&#10;                {/* Rabu — hari ini, disorot */}&#13;&#10;                &lt;rect x='446' y='0' width='208' height='300' rx='16' fill='#FFFFFF' stroke='#F3B26C' strokeWidth='5' /&gt;&#13;&#10;                &lt;rect x='446' y='0' width='208' height='62' rx='16' fill='#51277C' /&gt;&#13;&#10;                &lt;rect x='446' y='40' width='208' height='22' fill='#51277C' /&gt;&#13;&#10;                &lt;text x='550' y='42' fontFamily='Trebuchet MS' fontSize='24' fontWeight='bold' fill='#FFFFFF' textAnchor='middle'&gt;&#13;&#10;                    Rabu&#13;&#10;                &lt;/text&gt;&#13;&#10;                &lt;rect x='468' y='92' width='164' height='16' rx='8' fill='#51277C' opacity='0.65' /&gt;&#13;&#10;                &lt;rect x='468' y='124' width='136' height='14' rx='7' fill='#EDE8DF' /&gt;&#13;&#10;                &lt;rect x='468' y='158' width='92' height='28' rx='14' fill='#F3B26C' /&gt;&#13;&#10;                &lt;text x='514' y='178' fontFamily='Verdana' fontSize='15' fill='#51277C' textAnchor='middle'&gt;&#13;&#10;                    Semangka&#13;&#10;                &lt;/text&gt;&#13;&#10;                &lt;rect x='468' y='214' width='164' height='1' fill='#EFEAE1' /&gt;&#13;&#10;                &lt;circle cx='484' cy='240' r='12' fill='#51277C' opacity='0.25' /&gt;&#13;&#10;                &lt;rect x='504' y='233' width='118' height='12' rx='6' fill='#DED7CB' /&gt;&#13;&#10;                &lt;circle cx='654' cy='16' r='13' fill='#F3B26C' /&gt;&#13;&#10;                &lt;text x='654' y='22' fontFamily='Verdana' fontSize='13' fontWeight='bold' fill='#51277C' textAnchor='middle'&gt;&#13;&#10;                    !&#13;&#10;                &lt;/text&gt;&#13;&#10;&#13;&#10;                {/* Kamis */}&#13;&#10;                &lt;rect x='666' y='8' width='208' height='284' rx='16' fill='#FFFFFF' stroke='#E6DFD2' strokeWidth='2' /&gt;&#13;&#10;                &lt;rect x='666' y='8' width='208' height='58' rx='16' fill='#EFEAE1' /&gt;&#13;&#10;                &lt;rect x='666' y='44' width='208' height='22' fill='#EFEAE1' /&gt;&#13;&#10;                &lt;text x='770' y='46' fontFamily='Trebuchet MS' fontSize='24' fontWeight='bold' fill='#51277C' textAnchor='middle'&gt;&#13;&#10;                    Kamis&#13;&#10;                &lt;/text&gt;&#13;&#10;                &lt;rect x='688' y='92' width='164' height='16' rx='8' fill='#DED7CB' /&gt;&#13;&#10;                &lt;rect x='688' y='124' width='120' height='14' rx='7' fill='#EDE8DF' /&gt;&#13;&#10;                &lt;rect x='688' y='158' width='64' height='28' rx='14' fill='#AFC440' /&gt;&#13;&#10;                &lt;text x='720' y='178' fontFamily='Verdana' fontSize='15' fill='#3F4718' textAnchor='middle'&gt;&#13;&#10;                    Apel&#13;&#10;                &lt;/text&gt;&#13;&#10;                &lt;rect x='688' y='214' width='164' height='1' fill='#EFEAE1' /&gt;&#13;&#10;                &lt;circle cx='704' cy='240' r='12' fill='#DED7CB' /&gt;&#13;&#10;                &lt;rect x='724' y='233' width='88' height='12' rx='6' fill='#EDE8DF' /&gt;&#13;&#10;&#13;&#10;                {/* Jumat */}&#13;&#10;                &lt;rect x='886' y='8' width='208' height='284' rx='16' fill='#FFFFFF' stroke='#E6DFD2' strokeWidth='2' /&gt;&#13;&#10;                &lt;rect x='886' y='8' width='208' height='58' rx='16' fill='#EFEAE1' /&gt;&#13;&#10;                &lt;rect x='886' y='44' width='208' height='22' fill='#EFEAE1' /&gt;&#13;&#10;                &lt;text x='990' y='46' fontFamily='Trebuchet MS' fontSize='24' fontWeight='bold' fill='#51277C' textAnchor='middle'&gt;&#13;&#10;                    Jumat&#13;&#10;                &lt;/text&gt;&#13;&#10;                &lt;rect x='908' y='92' width='164' height='16' rx='8' fill='#DED7CB' /&gt;&#13;&#10;                &lt;rect x='908' y='124' width='132' height='14' rx='7' fill='#EDE8DF' /&gt;&#13;&#10;                &lt;rect x='908' y='158' width='70' height='28' rx='14' fill='#AFC440' /&gt;&#13;&#10;                &lt;text x='943' y='178' fontFamily='Verdana' fontSize='15' fill='#3F4718' textAnchor='middle'&gt;&#13;&#10;                    Melon&#13;&#10;                &lt;/text&gt;&#13;&#10;                &lt;rect x='908' y='214' width='164' height='1' fill='#EFEAE1' /&gt;&#13;&#10;                &lt;circle cx='924' cy='240' r='12' fill='#DED7CB' /&gt;&#13;&#10;                &lt;rect x='944' y='233' width='106' height='12' rx='6' fill='#EDE8DF' /&gt;&#13;&#10;            &lt;/svg&gt;&#13;&#10;        &lt;/Box&gt;&#13;&#10;&#13;&#10;        {/* bawah · dua kartu 60:40 */}&#13;&#10;        &lt;Box style={{ marginTop: 18, height: 172, flexDirection: 'row', gap: 24 }}&gt;&#13;&#10;            &lt;Box&#13;&#10;                style={{&#13;&#10;                    width: '60%',&#13;&#10;                    background: '#FFFFFF',&#13;&#10;                    borderRadius: 16,&#13;&#10;                    boxShadow: '0 4px 20px rgba(0,0,0,0.08)',&#13;&#10;                    padding: 24,&#13;&#10;                    borderLeft: '8px solid #F3B26C',&#13;&#10;                }}&#13;&#10;            &gt;&#13;&#10;                &lt;Text&#13;&#10;                    style={{&#13;&#10;                        fontSize: 26,&#13;&#10;                        fontWeight: 'bold',&#13;&#10;                        color: '#51277C',&#13;&#10;                        fontFamily: 'Trebuchet MS',&#13;&#10;                    }}&#13;&#10;                &gt;&#13;&#10;                    Hari ini &amp;amp; minggu ini&#13;&#10;                &lt;/Text&gt;&#13;&#10;                &lt;Text&#13;&#10;                    style={{&#13;&#10;                        marginTop: 10,&#13;&#10;                        fontSize: 19,&#13;&#10;                        color: '#6B6478',&#13;&#10;                        fontFamily: 'Verdana',&#13;&#10;                        lineHeight: 1.5,&#13;&#10;                    }}&#13;&#10;                &gt;&#13;&#10;                    Makanan dan buahnya langsung kelihatan, berikut nama anak yang piket hari itu. Hari berjalan ditandai.&#13;&#10;                &lt;/Text&gt;&#13;&#10;            &lt;/Box&gt;&#13;&#10;&#13;&#10;            &lt;Box&#13;&#10;                style={{&#13;&#10;                    width: '40%',&#13;&#10;                    background: '#FFFFFF',&#13;&#10;                    borderRadius: 16,&#13;&#10;                    boxShadow: '0 4px 20px rgba(0,0,0,0.08)',&#13;&#10;                    padding: 24,&#13;&#10;                    borderLeft: '8px solid #AFC440',&#13;&#10;                }}&#13;&#10;            &gt;&#13;&#10;                &lt;Text&#13;&#10;                    style={{&#13;&#10;                        fontSize: 26,&#13;&#10;                        fontWeight: 'bold',&#13;&#10;                        color: '#51277C',&#13;&#10;                        fontFamily: 'Trebuchet MS',&#13;&#10;                    }}&#13;&#10;                &gt;&#13;&#10;                    Bulan ini&#13;&#10;                &lt;/Text&gt;&#13;&#10;                &lt;Text&#13;&#10;                    style={{&#13;&#10;                        marginTop: 10,&#13;&#10;                        fontSize: 19,&#13;&#10;                        color: '#6B6478',&#13;&#10;                        fontFamily: 'Verdana',&#13;&#10;                        lineHeight: 1.5,&#13;&#10;                    }}&#13;&#10;                &gt;&#13;&#10;                    Kalender penuh satu bulan — bisa melihat jadwal jauh hari sebelumnya.&#13;&#10;                &lt;/Text&gt;&#13;&#10;            &lt;/Box&gt;&#13;&#10;        &lt;/Box&gt;&#13;&#10;    &lt;/Box&gt;&#13;&#10;&#13;&#10;    {/* ── C · bilah kaki ── */}&#13;&#10;    &lt;Box&#13;&#10;        style={{&#13;&#10;            height: 40,&#13;&#10;            flexDirection: 'row',&#13;&#10;            alignItems: 'center',&#13;&#10;            justifyContent: 'space-between',&#13;&#10;        }}&#13;&#10;    &gt;&#13;&#10;        &lt;Text style={{ fontSize: 14, color: '#6B6478', fontFamily: 'Verdana' }}&gt;&#13;&#10;            Pizza Snack Play · Panduan Orang Tua&#13;&#10;        &lt;/Text&gt;&#13;&#10;        &lt;Text style={{ fontSize: 14, color: '#6B6478', fontFamily: 'Verdana' }}&gt;10 / 15&lt;/Text&gt;&#13;&#10;    &lt;/Box&gt;&#13;&#10;&lt;/Slide&gt;&#13;&#10;"/>
         <p:cNvGrpSpPr/>
         <p:nvPr/>
       </p:nvGrpSpPr>
@@ -1544,7 +1562,7 @@
           <p:nvPr/>
         </p:nvPicPr>
         <p:blipFill>
-          <a:blip>
+          <a:blip r:embed="rId1">
             <a:extLst>
               <a:ext uri="{96DAC541-7B7A-43D3-8B79-37D633B846F1}">
                 <asvg:svgBlip r:embed="rId1"/>
@@ -1700,7 +1718,7 @@
         <p:spPr>
           <a:xfrm rot="0" flipH="0" flipV="0">
             <a:off x="914400" y="5276850"/>
-            <a:ext cx="5915025" cy="981075"/>
+            <a:ext cx="5915025" cy="657225"/>
           </a:xfrm>
           <a:prstGeom prst="rect"/>
         </p:spPr>
@@ -1722,7 +1740,7 @@
                 <a:latin typeface="Verdana"/>
                 <a:ea typeface="Verdana"/>
               </a:rPr>
-              <a:t>Begitu aplikasi dibuka, makanan dan buahnya langsung kelihatan. Hari yang sedang berjalan ditandai, jadi tidak salah lihat.</a:t>
+              <a:t>Makanan dan buahnya langsung kelihatan, berikut nama anak yang piket hari itu. Hari berjalan ditandai.</a:t>
             </a:r>
             <a:endParaRPr/>
           </a:p>
@@ -1966,11 +1984,11 @@
 </file>
 
 <file path=ppt/slides/slide11.xml><?xml version="1.0" encoding="utf-8"?>
-<p:sld xmlns:p="http://schemas.openxmlformats.org/presentationml/2006/main" xmlns:r="http://schemas.openxmlformats.org/officeDocument/2006/relationships" xmlns:a="http://schemas.openxmlformats.org/drawingml/2006/main" xmlns:asvg="http://schemas.microsoft.com/office/drawing/2016/SVG/main" xmlns:mc="http://schemas.openxmlformats.org/markup-compatibility/2006" mc:Ignorable="asvg">
+<p:sld xmlns:p="http://schemas.openxmlformats.org/presentationml/2006/main" xmlns:a="http://schemas.openxmlformats.org/drawingml/2006/main" xmlns:asvg="http://schemas.microsoft.com/office/drawing/2016/SVG/main" xmlns:r="http://schemas.openxmlformats.org/officeDocument/2006/relationships" xmlns:mc="http://schemas.openxmlformats.org/markup-compatibility/2006" mc:Ignorable="asvg">
   <p:cSld>
     <p:spTree>
       <p:nvGrpSpPr>
-        <p:cNvPr id="32" name="" descr="&lt;Slide&#13;&#10;    style={{&#13;&#10;        width: '1280px',&#13;&#10;        height: '720px',&#13;&#10;        background: '#FAF7F2',&#13;&#10;        paddingTop: 20,&#13;&#10;        paddingBottom: 20,&#13;&#10;        paddingLeft: 64,&#13;&#10;        paddingRight: 64,&#13;&#10;        position: 'relative',&#13;&#10;        overflow: 'hidden',&#13;&#10;    }}&#13;&#10;&gt;&#13;&#10;    {/* sorotan latar Hero */}&#13;&#10;    &lt;Box&#13;&#10;        style={{&#13;&#10;            position: 'absolute',&#13;&#10;            top: 120,&#13;&#10;            left: -60,&#13;&#10;            width: 420,&#13;&#10;            height: 420,&#13;&#10;            borderRadius: 210,&#13;&#10;            background: '#F3B26C',&#13;&#10;            opacity: 0.20,&#13;&#10;        }}&#13;&#10;    /&gt;&#13;&#10;&#13;&#10;    {/* ── A · blok judul ── */}&#13;&#10;    &lt;Box style={{ height: 110, justifyContent: 'center', position: 'relative', zIndex: 1 }}&gt;&#13;&#10;        &lt;Text&#13;&#10;            style={{&#13;&#10;                fontSize: 34,&#13;&#10;                fontWeight: 'bold',&#13;&#10;                color: '#51277C',&#13;&#10;                fontFamily: 'Trebuchet MS',&#13;&#10;                lineHeight: 1.3,&#13;&#10;            }}&#13;&#10;        &gt;&#13;&#10;            Ambil tanggal piket&#13;&#10;        &lt;/Text&gt;&#13;&#10;        &lt;Box style={{ marginTop: 10, width: 72, height: 6, borderRadius: 3, background: '#51277C' }} /&gt;&#13;&#10;    &lt;/Box&gt;&#13;&#10;&#13;&#10;    {/* ── B · area konten ── */}&#13;&#10;    &lt;Box style={{ height: 530, flexDirection: 'row', gap: 30, position: 'relative', zIndex: 1 }}&gt;&#13;&#10;        {/* kiri · frasa raksasa + penjelasan */}&#13;&#10;        &lt;Box style={{ width: '52%', justifyContent: 'center' }}&gt;&#13;&#10;            &lt;Text&#13;&#10;                style={{&#13;&#10;                    fontSize: 72,&#13;&#10;                    fontWeight: 'bold',&#13;&#10;                    color: '#51277C',&#13;&#10;                    fontFamily: 'Trebuchet MS',&#13;&#10;                    lineHeight: 1.05,&#13;&#10;                }}&#13;&#10;            &gt;&#13;&#10;                Siapa cepat,{'\n'}dia dapat.&#13;&#10;            &lt;/Text&gt;&#13;&#10;&#13;&#10;            &lt;Box style={{ marginTop: 24, width: 110, height: 7, borderRadius: 4, background: '#F3B26C' }} /&gt;&#13;&#10;&#13;&#10;            &lt;Text&#13;&#10;                style={{&#13;&#10;                    marginTop: 22,&#13;&#10;                    fontSize: 19,&#13;&#10;                    color: '#2A2333',&#13;&#10;                    fontFamily: 'Verdana',&#13;&#10;                    lineHeight: 1.55,&#13;&#10;                }}&#13;&#10;            &gt;&#13;&#10;                Tanggal yang belum ada petugasnya bisa diambil sendiri. Satu ketuk langsung tercatat.&#13;&#10;            &lt;/Text&gt;&#13;&#10;&#13;&#10;            &lt;Text&#13;&#10;                style={{&#13;&#10;                    marginTop: 14,&#13;&#10;                    fontSize: 19,&#13;&#10;                    color: '#6B6478',&#13;&#10;                    fontFamily: 'Verdana',&#13;&#10;                    lineHeight: 1.55,&#13;&#10;                }}&#13;&#10;            &gt;&#13;&#10;                Kalau keduluan, aplikasi menyebut siapa yang lebih dulu mengambilnya. Jadi tidak ada lagi dua orang merasa sama-sama sudah dapat.&#13;&#10;            &lt;/Text&gt;&#13;&#10;&#13;&#10;            &lt;Box&#13;&#10;                style={{&#13;&#10;                    marginTop: 22,&#13;&#10;                    flexDirection: 'row',&#13;&#10;                    alignItems: 'center',&#13;&#10;                    gap: 12,&#13;&#10;                    alignSelf: 'flex-start',&#13;&#10;                    background: '#FFFFFF',&#13;&#10;                    borderRadius: 14,&#13;&#10;                    boxShadow: '0 4px 20px rgba(0,0,0,0.08)',&#13;&#10;                    paddingTop: 12,&#13;&#10;                    paddingBottom: 12,&#13;&#10;                    paddingLeft: 20,&#13;&#10;                    paddingRight: 22,&#13;&#10;                }}&#13;&#10;            &gt;&#13;&#10;                &lt;svg width={22} height={22} viewBox=&quot;0 0 512 512&quot; xmlns=&quot;http://www.w3.org/2000/svg&quot;&gt;&lt;path fill=&quot;#51277C&quot; d=&quot;M48.5 224H40c-13.3 0-24-10.7-24-24V72c0-9.7 5.8-18.5 14.8-22.2s19.3-1.7 26.2 5.2L98.6 96.6c87.6-86.5 228.7-86.2 315.8 1c87.5 87.5 87.5 229.3 0 316.8s-229.3 87.5-316.8 0c-12.5-12.5-12.5-32.8 0-45.3s32.8-12.5 45.3 0c62.5 62.5 163.8 62.5 226.3 0s62.5-163.8 0-226.3c-62.2-62.2-162.7-62.5-225.3-1L185 183c6.9 6.9 8.9 17.2 5.2 26.2s-12.5 14.8-22.2 14.8H48.5z&quot; /&gt;&lt;/svg&gt;&#13;&#10;                &lt;Text style={{ fontSize: 18, color: '#2A2333', fontFamily: 'Verdana' }}&gt;&#13;&#10;                    Masih bisa dibatalkan sendiri&#13;&#10;                &lt;/Text&gt;&#13;&#10;            &lt;/Box&gt;&#13;&#10;        &lt;/Box&gt;&#13;&#10;&#13;&#10;        {/* kanan · kartu tanggal */}&#13;&#10;        &lt;Box&#13;&#10;            style={{&#13;&#10;                width: '48%',&#13;&#10;                justifyContent: 'center',&#13;&#10;                alignItems: 'center',&#13;&#10;            }}&#13;&#10;        &gt;&#13;&#10;            &lt;svg width={480} height={420} viewBox='0 0 480 420'&gt;&#13;&#10;                {/* kartu tersedia */}&#13;&#10;                &lt;rect x='8' y='8' width='464' height='236' rx='20' fill='#FFFFFF' stroke='#E6DFD2' strokeWidth='3' /&gt;&#13;&#10;                &lt;path d='M8 88 h464 v-32 a20 20 0 0 0 -20 -20 h-424 a20 20 0 0 0 -20 20 z' fill='#51277C' /&gt;&#13;&#10;                &lt;rect x='8' y='56' width='464' height='32' fill='#51277C' /&gt;&#13;&#10;                &lt;text x='36' y='62' fontFamily='Trebuchet MS' fontSize='23' fontWeight='bold' fill='#FFFFFF'&gt;&#13;&#10;                    Selasa, 1 September&#13;&#10;                &lt;/text&gt;&#13;&#10;                &lt;text x='36' y='158' fontFamily='Trebuchet MS' fontSize='64' fontWeight='bold' fill='#51277C'&gt;&#13;&#10;                    1&#13;&#10;                &lt;/text&gt;&#13;&#10;                &lt;text x='36' y='192' fontFamily='Verdana' fontSize='17' fill='#6B6478'&gt;&#13;&#10;                    Belum ada petugas&#13;&#10;                &lt;/text&gt;&#13;&#10;                &lt;rect x='272' y='132' width='176' height='62' rx='18' fill='#F3B26C' /&gt;&#13;&#10;                &lt;text x='360' y='172' fontFamily='Trebuchet MS' fontSize='26' fontWeight='bold' fill='#51277C' textAnchor='middle'&gt;&#13;&#10;                    Ambil&#13;&#10;                &lt;/text&gt;&#13;&#10;&#13;&#10;                {/* kartu sudah diambil */}&#13;&#10;                &lt;rect x='8' y='268' width='464' height='144' rx='20' fill='#FFFFFF' stroke='#AFC440' strokeWidth='4' /&gt;&#13;&#10;                &lt;circle cx='60' cy='340' r='30' fill='#AFC440' /&gt;&#13;&#10;                &lt;path&#13;&#10;                    d='M46 340 l10 11 l19 -22'&#13;&#10;                    fill='none'&#13;&#10;                    stroke='#FFFFFF'&#13;&#10;                    strokeWidth='7'&#13;&#10;                    strokeLinecap='round'&#13;&#10;                    strokeLinejoin='round'&#13;&#10;                /&gt;&#13;&#10;                &lt;text x='108' y='334' fontFamily='Trebuchet MS' fontSize='23' fontWeight='bold' fill='#2A2333'&gt;&#13;&#10;                    Diambil Bu Sari&#13;&#10;                &lt;/text&gt;&#13;&#10;                &lt;text x='108' y='364' fontFamily='Verdana' fontSize='17' fill='#6B6478'&gt;&#13;&#10;                    Tanggal ini sudah punya petugas&#13;&#10;                &lt;/text&gt;&#13;&#10;            &lt;/svg&gt;&#13;&#10;        &lt;/Box&gt;&#13;&#10;    &lt;/Box&gt;&#13;&#10;&#13;&#10;    {/* ── C · bilah kaki ── */}&#13;&#10;    &lt;Box&#13;&#10;        style={{&#13;&#10;            height: 40,&#13;&#10;            flexDirection: 'row',&#13;&#10;            alignItems: 'center',&#13;&#10;            justifyContent: 'space-between',&#13;&#10;            position: 'relative',&#13;&#10;            zIndex: 1,&#13;&#10;        }}&#13;&#10;    &gt;&#13;&#10;        &lt;Text style={{ fontSize: 14, color: '#6B6478', fontFamily: 'Verdana' }}&gt;&#13;&#10;            Pizza Snack Play · Panduan Orang Tua&#13;&#10;        &lt;/Text&gt;&#13;&#10;        &lt;Text style={{ fontSize: 14, color: '#6B6478', fontFamily: 'Verdana' }}&gt;11 / 15&lt;/Text&gt;&#13;&#10;    &lt;/Box&gt;&#13;&#10;&lt;/Slide&gt;"/>
+        <p:cNvPr id="32" name=""/>
         <p:cNvGrpSpPr/>
         <p:nvPr/>
       </p:nvGrpSpPr>
@@ -2003,7 +2021,10 @@
         </p:spPr>
         <p:txBody>
           <a:bodyPr/>
-          <a:p/>
+          <a:p>
+            <a:pPr/>
+            <a:endParaRPr/>
+          </a:p>
         </p:txBody>
       </p:sp>
       <p:sp>
@@ -2618,7 +2639,10 @@
         </p:spPr>
         <p:txBody>
           <a:bodyPr/>
-          <a:p/>
+          <a:p>
+            <a:pPr/>
+            <a:endParaRPr/>
+          </a:p>
         </p:txBody>
       </p:sp>
       <p:sp>
@@ -2679,7 +2703,10 @@
         </p:spPr>
         <p:txBody>
           <a:bodyPr/>
-          <a:p/>
+          <a:p>
+            <a:pPr/>
+            <a:endParaRPr/>
+          </a:p>
         </p:txBody>
       </p:sp>
       <p:sp>
@@ -2758,7 +2785,10 @@
         </p:spPr>
         <p:txBody>
           <a:bodyPr/>
-          <a:p/>
+          <a:p>
+            <a:pPr/>
+            <a:endParaRPr/>
+          </a:p>
         </p:txBody>
       </p:sp>
       <p:sp>
@@ -2865,7 +2895,10 @@
         </p:spPr>
         <p:txBody>
           <a:bodyPr/>
-          <a:p/>
+          <a:p>
+            <a:pPr/>
+            <a:endParaRPr/>
+          </a:p>
         </p:txBody>
       </p:sp>
       <p:pic>
@@ -2877,7 +2910,7 @@
           <p:nvPr/>
         </p:nvPicPr>
         <p:blipFill>
-          <a:blip>
+          <a:blip r:embed="rId1">
             <a:extLst>
               <a:ext uri="{96DAC541-7B7A-43D3-8B79-37D633B846F1}">
                 <asvg:svgBlip r:embed="rId1"/>
@@ -2943,7 +2976,7 @@
           <p:nvPr/>
         </p:nvPicPr>
         <p:blipFill>
-          <a:blip>
+          <a:blip r:embed="rId2">
             <a:extLst>
               <a:ext uri="{96DAC541-7B7A-43D3-8B79-37D633B846F1}">
                 <asvg:svgBlip r:embed="rId2"/>
@@ -3041,11 +3074,11 @@
 </file>
 
 <file path=ppt/slides/slide12.xml><?xml version="1.0" encoding="utf-8"?>
-<p:sld xmlns:p="http://schemas.openxmlformats.org/presentationml/2006/main" xmlns:r="http://schemas.openxmlformats.org/officeDocument/2006/relationships" xmlns:a="http://schemas.openxmlformats.org/drawingml/2006/main" xmlns:asvg="http://schemas.microsoft.com/office/drawing/2016/SVG/main" xmlns:mc="http://schemas.openxmlformats.org/markup-compatibility/2006" mc:Ignorable="asvg">
+<p:sld xmlns:p="http://schemas.openxmlformats.org/presentationml/2006/main" xmlns:a="http://schemas.openxmlformats.org/drawingml/2006/main" xmlns:asvg="http://schemas.microsoft.com/office/drawing/2016/SVG/main" xmlns:r="http://schemas.openxmlformats.org/officeDocument/2006/relationships" xmlns:mc="http://schemas.openxmlformats.org/markup-compatibility/2006" mc:Ignorable="asvg">
   <p:cSld>
     <p:spTree>
       <p:nvGrpSpPr>
-        <p:cNvPr id="47" name="" descr="&lt;Slide&#13;&#10;    style={{&#13;&#10;        width: '1280px',&#13;&#10;        height: '720px',&#13;&#10;        background: '#FAF7F2',&#13;&#10;        paddingTop: 20,&#13;&#10;        paddingBottom: 20,&#13;&#10;        paddingLeft: 64,&#13;&#10;        paddingRight: 64,&#13;&#10;    }}&#13;&#10;&gt;&#13;&#10;    {/* ── A · blok judul ── */}&#13;&#10;    &lt;Box style={{ height: 110, justifyContent: 'center' }}&gt;&#13;&#10;        &lt;Text&#13;&#10;            style={{&#13;&#10;                fontSize: 34,&#13;&#10;                fontWeight: 'bold',&#13;&#10;                color: '#51277C',&#13;&#10;                fontFamily: 'Trebuchet MS',&#13;&#10;                lineHeight: 1.3,&#13;&#10;            }}&#13;&#10;        &gt;&#13;&#10;            Cari menu&#13;&#10;        &lt;/Text&gt;&#13;&#10;        &lt;Box style={{ marginTop: 10, width: 72, height: 6, borderRadius: 3, background: '#51277C' }} /&gt;&#13;&#10;    &lt;/Box&gt;&#13;&#10;&#13;&#10;    {/* ── B · area konten ── */}&#13;&#10;    &lt;Box style={{ height: 530, flexDirection: 'row', gap: 28 }}&gt;&#13;&#10;        {/* kiri 30% · panel ungu */}&#13;&#10;        &lt;Box&#13;&#10;            style={{&#13;&#10;                width: '30%',&#13;&#10;                height: '100%',&#13;&#10;                background: 'linear-gradient(135deg, #51277C 0%, #7A45A8 100%)',&#13;&#10;                borderRadius: 20,&#13;&#10;                padding: 26,&#13;&#10;                justifyContent: 'space-between',&#13;&#10;                alignItems: 'center',&#13;&#10;            }}&#13;&#10;        &gt;&#13;&#10;            &lt;Box style={{ alignItems: 'center' }}&gt;&#13;&#10;                &lt;Text style={{ fontSize: 16, color: 'rgba(255,255,255,0.75)', fontFamily: 'Verdana' }}&gt;&#13;&#10;                    Fitur pendukung&#13;&#10;                &lt;/Text&gt;&#13;&#10;                &lt;Text&#13;&#10;                    style={{&#13;&#10;                        marginTop: 8,&#13;&#10;                        fontSize: 40,&#13;&#10;                        fontWeight: 'bold',&#13;&#10;                        color: '#FFFFFF',&#13;&#10;                        fontFamily: 'Trebuchet MS',&#13;&#10;                    }}&#13;&#10;                &gt;&#13;&#10;                    Cari&#13;&#10;                &lt;/Text&gt;&#13;&#10;            &lt;/Box&gt;&#13;&#10;&#13;&#10;            &lt;svg width={190} height={190} viewBox='0 0 190 190'&gt;&#13;&#10;                &lt;circle cx='82' cy='82' r='54' fill='none' stroke='#FFFFFF' strokeWidth='12' /&gt;&#13;&#10;                &lt;path d='M122 122 l44 44' stroke='#F3B26C' strokeWidth='14' strokeLinecap='round' /&gt;&#13;&#10;                &lt;circle cx='82' cy='82' r='34' fill='#AFC440' opacity='0.35' /&gt;&#13;&#10;                &lt;circle cx='70' cy='72' r='7' fill='#FFFFFF' /&gt;&#13;&#10;                &lt;circle cx='94' cy='88' r='7' fill='#FFFFFF' /&gt;&#13;&#10;                &lt;circle cx='76' cy='98' r='7' fill='#FFFFFF' /&gt;&#13;&#10;            &lt;/svg&gt;&#13;&#10;&#13;&#10;            &lt;Text&#13;&#10;                style={{&#13;&#10;                    fontSize: 17,&#13;&#10;                    color: 'rgba(255,255,255,0.9)',&#13;&#10;                    fontFamily: 'Verdana',&#13;&#10;                    lineHeight: 1.5,&#13;&#10;                    textAlign: 'center',&#13;&#10;                }}&#13;&#10;            &gt;&#13;&#10;                Dipakai kalau ingin tahu riwayat menu.&#13;&#10;            &lt;/Text&gt;&#13;&#10;        &lt;/Box&gt;&#13;&#10;&#13;&#10;        {/* kanan 70% · tiga keterangan */}&#13;&#10;        &lt;Box style={{ width: '70%', height: '100%', justifyContent: 'space-between' }}&gt;&#13;&#10;            &lt;Box&#13;&#10;                style={{&#13;&#10;                    height: 166,&#13;&#10;                    flexDirection: 'row',&#13;&#10;                    alignItems: 'center',&#13;&#10;                    gap: 20,&#13;&#10;                    background: '#FFFFFF',&#13;&#10;                    borderRadius: 16,&#13;&#10;                    boxShadow: '0 4px 20px rgba(0,0,0,0.08)',&#13;&#10;                    paddingLeft: 24,&#13;&#10;                    paddingRight: 26,&#13;&#10;                    borderLeft: '8px solid #AFC440',&#13;&#10;                }}&#13;&#10;            &gt;&#13;&#10;                &lt;Box&#13;&#10;                    style={{&#13;&#10;                        width: 54,&#13;&#10;                        height: 54,&#13;&#10;                        borderRadius: 27,&#13;&#10;                        background: 'rgba(81,39,124,0.10)',&#13;&#10;                        justifyContent: 'center',&#13;&#10;                        alignItems: 'center',&#13;&#10;                    }}&#13;&#10;                &gt;&#13;&#10;                    &lt;svg width={28} height={28} viewBox=&quot;0 0 512 512&quot; xmlns=&quot;http://www.w3.org/2000/svg&quot;&gt;&lt;path fill=&quot;#51277C&quot; d=&quot;M416 208c0 45.9-14.9 88.3-40 122.7L502.6 457.4c12.5 12.5 12.5 32.8 0 45.3s-32.8 12.5-45.3 0L330.7 376c-34.4 25.2-76.8 40-122.7 40C93.1 416 0 322.9 0 208S93.1 0 208 0S416 93.1 416 208zM208 352a144 144 0 1 0 0-288 144 144 0 1 0 0 288z&quot; /&gt;&lt;/svg&gt;&#13;&#10;                &lt;/Box&gt;&#13;&#10;                &lt;Box style={{ flex: 1 }}&gt;&#13;&#10;                    &lt;Text&#13;&#10;                        style={{&#13;&#10;                            fontSize: 24,&#13;&#10;                            fontWeight: 'bold',&#13;&#10;                            color: '#2A2333',&#13;&#10;                            fontFamily: 'Trebuchet MS',&#13;&#10;                            lineHeight: 1.3,&#13;&#10;                        }}&#13;&#10;                    &gt;&#13;&#10;                        Ketik nama makanan atau buah&#13;&#10;                    &lt;/Text&gt;&#13;&#10;                    &lt;Text&#13;&#10;                        style={{&#13;&#10;                            marginTop: 6,&#13;&#10;                            fontSize: 18,&#13;&#10;                            color: '#6B6478',&#13;&#10;                            fontFamily: 'Verdana',&#13;&#10;                            lineHeight: 1.45,&#13;&#10;                        }}&#13;&#10;                    &gt;&#13;&#10;                        Misalnya &quot;jeruk&quot; atau &quot;roti&quot;. Aplikasi langsung menemukannya.&#13;&#10;                    &lt;/Text&gt;&#13;&#10;                &lt;/Box&gt;&#13;&#10;            &lt;/Box&gt;&#13;&#10;&#13;&#10;            &lt;Box&#13;&#10;                style={{&#13;&#10;                    height: 166,&#13;&#10;                    flexDirection: 'row',&#13;&#10;                    alignItems: 'center',&#13;&#10;                    gap: 20,&#13;&#10;                    background: '#FFFFFF',&#13;&#10;                    borderRadius: 16,&#13;&#10;                    boxShadow: '0 4px 20px rgba(0,0,0,0.08)',&#13;&#10;                    paddingLeft: 24,&#13;&#10;                    paddingRight: 26,&#13;&#10;                    borderLeft: '8px solid #AFC440',&#13;&#10;                }}&#13;&#10;            &gt;&#13;&#10;                &lt;Box&#13;&#10;                    style={{&#13;&#10;                        width: 54,&#13;&#10;                        height: 54,&#13;&#10;                        borderRadius: 27,&#13;&#10;                        background: 'rgba(81,39,124,0.10)',&#13;&#10;                        justifyContent: 'center',&#13;&#10;                        alignItems: 'center',&#13;&#10;                    }}&#13;&#10;                &gt;&#13;&#10;                    &lt;svg width={28} height={28} viewBox=&quot;0 0 448 512&quot; xmlns=&quot;http://www.w3.org/2000/svg&quot;&gt;&lt;path fill=&quot;#51277C&quot; d=&quot;M96 32V64H48C21.5 64 0 85.5 0 112v48H448V112c0-26.5-21.5-48-48-48H352V32c0-17.7-14.3-32-32-32s-32 14.3-32 32V64H160V32c0-17.7-14.3-32-32-32S96 14.3 96 32zM448 192H0V464c0 26.5 21.5 48 48 48H400c26.5 0 48-21.5 48-48V192z&quot; /&gt;&lt;/svg&gt;&#13;&#10;                &lt;/Box&gt;&#13;&#10;                &lt;Box style={{ flex: 1 }}&gt;&#13;&#10;                    &lt;Text&#13;&#10;                        style={{&#13;&#10;                            fontSize: 24,&#13;&#10;                            fontWeight: 'bold',&#13;&#10;                            color: '#2A2333',&#13;&#10;                            fontFamily: 'Trebuchet MS',&#13;&#10;                            lineHeight: 1.3,&#13;&#10;                        }}&#13;&#10;                    &gt;&#13;&#10;                        Tahu kapan terakhir disajikan&#13;&#10;                    &lt;/Text&gt;&#13;&#10;                    &lt;Text&#13;&#10;                        style={{&#13;&#10;                            marginTop: 6,&#13;&#10;                            fontSize: 18,&#13;&#10;                            color: '#6B6478',&#13;&#10;                            fontFamily: 'Verdana',&#13;&#10;                            lineHeight: 1.45,&#13;&#10;                        }}&#13;&#10;                    &gt;&#13;&#10;                        Hasilnya berupa daftar tanggal, jadi rotasi menunya kelihatan.&#13;&#10;                    &lt;/Text&gt;&#13;&#10;                &lt;/Box&gt;&#13;&#10;            &lt;/Box&gt;&#13;&#10;&#13;&#10;            &lt;Box&#13;&#10;                style={{&#13;&#10;                    height: 166,&#13;&#10;                    background: '#FFFFFF',&#13;&#10;                    borderRadius: 16,&#13;&#10;                    boxShadow: '0 4px 20px rgba(0,0,0,0.08)',&#13;&#10;                    padding: 22,&#13;&#10;                    borderLeft: '8px solid #F3B26C',&#13;&#10;                }}&#13;&#10;            &gt;&#13;&#10;                &lt;Text&#13;&#10;                    style={{&#13;&#10;                        fontSize: 24,&#13;&#10;                        fontWeight: 'bold',&#13;&#10;                        color: '#2A2333',&#13;&#10;                        fontFamily: 'Trebuchet MS',&#13;&#10;                        lineHeight: 1.3,&#13;&#10;                    }}&#13;&#10;                &gt;&#13;&#10;                    Berguna kalau anak punya pantangan&#13;&#10;                &lt;/Text&gt;&#13;&#10;                &lt;Text&#13;&#10;                    style={{&#13;&#10;                        marginTop: 8,&#13;&#10;                        fontSize: 18,&#13;&#10;                        color: '#6B6478',&#13;&#10;                        fontFamily: 'Verdana',&#13;&#10;                        lineHeight: 1.45,&#13;&#10;                    }}&#13;&#10;                &gt;&#13;&#10;                    Bisa dicek lebih dulu sebelum hari itu tiba. Kalau perlu, hubungi korlas kelas agar menu diganti.&#13;&#10;                &lt;/Text&gt;&#13;&#10;                &lt;Box style={{ marginTop: 'auto' }}&gt;&#13;&#10;                    &lt;Text style={{ fontSize: 15, color: '#51277C', fontFamily: 'Verdana', fontWeight: 'bold' }}&gt;&#13;&#10;                        Contoh: cari &quot;udang&quot;, lalu lihat tanggalnya&#13;&#10;                    &lt;/Text&gt;&#13;&#10;                &lt;/Box&gt;&#13;&#10;            &lt;/Box&gt;&#13;&#10;        &lt;/Box&gt;&#13;&#10;    &lt;/Box&gt;&#13;&#10;&#13;&#10;    {/* ── C · bilah kaki ── */}&#13;&#10;    &lt;Box&#13;&#10;        style={{&#13;&#10;            height: 40,&#13;&#10;            flexDirection: 'row',&#13;&#10;            alignItems: 'center',&#13;&#10;            justifyContent: 'space-between',&#13;&#10;        }}&#13;&#10;    &gt;&#13;&#10;        &lt;Text style={{ fontSize: 14, color: '#6B6478', fontFamily: 'Verdana' }}&gt;&#13;&#10;            Pizza Snack Play · Panduan Orang Tua&#13;&#10;        &lt;/Text&gt;&#13;&#10;        &lt;Text style={{ fontSize: 14, color: '#6B6478', fontFamily: 'Verdana' }}&gt;12 / 15&lt;/Text&gt;&#13;&#10;    &lt;/Box&gt;&#13;&#10;&lt;/Slide&gt;"/>
+        <p:cNvPr id="47" name=""/>
         <p:cNvGrpSpPr/>
         <p:nvPr/>
       </p:nvGrpSpPr>
@@ -3078,7 +3111,10 @@
         </p:spPr>
         <p:txBody>
           <a:bodyPr/>
-          <a:p/>
+          <a:p>
+            <a:pPr/>
+            <a:endParaRPr/>
+          </a:p>
         </p:txBody>
       </p:sp>
       <p:sp>
@@ -3139,7 +3175,10 @@
         </p:spPr>
         <p:txBody>
           <a:bodyPr/>
-          <a:p/>
+          <a:p>
+            <a:pPr/>
+            <a:endParaRPr/>
+          </a:p>
         </p:txBody>
       </p:sp>
       <p:sp>
@@ -3173,7 +3212,10 @@
         </p:spPr>
         <p:txBody>
           <a:bodyPr/>
-          <a:p/>
+          <a:p>
+            <a:pPr/>
+            <a:endParaRPr/>
+          </a:p>
         </p:txBody>
       </p:sp>
       <p:sp>
@@ -3257,7 +3299,7 @@
           <p:nvPr/>
         </p:nvPicPr>
         <p:blipFill>
-          <a:blip>
+          <a:blip r:embed="rId1">
             <a:extLst>
               <a:ext uri="{96DAC541-7B7A-43D3-8B79-37D633B846F1}">
                 <asvg:svgBlip r:embed="rId1"/>
@@ -3348,7 +3390,10 @@
         </p:spPr>
         <p:txBody>
           <a:bodyPr/>
-          <a:p/>
+          <a:p>
+            <a:pPr/>
+            <a:endParaRPr/>
+          </a:p>
         </p:txBody>
       </p:sp>
       <p:sp>
@@ -3405,7 +3450,10 @@
         </p:spPr>
         <p:txBody>
           <a:bodyPr/>
-          <a:p/>
+          <a:p>
+            <a:pPr/>
+            <a:endParaRPr/>
+          </a:p>
         </p:txBody>
       </p:sp>
       <p:sp>
@@ -3433,7 +3481,10 @@
         </p:spPr>
         <p:txBody>
           <a:bodyPr/>
-          <a:p/>
+          <a:p>
+            <a:pPr/>
+            <a:endParaRPr/>
+          </a:p>
         </p:txBody>
       </p:sp>
       <p:pic>
@@ -3445,7 +3496,7 @@
           <p:nvPr/>
         </p:nvPicPr>
         <p:blipFill>
-          <a:blip>
+          <a:blip r:embed="rId2">
             <a:extLst>
               <a:ext uri="{96DAC541-7B7A-43D3-8B79-37D633B846F1}">
                 <asvg:svgBlip r:embed="rId2"/>
@@ -3567,7 +3618,10 @@
         </p:spPr>
         <p:txBody>
           <a:bodyPr/>
-          <a:p/>
+          <a:p>
+            <a:pPr/>
+            <a:endParaRPr/>
+          </a:p>
         </p:txBody>
       </p:sp>
       <p:sp>
@@ -3624,7 +3678,10 @@
         </p:spPr>
         <p:txBody>
           <a:bodyPr/>
-          <a:p/>
+          <a:p>
+            <a:pPr/>
+            <a:endParaRPr/>
+          </a:p>
         </p:txBody>
       </p:sp>
       <p:sp>
@@ -3652,7 +3709,10 @@
         </p:spPr>
         <p:txBody>
           <a:bodyPr/>
-          <a:p/>
+          <a:p>
+            <a:pPr/>
+            <a:endParaRPr/>
+          </a:p>
         </p:txBody>
       </p:sp>
       <p:pic>
@@ -3664,7 +3724,7 @@
           <p:nvPr/>
         </p:nvPicPr>
         <p:blipFill>
-          <a:blip>
+          <a:blip r:embed="rId3">
             <a:extLst>
               <a:ext uri="{96DAC541-7B7A-43D3-8B79-37D633B846F1}">
                 <asvg:svgBlip r:embed="rId3"/>
@@ -3786,7 +3846,10 @@
         </p:spPr>
         <p:txBody>
           <a:bodyPr/>
-          <a:p/>
+          <a:p>
+            <a:pPr/>
+            <a:endParaRPr/>
+          </a:p>
         </p:txBody>
       </p:sp>
       <p:sp>
@@ -3843,7 +3906,10 @@
         </p:spPr>
         <p:txBody>
           <a:bodyPr/>
-          <a:p/>
+          <a:p>
+            <a:pPr/>
+            <a:endParaRPr/>
+          </a:p>
         </p:txBody>
       </p:sp>
       <p:sp>
@@ -4029,11 +4095,11 @@
 </file>
 
 <file path=ppt/slides/slide13.xml><?xml version="1.0" encoding="utf-8"?>
-<p:sld xmlns:p="http://schemas.openxmlformats.org/presentationml/2006/main" xmlns:r="http://schemas.openxmlformats.org/officeDocument/2006/relationships" xmlns:a="http://schemas.openxmlformats.org/drawingml/2006/main" xmlns:asvg="http://schemas.microsoft.com/office/drawing/2016/SVG/main" xmlns:mc="http://schemas.openxmlformats.org/markup-compatibility/2006" mc:Ignorable="asvg">
+<p:sld xmlns:p="http://schemas.openxmlformats.org/presentationml/2006/main" xmlns:a="http://schemas.openxmlformats.org/drawingml/2006/main" xmlns:asvg="http://schemas.microsoft.com/office/drawing/2016/SVG/main" xmlns:r="http://schemas.openxmlformats.org/officeDocument/2006/relationships" xmlns:mc="http://schemas.openxmlformats.org/markup-compatibility/2006" mc:Ignorable="asvg">
   <p:cSld>
     <p:spTree>
       <p:nvGrpSpPr>
-        <p:cNvPr id="75" name="" descr="&lt;Slide&#10;    style={{&#10;        width: '1280px',&#10;        height: '720px',&#10;        background: 'linear-gradient(135deg, #51277C 0%, #7A45A8 100%)',&#10;        paddingTop: 60,&#10;        paddingBottom: 60,&#10;        paddingLeft: 72,&#10;        paddingRight: 72,&#10;        justifyContent: 'center',&#10;        position: 'relative',&#10;        overflow: 'hidden',&#10;    }}&#10;&gt;&#10;    {/* dekorasi: lingkaran centang + bintang */}&#10;    &lt;Box&#10;        style={{&#10;            position: 'absolute',&#10;            bottom: -130,&#10;            right: -40,&#10;            width: 420,&#10;            height: 420,&#10;            borderRadius: 210,&#10;            background: '#AFC440',&#10;            opacity: 0.16,&#10;        }}&#10;    /&gt;&#10;    &lt;Box style={{ position: 'absolute', top: 78, right: 96, opacity: 0.22 }}&gt;&#10;        &lt;svg width={230} height={230} viewBox='0 0 230 230'&gt;&#10;            &lt;circle cx='115' cy='115' r='96' fill='none' stroke='#FFFFFF' strokeWidth='8' /&gt;&#10;            &lt;path&#10;                d='M72 118 l30 32 l60 -70'&#10;                fill='none'&#10;                stroke='#AFC440'&#10;                strokeWidth='16'&#10;                strokeLinecap='round'&#10;                strokeLinejoin='round'&#10;            /&gt;&#10;            &lt;path&#10;                d='M196 36 l8 18 l18 8 l-18 8 l-8 18 l-8 -18 l-18 -8 l18 -8 z'&#10;                fill='#F3B26C'&#10;            /&gt;&#10;        &lt;/svg&gt;&#10;    &lt;/Box&gt;&#10;&#10;    {/* isi */}&#10;    &lt;Box style={{ position: 'relative', zIndex: 1, width: '62%' }}&gt;&#10;        &lt;Box style={{ flexDirection: 'row', alignItems: 'center', gap: 14, alignSelf: 'flex-start' }}&gt;&#10;            &lt;Text&#10;                style={{&#10;                    fontSize: 76,&#10;                    fontWeight: 'bold',&#10;                    color: '#F3B26C',&#10;                    fontFamily: 'Trebuchet MS',&#10;                    lineHeight: 1,&#10;                }}&#10;            &gt;&#10;                04&#10;            &lt;/Text&gt;&#10;            &lt;Box style={{ width: 3, height: 52, background: 'rgba(255,255,255,0.45)' }} /&gt;&#10;            &lt;Text style={{ fontSize: 19, color: 'rgba(255,255,255,0.8)', fontFamily: 'Verdana' }}&gt;&#10;                Bagian terakhir&#10;            &lt;/Text&gt;&#10;        &lt;/Box&gt;&#10;&#10;        &lt;Text&#10;            style={{&#10;                marginTop: 26,&#10;                fontSize: 60,&#10;                fontWeight: 'bold',&#10;                color: '#FFFFFF',&#10;                fontFamily: 'Trebuchet MS',&#10;                lineHeight: 1.15,&#10;            }}&#10;        &gt;&#10;            Yang perlu{'\n'}diingat&#10;        &lt;/Text&gt;&#10;&#10;        &lt;Text&#10;            style={{&#10;                marginTop: 24,&#10;                fontSize: 22,&#10;                color: 'rgba(255,255,255,0.88)',&#10;                fontFamily: 'Verdana',&#10;                lineHeight: 1.5,&#10;            }}&#10;        &gt;&#10;            Empat hal yang paling sering ditanyakan orang tua.&#10;        &lt;/Text&gt;&#10;    &lt;/Box&gt;&#10;&lt;/Slide&gt;"/>
+        <p:cNvPr id="75" name=""/>
         <p:cNvGrpSpPr/>
         <p:nvPr/>
       </p:nvGrpSpPr>
@@ -4074,7 +4140,10 @@
         </p:spPr>
         <p:txBody>
           <a:bodyPr/>
-          <a:p/>
+          <a:p>
+            <a:pPr/>
+            <a:endParaRPr/>
+          </a:p>
         </p:txBody>
       </p:sp>
       <p:sp>
@@ -4467,7 +4536,10 @@
         </p:spPr>
         <p:txBody>
           <a:bodyPr/>
-          <a:p/>
+          <a:p>
+            <a:pPr/>
+            <a:endParaRPr/>
+          </a:p>
         </p:txBody>
       </p:sp>
       <p:pic>
@@ -4479,7 +4551,7 @@
           <p:nvPr/>
         </p:nvPicPr>
         <p:blipFill>
-          <a:blip>
+          <a:blip r:embed="rId1">
             <a:alphaModFix amt="22000"/>
             <a:extLst>
               <a:ext uri="{96DAC541-7B7A-43D3-8B79-37D633B846F1}">
@@ -4560,7 +4632,10 @@
         </p:spPr>
         <p:txBody>
           <a:bodyPr/>
-          <a:p/>
+          <a:p>
+            <a:pPr/>
+            <a:endParaRPr/>
+          </a:p>
         </p:txBody>
       </p:sp>
       <p:sp>
@@ -4696,11 +4771,11 @@
 </file>
 
 <file path=ppt/slides/slide14.xml><?xml version="1.0" encoding="utf-8"?>
-<p:sld xmlns:p="http://schemas.openxmlformats.org/presentationml/2006/main" xmlns:r="http://schemas.openxmlformats.org/officeDocument/2006/relationships" xmlns:a="http://schemas.openxmlformats.org/drawingml/2006/main" xmlns:asvg="http://schemas.microsoft.com/office/drawing/2016/SVG/main" xmlns:mc="http://schemas.openxmlformats.org/markup-compatibility/2006" mc:Ignorable="asvg">
+<p:sld xmlns:p="http://schemas.openxmlformats.org/presentationml/2006/main" xmlns:a="http://schemas.openxmlformats.org/drawingml/2006/main" xmlns:asvg="http://schemas.microsoft.com/office/drawing/2016/SVG/main" xmlns:r="http://schemas.openxmlformats.org/officeDocument/2006/relationships" xmlns:mc="http://schemas.openxmlformats.org/markup-compatibility/2006" mc:Ignorable="asvg">
   <p:cSld>
     <p:spTree>
       <p:nvGrpSpPr>
-        <p:cNvPr id="84" name="" descr="&lt;Slide&#13;&#10;    style={{&#13;&#10;        width: '1280px',&#13;&#10;        height: '720px',&#13;&#10;        background: '#FAF7F2',&#13;&#10;        paddingTop: 20,&#13;&#10;        paddingBottom: 20,&#13;&#10;        paddingLeft: 64,&#13;&#10;        paddingRight: 64,&#13;&#10;    }}&#13;&#10;&gt;&#13;&#10;    {/* ── A · blok judul ── */}&#13;&#10;    &lt;Box style={{ height: 110, justifyContent: 'center' }}&gt;&#13;&#10;        &lt;Text&#13;&#10;            style={{&#13;&#10;                fontSize: 34,&#13;&#10;                fontWeight: 'bold',&#13;&#10;                color: '#51277C',&#13;&#10;                fontFamily: 'Trebuchet MS',&#13;&#10;                lineHeight: 1.3,&#13;&#10;            }}&#13;&#10;        &gt;&#13;&#10;            Empat hal yang perlu diingat&#13;&#10;        &lt;/Text&gt;&#13;&#10;        &lt;Box style={{ marginTop: 10, width: 72, height: 6, borderRadius: 3, background: '#51277C' }} /&gt;&#13;&#10;    &lt;/Box&gt;&#13;&#10;&#13;&#10;    {/* ── B · area konten ── */}&#13;&#10;    &lt;Box style={{ height: 530 }}&gt;&#13;&#10;        &lt;Box style={{ height: 470, flexDirection: 'row', gap: 18 }}&gt;&#13;&#10;            {[&#13;&#10;                {&#13;&#10;                    vb: '0 0 512 512',&#13;&#10;                    d: 'M256 0a256 256 0 1 1 0 512A256 256 0 1 1 256 0zM232 120V256c0 8 4 15.5 10.7 20l96 64c11 7.4 25.9 4.4 33.3-6.7s4.4-25.9-6.7-33.3L280 243.2V120c0-13.3-10.7-24-24-24s-24 10.7-24 24z',&#13;&#10;                    t: 'Jadwal muncul setelah diumumkan',&#13;&#10;                    d: 'Jadwal baru tampil setelah korlas atau admin sekolah mengumumkannya. Kalau hari itu belum muncul, berarti belum diumumkan — bukan hilang.',&#13;&#10;                    g: 'Sabar menunggu',&#13;&#10;                },&#13;&#10;                {&#13;&#10;                    vb: '0 0 640 512',&#13;&#10;                    d: 'M144 0a80 80 0 1 1 0 160A80 80 0 1 1 144 0zM512 0a80 80 0 1 1 0 160A80 80 0 1 1 512 0zM0 298.7C0 239.8 47.8 192 106.7 192h42.7c15.9 0 31 3.5 44.6 9.7c-1.3 7.2-1.9 14.7-1.9 22.3c0 38.2 16.8 72.5 43.3 96c-.2 0-.4 0-.7 0H21.3C9.6 320 0 310.4 0 298.7zM405.3 320c-.2 0-.4 0-.7 0c26.6-23.5 43.3-57.8 43.3-96c0-7.6-.7-15-1.9-22.3c13.6-6.3 28.7-9.7 44.6-9.7h42.7C592.2 192 640 239.8 640 298.7c0 11.8-9.6 21.3-21.3 21.3H405.3zM224 224a96 96 0 1 1 192 0 96 96 0 1 1 -192 0zM128 485.3C128 411.7 187.7 352 261.3 352H378.7C452.3 352 512 411.7 512 485.3c0 14.7-11.9 26.7-26.7 26.7H154.7c-14.7 0-26.7-11.9-26.7-26.7z',&#13;&#10;                    t: 'Satu akun untuk beberapa anak',&#13;&#10;                    d: 'Punya dua anak di kelas berbeda tidak perlu akun tambahan. Pilih kelasnya di bagian atas layar, jadwalnya ikut berganti.',&#13;&#10;                    g: 'Tidak perlu daftar ulang',&#13;&#10;                },&#13;&#10;                {&#13;&#10;                    vb: '0 0 576 512',&#13;&#10;                    d: 'M575.8 255.5c0 18-15 32.1-32 32.1h-32l.7 160.2c0 2.7-.2 5.4-.5 8.1V472c0 22.1-17.9 40-40 40H456c-1.1 0-2.2 0-3.3-.1c-1.4 .1-2.8 .1-4.2 .1H416 392c-22.1 0-40-17.9-40-40V448 384c0-17.7-14.3-32-32-32H256c-17.7 0-32 14.3-32 32v64 24c0 22.1-17.9 40-40 40H160 128.1c-1.5 0-3-.1-4.5-.2c-1.2 .1-2.4 .2-3.6 .2H104c-22.1 0-40-17.9-40-40V360c0-.9 0-1.9 .1-2.8V287.6H32c-18 0-32-14-32-32.1c0-9 3-17 10-24L266.4 8c7-7 15-8 22-8s15 2 21 7L564.8 231.5c8 7 12 15 11 24z',&#13;&#10;                    t: 'Ambil tanggal di kelas anak sendiri',&#13;&#10;                    d: 'Setiap kelas punya baris jadwalnya sendiri. Mengambil tanggal di kelas lain tidak bisa, dan tanggal di kelas anak tidak tertutup oleh kelas lain.',&#13;&#10;                    g: 'Adil per kelas',&#13;&#10;                },&#13;&#10;                {&#13;&#10;                    vb: '0 0 512 512',&#13;&#10;                    d: 'M164.9 24.6c-7.7-18.6-28-28.5-47.4-23.2l-88 24C12.1 30.2 0 46 0 64C0 311.4 200.6 512 448 512c18 0 33.8-12.1 38.6-29.5l24-88c5.3-19.4-4.6-39.7-23.2-47.4l-96-40c-16.3-6.8-35.2-2.1-46.3 11.6L304.7 368C234.3 334.7 177.3 277.7 144 207.3L193.3 167c13.7-11.2 18.4-30 11.6-46.3l-40-96z',&#13;&#10;                    t: 'Perubahan lewat korlas kelas',&#13;&#10;                    d: 'Jadwal yang sudah diumumkan tidak bisa diubah sendiri. Sampaikan ke korlas kelas atau admin sekolah bila ada keperluan mendadak.',&#13;&#10;                    g: 'Jangan diubah sendiri',&#13;&#10;                },&#13;&#10;            ].map((c, idx) =&gt; (&#13;&#10;                &lt;Box&#13;&#10;                    key={idx}&#13;&#10;                    style={{&#13;&#10;                        flex: 1,&#13;&#10;                        height: '100%',&#13;&#10;                        background: '#FFFFFF',&#13;&#10;                        borderRadius: 16,&#13;&#10;                        boxShadow: '0 4px 20px rgba(0,0,0,0.08)',&#13;&#10;                        padding: 24,&#13;&#10;                        borderTop: '8px solid #AFC440',&#13;&#10;                    }}&#13;&#10;                &gt;&#13;&#10;                    &lt;Box&#13;&#10;                        style={{&#13;&#10;                            width: 60,&#13;&#10;                            height: 60,&#13;&#10;                            borderRadius: 30,&#13;&#10;                            background: 'rgba(81,39,124,0.10)',&#13;&#10;                            justifyContent: 'center',&#13;&#10;                            alignItems: 'center',&#13;&#10;                        }}&#13;&#10;                    &gt;&#13;&#10;                        &lt;svg width={30} height={30} viewBox={c.vb} xmlns=&quot;http://www.w3.org/2000/svg&quot;&gt;&lt;path fill=&quot;#51277C&quot; d={c.d} /&gt;&lt;/svg&gt;&#13;&#10;                    &lt;/Box&gt;&#13;&#10;&#13;&#10;                    &lt;Text&#13;&#10;                        style={{&#13;&#10;                            marginTop: 16,&#13;&#10;                            fontSize: 23,&#13;&#10;                            fontWeight: 'bold',&#13;&#10;                            color: '#51277C',&#13;&#10;                            fontFamily: 'Trebuchet MS',&#13;&#10;                            lineHeight: 1.32,&#13;&#10;                        }}&#13;&#10;                    &gt;&#13;&#10;                        {c.t}&#13;&#10;                    &lt;/Text&gt;&#13;&#10;&#13;&#10;                    &lt;Box&#13;&#10;                        style={{&#13;&#10;                            marginTop: 12,&#13;&#10;                            width: 44,&#13;&#10;                            height: 3,&#13;&#10;                            borderRadius: 2,&#13;&#10;                            background: '#AFC440',&#13;&#10;                        }}&#13;&#10;                    /&gt;&#13;&#10;&#13;&#10;                    &lt;Text&#13;&#10;                        style={{&#13;&#10;                            marginTop: 12,&#13;&#10;                            fontSize: 18,&#13;&#10;                            color: '#6B6478',&#13;&#10;                            fontFamily: 'Verdana',&#13;&#10;                            lineHeight: 1.55,&#13;&#10;                        }}&#13;&#10;                    &gt;&#13;&#10;                        {c.d}&#13;&#10;                    &lt;/Text&gt;&#13;&#10;&#13;&#10;                    &lt;Box style={{ marginTop: 'auto' }}&gt;&#13;&#10;                        &lt;Text&#13;&#10;                            style={{&#13;&#10;                                fontSize: 16,&#13;&#10;                                color: '#51277C',&#13;&#10;                                fontFamily: 'Verdana',&#13;&#10;                                fontWeight: 'bold',&#13;&#10;                            }}&#13;&#10;                        &gt;&#13;&#10;                            {c.g}&#13;&#10;                        &lt;/Text&gt;&#13;&#10;                    &lt;/Box&gt;&#13;&#10;                &lt;/Box&gt;&#13;&#10;            ))}&#13;&#10;        &lt;/Box&gt;&#13;&#10;&#13;&#10;        {/* simpulan */}&#13;&#10;        &lt;Box&#13;&#10;            style={{&#13;&#10;                marginTop: 14,&#13;&#10;                height: 46,&#13;&#10;                background: '#51277C',&#13;&#10;                borderRadius: 14,&#13;&#10;                justifyContent: 'center',&#13;&#10;                alignItems: 'center',&#13;&#10;            }}&#13;&#10;        &gt;&#13;&#10;            &lt;Text&#13;&#10;                style={{&#13;&#10;                    fontSize: 19,&#13;&#10;                    color: '#FFFFFF',&#13;&#10;                    fontFamily: 'Verdana',&#13;&#10;                    fontWeight: 'bold',&#13;&#10;                }}&#13;&#10;            &gt;&#13;&#10;                Intinya: satu akun, satu aplikasi, dan semua perubahan disampaikan lewat korlas kelas.&#13;&#10;            &lt;/Text&gt;&#13;&#10;        &lt;/Box&gt;&#13;&#10;    &lt;/Box&gt;&#13;&#10;&#13;&#10;    {/* ── C · bilah kaki ── */}&#13;&#10;    &lt;Box&#13;&#10;        style={{&#13;&#10;            height: 40,&#13;&#10;            flexDirection: 'row',&#13;&#10;            alignItems: 'center',&#13;&#10;            justifyContent: 'space-between',&#13;&#10;        }}&#13;&#10;    &gt;&#13;&#10;        &lt;Text style={{ fontSize: 14, color: '#6B6478', fontFamily: 'Verdana' }}&gt;&#13;&#10;            Pizza Snack Play · Panduan Orang Tua&#13;&#10;        &lt;/Text&gt;&#13;&#10;        &lt;Text style={{ fontSize: 14, color: '#6B6478', fontFamily: 'Verdana' }}&gt;14 / 15&lt;/Text&gt;&#13;&#10;    &lt;/Box&gt;&#13;&#10;&lt;/Slide&gt;"/>
+        <p:cNvPr id="84" name="" descr="&lt;Slide&#13;&#10;    style={{&#13;&#10;        width: '1280px',&#13;&#10;        height: '720px',&#13;&#10;        background: '#FAF7F2',&#13;&#10;        paddingTop: 20,&#13;&#10;        paddingBottom: 20,&#13;&#10;        paddingLeft: 64,&#13;&#10;        paddingRight: 64,&#13;&#10;    }}&#13;&#10;&gt;&#13;&#10;    {/* ── A · blok judul ── */}&#13;&#10;    &lt;Box style={{ height: 110, justifyContent: 'center' }}&gt;&#13;&#10;        &lt;Text&#13;&#10;            style={{&#13;&#10;                fontSize: 34,&#13;&#10;                fontWeight: 'bold',&#13;&#10;                color: '#51277C',&#13;&#10;                fontFamily: 'Trebuchet MS',&#13;&#10;                lineHeight: 1.3,&#13;&#10;            }}&#13;&#10;        &gt;&#13;&#10;            Empat hal yang perlu diingat&#13;&#10;        &lt;/Text&gt;&#13;&#10;        &lt;Box style={{ marginTop: 10, width: 72, height: 6, borderRadius: 3, background: '#51277C' }} /&gt;&#13;&#10;    &lt;/Box&gt;&#13;&#10;&#13;&#10;    {/* ── B · area konten ── */}&#13;&#10;    &lt;Box style={{ height: 530 }}&gt;&#13;&#10;        &lt;Box style={{ height: 470, flexDirection: 'row', gap: 18 }}&gt;&#13;&#10;            {[&#13;&#10;                {&#13;&#10;                    vb: '0 0 512 512',&#13;&#10;                    d: 'M256 0a256 256 0 1 1 0 512A256 256 0 1 1 256 0zM232 120V256c0 8 4 15.5 10.7 20l96 64c11 7.4 25.9 4.4 33.3-6.7s4.4-25.9-6.7-33.3L280 243.2V120c0-13.3-10.7-24-24-24s-24 10.7-24 24z',&#13;&#10;                    t: 'Jadwal muncul setelah diumumkan',&#13;&#10;                    d: 'Jadwal baru tampil setelah korlas atau admin sekolah mengumumkannya. Kalau hari itu belum muncul, berarti belum diumumkan — bukan hilang.',&#13;&#10;                    g: 'Sabar menunggu',&#13;&#10;                },&#13;&#10;                {&#13;&#10;                    vb: '0 0 640 512',&#13;&#10;                    d: 'M144 0a80 80 0 1 1 0 160A80 80 0 1 1 144 0zM512 0a80 80 0 1 1 0 160A80 80 0 1 1 512 0zM0 298.7C0 239.8 47.8 192 106.7 192h42.7c15.9 0 31 3.5 44.6 9.7c-1.3 7.2-1.9 14.7-1.9 22.3c0 38.2 16.8 72.5 43.3 96c-.2 0-.4 0-.7 0H21.3C9.6 320 0 310.4 0 298.7zM405.3 320c-.2 0-.4 0-.7 0c26.6-23.5 43.3-57.8 43.3-96c0-7.6-.7-15-1.9-22.3c13.6-6.3 28.7-9.7 44.6-9.7h42.7C592.2 192 640 239.8 640 298.7c0 11.8-9.6 21.3-21.3 21.3H405.3zM224 224a96 96 0 1 1 192 0 96 96 0 1 1 -192 0zM128 485.3C128 411.7 187.7 352 261.3 352H378.7C452.3 352 512 411.7 512 485.3c0 14.7-11.9 26.7-26.7 26.7H154.7c-14.7 0-26.7-11.9-26.7-26.7z',&#13;&#10;                    t: 'Satu akun untuk beberapa anak',&#13;&#10;                    d: 'Punya dua anak di kelas berbeda tidak perlu akun tambahan. Pilih kelasnya di bagian atas layar, jadwalnya ikut berganti.',&#13;&#10;                    g: 'Tidak perlu daftar ulang',&#13;&#10;                },&#13;&#10;                {&#13;&#10;                    vb: '0 0 576 512',&#13;&#10;                    d: 'M575.8 255.5c0 18-15 32.1-32 32.1h-32l.7 160.2c0 2.7-.2 5.4-.5 8.1V472c0 22.1-17.9 40-40 40H456c-1.1 0-2.2 0-3.3-.1c-1.4 .1-2.8 .1-4.2 .1H416 392c-22.1 0-40-17.9-40-40V448 384c0-17.7-14.3-32-32-32H256c-17.7 0-32 14.3-32 32v64 24c0 22.1-17.9 40-40 40H160 128.1c-1.5 0-3-.1-4.5-.2c-1.2 .1-2.4 .2-3.6 .2H104c-22.1 0-40-17.9-40-40V360c0-.9 0-1.9 .1-2.8V287.6H32c-18 0-32-14-32-32.1c0-9 3-17 10-24L266.4 8c7-7 15-8 22-8s15 2 21 7L564.8 231.5c8 7 12 15 11 24z',&#13;&#10;                    t: 'Ambil tanggal di kelas anak sendiri',&#13;&#10;                    d: 'Setiap kelas punya barisnya sendiri. Ambil tanggal di kelas lain tidak bisa, dan yang sudah ditentukan korlas tidak ikut direbutkan.',&#13;&#10;                    g: 'Adil per kelas',&#13;&#10;                },&#13;&#10;                {&#13;&#10;                    vb: '0 0 512 512',&#13;&#10;                    d: 'M164.9 24.6c-7.7-18.6-28-28.5-47.4-23.2l-88 24C12.1 30.2 0 46 0 64C0 311.4 200.6 512 448 512c18 0 33.8-12.1 38.6-29.5l24-88c5.3-19.4-4.6-39.7-23.2-47.4l-96-40c-16.3-6.8-35.2-2.1-46.3 11.6L304.7 368C234.3 334.7 177.3 277.7 144 207.3L193.3 167c13.7-11.2 18.4-30 11.6-46.3l-40-96z',&#13;&#10;                    t: 'Perubahan lewat korlas kelas',&#13;&#10;                    d: 'Jadwal yang sudah diumumkan tidak bisa diubah sendiri. Sampaikan ke korlas kelas atau admin sekolah bila ada keperluan mendadak.',&#13;&#10;                    g: 'Jangan diubah sendiri',&#13;&#10;                },&#13;&#10;            ].map((c, idx) =&gt; (&#13;&#10;                &lt;Box&#13;&#10;                    key={idx}&#13;&#10;                    style={{&#13;&#10;                        flex: 1,&#13;&#10;                        height: '100%',&#13;&#10;                        background: '#FFFFFF',&#13;&#10;                        borderRadius: 16,&#13;&#10;                        boxShadow: '0 4px 20px rgba(0,0,0,0.08)',&#13;&#10;                        padding: 24,&#13;&#10;                        borderTop: '8px solid #AFC440',&#13;&#10;                    }}&#13;&#10;                &gt;&#13;&#10;                    &lt;Box&#13;&#10;                        style={{&#13;&#10;                            width: 60,&#13;&#10;                            height: 60,&#13;&#10;                            borderRadius: 30,&#13;&#10;                            background: 'rgba(81,39,124,0.10)',&#13;&#10;                            justifyContent: 'center',&#13;&#10;                            alignItems: 'center',&#13;&#10;                        }}&#13;&#10;                    &gt;&#13;&#10;                        &lt;svg width={30} height={30} viewBox={c.vb} xmlns=&quot;http://www.w3.org/2000/svg&quot;&gt;&lt;path fill=&quot;#51277C&quot; d={c.d} /&gt;&lt;/svg&gt;&#13;&#10;                    &lt;/Box&gt;&#13;&#10;&#13;&#10;                    &lt;Text&#13;&#10;                        style={{&#13;&#10;                            marginTop: 16,&#13;&#10;                            fontSize: 23,&#13;&#10;                            fontWeight: 'bold',&#13;&#10;                            color: '#51277C',&#13;&#10;                            fontFamily: 'Trebuchet MS',&#13;&#10;                            lineHeight: 1.32,&#13;&#10;                        }}&#13;&#10;                    &gt;&#13;&#10;                        {c.t}&#13;&#10;                    &lt;/Text&gt;&#13;&#10;&#13;&#10;                    &lt;Box&#13;&#10;                        style={{&#13;&#10;                            marginTop: 12,&#13;&#10;                            width: 44,&#13;&#10;                            height: 3,&#13;&#10;                            borderRadius: 2,&#13;&#10;                            background: '#AFC440',&#13;&#10;                        }}&#13;&#10;                    /&gt;&#13;&#10;&#13;&#10;                    &lt;Text&#13;&#10;                        style={{&#13;&#10;                            marginTop: 12,&#13;&#10;                            fontSize: 17,&#13;&#10;                            color: '#6B6478',&#13;&#10;                            fontFamily: 'Verdana',&#13;&#10;                            lineHeight: 1.5,&#13;&#10;                        }}&#13;&#10;                    &gt;&#13;&#10;                        {c.d}&#13;&#10;                    &lt;/Text&gt;&#13;&#10;&#13;&#10;                    &lt;Box style={{ marginTop: 'auto' }}&gt;&#13;&#10;                        &lt;Text&#13;&#10;                            style={{&#13;&#10;                                fontSize: 16,&#13;&#10;                                color: '#51277C',&#13;&#10;                                fontFamily: 'Verdana',&#13;&#10;                                fontWeight: 'bold',&#13;&#10;                            }}&#13;&#10;                        &gt;&#13;&#10;                            {c.g}&#13;&#10;                        &lt;/Text&gt;&#13;&#10;                    &lt;/Box&gt;&#13;&#10;                &lt;/Box&gt;&#13;&#10;            ))}&#13;&#10;        &lt;/Box&gt;&#13;&#10;&#13;&#10;        {/* simpulan */}&#13;&#10;        &lt;Box&#13;&#10;            style={{&#13;&#10;                marginTop: 14,&#13;&#10;                height: 46,&#13;&#10;                background: '#51277C',&#13;&#10;                borderRadius: 14,&#13;&#10;                justifyContent: 'center',&#13;&#10;                alignItems: 'center',&#13;&#10;            }}&#13;&#10;        &gt;&#13;&#10;            &lt;Text&#13;&#10;                style={{&#13;&#10;                    fontSize: 19,&#13;&#10;                    color: '#FFFFFF',&#13;&#10;                    fontFamily: 'Verdana',&#13;&#10;                    fontWeight: 'bold',&#13;&#10;                }}&#13;&#10;            &gt;&#13;&#10;                Intinya: satu akun, satu aplikasi, dan semua perubahan disampaikan lewat korlas kelas.&#13;&#10;            &lt;/Text&gt;&#13;&#10;        &lt;/Box&gt;&#13;&#10;    &lt;/Box&gt;&#13;&#10;&#13;&#10;    {/* ── C · bilah kaki ── */}&#13;&#10;    &lt;Box&#13;&#10;        style={{&#13;&#10;            height: 40,&#13;&#10;            flexDirection: 'row',&#13;&#10;            alignItems: 'center',&#13;&#10;            justifyContent: 'space-between',&#13;&#10;        }}&#13;&#10;    &gt;&#13;&#10;        &lt;Text style={{ fontSize: 14, color: '#6B6478', fontFamily: 'Verdana' }}&gt;&#13;&#10;            Pizza Snack Play · Panduan Orang Tua&#13;&#10;        &lt;/Text&gt;&#13;&#10;        &lt;Text style={{ fontSize: 14, color: '#6B6478', fontFamily: 'Verdana' }}&gt;14 / 15&lt;/Text&gt;&#13;&#10;    &lt;/Box&gt;&#13;&#10;&lt;/Slide&gt;&#13;&#10;"/>
         <p:cNvGrpSpPr/>
         <p:nvPr/>
       </p:nvGrpSpPr>
@@ -4924,7 +4999,7 @@
           <p:nvPr/>
         </p:nvPicPr>
         <p:blipFill>
-          <a:blip>
+          <a:blip r:embed="rId1">
             <a:extLst>
               <a:ext uri="{96DAC541-7B7A-43D3-8B79-37D633B846F1}">
                 <asvg:svgBlip r:embed="rId1"/>
@@ -5018,7 +5093,7 @@
         <p:spPr>
           <a:xfrm rot="0" flipH="0" flipV="0">
             <a:off x="838200" y="3219450"/>
-            <a:ext cx="2162175" cy="2552700"/>
+            <a:ext cx="2162175" cy="2047875"/>
           </a:xfrm>
           <a:prstGeom prst="rect"/>
         </p:spPr>
@@ -5029,11 +5104,11 @@
           <a:p>
             <a:pPr>
               <a:lnSpc>
-                <a:spcPct val="155000"/>
-              </a:lnSpc>
-            </a:pPr>
-            <a:r>
-              <a:rPr lang="en-US" sz="1350">
+                <a:spcPct val="150000"/>
+              </a:lnSpc>
+            </a:pPr>
+            <a:r>
+              <a:rPr lang="en-US" sz="1275">
                 <a:solidFill>
                   <a:srgbClr val="6B6478"/>
                 </a:solidFill>
@@ -5208,7 +5283,7 @@
           <p:nvPr/>
         </p:nvPicPr>
         <p:blipFill>
-          <a:blip>
+          <a:blip r:embed="rId2">
             <a:extLst>
               <a:ext uri="{96DAC541-7B7A-43D3-8B79-37D633B846F1}">
                 <asvg:svgBlip r:embed="rId2"/>
@@ -5302,7 +5377,7 @@
         <p:spPr>
           <a:xfrm rot="0" flipH="0" flipV="0">
             <a:off x="3629025" y="3219450"/>
-            <a:ext cx="2152650" cy="1914525"/>
+            <a:ext cx="2152650" cy="1457325"/>
           </a:xfrm>
           <a:prstGeom prst="rect"/>
         </p:spPr>
@@ -5313,11 +5388,11 @@
           <a:p>
             <a:pPr>
               <a:lnSpc>
-                <a:spcPct val="155000"/>
-              </a:lnSpc>
-            </a:pPr>
-            <a:r>
-              <a:rPr lang="en-US" sz="1350">
+                <a:spcPct val="150000"/>
+              </a:lnSpc>
+            </a:pPr>
+            <a:r>
+              <a:rPr lang="en-US" sz="1275">
                 <a:solidFill>
                   <a:srgbClr val="6B6478"/>
                 </a:solidFill>
@@ -5492,7 +5567,7 @@
           <p:nvPr/>
         </p:nvPicPr>
         <p:blipFill>
-          <a:blip>
+          <a:blip r:embed="rId3">
             <a:extLst>
               <a:ext uri="{96DAC541-7B7A-43D3-8B79-37D633B846F1}">
                 <asvg:svgBlip r:embed="rId3"/>
@@ -5586,7 +5661,7 @@
         <p:spPr>
           <a:xfrm rot="0" flipH="0" flipV="0">
             <a:off x="6410325" y="3219450"/>
-            <a:ext cx="2162175" cy="2238375"/>
+            <a:ext cx="2162175" cy="1752600"/>
           </a:xfrm>
           <a:prstGeom prst="rect"/>
         </p:spPr>
@@ -5597,18 +5672,18 @@
           <a:p>
             <a:pPr>
               <a:lnSpc>
-                <a:spcPct val="155000"/>
-              </a:lnSpc>
-            </a:pPr>
-            <a:r>
-              <a:rPr lang="en-US" sz="1350">
+                <a:spcPct val="150000"/>
+              </a:lnSpc>
+            </a:pPr>
+            <a:r>
+              <a:rPr lang="en-US" sz="1275">
                 <a:solidFill>
                   <a:srgbClr val="6B6478"/>
                 </a:solidFill>
                 <a:latin typeface="Verdana"/>
                 <a:ea typeface="Verdana"/>
               </a:rPr>
-              <a:t>Setiap kelas punya baris jadwalnya sendiri. Mengambil tanggal di kelas lain tidak bisa, dan tanggal di kelas anak tidak tertutup oleh kelas lain.</a:t>
+              <a:t>Setiap kelas punya barisnya sendiri. Ambil tanggal di kelas lain tidak bisa, dan yang sudah ditentukan korlas tidak ikut direbutkan.</a:t>
             </a:r>
             <a:endParaRPr/>
           </a:p>
@@ -5776,7 +5851,7 @@
           <p:nvPr/>
         </p:nvPicPr>
         <p:blipFill>
-          <a:blip>
+          <a:blip r:embed="rId4">
             <a:extLst>
               <a:ext uri="{96DAC541-7B7A-43D3-8B79-37D633B846F1}">
                 <asvg:svgBlip r:embed="rId4"/>
@@ -5870,7 +5945,7 @@
         <p:spPr>
           <a:xfrm rot="0" flipH="0" flipV="0">
             <a:off x="9201150" y="3219450"/>
-            <a:ext cx="2152650" cy="2238375"/>
+            <a:ext cx="2152650" cy="2047875"/>
           </a:xfrm>
           <a:prstGeom prst="rect"/>
         </p:spPr>
@@ -5881,11 +5956,11 @@
           <a:p>
             <a:pPr>
               <a:lnSpc>
-                <a:spcPct val="155000"/>
-              </a:lnSpc>
-            </a:pPr>
-            <a:r>
-              <a:rPr lang="en-US" sz="1350">
+                <a:spcPct val="150000"/>
+              </a:lnSpc>
+            </a:pPr>
+            <a:r>
+              <a:rPr lang="en-US" sz="1275">
                 <a:solidFill>
                   <a:srgbClr val="6B6478"/>
                 </a:solidFill>
@@ -6070,11 +6145,11 @@
 </file>
 
 <file path=ppt/slides/slide15.xml><?xml version="1.0" encoding="utf-8"?>
-<p:sld xmlns:p="http://schemas.openxmlformats.org/presentationml/2006/main" xmlns:r="http://schemas.openxmlformats.org/officeDocument/2006/relationships" xmlns:a="http://schemas.openxmlformats.org/drawingml/2006/main" xmlns:asvg="http://schemas.microsoft.com/office/drawing/2016/SVG/main" xmlns:mc="http://schemas.openxmlformats.org/markup-compatibility/2006" mc:Ignorable="asvg">
+<p:sld xmlns:p="http://schemas.openxmlformats.org/presentationml/2006/main" xmlns:a="http://schemas.openxmlformats.org/drawingml/2006/main" xmlns:asvg="http://schemas.microsoft.com/office/drawing/2016/SVG/main" xmlns:r="http://schemas.openxmlformats.org/officeDocument/2006/relationships" xmlns:mc="http://schemas.openxmlformats.org/markup-compatibility/2006" mc:Ignorable="asvg">
   <p:cSld>
     <p:spTree>
       <p:nvGrpSpPr>
-        <p:cNvPr id="124" name="" descr="&lt;Slide&#13;&#10;    style={{&#13;&#10;        width: '1280px',&#13;&#10;        height: '720px',&#13;&#10;        background: '#FAF7F2',&#13;&#10;        justifyContent: 'center',&#13;&#10;        alignItems: 'center',&#13;&#10;        position: 'relative',&#13;&#10;        overflow: 'hidden',&#13;&#10;    }}&#13;&#10;&gt;&#13;&#10;    {/* cahaya latar */}&#13;&#10;    &lt;Box&#13;&#10;        style={{&#13;&#10;            position: 'absolute',&#13;&#10;            top: 90,&#13;&#10;            width: 520,&#13;&#10;            height: 520,&#13;&#10;            borderRadius: 260,&#13;&#10;            background: 'linear-gradient(135deg, #51277C 0%, #7A45A8 100%)',&#13;&#10;            opacity: 0.10,&#13;&#10;        }}&#13;&#10;    /&gt;&#13;&#10;    &lt;Box&#13;&#10;        style={{&#13;&#10;            position: 'absolute',&#13;&#10;            bottom: -80,&#13;&#10;            left: -80,&#13;&#10;            width: 320,&#13;&#10;            height: 320,&#13;&#10;            borderRadius: 160,&#13;&#10;            background: 'linear-gradient(135deg, #AFC440 0%, #F3B26C 100%)',&#13;&#10;            opacity: 0.18,&#13;&#10;        }}&#13;&#10;    /&gt;&#13;&#10;&#13;&#10;    &lt;Box style={{ position: 'relative', zIndex: 1, alignItems: 'center', paddingLeft: 72, paddingRight: 72 }}&gt;&#13;&#10;        &lt;Image&#13;&#10;            src=&quot;assets/app_logo.png&quot;&#13;&#10;            style={{ width: 200, height: 194, objectFit: 'contain' }}&#13;&#10;        /&gt;&#13;&#10;&#13;&#10;        &lt;Text&#13;&#10;            style={{&#13;&#10;                marginTop: 26,&#13;&#10;                fontSize: 60,&#13;&#10;                fontWeight: 'bold',&#13;&#10;                color: '#51277C',&#13;&#10;                fontFamily: 'Trebuchet MS',&#13;&#10;                lineHeight: 1.15,&#13;&#10;            }}&#13;&#10;        &gt;&#13;&#10;            Terima kasih&#13;&#10;        &lt;/Text&gt;&#13;&#10;&#13;&#10;        &lt;Box style={{ marginTop: 18, width: 96, height: 7, borderRadius: 4, background: '#AFC440' }} /&gt;&#13;&#10;&#13;&#10;        &lt;Text&#13;&#10;            style={{&#13;&#10;                marginTop: 22,&#13;&#10;                fontSize: 22,&#13;&#10;                color: '#2A2333',&#13;&#10;                fontFamily: 'Verdana',&#13;&#10;                lineHeight: 1.5,&#13;&#10;                textAlign: 'center',&#13;&#10;            }}&#13;&#10;        &gt;&#13;&#10;            Mari pasang aplikasinya hari ini juga.&#13;&#10;        &lt;/Text&gt;&#13;&#10;&#13;&#10;        &lt;Text&#13;&#10;            style={{&#13;&#10;                marginTop: 14,&#13;&#10;                fontSize: 19,&#13;&#10;                color: '#6B6478',&#13;&#10;                fontFamily: 'Verdana',&#13;&#10;                lineHeight: 1.5,&#13;&#10;                textAlign: 'center',&#13;&#10;            }}&#13;&#10;        &gt;&#13;&#10;            Ada pertanyaan? Sampaikan kepada korlas kelas atau admin sekolah.&#13;&#10;        &lt;/Text&gt;&#13;&#10;&#13;&#10;        &lt;Box&#13;&#10;            style={{&#13;&#10;                marginTop: 26,&#13;&#10;                flexDirection: 'row',&#13;&#10;                alignItems: 'center',&#13;&#10;                gap: 12,&#13;&#10;                background: '#F3B26C',&#13;&#10;                borderRadius: 999,&#13;&#10;                paddingTop: 13,&#13;&#10;                paddingBottom: 13,&#13;&#10;                paddingLeft: 28,&#13;&#10;                paddingRight: 30,&#13;&#10;            }}&#13;&#10;        &gt;&#13;&#10;            &lt;svg width={22} height={22} viewBox=&quot;0 0 576 512&quot; xmlns=&quot;http://www.w3.org/2000/svg&quot;&gt;&lt;path fill=&quot;#51277C&quot; d=&quot;M316.9 18C311.6 7 300.4 0 288.1 0s-23.4 7-28.8 18L195 150.3 51.4 171.5c-12 1.8-22 10.2-25.7 21.7s-.7 24.2 7.9 32.7L137.8 329 113.2 474.7c-2 12 3 24.2 12.9 31.3s23 8 33.8 2.3l128.3-68.5 128.3 68.5c10.8 5.7 23.9 4.9 33.8-2.3s14.9-19.3 12.9-31.3L438.5 329 542.7 225.9c8.6-8.5 11.7-21.2 7.9-32.7s-13.7-19.9-25.7-21.7L381.2 150.3 316.9 18z&quot; /&gt;&lt;/svg&gt;&#13;&#10;            &lt;Text style={{ fontSize: 19, color: '#51277C', fontFamily: 'Trebuchet MS', fontWeight: 'bold' }}&gt;&#13;&#10;                Pizza Snack Play&#13;&#10;            &lt;/Text&gt;&#13;&#10;        &lt;/Box&gt;&#13;&#10;    &lt;/Box&gt;&#13;&#10;&lt;/Slide&gt;"/>
+        <p:cNvPr id="124" name=""/>
         <p:cNvGrpSpPr/>
         <p:nvPr/>
       </p:nvGrpSpPr>
@@ -6107,7 +6182,10 @@
         </p:spPr>
         <p:txBody>
           <a:bodyPr/>
-          <a:p/>
+          <a:p>
+            <a:pPr/>
+            <a:endParaRPr/>
+          </a:p>
         </p:txBody>
       </p:sp>
       <p:sp>
@@ -6145,7 +6223,10 @@
         </p:spPr>
         <p:txBody>
           <a:bodyPr/>
-          <a:p/>
+          <a:p>
+            <a:pPr/>
+            <a:endParaRPr/>
+          </a:p>
         </p:txBody>
       </p:sp>
       <p:sp>
@@ -6209,7 +6290,10 @@
         </p:spPr>
         <p:txBody>
           <a:bodyPr/>
-          <a:p/>
+          <a:p>
+            <a:pPr/>
+            <a:endParaRPr/>
+          </a:p>
         </p:txBody>
       </p:sp>
       <p:pic>
@@ -6296,7 +6380,10 @@
         </p:spPr>
         <p:txBody>
           <a:bodyPr/>
-          <a:p/>
+          <a:p>
+            <a:pPr/>
+            <a:endParaRPr/>
+          </a:p>
         </p:txBody>
       </p:sp>
       <p:sp>
@@ -6392,7 +6479,10 @@
         </p:spPr>
         <p:txBody>
           <a:bodyPr/>
-          <a:p/>
+          <a:p>
+            <a:pPr/>
+            <a:endParaRPr/>
+          </a:p>
         </p:txBody>
       </p:sp>
       <p:pic>
@@ -6404,7 +6494,7 @@
           <p:nvPr/>
         </p:nvPicPr>
         <p:blipFill>
-          <a:blip>
+          <a:blip r:embed="rId2">
             <a:extLst>
               <a:ext uri="{96DAC541-7B7A-43D3-8B79-37D633B846F1}">
                 <asvg:svgBlip r:embed="rId2"/>
@@ -6471,7 +6561,7 @@
   <p:cSld>
     <p:spTree>
       <p:nvGrpSpPr>
-        <p:cNvPr id="136" name="" descr="&lt;Slide&#10;    style={{&#10;        width: '1280px',&#10;        height: '720px',&#10;        background: '#FAF7F2',&#10;        paddingTop: 20,&#10;        paddingBottom: 20,&#10;        paddingLeft: 64,&#10;        paddingRight: 64,&#10;    }}&#10;&gt;&#10;    {/* ── A · blok judul (20–130) ── */}&#10;    &lt;Box style={{ height: 110, justifyContent: 'center' }}&gt;&#10;        &lt;Text&#10;            style={{&#10;                fontSize: 34,&#10;                fontWeight: 'bold',&#10;                color: '#51277C',&#10;                fontFamily: 'Trebuchet MS',&#10;                lineHeight: 1.3,&#10;            }}&#10;        &gt;&#10;            Isi panduan ini&#10;        &lt;/Text&gt;&#10;        &lt;Box style={{ marginTop: 10, width: 72, height: 6, borderRadius: 3, background: '#51277C' }} /&gt;&#10;    &lt;/Box&gt;&#10;&#10;    {/* ── B · area konten (130–660) ── */}&#10;    &lt;Box style={{ height: 530, flexDirection: 'row', gap: 28 }}&gt;&#10;        {/* kolom kiri 32% — penanda jumlah bagian */}&#10;        &lt;Box&#10;            style={{&#10;                width: '32%',&#10;                height: '100%',&#10;                background: 'linear-gradient(135deg, #51277C 0%, #7A45A8 100%)',&#10;                borderRadius: 18,&#10;                padding: 28,&#10;                justifyContent: 'space-between',&#10;            }}&#10;        &gt;&#10;            &lt;Box&gt;&#10;                &lt;Text&#10;                    style={{&#10;                        fontSize: 96,&#10;                        fontWeight: 'bold',&#10;                        color: '#FFFFFF',&#10;                        fontFamily: 'Trebuchet MS',&#10;                        lineHeight: 1,&#10;                    }}&#10;                &gt;&#10;                    4&#10;                &lt;/Text&gt;&#10;                &lt;Text&#10;                    style={{&#10;                        marginTop: 6,&#10;                        fontSize: 24,&#10;                        fontWeight: 'bold',&#10;                        color: '#F3B26C',&#10;                        fontFamily: 'Trebuchet MS',&#10;                    }}&#10;                &gt;&#10;                    bagian&#10;                &lt;/Text&gt;&#10;            &lt;/Box&gt;&#10;            &lt;Text&#10;                style={{&#10;                    fontSize: 17,&#10;                    color: 'rgba(255,255,255,0.88)',&#10;                    fontFamily: 'Verdana',&#10;                    lineHeight: 1.5,&#10;                }}&#10;            &gt;&#10;                Singkat saja. Bagian 2 dan 3 yang paling sering dipakai sehari-hari.&#10;            &lt;/Text&gt;&#10;        &lt;/Box&gt;&#10;&#10;        {/* kolom kanan 68% — daftar bagian */}&#10;        &lt;Box style={{ width: '68%', height: '100%', justifyContent: 'space-between' }}&gt;&#10;            {[&#10;                {&#10;                    n: '01',&#10;                    t: 'Kenapa ada aplikasi ini',&#10;                    d: 'Masalah yang selama ini bikin repot, dan apa yang berubah.',&#10;                    p: '3–5',&#10;                },&#10;                {&#10;                    n: '02',&#10;                    t: 'Cara mulai',&#10;                    d: 'Memasang aplikasi di HP, lalu masuk memakai akun dari sekolah.',&#10;                    p: '6–8',&#10;                },&#10;                {&#10;                    n: '03',&#10;                    t: 'Dipakai tiap hari',&#10;                    d: 'Melihat jadwal snack, mengambil tanggal piket, mencari menu.',&#10;                    p: '9–12',&#10;                },&#10;                {&#10;                    n: '04',&#10;                    t: 'Yang perlu diingat',&#10;                    d: 'Empat aturan yang paling sering ditanyakan orang tua.',&#10;                    p: '13–14',&#10;                },&#10;            ].map((it, i) =&gt; (&#10;                &lt;Box&#10;                    key={i}&#10;                    style={{&#10;                        flexDirection: 'row',&#10;                        alignItems: 'center',&#10;                        gap: 20,&#10;                        height: 122,&#10;                        background: '#FFFFFF',&#10;                        borderRadius: 16,&#10;                        boxShadow: '0 4px 20px rgba(0,0,0,0.08)',&#10;                        paddingLeft: 24,&#10;                        paddingRight: 28,&#10;                        borderLeft: '8px solid #AFC440',&#10;                    }}&#10;                &gt;&#10;                    &lt;Box&#10;                        style={{&#10;                            width: 56,&#10;                            height: 56,&#10;                            borderRadius: 28,&#10;                            background: 'rgba(81,39,124,0.09)',&#10;                            justifyContent: 'center',&#10;                            alignItems: 'center',&#10;                        }}&#10;                    &gt;&#10;                        &lt;Text&#10;                            style={{&#10;                                fontSize: 24,&#10;                                fontWeight: 'bold',&#10;                                color: '#51277C',&#10;                                fontFamily: 'Trebuchet MS',&#10;                            }}&#10;                        &gt;&#10;                            {it.n}&#10;                        &lt;/Text&gt;&#10;                    &lt;/Box&gt;&#10;                    &lt;Box style={{ flex: 1 }}&gt;&#10;                        &lt;Text&#10;                            style={{&#10;                                fontSize: 25,&#10;                                fontWeight: 'bold',&#10;                                color: '#2A2333',&#10;                                fontFamily: 'Trebuchet MS',&#10;                                lineHeight: 1.3,&#10;                            }}&#10;                        &gt;&#10;                            {it.t}&#10;                        &lt;/Text&gt;&#10;                        &lt;Text&#10;                            style={{&#10;                                marginTop: 5,&#10;                                fontSize: 18,&#10;                                color: '#6B6478',&#10;                                fontFamily: 'Verdana',&#10;                                lineHeight: 1.45,&#10;                            }}&#10;                        &gt;&#10;                            {it.d}&#10;                        &lt;/Text&gt;&#10;                    &lt;/Box&gt;&#10;                    &lt;Text&#10;                        style={{&#10;                            fontSize: 17,&#10;                            color: '#51277C',&#10;                            fontFamily: 'Verdana',&#10;                            fontWeight: 'bold',&#10;                        }}&#10;                    &gt;&#10;                        {it.p}&#10;                    &lt;/Text&gt;&#10;                &lt;/Box&gt;&#10;            ))}&#10;        &lt;/Box&gt;&#10;    &lt;/Box&gt;&#10;&#10;    {/* ── C · bilah kaki (660–700) ── */}&#10;    &lt;Box&#10;        style={{&#10;            height: 40,&#10;            flexDirection: 'row',&#10;            alignItems: 'center',&#10;            justifyContent: 'space-between',&#10;        }}&#10;    &gt;&#10;        &lt;Text style={{ fontSize: 14, color: '#6B6478', fontFamily: 'Verdana' }}&gt;&#10;            Pizza Snack Play · Panduan Orang Tua&#10;        &lt;/Text&gt;&#10;        &lt;Text style={{ fontSize: 14, color: '#6B6478', fontFamily: 'Verdana' }}&gt;02 / 15&lt;/Text&gt;&#10;    &lt;/Box&gt;&#10;&lt;/Slide&gt;"/>
+        <p:cNvPr id="136" name=""/>
         <p:cNvGrpSpPr/>
         <p:nvPr/>
       </p:nvGrpSpPr>
@@ -6504,7 +6594,10 @@
         </p:spPr>
         <p:txBody>
           <a:bodyPr/>
-          <a:p/>
+          <a:p>
+            <a:pPr/>
+            <a:endParaRPr/>
+          </a:p>
         </p:txBody>
       </p:sp>
       <p:sp>
@@ -6565,7 +6658,10 @@
         </p:spPr>
         <p:txBody>
           <a:bodyPr/>
-          <a:p/>
+          <a:p>
+            <a:pPr/>
+            <a:endParaRPr/>
+          </a:p>
         </p:txBody>
       </p:sp>
       <p:sp>
@@ -6599,7 +6695,10 @@
         </p:spPr>
         <p:txBody>
           <a:bodyPr/>
-          <a:p/>
+          <a:p>
+            <a:pPr/>
+            <a:endParaRPr/>
+          </a:p>
         </p:txBody>
       </p:sp>
       <p:sp>
@@ -6741,7 +6840,10 @@
         </p:spPr>
         <p:txBody>
           <a:bodyPr/>
-          <a:p/>
+          <a:p>
+            <a:pPr/>
+            <a:endParaRPr/>
+          </a:p>
         </p:txBody>
       </p:sp>
       <p:sp>
@@ -6798,7 +6900,10 @@
         </p:spPr>
         <p:txBody>
           <a:bodyPr/>
-          <a:p/>
+          <a:p>
+            <a:pPr/>
+            <a:endParaRPr/>
+          </a:p>
         </p:txBody>
       </p:sp>
       <p:sp>
@@ -6826,7 +6931,10 @@
         </p:spPr>
         <p:txBody>
           <a:bodyPr/>
-          <a:p/>
+          <a:p>
+            <a:pPr/>
+            <a:endParaRPr/>
+          </a:p>
         </p:txBody>
       </p:sp>
       <p:sp>
@@ -6999,7 +7107,10 @@
         </p:spPr>
         <p:txBody>
           <a:bodyPr/>
-          <a:p/>
+          <a:p>
+            <a:pPr/>
+            <a:endParaRPr/>
+          </a:p>
         </p:txBody>
       </p:sp>
       <p:sp>
@@ -7056,7 +7167,10 @@
         </p:spPr>
         <p:txBody>
           <a:bodyPr/>
-          <a:p/>
+          <a:p>
+            <a:pPr/>
+            <a:endParaRPr/>
+          </a:p>
         </p:txBody>
       </p:sp>
       <p:sp>
@@ -7084,7 +7198,10 @@
         </p:spPr>
         <p:txBody>
           <a:bodyPr/>
-          <a:p/>
+          <a:p>
+            <a:pPr/>
+            <a:endParaRPr/>
+          </a:p>
         </p:txBody>
       </p:sp>
       <p:sp>
@@ -7259,7 +7376,10 @@
         </p:spPr>
         <p:txBody>
           <a:bodyPr/>
-          <a:p/>
+          <a:p>
+            <a:pPr/>
+            <a:endParaRPr/>
+          </a:p>
         </p:txBody>
       </p:sp>
       <p:sp>
@@ -7316,7 +7436,10 @@
         </p:spPr>
         <p:txBody>
           <a:bodyPr/>
-          <a:p/>
+          <a:p>
+            <a:pPr/>
+            <a:endParaRPr/>
+          </a:p>
         </p:txBody>
       </p:sp>
       <p:sp>
@@ -7344,7 +7467,10 @@
         </p:spPr>
         <p:txBody>
           <a:bodyPr/>
-          <a:p/>
+          <a:p>
+            <a:pPr/>
+            <a:endParaRPr/>
+          </a:p>
         </p:txBody>
       </p:sp>
       <p:sp>
@@ -7519,7 +7645,10 @@
         </p:spPr>
         <p:txBody>
           <a:bodyPr/>
-          <a:p/>
+          <a:p>
+            <a:pPr/>
+            <a:endParaRPr/>
+          </a:p>
         </p:txBody>
       </p:sp>
       <p:sp>
@@ -7576,7 +7705,10 @@
         </p:spPr>
         <p:txBody>
           <a:bodyPr/>
-          <a:p/>
+          <a:p>
+            <a:pPr/>
+            <a:endParaRPr/>
+          </a:p>
         </p:txBody>
       </p:sp>
       <p:sp>
@@ -7604,7 +7736,10 @@
         </p:spPr>
         <p:txBody>
           <a:bodyPr/>
-          <a:p/>
+          <a:p>
+            <a:pPr/>
+            <a:endParaRPr/>
+          </a:p>
         </p:txBody>
       </p:sp>
       <p:sp>
@@ -7823,11 +7958,11 @@
 </file>
 
 <file path=ppt/slides/slide3.xml><?xml version="1.0" encoding="utf-8"?>
-<p:sld xmlns:p="http://schemas.openxmlformats.org/presentationml/2006/main" xmlns:r="http://schemas.openxmlformats.org/officeDocument/2006/relationships" xmlns:a="http://schemas.openxmlformats.org/drawingml/2006/main" xmlns:asvg="http://schemas.microsoft.com/office/drawing/2016/SVG/main" xmlns:mc="http://schemas.openxmlformats.org/markup-compatibility/2006" mc:Ignorable="asvg">
+<p:sld xmlns:p="http://schemas.openxmlformats.org/presentationml/2006/main" xmlns:a="http://schemas.openxmlformats.org/drawingml/2006/main" xmlns:asvg="http://schemas.microsoft.com/office/drawing/2016/SVG/main" xmlns:r="http://schemas.openxmlformats.org/officeDocument/2006/relationships" xmlns:mc="http://schemas.openxmlformats.org/markup-compatibility/2006" mc:Ignorable="asvg">
   <p:cSld>
     <p:spTree>
       <p:nvGrpSpPr>
-        <p:cNvPr id="174" name="" descr="&lt;Slide&#10;    style={{&#10;        width: '1280px',&#10;        height: '720px',&#10;        background: 'linear-gradient(135deg, #51277C 0%, #7A45A8 100%)',&#10;        paddingTop: 60,&#10;        paddingBottom: 60,&#10;        paddingLeft: 72,&#10;        paddingRight: 72,&#10;        justifyContent: 'center',&#10;        position: 'relative',&#10;        overflow: 'hidden',&#10;    }}&#10;&gt;&#10;    {/* dekorasi: lingkaran + kisi kalender */}&#10;    &lt;Box&#10;        style={{&#10;            position: 'absolute',&#10;            top: -100,&#10;            right: -60,&#10;            width: 420,&#10;            height: 420,&#10;            borderRadius: 210,&#10;            background: '#AFC440',&#10;            opacity: 0.14,&#10;        }}&#10;    /&gt;&#10;    &lt;Box style={{ position: 'absolute', bottom: 46, right: 78, opacity: 0.16 }}&gt;&#10;        &lt;svg width={240} height={190} viewBox='0 0 240 190'&gt;&#10;            &lt;rect x='10' y='26' width='220' height='156' rx='16' fill='none' stroke='#FFFFFF' strokeWidth='6' /&gt;&#10;            &lt;path d='M10 62h220' stroke='#FFFFFF' strokeWidth='6' /&gt;&#10;            &lt;path d='M60 8v30M180 8v30' stroke='#FFFFFF' strokeWidth='8' strokeLinecap='round' /&gt;&#10;            &lt;rect x='42' y='84' width='34' height='26' rx='6' fill='#FFFFFF' /&gt;&#10;            &lt;rect x='102' y='84' width='34' height='26' rx='6' fill='#FFFFFF' /&gt;&#10;            &lt;rect x='162' y='84' width='34' height='26' rx='6' fill='#FFFFFF' /&gt;&#10;            &lt;rect x='42' y='128' width='34' height='26' rx='6' fill='#FFFFFF' /&gt;&#10;            &lt;rect x='102' y='128' width='34' height='26' rx='6' fill='#FFFFFF' /&gt;&#10;            &lt;rect x='162' y='128' width='34' height='26' rx='6' fill='#F3B26C' /&gt;&#10;        &lt;/svg&gt;&#10;    &lt;/Box&gt;&#10;&#10;    {/* isi */}&#10;    &lt;Box style={{ position: 'relative', zIndex: 1, width: '62%' }}&gt;&#10;        &lt;Box&#10;            style={{&#10;                flexDirection: 'row',&#10;                alignItems: 'center',&#10;                gap: 14,&#10;                alignSelf: 'flex-start',&#10;            }}&#10;        &gt;&#10;            &lt;Text&#10;                style={{&#10;                    fontSize: 76,&#10;                    fontWeight: 'bold',&#10;                    color: '#F3B26C',&#10;                    fontFamily: 'Trebuchet MS',&#10;                    lineHeight: 1,&#10;                }}&#10;            &gt;&#10;                01&#10;            &lt;/Text&gt;&#10;            &lt;Box style={{ width: 3, height: 52, background: 'rgba(255,255,255,0.45)' }} /&gt;&#10;            &lt;Text&#10;                style={{&#10;                    fontSize: 19,&#10;                    color: 'rgba(255,255,255,0.8)',&#10;                    fontFamily: 'Verdana',&#10;                }}&#10;            &gt;&#10;                Bagian pertama&#10;            &lt;/Text&gt;&#10;        &lt;/Box&gt;&#10;&#10;        &lt;Text&#10;            style={{&#10;                marginTop: 26,&#10;                fontSize: 60,&#10;                fontWeight: 'bold',&#10;                color: '#FFFFFF',&#10;                fontFamily: 'Trebuchet MS',&#10;                lineHeight: 1.15,&#10;            }}&#10;        &gt;&#10;            Kenapa ada{'\n'}aplikasi ini&#10;        &lt;/Text&gt;&#10;&#10;        &lt;Text&#10;            style={{&#10;                marginTop: 24,&#10;                fontSize: 22,&#10;                color: 'rgba(255,255,255,0.88)',&#10;                fontFamily: 'Verdana',&#10;                lineHeight: 1.5,&#10;            }}&#10;        &gt;&#10;            Kita mulai dari keluhan yang paling sering terdengar.&#10;        &lt;/Text&gt;&#10;    &lt;/Box&gt;&#10;&lt;/Slide&gt;"/>
+        <p:cNvPr id="174" name=""/>
         <p:cNvGrpSpPr/>
         <p:nvPr/>
       </p:nvGrpSpPr>
@@ -7868,7 +8003,10 @@
         </p:spPr>
         <p:txBody>
           <a:bodyPr/>
-          <a:p/>
+          <a:p>
+            <a:pPr/>
+            <a:endParaRPr/>
+          </a:p>
         </p:txBody>
       </p:sp>
       <p:sp>
@@ -8264,7 +8402,10 @@
         </p:spPr>
         <p:txBody>
           <a:bodyPr/>
-          <a:p/>
+          <a:p>
+            <a:pPr/>
+            <a:endParaRPr/>
+          </a:p>
         </p:txBody>
       </p:sp>
       <p:pic>
@@ -8276,7 +8417,7 @@
           <p:nvPr/>
         </p:nvPicPr>
         <p:blipFill>
-          <a:blip>
+          <a:blip r:embed="rId1">
             <a:alphaModFix amt="16000"/>
             <a:extLst>
               <a:ext uri="{96DAC541-7B7A-43D3-8B79-37D633B846F1}">
@@ -8357,7 +8498,10 @@
         </p:spPr>
         <p:txBody>
           <a:bodyPr/>
-          <a:p/>
+          <a:p>
+            <a:pPr/>
+            <a:endParaRPr/>
+          </a:p>
         </p:txBody>
       </p:sp>
       <p:sp>
@@ -8493,11 +8637,11 @@
 </file>
 
 <file path=ppt/slides/slide4.xml><?xml version="1.0" encoding="utf-8"?>
-<p:sld xmlns:p="http://schemas.openxmlformats.org/presentationml/2006/main" xmlns:r="http://schemas.openxmlformats.org/officeDocument/2006/relationships" xmlns:a="http://schemas.openxmlformats.org/drawingml/2006/main" xmlns:asvg="http://schemas.microsoft.com/office/drawing/2016/SVG/main" xmlns:mc="http://schemas.openxmlformats.org/markup-compatibility/2006" mc:Ignorable="asvg">
+<p:sld xmlns:p="http://schemas.openxmlformats.org/presentationml/2006/main" xmlns:a="http://schemas.openxmlformats.org/drawingml/2006/main" xmlns:asvg="http://schemas.microsoft.com/office/drawing/2016/SVG/main" xmlns:r="http://schemas.openxmlformats.org/officeDocument/2006/relationships" xmlns:mc="http://schemas.openxmlformats.org/markup-compatibility/2006" mc:Ignorable="asvg">
   <p:cSld>
     <p:spTree>
       <p:nvGrpSpPr>
-        <p:cNvPr id="183" name="" descr="&lt;Slide&#13;&#10;    style={{&#13;&#10;        width: '1280px',&#13;&#10;        height: '720px',&#13;&#10;        background: '#FAF7F2',&#13;&#10;        paddingTop: 20,&#13;&#10;        paddingBottom: 20,&#13;&#10;        paddingLeft: 64,&#13;&#10;        paddingRight: 64,&#13;&#10;    }}&#13;&#10;&gt;&#13;&#10;    {/* ── A · blok judul ── */}&#13;&#10;    &lt;Box style={{ height: 110, justifyContent: 'center' }}&gt;&#13;&#10;        &lt;Text&#13;&#10;            style={{&#13;&#10;                fontSize: 34,&#13;&#10;                fontWeight: 'bold',&#13;&#10;                color: '#51277C',&#13;&#10;                fontFamily: 'Trebuchet MS',&#13;&#10;                lineHeight: 1.3,&#13;&#10;            }}&#13;&#10;        &gt;&#13;&#10;            Dulu, begini masalahnya&#13;&#10;        &lt;/Text&gt;&#13;&#10;        &lt;Box style={{ marginTop: 10, width: 72, height: 6, borderRadius: 3, background: '#51277C' }} /&gt;&#13;&#10;    &lt;/Box&gt;&#13;&#10;&#13;&#10;    {/* ── B · area konten ── */}&#13;&#10;    &lt;Box style={{ height: 530, flexDirection: 'row', gap: 28 }}&gt;&#13;&#10;        {/* kiri 60% — ilustrasi grup &amp; kertas jadwal */}&#13;&#10;        &lt;Box&#13;&#10;            style={{&#13;&#10;                width: '60%',&#13;&#10;                height: '100%',&#13;&#10;                background: 'rgba(81,39,124,0.06)',&#13;&#10;                borderRadius: 20,&#13;&#10;                justifyContent: 'center',&#13;&#10;                alignItems: 'center',&#13;&#10;            }}&#13;&#10;        &gt;&#13;&#10;            &lt;svg width={620} height={430} viewBox='0 0 620 430'&gt;&#13;&#10;                {/* kertas jadwal cetak, miring */}&#13;&#10;                &lt;g transform='rotate(-7 150 215)'&gt;&#13;&#10;                    &lt;rect x='26' y='34' width='250' height='350' rx='12' fill='#FFFFFF' stroke='#DCD5C9' strokeWidth='3' /&gt;&#13;&#10;                    &lt;rect x='58' y='74' width='170' height='15' rx='7' fill='#51277C' opacity='0.55' /&gt;&#13;&#10;                    &lt;rect x='58' y='118' width='186' height='10' rx='5' fill='#E6E0D5' /&gt;&#13;&#10;                    &lt;rect x='58' y='146' width='150' height='10' rx='5' fill='#EFEAE1' /&gt;&#13;&#10;                    &lt;rect x='58' y='174' width='176' height='10' rx='5' fill='#EFEAE1' /&gt;&#13;&#10;                    &lt;rect x='58' y='202' width='132' height='10' rx='5' fill='#EFEAE1' /&gt;&#13;&#10;                    &lt;rect x='58' y='230' width='164' height='10' rx='5' fill='#EFEAE1' /&gt;&#13;&#10;                    &lt;rect x='58' y='258' width='120' height='10' rx='5' fill='#EFEAE1' /&gt;&#13;&#10;                    &lt;rect x='58' y='286' width='158' height='10' rx='5' fill='#EFEAE1' /&gt;&#13;&#10;                    &lt;rect x='58' y='314' width='140' height='10' rx='5' fill='#E6E0D5' /&gt;&#13;&#10;                &lt;/g&gt;&#13;&#10;&#13;&#10;                {/* gelembung chat bertumpuk */}&#13;&#10;                &lt;g&gt;&#13;&#10;                    &lt;rect x='296' y='46' width='300' height='92' rx='18' fill='#FFFFFF' stroke='#E3DCCF' strokeWidth='3' /&gt;&#13;&#10;                    &lt;path d='M320 138 l0 26 l26 -26 z' fill='#FFFFFF' stroke='#E3DCCF' strokeWidth='3' /&gt;&#13;&#10;                    &lt;rect x='322' y='70' width='230' height='12' rx='6' fill='#C9C1B4' /&gt;&#13;&#10;                    &lt;rect x='322' y='94' width='170' height='12' rx='6' fill='#DED7CB' /&gt;&#13;&#10;                &lt;/g&gt;&#13;&#10;                &lt;g&gt;&#13;&#10;                    &lt;rect x='330' y='166' width='286' height='92' rx='18' fill='#AFC440' opacity='0.30' /&gt;&#13;&#10;                    &lt;path d='M354 258 l0 24 l24 -24 z' fill='#AFC440' opacity='0.30' /&gt;&#13;&#10;                    &lt;rect x='356' y='190' width='210' height='12' rx='6' fill='#6E7A32' opacity='0.55' /&gt;&#13;&#10;                    &lt;rect x='356' y='214' width='150' height='12' rx='6' fill='#6E7A32' opacity='0.40' /&gt;&#13;&#10;                &lt;/g&gt;&#13;&#10;                &lt;g&gt;&#13;&#10;                    &lt;rect x='288' y='286' width='312' height='96' rx='18' fill='#FFFFFF' stroke='#E3DCCF' strokeWidth='3' /&gt;&#13;&#10;                    &lt;path d='M566 382 l0 24 l-24 -24 z' fill='#FFFFFF' stroke='#E3DCCF' strokeWidth='3' /&gt;&#13;&#10;                    &lt;rect x='314' y='310' width='200' height='12' rx='6' fill='#C9C1B4' /&gt;&#13;&#10;                    &lt;rect x='314' y='334' width='150' height='12' rx='6' fill='#DED7CB' /&gt;&#13;&#10;                &lt;/g&gt;&#13;&#10;&#13;&#10;                {/* tanda tanya besar */}&#13;&#10;                &lt;circle cx='546' cy='62' r='44' fill='#F3B26C' /&gt;&#13;&#10;                &lt;text&#13;&#10;                    x='546'&#13;&#10;                    y='82'&#13;&#10;                    fontFamily='Trebuchet MS'&#13;&#10;                    fontSize='54'&#13;&#10;                    fontWeight='bold'&#13;&#10;                    fill='#51277C'&#13;&#10;                    textAnchor='middle'&#13;&#10;                &gt;&#13;&#10;                    ?&#13;&#10;                &lt;/text&gt;&#13;&#10;            &lt;/svg&gt;&#13;&#10;        &lt;/Box&gt;&#13;&#10;&#13;&#10;        {/* kanan 40% — tiga masalah */}&#13;&#10;        &lt;Box style={{ width: '40%', height: '100%', justifyContent: 'space-between' }}&gt;&#13;&#10;            &lt;Box&#13;&#10;                style={{&#13;&#10;                    height: 166,&#13;&#10;                    background: '#FFFFFF',&#13;&#10;                    borderRadius: 16,&#13;&#10;                    boxShadow: '0 4px 20px rgba(0,0,0,0.08)',&#13;&#10;                    padding: 20,&#13;&#10;                }}&#13;&#10;            &gt;&#13;&#10;                &lt;Box style={{ flexDirection: 'row', gap: 14, alignItems: 'flex-start' }}&gt;&#13;&#10;                    &lt;Box&#13;&#10;                        style={{&#13;&#10;                            width: 48,&#13;&#10;                            height: 48,&#13;&#10;                            borderRadius: 24,&#13;&#10;                            background: 'rgba(81,39,124,0.10)',&#13;&#10;                            justifyContent: 'center',&#13;&#10;                            alignItems: 'center',&#13;&#10;                        }}&#13;&#10;                    &gt;&#13;&#10;                        &lt;svg width={26} height={26} viewBox=&quot;0 0 512 512&quot; xmlns=&quot;http://www.w3.org/2000/svg&quot;&gt;&lt;path fill=&quot;#51277C&quot; d=&quot;M512 240c0 114.9-114.6 208-256 208c-37.1 0-72.3-6.4-104.1-17.9c-11.9 8.7-31.3 20.6-54.3 30.6C73.6 471.1 44.7 480 16 480c-6.5 0-12.3-3.9-14.8-9.9c-2.5-6-1.1-12.8 3.4-17.4l0 0 0 0 0 0 0 0 .3-.3c.3-.3 .7-.7 1.3-1.4c1.1-1.2 2.8-3.1 4.9-5.7c4.1-5 9.6-12.4 15.2-21.6c10-16.6 19.5-38.4 21.4-62.9C17.7 326.8 0 285.1 0 240C0 125.1 114.6 32 256 32s256 93.1 256 208z&quot; /&gt;&lt;/svg&gt;&#13;&#10;                    &lt;/Box&gt;&#13;&#10;                    &lt;Box style={{ flex: 1 }}&gt;&#13;&#10;                        &lt;Text&#13;&#10;                            style={{&#13;&#10;                                fontSize: 24,&#13;&#10;                                fontWeight: 'bold',&#13;&#10;                                color: '#2A2333',&#13;&#10;                                fontFamily: 'Trebuchet MS',&#13;&#10;                                lineHeight: 1.3,&#13;&#10;                            }}&#13;&#10;                        &gt;&#13;&#10;                            Menu harus ditanya&#13;&#10;                        &lt;/Text&gt;&#13;&#10;                    &lt;/Box&gt;&#13;&#10;                &lt;/Box&gt;&#13;&#10;                &lt;Text&#13;&#10;                    style={{&#13;&#10;                        marginTop: 12,&#13;&#10;                        fontSize: 18,&#13;&#10;                        color: '#6B6478',&#13;&#10;                        fontFamily: 'Verdana',&#13;&#10;                        lineHeight: 1.45,&#13;&#10;                    }}&#13;&#10;                &gt;&#13;&#10;                    Tidak ada satu tempat yang jadi rujukan. Jawabannya kadang lambat, kadang beda-beda.&#13;&#10;                &lt;/Text&gt;&#13;&#10;                &lt;Box style={{ marginTop: 'auto' }}&gt;&#13;&#10;                    &lt;Text style={{ fontSize: 15, color: '#51277C', fontFamily: 'Verdana', fontWeight: 'bold' }}&gt;&#13;&#10;                        Setiap hari&#13;&#10;                    &lt;/Text&gt;&#13;&#10;                &lt;/Box&gt;&#13;&#10;            &lt;/Box&gt;&#13;&#10;&#13;&#10;            &lt;Box&#13;&#10;                style={{&#13;&#10;                    height: 166,&#13;&#10;                    background: '#FFFFFF',&#13;&#10;                    borderRadius: 16,&#13;&#10;                    boxShadow: '0 4px 20px rgba(0,0,0,0.08)',&#13;&#10;                    padding: 20,&#13;&#10;                }}&#13;&#10;            &gt;&#13;&#10;                &lt;Box style={{ flexDirection: 'row', gap: 14, alignItems: 'flex-start' }}&gt;&#13;&#10;                    &lt;Box&#13;&#10;                        style={{&#13;&#10;                            width: 48,&#13;&#10;                            height: 48,&#13;&#10;                            borderRadius: 24,&#13;&#10;                            background: 'rgba(81,39,124,0.10)',&#13;&#10;                            justifyContent: 'center',&#13;&#10;                            alignItems: 'center',&#13;&#10;                        }}&#13;&#10;                    &gt;&#13;&#10;                        &lt;svg width={26} height={26} viewBox=&quot;0 0 384 512&quot; xmlns=&quot;http://www.w3.org/2000/svg&quot;&gt;&lt;path fill=&quot;#51277C&quot; d=&quot;M0 64C0 28.7 28.7 0 64 0H224V128c0 17.7 14.3 32 32 32H384V448c0 35.3-28.7 64-64 64H64c-35.3 0-64-28.7-64-64V64zm384 64H256V0L384 128z&quot; /&gt;&lt;/svg&gt;&#13;&#10;                    &lt;/Box&gt;&#13;&#10;                    &lt;Box style={{ flex: 1 }}&gt;&#13;&#10;                        &lt;Text&#13;&#10;                            style={{&#13;&#10;                                fontSize: 24,&#13;&#10;                                fontWeight: 'bold',&#13;&#10;                                color: '#2A2333',&#13;&#10;                                fontFamily: 'Trebuchet MS',&#13;&#10;                                lineHeight: 1.3,&#13;&#10;                            }}&#13;&#10;                        &gt;&#13;&#10;                            Riwayat hilang&#13;&#10;                        &lt;/Text&gt;&#13;&#10;                    &lt;/Box&gt;&#13;&#10;                &lt;/Box&gt;&#13;&#10;                &lt;Text&#13;&#10;                    style={{&#13;&#10;                        marginTop: 12,&#13;&#10;                        fontSize: 18,&#13;&#10;                        color: '#6B6478',&#13;&#10;                        fontFamily: 'Verdana',&#13;&#10;                        lineHeight: 1.45,&#13;&#10;                    }}&#13;&#10;                &gt;&#13;&#10;                    Menu bulan lalu tidak tersimpan rapi. Ingin tahu rotasinya, harus buka-buka lagi.&#13;&#10;                &lt;/Text&gt;&#13;&#10;                &lt;Box style={{ marginTop: 'auto' }}&gt;&#13;&#10;                    &lt;Text style={{ fontSize: 15, color: '#51277C', fontFamily: 'Verdana', fontWeight: 'bold' }}&gt;&#13;&#10;                        Tidak bisa dilacak&#13;&#10;                    &lt;/Text&gt;&#13;&#10;                &lt;/Box&gt;&#13;&#10;            &lt;/Box&gt;&#13;&#10;&#13;&#10;            &lt;Box&#13;&#10;                style={{&#13;&#10;                    height: 166,&#13;&#10;                    background: '#FFFFFF',&#13;&#10;                    borderRadius: 16,&#13;&#10;                    boxShadow: '0 4px 20px rgba(0,0,0,0.08)',&#13;&#10;                    padding: 20,&#13;&#10;                    borderLeft: '8px solid #F3B26C',&#13;&#10;                }}&#13;&#10;            &gt;&#13;&#10;                &lt;Box style={{ flexDirection: 'row', gap: 14, alignItems: 'flex-start' }}&gt;&#13;&#10;                    &lt;Box&#13;&#10;                        style={{&#13;&#10;                            width: 48,&#13;&#10;                            height: 48,&#13;&#10;                            borderRadius: 24,&#13;&#10;                            background: 'rgba(243,178,108,0.28)',&#13;&#10;                            justifyContent: 'center',&#13;&#10;                            alignItems: 'center',&#13;&#10;                        }}&#13;&#10;                    &gt;&#13;&#10;                        &lt;svg width={26} height={26} viewBox=&quot;0 0 512 512&quot; xmlns=&quot;http://www.w3.org/2000/svg&quot;&gt;&lt;path fill=&quot;#51277C&quot; d=&quot;M256 512A256 256 0 1 0 256 0a256 256 0 1 0 0 512zm0-384c13.3 0 24 10.7 24 24V264c0 13.3-10.7 24-24 24s-24-10.7-24-24V152c0-13.3 10.7-24 24-24zM224 352a32 32 0 1 1 64 0 32 32 0 1 1 -64 0z&quot; /&gt;&lt;/svg&gt;&#13;&#10;                    &lt;/Box&gt;&#13;&#10;                    &lt;Box style={{ flex: 1 }}&gt;&#13;&#10;                        &lt;Text&#13;&#10;                            style={{&#13;&#10;                                fontSize: 24,&#13;&#10;                                fontWeight: 'bold',&#13;&#10;                                color: '#2A2333',&#13;&#10;                                fontFamily: 'Trebuchet MS',&#13;&#10;                                lineHeight: 1.3,&#13;&#10;                            }}&#13;&#10;                        &gt;&#13;&#10;                            Rebutan tanggal&#13;&#10;                        &lt;/Text&gt;&#13;&#10;                    &lt;/Box&gt;&#13;&#10;                &lt;/Box&gt;&#13;&#10;                &lt;Text&#13;&#10;                    style={{&#13;&#10;                        marginTop: 12,&#13;&#10;                        fontSize: 18,&#13;&#10;                        color: '#6B6478',&#13;&#10;                        fontFamily: 'Verdana',&#13;&#10;                        lineHeight: 1.45,&#13;&#10;                    }}&#13;&#10;                &gt;&#13;&#10;                    Dua orang bisa merasa sama-sama sudah mengambil tanggal yang sama.&#13;&#10;                &lt;/Text&gt;&#13;&#10;                &lt;Box style={{ marginTop: 'auto' }}&gt;&#13;&#10;                    &lt;Text style={{ fontSize: 15, color: '#51277C', fontFamily: 'Verdana', fontWeight: 'bold' }}&gt;&#13;&#10;                        Paling sering jadi masalah&#13;&#10;                    &lt;/Text&gt;&#13;&#10;                &lt;/Box&gt;&#13;&#10;            &lt;/Box&gt;&#13;&#10;        &lt;/Box&gt;&#13;&#10;    &lt;/Box&gt;&#13;&#10;&#13;&#10;    {/* ── C · bilah kaki ── */}&#13;&#10;    &lt;Box&#13;&#10;        style={{&#13;&#10;            height: 40,&#13;&#10;            flexDirection: 'row',&#13;&#10;            alignItems: 'center',&#13;&#10;            justifyContent: 'space-between',&#13;&#10;        }}&#13;&#10;    &gt;&#13;&#10;        &lt;Text style={{ fontSize: 14, color: '#6B6478', fontFamily: 'Verdana' }}&gt;&#13;&#10;            Pizza Snack Play · Panduan Orang Tua&#13;&#10;        &lt;/Text&gt;&#13;&#10;        &lt;Text style={{ fontSize: 14, color: '#6B6478', fontFamily: 'Verdana' }}&gt;04 / 15&lt;/Text&gt;&#13;&#10;    &lt;/Box&gt;&#13;&#10;&lt;/Slide&gt;"/>
+        <p:cNvPr id="183" name=""/>
         <p:cNvGrpSpPr/>
         <p:nvPr/>
       </p:nvGrpSpPr>
@@ -8530,7 +8674,10 @@
         </p:spPr>
         <p:txBody>
           <a:bodyPr/>
-          <a:p/>
+          <a:p>
+            <a:pPr/>
+            <a:endParaRPr/>
+          </a:p>
         </p:txBody>
       </p:sp>
       <p:sp>
@@ -8591,7 +8738,10 @@
         </p:spPr>
         <p:txBody>
           <a:bodyPr/>
-          <a:p/>
+          <a:p>
+            <a:pPr/>
+            <a:endParaRPr/>
+          </a:p>
         </p:txBody>
       </p:sp>
       <p:sp>
@@ -8619,7 +8769,10 @@
         </p:spPr>
         <p:txBody>
           <a:bodyPr/>
-          <a:p/>
+          <a:p>
+            <a:pPr/>
+            <a:endParaRPr/>
+          </a:p>
         </p:txBody>
       </p:sp>
       <p:pic>
@@ -8631,7 +8784,7 @@
           <p:nvPr/>
         </p:nvPicPr>
         <p:blipFill>
-          <a:blip>
+          <a:blip r:embed="rId1">
             <a:extLst>
               <a:ext uri="{96DAC541-7B7A-43D3-8B79-37D633B846F1}">
                 <asvg:svgBlip r:embed="rId1"/>
@@ -8683,7 +8836,10 @@
         </p:spPr>
         <p:txBody>
           <a:bodyPr/>
-          <a:p/>
+          <a:p>
+            <a:pPr/>
+            <a:endParaRPr/>
+          </a:p>
         </p:txBody>
       </p:sp>
       <p:sp>
@@ -8711,7 +8867,10 @@
         </p:spPr>
         <p:txBody>
           <a:bodyPr/>
-          <a:p/>
+          <a:p>
+            <a:pPr/>
+            <a:endParaRPr/>
+          </a:p>
         </p:txBody>
       </p:sp>
       <p:pic>
@@ -8723,7 +8882,7 @@
           <p:nvPr/>
         </p:nvPicPr>
         <p:blipFill>
-          <a:blip>
+          <a:blip r:embed="rId2">
             <a:extLst>
               <a:ext uri="{96DAC541-7B7A-43D3-8B79-37D633B846F1}">
                 <asvg:svgBlip r:embed="rId2"/>
@@ -8882,7 +9041,10 @@
         </p:spPr>
         <p:txBody>
           <a:bodyPr/>
-          <a:p/>
+          <a:p>
+            <a:pPr/>
+            <a:endParaRPr/>
+          </a:p>
         </p:txBody>
       </p:sp>
       <p:sp>
@@ -8910,7 +9072,10 @@
         </p:spPr>
         <p:txBody>
           <a:bodyPr/>
-          <a:p/>
+          <a:p>
+            <a:pPr/>
+            <a:endParaRPr/>
+          </a:p>
         </p:txBody>
       </p:sp>
       <p:pic>
@@ -8922,7 +9087,7 @@
           <p:nvPr/>
         </p:nvPicPr>
         <p:blipFill>
-          <a:blip>
+          <a:blip r:embed="rId3">
             <a:extLst>
               <a:ext uri="{96DAC541-7B7A-43D3-8B79-37D633B846F1}">
                 <asvg:svgBlip r:embed="rId3"/>
@@ -9081,7 +9246,10 @@
         </p:spPr>
         <p:txBody>
           <a:bodyPr/>
-          <a:p/>
+          <a:p>
+            <a:pPr/>
+            <a:endParaRPr/>
+          </a:p>
         </p:txBody>
       </p:sp>
       <p:sp>
@@ -9138,7 +9306,10 @@
         </p:spPr>
         <p:txBody>
           <a:bodyPr/>
-          <a:p/>
+          <a:p>
+            <a:pPr/>
+            <a:endParaRPr/>
+          </a:p>
         </p:txBody>
       </p:sp>
       <p:sp>
@@ -9166,7 +9337,10 @@
         </p:spPr>
         <p:txBody>
           <a:bodyPr/>
-          <a:p/>
+          <a:p>
+            <a:pPr/>
+            <a:endParaRPr/>
+          </a:p>
         </p:txBody>
       </p:sp>
       <p:pic>
@@ -9178,7 +9352,7 @@
           <p:nvPr/>
         </p:nvPicPr>
         <p:blipFill>
-          <a:blip>
+          <a:blip r:embed="rId4">
             <a:extLst>
               <a:ext uri="{96DAC541-7B7A-43D3-8B79-37D633B846F1}">
                 <asvg:svgBlip r:embed="rId4"/>
@@ -9383,11 +9557,11 @@
 </file>
 
 <file path=ppt/slides/slide5.xml><?xml version="1.0" encoding="utf-8"?>
-<p:sld xmlns:p="http://schemas.openxmlformats.org/presentationml/2006/main" xmlns:r="http://schemas.openxmlformats.org/officeDocument/2006/relationships" xmlns:a="http://schemas.openxmlformats.org/drawingml/2006/main" xmlns:asvg="http://schemas.microsoft.com/office/drawing/2016/SVG/main" xmlns:mc="http://schemas.openxmlformats.org/markup-compatibility/2006" mc:Ignorable="asvg">
+<p:sld xmlns:p="http://schemas.openxmlformats.org/presentationml/2006/main" xmlns:a="http://schemas.openxmlformats.org/drawingml/2006/main" xmlns:asvg="http://schemas.microsoft.com/office/drawing/2016/SVG/main" xmlns:r="http://schemas.openxmlformats.org/officeDocument/2006/relationships" xmlns:mc="http://schemas.openxmlformats.org/markup-compatibility/2006" mc:Ignorable="asvg">
   <p:cSld>
     <p:spTree>
       <p:nvGrpSpPr>
-        <p:cNvPr id="210" name="" descr="&lt;Slide&#13;&#10;    style={{&#13;&#10;        width: '1280px',&#13;&#10;        height: '720px',&#13;&#10;        background: '#FAF7F2',&#13;&#10;        paddingTop: 20,&#13;&#10;        paddingBottom: 20,&#13;&#10;        paddingLeft: 64,&#13;&#10;        paddingRight: 64,&#13;&#10;    }}&#13;&#10;&gt;&#13;&#10;    {/* ── A · blok judul ── */}&#13;&#10;    &lt;Box style={{ height: 110, justifyContent: 'center' }}&gt;&#13;&#10;        &lt;Text&#13;&#10;            style={{&#13;&#10;                fontSize: 34,&#13;&#10;                fontWeight: 'bold',&#13;&#10;                color: '#51277C',&#13;&#10;                fontFamily: 'Trebuchet MS',&#13;&#10;                lineHeight: 1.3,&#13;&#10;            }}&#13;&#10;        &gt;&#13;&#10;            Sekarang: cukup satu aplikasi&#13;&#10;        &lt;/Text&gt;&#13;&#10;        &lt;Box style={{ marginTop: 10, width: 72, height: 6, borderRadius: 3, background: '#51277C' }} /&gt;&#13;&#10;    &lt;/Box&gt;&#13;&#10;&#13;&#10;    {/* ── B · area konten ── */}&#13;&#10;    &lt;Box style={{ height: 530, flexDirection: 'row', gap: 28 }}&gt;&#13;&#10;        {/* ── kiri 44% · teks ── */}&#13;&#10;        &lt;Box&#13;&#10;            style={{&#13;&#10;                width: '44%',&#13;&#10;                justifyContent: 'center',&#13;&#10;            }}&#13;&#10;        &gt;&#13;&#10;        &lt;Box&#13;&#10;            style={{&#13;&#10;                flexDirection: 'row',&#13;&#10;                alignItems: 'center',&#13;&#10;                gap: 10,&#13;&#10;                alignSelf: 'flex-start',&#13;&#10;                background: 'rgba(175,196,64,0.28)',&#13;&#10;                borderRadius: 999,&#13;&#10;                paddingTop: 8,&#13;&#10;                paddingBottom: 8,&#13;&#10;                paddingLeft: 18,&#13;&#10;                paddingRight: 20,&#13;&#10;            }}&#13;&#10;        &gt;&#13;&#10;            &lt;Text style={{ fontSize: 16, color: '#4F5A24', fontFamily: 'Verdana', fontWeight: 'bold' }}&gt;&#13;&#10;                Solusinya&#13;&#10;            &lt;/Text&gt;&#13;&#10;        &lt;/Box&gt;&#13;&#10;&#13;&#10;        &lt;Text&#13;&#10;            style={{&#13;&#10;                marginTop: 18,&#13;&#10;                fontSize: 46,&#13;&#10;                fontWeight: 'bold',&#13;&#10;                color: '#51277C',&#13;&#10;                fontFamily: 'Trebuchet MS',&#13;&#10;                lineHeight: 1.15,&#13;&#10;            }}&#13;&#10;        &gt;&#13;&#10;            Menu jelas,{'\n'}giliran jelas.&#13;&#10;        &lt;/Text&gt;&#13;&#10;&#13;&#10;        &lt;Text&#13;&#10;            style={{&#13;&#10;                marginTop: 16,&#13;&#10;                fontSize: 21,&#13;&#10;                color: '#2A2333',&#13;&#10;                fontFamily: 'Verdana',&#13;&#10;                lineHeight: 1.5,&#13;&#10;            }}&#13;&#10;        &gt;&#13;&#10;            Tidak perlu tanya-tanya lagi ke grup.&#13;&#10;        &lt;/Text&gt;&#13;&#10;&#13;&#10;        &lt;Box style={{ marginTop: 22, gap: 14 }}&gt;&#13;&#10;            {[&#13;&#10;                'Jadwal snack kelihatan kapan saja',&#13;&#10;                'Giliran piket anak tercatat rapi',&#13;&#10;                'Tanggal kosong bisa diambil sendiri',&#13;&#10;            ].map((t, i) =&gt; (&#13;&#10;                &lt;Box key={i} style={{ flexDirection: 'row', alignItems: 'center', gap: 14 }}&gt;&#13;&#10;                    &lt;Box&#13;&#10;                        style={{&#13;&#10;                            width: 34,&#13;&#10;                            height: 34,&#13;&#10;                            borderRadius: 17,&#13;&#10;                            background: '#AFC440',&#13;&#10;                            justifyContent: 'center',&#13;&#10;                            alignItems: 'center',&#13;&#10;                        }}&#13;&#10;                    &gt;&#13;&#10;                        &lt;svg width={18} height={18} viewBox=&quot;0 0 448 512&quot; xmlns=&quot;http://www.w3.org/2000/svg&quot;&gt;&lt;path fill=&quot;#FFFFFF&quot; d=&quot;M438.6 105.4c12.5 12.5 12.5 32.8 0 45.3l-256 256c-12.5 12.5-32.8 12.5-45.3 0l-128-128c-12.5-12.5-12.5-32.8 0-45.3s32.8-12.5 45.3 0L160 338.7 393.4 105.4c12.5-12.5 32.8-12.5 45.3 0z&quot; /&gt;&lt;/svg&gt;&#13;&#10;                    &lt;/Box&gt;&#13;&#10;                    &lt;Text style={{ fontSize: 20, color: '#2A2333', fontFamily: 'Verdana' }}&gt;{t}&lt;/Text&gt;&#13;&#10;                &lt;/Box&gt;&#13;&#10;            ))}&#13;&#10;        &lt;/Box&gt;&#13;&#10;&#13;&#10;        &lt;Box&#13;&#10;            style={{&#13;&#10;                marginTop: 24,&#13;&#10;                alignSelf: 'flex-start',&#13;&#10;                background: '#F3B26C',&#13;&#10;                borderRadius: 14,&#13;&#10;                paddingTop: 13,&#13;&#10;                paddingBottom: 13,&#13;&#10;                paddingLeft: 24,&#13;&#10;                paddingRight: 26,&#13;&#10;            }}&#13;&#10;        &gt;&#13;&#10;            &lt;Text style={{ fontSize: 19, color: '#51277C', fontFamily: 'Trebuchet MS', fontWeight: 'bold' }}&gt;&#13;&#10;                Satu tempat. Satu rujukan.&#13;&#10;            &lt;/Text&gt;&#13;&#10;        &lt;/Box&gt;&#13;&#10;    &lt;/Box&gt;&#13;&#10;&#13;&#10;    {/* ── kanan 52% · panel ungu + ponsel ── */}&#13;&#10;    &lt;Box&#13;&#10;        style={{&#13;&#10;            width: '52%',&#13;&#10;            height: '100%',&#13;&#10;            background: 'linear-gradient(135deg, #51277C 0%, #7A45A8 100%)',&#13;&#10;            borderRadius: 20,&#13;&#10;            justifyContent: 'center',&#13;&#10;            alignItems: 'center',&#13;&#10;            position: 'relative',&#13;&#10;            overflow: 'hidden',&#13;&#10;        }}&#13;&#10;    &gt;&#13;&#10;        &lt;Box&#13;&#10;            style={{&#13;&#10;                position: 'absolute',&#13;&#10;                top: -110,&#13;&#10;                left: -90,&#13;&#10;                width: 340,&#13;&#10;                height: 340,&#13;&#10;                borderRadius: 170,&#13;&#10;                background: '#AFC440',&#13;&#10;                opacity: 0.16,&#13;&#10;            }}&#13;&#10;        /&gt;&#13;&#10;        &lt;Box style={{ position: 'relative', zIndex: 1 }}&gt;&#13;&#10;            &lt;svg width={376} height={490} viewBox='0 0 430 560'&gt;&#13;&#10;                {/* bingkai ponsel */}&#13;&#10;                &lt;rect x='12' y='10' width='406' height='540' rx='46' fill='#FFFFFF' stroke='#E3DCCF' strokeWidth='4' /&gt;&#13;&#10;                &lt;rect x='176' y='26' width='78' height='11' rx='6' fill='#DCD5C9' /&gt;&#13;&#10;&#13;&#10;                {/* bilah atas aplikasi */}&#13;&#10;                &lt;rect x='38' y='56' width='354' height='62' rx='14' fill='#51277C' /&gt;&#13;&#10;                &lt;text x='60' y='96' fontFamily='Trebuchet MS' fontSize='25' fontWeight='bold' fill='#FFFFFF'&gt;&#13;&#10;                    Hari Ini&#13;&#10;                &lt;/text&gt;&#13;&#10;                &lt;circle cx='366' cy='87' r='16' fill='#F3B26C' /&gt;&#13;&#10;&#13;&#10;                {/* kartu menu hari ini */}&#13;&#10;                &lt;rect x='38' y='136' width='354' height='128' rx='16' fill='#F7F3EC' stroke='#E6DFD2' strokeWidth='2' /&gt;&#13;&#10;                &lt;rect x='60' y='158' width='92' height='26' rx='13' fill='#AFC440' /&gt;&#13;&#10;                &lt;text x='74' y='177' fontFamily='Verdana' fontSize='15' fill='#3F4718'&gt;&#13;&#10;                    Selasa&#13;&#10;                &lt;/text&gt;&#13;&#10;                &lt;text x='60' y='218' fontFamily='Trebuchet MS' fontSize='26' fontWeight='bold' fill='#2A2333'&gt;&#13;&#10;                    Roti coklat&#13;&#10;                &lt;/text&gt;&#13;&#10;                &lt;text x='60' y='246' fontFamily='Verdana' fontSize='19' fill='#6B6478'&gt;&#13;&#10;                    + Jeruk manis&#13;&#10;                &lt;/text&gt;&#13;&#10;&#13;&#10;                {/* kartu minggu ini */}&#13;&#10;                &lt;rect x='38' y='280' width='354' height='166' rx='16' fill='#F7F3EC' stroke='#E6DFD2' strokeWidth='2' /&gt;&#13;&#10;                &lt;text x='60' y='310' fontFamily='Trebuchet MS' fontSize='21' fontWeight='bold' fill='#51277C'&gt;&#13;&#10;                    Minggu ini&#13;&#10;                &lt;/text&gt;&#13;&#10;                &lt;rect x='60' y='326' width='310' height='1' fill='#E6DFD2' /&gt;&#13;&#10;                &lt;circle cx='74' cy='352' r='7' fill='#AFC440' /&gt;&#13;&#10;                &lt;rect x='92' y='344' width='150' height='11' rx='5' fill='#C9C1B4' /&gt;&#13;&#10;                &lt;circle cx='74' cy='382' r='7' fill='#AFC440' /&gt;&#13;&#10;                &lt;rect x='92' y='374' width='120' height='11' rx='5' fill='#DED7CB' /&gt;&#13;&#10;                &lt;circle cx='74' cy='412' r='7' fill='#F3B26C' /&gt;&#13;&#10;                &lt;rect x='92' y='404' width='160' height='11' rx='5' fill='#DED7CB' /&gt;&#13;&#10;&#13;&#10;                {/* bilah navigasi bawah */}&#13;&#10;                &lt;rect x='52' y='470' width='326' height='60' rx='30' fill='#FFFFFF' stroke='#E6DFD2' strokeWidth='2' /&gt;&#13;&#10;                &lt;circle cx='100' cy='500' r='11' fill='#51277C' /&gt;&#13;&#10;                &lt;circle cx='160' cy='500' r='11' fill='#DED7CB' /&gt;&#13;&#10;                &lt;circle cx='270' cy='500' r='11' fill='#DED7CB' /&gt;&#13;&#10;                &lt;circle cx='330' cy='500' r='11' fill='#DED7CB' /&gt;&#13;&#10;                &lt;circle cx='215' cy='470' r='24' fill='#51277C' /&gt;&#13;&#10;                &lt;rect x='203' y='459' width='24' height='4' rx='2' fill='#FFFFFF' /&gt;&#13;&#10;                &lt;rect x='203' y='467' width='24' height='4' rx='2' fill='#FFFFFF' /&gt;&#13;&#10;                &lt;rect x='203' y='475' width='24' height='4' rx='2' fill='#FFFFFF' /&gt;&#13;&#10;            &lt;/svg&gt;&#13;&#10;        &lt;/Box&gt;&#13;&#10;    &lt;/Box&gt;&#13;&#10;    &lt;/Box&gt;&#13;&#10;&#13;&#10;    {/* ── C · bilah kaki ── */}&#13;&#10;    &lt;Box&#13;&#10;        style={{&#13;&#10;            height: 40,&#13;&#10;            flexDirection: 'row',&#13;&#10;            alignItems: 'center',&#13;&#10;            justifyContent: 'space-between',&#13;&#10;        }}&#13;&#10;    &gt;&#13;&#10;        &lt;Text style={{ fontSize: 14, color: '#6B6478', fontFamily: 'Verdana' }}&gt;&#13;&#10;            Pizza Snack Play · Panduan Orang Tua&#13;&#10;        &lt;/Text&gt;&#13;&#10;        &lt;Text style={{ fontSize: 14, color: '#6B6478', fontFamily: 'Verdana' }}&gt;05 / 15&lt;/Text&gt;&#13;&#10;    &lt;/Box&gt;&#13;&#10;&lt;/Slide&gt;"/>
+        <p:cNvPr id="210" name=""/>
         <p:cNvGrpSpPr/>
         <p:nvPr/>
       </p:nvGrpSpPr>
@@ -9420,7 +9594,10 @@
         </p:spPr>
         <p:txBody>
           <a:bodyPr/>
-          <a:p/>
+          <a:p>
+            <a:pPr/>
+            <a:endParaRPr/>
+          </a:p>
         </p:txBody>
       </p:sp>
       <p:sp>
@@ -9481,7 +9658,10 @@
         </p:spPr>
         <p:txBody>
           <a:bodyPr/>
-          <a:p/>
+          <a:p>
+            <a:pPr/>
+            <a:endParaRPr/>
+          </a:p>
         </p:txBody>
       </p:sp>
       <p:sp>
@@ -9509,7 +9689,10 @@
         </p:spPr>
         <p:txBody>
           <a:bodyPr/>
-          <a:p/>
+          <a:p>
+            <a:pPr/>
+            <a:endParaRPr/>
+          </a:p>
         </p:txBody>
       </p:sp>
       <p:sp>
@@ -9658,7 +9841,10 @@
         </p:spPr>
         <p:txBody>
           <a:bodyPr/>
-          <a:p/>
+          <a:p>
+            <a:pPr/>
+            <a:endParaRPr/>
+          </a:p>
         </p:txBody>
       </p:sp>
       <p:pic>
@@ -9670,7 +9856,7 @@
           <p:nvPr/>
         </p:nvPicPr>
         <p:blipFill>
-          <a:blip>
+          <a:blip r:embed="rId1">
             <a:extLst>
               <a:ext uri="{96DAC541-7B7A-43D3-8B79-37D633B846F1}">
                 <asvg:svgBlip r:embed="rId1"/>
@@ -9750,7 +9936,10 @@
         </p:spPr>
         <p:txBody>
           <a:bodyPr/>
-          <a:p/>
+          <a:p>
+            <a:pPr/>
+            <a:endParaRPr/>
+          </a:p>
         </p:txBody>
       </p:sp>
       <p:pic>
@@ -9762,7 +9951,7 @@
           <p:nvPr/>
         </p:nvPicPr>
         <p:blipFill>
-          <a:blip>
+          <a:blip r:embed="rId1">
             <a:extLst>
               <a:ext uri="{96DAC541-7B7A-43D3-8B79-37D633B846F1}">
                 <asvg:svgBlip r:embed="rId1"/>
@@ -9842,7 +10031,10 @@
         </p:spPr>
         <p:txBody>
           <a:bodyPr/>
-          <a:p/>
+          <a:p>
+            <a:pPr/>
+            <a:endParaRPr/>
+          </a:p>
         </p:txBody>
       </p:sp>
       <p:pic>
@@ -9854,7 +10046,7 @@
           <p:nvPr/>
         </p:nvPicPr>
         <p:blipFill>
-          <a:blip>
+          <a:blip r:embed="rId1">
             <a:extLst>
               <a:ext uri="{96DAC541-7B7A-43D3-8B79-37D633B846F1}">
                 <asvg:svgBlip r:embed="rId1"/>
@@ -9934,7 +10126,10 @@
         </p:spPr>
         <p:txBody>
           <a:bodyPr/>
-          <a:p/>
+          <a:p>
+            <a:pPr/>
+            <a:endParaRPr/>
+          </a:p>
         </p:txBody>
       </p:sp>
       <p:sp>
@@ -10073,7 +10268,10 @@
         </p:spPr>
         <p:txBody>
           <a:bodyPr/>
-          <a:p/>
+          <a:p>
+            <a:pPr/>
+            <a:endParaRPr/>
+          </a:p>
         </p:txBody>
       </p:sp>
       <p:sp>
@@ -10127,7 +10325,10 @@
         </p:spPr>
         <p:txBody>
           <a:bodyPr/>
-          <a:p/>
+          <a:p>
+            <a:pPr/>
+            <a:endParaRPr/>
+          </a:p>
         </p:txBody>
       </p:sp>
       <p:pic>
@@ -10139,7 +10340,7 @@
           <p:nvPr/>
         </p:nvPicPr>
         <p:blipFill>
-          <a:blip>
+          <a:blip r:embed="rId2">
             <a:extLst>
               <a:ext uri="{96DAC541-7B7A-43D3-8B79-37D633B846F1}">
                 <asvg:svgBlip r:embed="rId2"/>
@@ -10167,11 +10368,11 @@
 </file>
 
 <file path=ppt/slides/slide6.xml><?xml version="1.0" encoding="utf-8"?>
-<p:sld xmlns:p="http://schemas.openxmlformats.org/presentationml/2006/main" xmlns:r="http://schemas.openxmlformats.org/officeDocument/2006/relationships" xmlns:a="http://schemas.openxmlformats.org/drawingml/2006/main" xmlns:asvg="http://schemas.microsoft.com/office/drawing/2016/SVG/main" xmlns:mc="http://schemas.openxmlformats.org/markup-compatibility/2006" mc:Ignorable="asvg">
+<p:sld xmlns:p="http://schemas.openxmlformats.org/presentationml/2006/main" xmlns:a="http://schemas.openxmlformats.org/drawingml/2006/main" xmlns:asvg="http://schemas.microsoft.com/office/drawing/2016/SVG/main" xmlns:r="http://schemas.openxmlformats.org/officeDocument/2006/relationships" xmlns:mc="http://schemas.openxmlformats.org/markup-compatibility/2006" mc:Ignorable="asvg">
   <p:cSld>
     <p:spTree>
       <p:nvGrpSpPr>
-        <p:cNvPr id="234" name="" descr="&lt;Slide&#10;    style={{&#10;        width: '1280px',&#10;        height: '720px',&#10;        background: 'linear-gradient(135deg, #51277C 0%, #7A45A8 100%)',&#10;        paddingTop: 60,&#10;        paddingBottom: 60,&#10;        paddingLeft: 72,&#10;        paddingRight: 72,&#10;        justifyContent: 'center',&#10;        position: 'relative',&#10;        overflow: 'hidden',&#10;    }}&#10;&gt;&#10;    {/* dekorasi: ponsel + panah unduh */}&#10;    &lt;Box&#10;        style={{&#10;            position: 'absolute',&#10;            bottom: -120,&#10;            right: -70,&#10;            width: 440,&#10;            height: 440,&#10;            borderRadius: 220,&#10;            background: '#AFC440',&#10;            opacity: 0.14,&#10;        }}&#10;    /&gt;&#10;    &lt;Box style={{ position: 'absolute', top: 74, right: 92, opacity: 0.20 }}&gt;&#10;        &lt;svg width={230} height={250} viewBox='0 0 230 250'&gt;&#10;            &lt;rect x='52' y='10' width='126' height='210' rx='22' fill='none' stroke='#FFFFFF' strokeWidth='6' /&gt;&#10;            &lt;rect x='96' y='24' width='38' height='7' rx='4' fill='#FFFFFF' /&gt;&#10;            &lt;path d='M92 150 v46 M74 180 l18 18 l18 -18' fill='none' stroke='#FFFFFF' strokeWidth='8' strokeLinecap='round' strokeLinejoin='round' /&gt;&#10;            &lt;path d='M52 196 h126' stroke='#FFFFFF' strokeWidth='6' /&gt;&#10;        &lt;/svg&gt;&#10;    &lt;/Box&gt;&#10;&#10;    {/* isi */}&#10;    &lt;Box style={{ position: 'relative', zIndex: 1, width: '62%' }}&gt;&#10;        &lt;Box style={{ flexDirection: 'row', alignItems: 'center', gap: 14, alignSelf: 'flex-start' }}&gt;&#10;            &lt;Text&#10;                style={{&#10;                    fontSize: 76,&#10;                    fontWeight: 'bold',&#10;                    color: '#F3B26C',&#10;                    fontFamily: 'Trebuchet MS',&#10;                    lineHeight: 1,&#10;                }}&#10;            &gt;&#10;                02&#10;            &lt;/Text&gt;&#10;            &lt;Box style={{ width: 3, height: 52, background: 'rgba(255,255,255,0.45)' }} /&gt;&#10;            &lt;Text style={{ fontSize: 19, color: 'rgba(255,255,255,0.8)', fontFamily: 'Verdana' }}&gt;&#10;                Bagian kedua&#10;            &lt;/Text&gt;&#10;        &lt;/Box&gt;&#10;&#10;        &lt;Text&#10;            style={{&#10;                marginTop: 26,&#10;                fontSize: 60,&#10;                fontWeight: 'bold',&#10;                color: '#FFFFFF',&#10;                fontFamily: 'Trebuchet MS',&#10;                lineHeight: 1.15,&#10;            }}&#10;        &gt;&#10;            Cara mulai&#10;        &lt;/Text&gt;&#10;&#10;        &lt;Text&#10;            style={{&#10;                marginTop: 24,&#10;                fontSize: 22,&#10;                color: 'rgba(255,255,255,0.88)',&#10;                fontFamily: 'Verdana',&#10;                lineHeight: 1.5,&#10;            }}&#10;        &gt;&#10;            Dua langkah saja, lalu aplikasinya siap dipakai.&#10;        &lt;/Text&gt;&#10;    &lt;/Box&gt;&#10;&lt;/Slide&gt;"/>
+        <p:cNvPr id="234" name=""/>
         <p:cNvGrpSpPr/>
         <p:nvPr/>
       </p:nvGrpSpPr>
@@ -10212,7 +10413,10 @@
         </p:spPr>
         <p:txBody>
           <a:bodyPr/>
-          <a:p/>
+          <a:p>
+            <a:pPr/>
+            <a:endParaRPr/>
+          </a:p>
         </p:txBody>
       </p:sp>
       <p:sp>
@@ -10590,7 +10794,10 @@
         </p:spPr>
         <p:txBody>
           <a:bodyPr/>
-          <a:p/>
+          <a:p>
+            <a:pPr/>
+            <a:endParaRPr/>
+          </a:p>
         </p:txBody>
       </p:sp>
       <p:pic>
@@ -10602,7 +10809,7 @@
           <p:nvPr/>
         </p:nvPicPr>
         <p:blipFill>
-          <a:blip>
+          <a:blip r:embed="rId1">
             <a:alphaModFix amt="20000"/>
             <a:extLst>
               <a:ext uri="{96DAC541-7B7A-43D3-8B79-37D633B846F1}">
@@ -10683,7 +10890,10 @@
         </p:spPr>
         <p:txBody>
           <a:bodyPr/>
-          <a:p/>
+          <a:p>
+            <a:pPr/>
+            <a:endParaRPr/>
+          </a:p>
         </p:txBody>
       </p:sp>
       <p:sp>
@@ -10801,11 +11011,11 @@
 </file>
 
 <file path=ppt/slides/slide7.xml><?xml version="1.0" encoding="utf-8"?>
-<p:sld xmlns:p="http://schemas.openxmlformats.org/presentationml/2006/main" xmlns:r="http://schemas.openxmlformats.org/officeDocument/2006/relationships" xmlns:a="http://schemas.openxmlformats.org/drawingml/2006/main" xmlns:asvg="http://schemas.microsoft.com/office/drawing/2016/SVG/main" xmlns:mc="http://schemas.openxmlformats.org/markup-compatibility/2006" mc:Ignorable="asvg">
+<p:sld xmlns:p="http://schemas.openxmlformats.org/presentationml/2006/main" xmlns:a="http://schemas.openxmlformats.org/drawingml/2006/main" xmlns:asvg="http://schemas.microsoft.com/office/drawing/2016/SVG/main" xmlns:r="http://schemas.openxmlformats.org/officeDocument/2006/relationships" xmlns:mc="http://schemas.openxmlformats.org/markup-compatibility/2006" mc:Ignorable="asvg">
   <p:cSld>
     <p:spTree>
       <p:nvGrpSpPr>
-        <p:cNvPr id="243" name="" descr="&lt;Slide&#10;    style={{&#10;        width: '1280px',&#10;        height: '720px',&#10;        background: '#FAF7F2',&#10;        paddingTop: 20,&#10;        paddingBottom: 20,&#10;        paddingLeft: 64,&#10;        paddingRight: 64,&#10;    }}&#10;&gt;&#10;    {/* ── A · blok judul ── */}&#10;    &lt;Box style={{ height: 110, justifyContent: 'center' }}&gt;&#10;        &lt;Text&#10;            style={{&#10;                fontSize: 34,&#10;                fontWeight: 'bold',&#10;                color: '#51277C',&#10;                fontFamily: 'Trebuchet MS',&#10;                lineHeight: 1.3,&#10;            }}&#10;        &gt;&#10;            Pasang ke layar utama HP&#10;        &lt;/Text&gt;&#10;        &lt;Box style={{ marginTop: 10, width: 72, height: 6, borderRadius: 3, background: '#51277C' }} /&gt;&#10;    &lt;/Box&gt;&#10;&#10;    {/* ── B · area konten ── */}&#10;    &lt;Box style={{ height: 530, flexDirection: 'row', gap: 30 }}&gt;&#10;        {/* kiri 55% · ilustrasi */}&#10;        &lt;Box&#10;            style={{&#10;                width: '55%',&#10;                height: '100%',&#10;                background: 'rgba(81,39,124,0.06)',&#10;                borderRadius: 20,&#10;                justifyContent: 'center',&#10;                alignItems: 'center',&#10;            }}&#10;        &gt;&#10;            &lt;svg width={600} height={430} viewBox='0 0 600 430'&gt;&#10;                {/* ponsel kiri — browser */}&#10;                &lt;rect x='24' y='34' width='204' height='362' rx='30' fill='#FFFFFF' stroke='#E3DCCF' strokeWidth='4' /&gt;&#10;                &lt;rect x='104' y='50' width='44' height='9' rx='5' fill='#DCD5C9' /&gt;&#10;                &lt;rect x='48' y='76' width='156' height='34' rx='10' fill='#EFEAE1' /&gt;&#10;                &lt;rect x='48' y='126' width='156' height='10' rx='5' fill='#DED7CB' /&gt;&#10;                &lt;rect x='48' y='148' width='118' height='10' rx='5' fill='#EDE8DF' /&gt;&#10;                &lt;rect x='48' y='186' width='156' height='10' rx='5' fill='#EDE8DF' /&gt;&#10;                &lt;rect x='48' y='208' width='132' height='10' rx='5' fill='#EDE8DF' /&gt;&#10;                &lt;rect x='48' y='246' width='156' height='10' rx='5' fill='#EDE8DF' /&gt;&#10;                {/* tombol Pasang */}&#10;                &lt;rect x='48' y='292' width='156' height='54' rx='14' fill='#F3B26C' /&gt;&#10;                &lt;text x='126' y='326' fontFamily='Trebuchet MS' fontSize='24' fontWeight='bold' fill='#51277C' textAnchor='middle'&gt;&#10;                    Pasang&#10;                &lt;/text&gt;&#10;&#10;                {/* panah */}&#10;                &lt;path&#10;                    d='M248 215 h60 M292 195 l20 20 l-20 20'&#10;                    fill='none'&#10;                    stroke='#51277C'&#10;                    strokeWidth='7'&#10;                    strokeLinecap='round'&#10;                    strokeLinejoin='round'&#10;                /&gt;&#10;&#10;                {/* ponsel kanan — layar utama */}&#10;                &lt;rect x='330' y='54' width='244' height='322' rx='30' fill='#FFFFFF' stroke='#E3DCCF' strokeWidth='4' /&gt;&#10;                &lt;rect x='430' y='70' width='44' height='9' rx='5' fill='#DCD5C9' /&gt;&#10;                {/* ikon-ikon lain */}&#10;                &lt;rect x='358' y='100' width='48' height='48' rx='13' fill='#EFEAE1' /&gt;&#10;                &lt;rect x='424' y='100' width='48' height='48' rx='13' fill='#EFEAE1' /&gt;&#10;                &lt;rect x='490' y='100' width='48' height='48' rx='13' fill='#EFEAE1' /&gt;&#10;                &lt;rect x='358' y='170' width='48' height='48' rx='13' fill='#EFEAE1' /&gt;&#10;                &lt;rect x='424' y='170' width='48' height='48' rx='13' fill='#EFEAE1' /&gt;&#10;                &lt;rect x='490' y='170' width='48' height='48' rx='13' fill='#EFEAE1' /&gt;&#10;                &lt;rect x='358' y='240' width='48' height='48' rx='13' fill='#EFEAE1' /&gt;&#10;                &lt;rect x='490' y='240' width='48' height='48' rx='13' fill='#EFEAE1' /&gt;&#10;                {/* ikon aplikasi — baru muncul */}&#10;                &lt;rect x='418' y='234' width='64' height='64' rx='16' fill='#B6E9EC' /&gt;&#10;                &lt;rect x='430' y='246' width='30' height='26' rx='5' fill='#FFFFFF' /&gt;&#10;                &lt;path d='M430 246 h30' stroke='#51277C' strokeWidth='4' /&gt;&#10;                &lt;path d='M472 288 l-14 -14 a20 20 0 0 1 14 -6 z' fill='#F3B26C' /&gt;&#10;                &lt;circle cx='404' cy='228' r='13' fill='#AFC440' /&gt;&#10;                &lt;text x='404' y='235' fontFamily='Verdana' fontSize='14' fontWeight='bold' fill='#FFFFFF' textAnchor='middle'&gt;&#10;                    1&#10;                &lt;/text&gt;&#10;            &lt;/svg&gt;&#10;        &lt;/Box&gt;&#10;&#10;        {/* kanan 45% · langkah */}&#10;        &lt;Box style={{ width: '45%', height: '100%' }}&gt;&#10;            &lt;Box style={{ gap: 10 }}&gt;&#10;                {[&#10;                    { a: 'Buka alamat aplikasi', d: 'Lewat browser HP — Chrome atau Edge.' },&#10;                    { a: 'Ketuk tombol &quot;Pasang&quot;', d: 'Muncul sendiri di bagian bawah layar.' },&#10;                    { a: 'Ikon muncul di layar utama', d: 'Berciri pizza dan kalender, warna hijau muda.' },&#10;                    { a: 'Ketuk ikonnya', d: 'Terbuka seperti aplikasi biasa. Tidak perlu mengetik alamat lagi.' },&#10;                ].map((s, i) =&gt; (&#10;                    &lt;Box&#10;                        key={i}&#10;                        style={{&#10;                            height: 96,&#10;                            flexDirection: 'row',&#10;                            alignItems: 'center',&#10;                            gap: 16,&#10;                            background: '#FFFFFF',&#10;                            borderRadius: 14,&#10;                            boxShadow: '0 4px 20px rgba(0,0,0,0.08)',&#10;                            paddingLeft: 18,&#10;                            paddingRight: 20,&#10;                        }}&#10;                    &gt;&#10;                        &lt;Box&#10;                            style={{&#10;                                width: 44,&#10;                                height: 44,&#10;                                borderRadius: 22,&#10;                                background: '#51277C',&#10;                                justifyContent: 'center',&#10;                                alignItems: 'center',&#10;                            }}&#10;                        &gt;&#10;                            &lt;Text&#10;                                style={{&#10;                                    fontSize: 22,&#10;                                    fontWeight: 'bold',&#10;                                    color: '#FFFFFF',&#10;                                    fontFamily: 'Trebuchet MS',&#10;                                }}&#10;                            &gt;&#10;                                {i + 1}&#10;                            &lt;/Text&gt;&#10;                        &lt;/Box&gt;&#10;                        &lt;Box style={{ flex: 1 }}&gt;&#10;                            &lt;Text&#10;                                style={{&#10;                                    fontSize: 20,&#10;                                    fontWeight: 'bold',&#10;                                    color: '#2A2333',&#10;                                    fontFamily: 'Trebuchet MS',&#10;                                    lineHeight: 1.3,&#10;                                }}&#10;                            &gt;&#10;                                {s.a}&#10;                            &lt;/Text&gt;&#10;                            &lt;Text&#10;                                style={{&#10;                                    marginTop: 3,&#10;                                    fontSize: 17,&#10;                                    color: '#6B6478',&#10;                                    fontFamily: 'Verdana',&#10;                                    lineHeight: 1.4,&#10;                                }}&#10;                            &gt;&#10;                                {s.d}&#10;                            &lt;/Text&gt;&#10;                        &lt;/Box&gt;&#10;                    &lt;/Box&gt;&#10;                ))}&#10;            &lt;/Box&gt;&#10;&#10;            {/* catatan iOS */}&#10;            &lt;Box&#10;                style={{&#10;                    marginTop: 20,&#10;                    height: 96,&#10;                    background: '#FFFFFF',&#10;                    borderLeft: '8px solid #F3B26C',&#10;                    borderRadius: 14,&#10;                    boxShadow: '0 4px 20px rgba(0,0,0,0.08)',&#10;                    paddingTop: 16,&#10;                    paddingBottom: 16,&#10;                    paddingLeft: 20,&#10;                    paddingRight: 20,&#10;                    justifyContent: 'center',&#10;                }}&#10;            &gt;&#10;                &lt;Text&#10;                    style={{&#10;                        fontSize: 18,&#10;                        fontWeight: 'bold',&#10;                        color: '#51277C',&#10;                        fontFamily: 'Trebuchet MS',&#10;                    }}&#10;                &gt;&#10;                    Kalau memakai iPhone&#10;                &lt;/Text&gt;&#10;                &lt;Text&#10;                    style={{&#10;                        marginTop: 5,&#10;                        fontSize: 17,&#10;                        color: '#6B6478',&#10;                        fontFamily: 'Verdana',&#10;                        lineHeight: 1.4,&#10;                    }}&#10;                &gt;&#10;                    Tombol Bagikan, lalu pilih &quot;Add to Home Screen&quot;.&#10;                &lt;/Text&gt;&#10;            &lt;/Box&gt;&#10;        &lt;/Box&gt;&#10;    &lt;/Box&gt;&#10;&#10;    {/* ── C · bilah kaki ── */}&#10;    &lt;Box&#10;        style={{&#10;            height: 40,&#10;            flexDirection: 'row',&#10;            alignItems: 'center',&#10;            justifyContent: 'space-between',&#10;        }}&#10;    &gt;&#10;        &lt;Text style={{ fontSize: 14, color: '#6B6478', fontFamily: 'Verdana' }}&gt;&#10;            Pizza Snack Play · Panduan Orang Tua&#10;        &lt;/Text&gt;&#10;        &lt;Text style={{ fontSize: 14, color: '#6B6478', fontFamily: 'Verdana' }}&gt;07 / 15&lt;/Text&gt;&#10;    &lt;/Box&gt;&#10;&lt;/Slide&gt;"/>
+        <p:cNvPr id="243" name=""/>
         <p:cNvGrpSpPr/>
         <p:nvPr/>
       </p:nvGrpSpPr>
@@ -10838,7 +11048,10 @@
         </p:spPr>
         <p:txBody>
           <a:bodyPr/>
-          <a:p/>
+          <a:p>
+            <a:pPr/>
+            <a:endParaRPr/>
+          </a:p>
         </p:txBody>
       </p:sp>
       <p:sp>
@@ -10899,7 +11112,10 @@
         </p:spPr>
         <p:txBody>
           <a:bodyPr/>
-          <a:p/>
+          <a:p>
+            <a:pPr/>
+            <a:endParaRPr/>
+          </a:p>
         </p:txBody>
       </p:sp>
       <p:sp>
@@ -10927,7 +11143,10 @@
         </p:spPr>
         <p:txBody>
           <a:bodyPr/>
-          <a:p/>
+          <a:p>
+            <a:pPr/>
+            <a:endParaRPr/>
+          </a:p>
         </p:txBody>
       </p:sp>
       <p:pic>
@@ -10939,7 +11158,7 @@
           <p:nvPr/>
         </p:nvPicPr>
         <p:blipFill>
-          <a:blip>
+          <a:blip r:embed="rId1">
             <a:extLst>
               <a:ext uri="{96DAC541-7B7A-43D3-8B79-37D633B846F1}">
                 <asvg:svgBlip r:embed="rId1"/>
@@ -10991,7 +11210,10 @@
         </p:spPr>
         <p:txBody>
           <a:bodyPr/>
-          <a:p/>
+          <a:p>
+            <a:pPr/>
+            <a:endParaRPr/>
+          </a:p>
         </p:txBody>
       </p:sp>
       <p:sp>
@@ -11017,7 +11239,10 @@
         </p:spPr>
         <p:txBody>
           <a:bodyPr/>
-          <a:p/>
+          <a:p>
+            <a:pPr/>
+            <a:endParaRPr/>
+          </a:p>
         </p:txBody>
       </p:sp>
       <p:sp>
@@ -11155,7 +11380,10 @@
         </p:spPr>
         <p:txBody>
           <a:bodyPr/>
-          <a:p/>
+          <a:p>
+            <a:pPr/>
+            <a:endParaRPr/>
+          </a:p>
         </p:txBody>
       </p:sp>
       <p:sp>
@@ -11181,7 +11409,10 @@
         </p:spPr>
         <p:txBody>
           <a:bodyPr/>
-          <a:p/>
+          <a:p>
+            <a:pPr/>
+            <a:endParaRPr/>
+          </a:p>
         </p:txBody>
       </p:sp>
       <p:sp>
@@ -11319,7 +11550,10 @@
         </p:spPr>
         <p:txBody>
           <a:bodyPr/>
-          <a:p/>
+          <a:p>
+            <a:pPr/>
+            <a:endParaRPr/>
+          </a:p>
         </p:txBody>
       </p:sp>
       <p:sp>
@@ -11345,7 +11579,10 @@
         </p:spPr>
         <p:txBody>
           <a:bodyPr/>
-          <a:p/>
+          <a:p>
+            <a:pPr/>
+            <a:endParaRPr/>
+          </a:p>
         </p:txBody>
       </p:sp>
       <p:sp>
@@ -11483,7 +11720,10 @@
         </p:spPr>
         <p:txBody>
           <a:bodyPr/>
-          <a:p/>
+          <a:p>
+            <a:pPr/>
+            <a:endParaRPr/>
+          </a:p>
         </p:txBody>
       </p:sp>
       <p:sp>
@@ -11509,7 +11749,10 @@
         </p:spPr>
         <p:txBody>
           <a:bodyPr/>
-          <a:p/>
+          <a:p>
+            <a:pPr/>
+            <a:endParaRPr/>
+          </a:p>
         </p:txBody>
       </p:sp>
       <p:sp>
@@ -11649,7 +11892,10 @@
         </p:spPr>
         <p:txBody>
           <a:bodyPr/>
-          <a:p/>
+          <a:p>
+            <a:pPr/>
+            <a:endParaRPr/>
+          </a:p>
         </p:txBody>
       </p:sp>
       <p:sp>
@@ -11706,7 +11952,10 @@
         </p:spPr>
         <p:txBody>
           <a:bodyPr/>
-          <a:p/>
+          <a:p>
+            <a:pPr/>
+            <a:endParaRPr/>
+          </a:p>
         </p:txBody>
       </p:sp>
       <p:sp>
@@ -11855,11 +12104,11 @@
 </file>
 
 <file path=ppt/slides/slide8.xml><?xml version="1.0" encoding="utf-8"?>
-<p:sld xmlns:p="http://schemas.openxmlformats.org/presentationml/2006/main" xmlns:r="http://schemas.openxmlformats.org/officeDocument/2006/relationships" xmlns:a="http://schemas.openxmlformats.org/drawingml/2006/main" xmlns:asvg="http://schemas.microsoft.com/office/drawing/2016/SVG/main" xmlns:mc="http://schemas.openxmlformats.org/markup-compatibility/2006" mc:Ignorable="asvg">
+<p:sld xmlns:p="http://schemas.openxmlformats.org/presentationml/2006/main" xmlns:a="http://schemas.openxmlformats.org/drawingml/2006/main" xmlns:asvg="http://schemas.microsoft.com/office/drawing/2016/SVG/main" xmlns:r="http://schemas.openxmlformats.org/officeDocument/2006/relationships" xmlns:mc="http://schemas.openxmlformats.org/markup-compatibility/2006" mc:Ignorable="asvg">
   <p:cSld>
     <p:spTree>
       <p:nvGrpSpPr>
-        <p:cNvPr id="275" name="" descr="&lt;Slide&#13;&#10;    style={{&#13;&#10;        width: '1280px',&#13;&#10;        height: '720px',&#13;&#10;        background: '#FAF7F2',&#13;&#10;        paddingTop: 20,&#13;&#10;        paddingBottom: 20,&#13;&#10;        paddingLeft: 64,&#13;&#10;        paddingRight: 64,&#13;&#10;    }}&#13;&#10;&gt;&#13;&#10;    {/* ── A · blok judul ── */}&#13;&#10;    &lt;Box style={{ height: 110, justifyContent: 'center' }}&gt;&#13;&#10;        &lt;Text&#13;&#10;            style={{&#13;&#10;                fontSize: 34,&#13;&#10;                fontWeight: 'bold',&#13;&#10;                color: '#51277C',&#13;&#10;                fontFamily: 'Trebuchet MS',&#13;&#10;                lineHeight: 1.3,&#13;&#10;            }}&#13;&#10;        &gt;&#13;&#10;            Masuk memakai akun dari sekolah&#13;&#10;        &lt;/Text&gt;&#13;&#10;        &lt;Box style={{ marginTop: 10, width: 72, height: 6, borderRadius: 3, background: '#51277C' }} /&gt;&#13;&#10;    &lt;/Box&gt;&#13;&#10;&#13;&#10;    {/* ── B · area konten ── */}&#13;&#10;    &lt;Box style={{ height: 530, flexDirection: 'row', gap: 28 }}&gt;&#13;&#10;        {/* kiri 30% · panel ungu */}&#13;&#10;        &lt;Box&#13;&#10;            style={{&#13;&#10;                width: '30%',&#13;&#10;                height: '100%',&#13;&#10;                background: 'linear-gradient(135deg, #51277C 0%, #7A45A8 100%)',&#13;&#10;                borderRadius: 20,&#13;&#10;                padding: 26,&#13;&#10;                justifyContent: 'space-between',&#13;&#10;                alignItems: 'center',&#13;&#10;            }}&#13;&#10;        &gt;&#13;&#10;            &lt;Box style={{ alignItems: 'center' }}&gt;&#13;&#10;                &lt;Text&#13;&#10;                    style={{&#13;&#10;                        fontSize: 16,&#13;&#10;                        color: 'rgba(255,255,255,0.75)',&#13;&#10;                        fontFamily: 'Verdana',&#13;&#10;                    }}&#13;&#10;                &gt;&#13;&#10;                    Langkah 2&#13;&#10;                &lt;/Text&gt;&#13;&#10;                &lt;Text&#13;&#10;                    style={{&#13;&#10;                        marginTop: 8,&#13;&#10;                        fontSize: 40,&#13;&#10;                        fontWeight: 'bold',&#13;&#10;                        color: '#FFFFFF',&#13;&#10;                        fontFamily: 'Trebuchet MS',&#13;&#10;                    }}&#13;&#10;                &gt;&#13;&#10;                    Masuk&#13;&#10;                &lt;/Text&gt;&#13;&#10;            &lt;/Box&gt;&#13;&#10;&#13;&#10;            &lt;svg width={170} height={170} viewBox='0 0 170 170'&gt;&#13;&#10;                &lt;rect x='34' y='74' width='102' height='80' rx='14' fill='#F3B26C' /&gt;&#13;&#10;                &lt;path&#13;&#10;                    d='M58 74 v-20 a27 27 0 0 1 54 0 v20'&#13;&#10;                    fill='none'&#13;&#10;                    stroke='#FFFFFF'&#13;&#10;                    strokeWidth='10'&#13;&#10;                    strokeLinecap='round'&#13;&#10;                /&gt;&#13;&#10;                &lt;circle cx='85' cy='108' r='10' fill='#51277C' /&gt;&#13;&#10;                &lt;rect x='81' y='114' width='8' height='20' rx='4' fill='#51277C' /&gt;&#13;&#10;                &lt;circle cx='132' cy='44' r='22' fill='none' stroke='#AFC440' strokeWidth='8' /&gt;&#13;&#10;                &lt;path d='M148 60 l16 16' stroke='#AFC440' strokeWidth='8' strokeLinecap='round' /&gt;&#13;&#10;            &lt;/svg&gt;&#13;&#10;&#13;&#10;            &lt;Text&#13;&#10;                style={{&#13;&#10;                    fontSize: 17,&#13;&#10;                    color: 'rgba(255,255,255,0.9)',&#13;&#10;                    fontFamily: 'Verdana',&#13;&#10;                    lineHeight: 1.5,&#13;&#10;                    textAlign: 'center',&#13;&#10;                }}&#13;&#10;            &gt;&#13;&#10;                Wajib masuk dulu sebelum jadwal bisa dilihat.&#13;&#10;            &lt;/Text&gt;&#13;&#10;        &lt;/Box&gt;&#13;&#10;&#13;&#10;        {/* kanan 70% · empat keterangan */}&#13;&#10;        &lt;Box style={{ width: '70%', height: '100%', justifyContent: 'space-between' }}&gt;&#13;&#10;            {[&#13;&#10;                {&#13;&#10;                    vb: '0 0 448 512',&#13;&#10;                    d: 'M224 256A128 128 0 1 0 224 0a128 128 0 1 0 0 256zm-45.7 48C79.8 304 0 383.8 0 482.3C0 498.7 13.3 512 29.7 512H418.3c16.4 0 29.7-13.3 29.7-29.7C448 383.8 368.2 304 269.7 304H178.3z',&#13;&#10;                    t: 'Akunnya dibuatkan sekolah',&#13;&#10;                    d: 'Username dan password diberikan oleh admin sekolah. Bapak/Ibu tidak perlu mendaftar sendiri.',&#13;&#10;                },&#13;&#10;                {&#13;&#10;                    vb: '0 0 640 512',&#13;&#10;                    d: 'M144 0a80 80 0 1 1 0 160A80 80 0 1 1 144 0zM512 0a80 80 0 1 1 0 160A80 80 0 1 1 512 0zM0 298.7C0 239.8 47.8 192 106.7 192h42.7c15.9 0 31 3.5 44.6 9.7c-1.3 7.2-1.9 14.7-1.9 22.3c0 38.2 16.8 72.5 43.3 96c-.2 0-.4 0-.7 0H21.3C9.6 320 0 310.4 0 298.7zM405.3 320c-.2 0-.4 0-.7 0c26.6-23.5 43.3-57.8 43.3-96c0-7.6-.7-15-1.9-22.3c13.6-6.3 28.7-9.7 44.6-9.7h42.7C592.2 192 640 239.8 640 298.7c0 11.8-9.6 21.3-21.3 21.3H405.3zM224 224a96 96 0 1 1 192 0 96 96 0 1 1 -192 0zM128 485.3C128 411.7 187.7 352 261.3 352H378.7C452.3 352 512 411.7 512 485.3c0 14.7-11.9 26.7-26.7 26.7H154.7c-14.7 0-26.7-11.9-26.7-26.7z',&#13;&#10;                    t: 'Satu akun bisa untuk beberapa anak',&#13;&#10;                    d: 'Punya dua anak di kelas berbeda? Cukup satu akun — pilih kelasnya di bagian atas layar. Anak bisa ditambah di menu Profil.',&#13;&#10;                },&#13;&#10;                {&#13;&#10;                    vb: '0 0 512 512',&#13;&#10;                    d: 'M336 352c97.2 0 176-78.8 176-176S433.2 0 336 0S160 78.8 160 176c0 18.7 2.9 36.8 8.3 53.7L7 391c-4.5 4.5-7 10.6-7 17v80c0 13.3 10.7 24 24 24h80c13.3 0 24-10.7 24-24V448h40c13.3 0 24-10.7 24-24V384h40c6.4 0 12.5-2.5 17-7l33.3-33.3c16.9 5.4 35 8.3 53.7 8.3zM376 96a40 40 0 1 1 0 80 40 40 0 1 1 0-80z',&#13;&#10;                    t: 'Password bisa diganti sendiri',&#13;&#10;                    d: 'Ada menu Profil di dalam aplikasi. Kalau lupa, minta reset kepada admin sekolah sebelum salah mencoba berulang kali.',&#13;&#10;                },&#13;&#10;                {&#13;&#10;                    vb: '0 0 448 512',&#13;&#10;                    d: 'M144 144v48H304V144c0-44.2-35.8-80-80-80s-80 35.8-80 80zM80 192V144C80 64.5 144.5 0 224 0s144 64.5 144 144v48h16c35.3 0 64 28.7 64 64V448c0 35.3-28.7 64-64 64H64c-35.3 0-64-28.7-64-64V256c0-35.3 28.7-64 64-64H80z',&#13;&#10;                    t: 'Hati-hati: 5 kali salah, akun terkunci',&#13;&#10;                    d: 'Salah password 5 kali berturut-turut mengunci akun. Tidak bisa dibuka sendiri — hubungi admin sekolah, nanti dibukakan.',&#13;&#10;                    warn: true,&#13;&#10;                },&#13;&#10;                {&#13;&#10;                    vb: '0 0 512 512',&#13;&#10;                    d: 'M256 0c4.6 0 9.2 1 13.4 2.9L457.7 82.8c22 9.3 38.4 31 38.3 57.2c-.5 99.2-41.3 280.7-213.6 363.2c-16.7 8-36.1 8-52.8 0C57.3 420.7 16.5 239.2 16 140c-.1-26.2 16.3-47.9 38.3-57.2L242.7 2.9C246.8 1 251.4 0 256 0z',&#13;&#10;                    t: 'Kenapa harus masuk?',&#13;&#10;                    d: 'Supaya jadwal dan nama anak hanya dilihat oleh orang tuanya sendiri, bukan orang lain.',&#13;&#10;                },&#13;&#10;            ].map((c, idx) =&gt; (&#13;&#10;                &lt;Box&#13;&#10;                    key={idx}&#13;&#10;                    style={{&#13;&#10;                        height: 100,&#13;&#10;                        flexDirection: 'row',&#13;&#10;                        alignItems: 'center',&#13;&#10;                        gap: 20,&#13;&#10;                        background: '#FFFFFF',&#13;&#10;                        borderRadius: 16,&#13;&#10;                        boxShadow: '0 4px 20px rgba(0,0,0,0.08)',&#13;&#10;                        paddingLeft: 24,&#13;&#10;                        paddingRight: 26,&#13;&#10;                        borderLeft: c.warn ? '8px solid #F3B26C' : '8px solid #AFC440',&#13;&#10;                    }}&#13;&#10;                &gt;&#13;&#10;                    &lt;Box&#13;&#10;                        style={{&#13;&#10;                            width: 54,&#13;&#10;                            height: 54,&#13;&#10;                            borderRadius: 27,&#13;&#10;                            background: 'rgba(81,39,124,0.10)',&#13;&#10;                            justifyContent: 'center',&#13;&#10;                            alignItems: 'center',&#13;&#10;                        }}&#13;&#10;                    &gt;&#13;&#10;                        &lt;svg width={28} height={28} viewBox={c.vb} xmlns=&quot;http://www.w3.org/2000/svg&quot;&gt;&lt;path fill=&quot;#51277C&quot; d={c.d} /&gt;&lt;/svg&gt;&#13;&#10;                    &lt;/Box&gt;&#13;&#10;                    &lt;Box style={{ flex: 1 }}&gt;&#13;&#10;                        &lt;Text&#13;&#10;                            style={{&#13;&#10;                                fontSize: 24,&#13;&#10;                                fontWeight: 'bold',&#13;&#10;                                color: '#2A2333',&#13;&#10;                                fontFamily: 'Trebuchet MS',&#13;&#10;                                lineHeight: 1.3,&#13;&#10;                            }}&#13;&#10;                        &gt;&#13;&#10;                            {c.t}&#13;&#10;                        &lt;/Text&gt;&#13;&#10;                        &lt;Text&#13;&#10;                            style={{&#13;&#10;                                marginTop: 5,&#13;&#10;                                fontSize: 18,&#13;&#10;                                color: '#6B6478',&#13;&#10;                                fontFamily: 'Verdana',&#13;&#10;                                lineHeight: 1.45,&#13;&#10;                            }}&#13;&#10;                        &gt;&#13;&#10;                            {c.d}&#13;&#10;                        &lt;/Text&gt;&#13;&#10;                    &lt;/Box&gt;&#13;&#10;                &lt;/Box&gt;&#13;&#10;            ))}&#13;&#10;        &lt;/Box&gt;&#13;&#10;    &lt;/Box&gt;&#13;&#10;&#13;&#10;    {/* ── C · bilah kaki ── */}&#13;&#10;    &lt;Box&#13;&#10;        style={{&#13;&#10;            height: 40,&#13;&#10;            flexDirection: 'row',&#13;&#10;            alignItems: 'center',&#13;&#10;            justifyContent: 'space-between',&#13;&#10;        }}&#13;&#10;    &gt;&#13;&#10;        &lt;Text style={{ fontSize: 14, color: '#6B6478', fontFamily: 'Verdana' }}&gt;&#13;&#10;            Pizza Snack Play · Panduan Orang Tua&#13;&#10;        &lt;/Text&gt;&#13;&#10;        &lt;Text style={{ fontSize: 14, color: '#6B6478', fontFamily: 'Verdana' }}&gt;08 / 15&lt;/Text&gt;&#13;&#10;    &lt;/Box&gt;&#13;&#10;&lt;/Slide&gt;&#13;&#10;"/>
+        <p:cNvPr id="275" name=""/>
         <p:cNvGrpSpPr/>
         <p:nvPr/>
       </p:nvGrpSpPr>
@@ -11892,7 +12141,10 @@
         </p:spPr>
         <p:txBody>
           <a:bodyPr/>
-          <a:p/>
+          <a:p>
+            <a:pPr/>
+            <a:endParaRPr/>
+          </a:p>
         </p:txBody>
       </p:sp>
       <p:sp>
@@ -11953,7 +12205,10 @@
         </p:spPr>
         <p:txBody>
           <a:bodyPr/>
-          <a:p/>
+          <a:p>
+            <a:pPr/>
+            <a:endParaRPr/>
+          </a:p>
         </p:txBody>
       </p:sp>
       <p:sp>
@@ -11987,7 +12242,10 @@
         </p:spPr>
         <p:txBody>
           <a:bodyPr/>
-          <a:p/>
+          <a:p>
+            <a:pPr/>
+            <a:endParaRPr/>
+          </a:p>
         </p:txBody>
       </p:sp>
       <p:sp>
@@ -12071,7 +12329,7 @@
           <p:nvPr/>
         </p:nvPicPr>
         <p:blipFill>
-          <a:blip>
+          <a:blip r:embed="rId1">
             <a:extLst>
               <a:ext uri="{96DAC541-7B7A-43D3-8B79-37D633B846F1}">
                 <asvg:svgBlip r:embed="rId1"/>
@@ -12162,7 +12420,10 @@
         </p:spPr>
         <p:txBody>
           <a:bodyPr/>
-          <a:p/>
+          <a:p>
+            <a:pPr/>
+            <a:endParaRPr/>
+          </a:p>
         </p:txBody>
       </p:sp>
       <p:sp>
@@ -12219,7 +12480,10 @@
         </p:spPr>
         <p:txBody>
           <a:bodyPr/>
-          <a:p/>
+          <a:p>
+            <a:pPr/>
+            <a:endParaRPr/>
+          </a:p>
         </p:txBody>
       </p:sp>
       <p:sp>
@@ -12247,7 +12511,10 @@
         </p:spPr>
         <p:txBody>
           <a:bodyPr/>
-          <a:p/>
+          <a:p>
+            <a:pPr/>
+            <a:endParaRPr/>
+          </a:p>
         </p:txBody>
       </p:sp>
       <p:pic>
@@ -12259,7 +12526,7 @@
           <p:nvPr/>
         </p:nvPicPr>
         <p:blipFill>
-          <a:blip>
+          <a:blip r:embed="rId2">
             <a:extLst>
               <a:ext uri="{96DAC541-7B7A-43D3-8B79-37D633B846F1}">
                 <asvg:svgBlip r:embed="rId2"/>
@@ -12383,7 +12650,10 @@
         </p:spPr>
         <p:txBody>
           <a:bodyPr/>
-          <a:p/>
+          <a:p>
+            <a:pPr/>
+            <a:endParaRPr/>
+          </a:p>
         </p:txBody>
       </p:sp>
       <p:sp>
@@ -12440,7 +12710,10 @@
         </p:spPr>
         <p:txBody>
           <a:bodyPr/>
-          <a:p/>
+          <a:p>
+            <a:pPr/>
+            <a:endParaRPr/>
+          </a:p>
         </p:txBody>
       </p:sp>
       <p:sp>
@@ -12468,7 +12741,10 @@
         </p:spPr>
         <p:txBody>
           <a:bodyPr/>
-          <a:p/>
+          <a:p>
+            <a:pPr/>
+            <a:endParaRPr/>
+          </a:p>
         </p:txBody>
       </p:sp>
       <p:pic>
@@ -12480,7 +12756,7 @@
           <p:nvPr/>
         </p:nvPicPr>
         <p:blipFill>
-          <a:blip>
+          <a:blip r:embed="rId3">
             <a:extLst>
               <a:ext uri="{96DAC541-7B7A-43D3-8B79-37D633B846F1}">
                 <asvg:svgBlip r:embed="rId3"/>
@@ -12604,7 +12880,10 @@
         </p:spPr>
         <p:txBody>
           <a:bodyPr/>
-          <a:p/>
+          <a:p>
+            <a:pPr/>
+            <a:endParaRPr/>
+          </a:p>
         </p:txBody>
       </p:sp>
       <p:sp>
@@ -12661,7 +12940,10 @@
         </p:spPr>
         <p:txBody>
           <a:bodyPr/>
-          <a:p/>
+          <a:p>
+            <a:pPr/>
+            <a:endParaRPr/>
+          </a:p>
         </p:txBody>
       </p:sp>
       <p:sp>
@@ -12689,7 +12971,10 @@
         </p:spPr>
         <p:txBody>
           <a:bodyPr/>
-          <a:p/>
+          <a:p>
+            <a:pPr/>
+            <a:endParaRPr/>
+          </a:p>
         </p:txBody>
       </p:sp>
       <p:pic>
@@ -12701,7 +12986,7 @@
           <p:nvPr/>
         </p:nvPicPr>
         <p:blipFill>
-          <a:blip>
+          <a:blip r:embed="rId4">
             <a:extLst>
               <a:ext uri="{96DAC541-7B7A-43D3-8B79-37D633B846F1}">
                 <asvg:svgBlip r:embed="rId4"/>
@@ -12825,7 +13110,10 @@
         </p:spPr>
         <p:txBody>
           <a:bodyPr/>
-          <a:p/>
+          <a:p>
+            <a:pPr/>
+            <a:endParaRPr/>
+          </a:p>
         </p:txBody>
       </p:sp>
       <p:sp>
@@ -12882,7 +13170,10 @@
         </p:spPr>
         <p:txBody>
           <a:bodyPr/>
-          <a:p/>
+          <a:p>
+            <a:pPr/>
+            <a:endParaRPr/>
+          </a:p>
         </p:txBody>
       </p:sp>
       <p:sp>
@@ -12910,7 +13201,10 @@
         </p:spPr>
         <p:txBody>
           <a:bodyPr/>
-          <a:p/>
+          <a:p>
+            <a:pPr/>
+            <a:endParaRPr/>
+          </a:p>
         </p:txBody>
       </p:sp>
       <p:pic>
@@ -12922,7 +13216,7 @@
           <p:nvPr/>
         </p:nvPicPr>
         <p:blipFill>
-          <a:blip>
+          <a:blip r:embed="rId5">
             <a:extLst>
               <a:ext uri="{96DAC541-7B7A-43D3-8B79-37D633B846F1}">
                 <asvg:svgBlip r:embed="rId5"/>
@@ -13046,7 +13340,10 @@
         </p:spPr>
         <p:txBody>
           <a:bodyPr/>
-          <a:p/>
+          <a:p>
+            <a:pPr/>
+            <a:endParaRPr/>
+          </a:p>
         </p:txBody>
       </p:sp>
       <p:sp>
@@ -13103,7 +13400,10 @@
         </p:spPr>
         <p:txBody>
           <a:bodyPr/>
-          <a:p/>
+          <a:p>
+            <a:pPr/>
+            <a:endParaRPr/>
+          </a:p>
         </p:txBody>
       </p:sp>
       <p:sp>
@@ -13131,7 +13431,10 @@
         </p:spPr>
         <p:txBody>
           <a:bodyPr/>
-          <a:p/>
+          <a:p>
+            <a:pPr/>
+            <a:endParaRPr/>
+          </a:p>
         </p:txBody>
       </p:sp>
       <p:pic>
@@ -13143,7 +13446,7 @@
           <p:nvPr/>
         </p:nvPicPr>
         <p:blipFill>
-          <a:blip>
+          <a:blip r:embed="rId6">
             <a:extLst>
               <a:ext uri="{96DAC541-7B7A-43D3-8B79-37D633B846F1}">
                 <asvg:svgBlip r:embed="rId6"/>
@@ -13313,11 +13616,11 @@
 </file>
 
 <file path=ppt/slides/slide9.xml><?xml version="1.0" encoding="utf-8"?>
-<p:sld xmlns:p="http://schemas.openxmlformats.org/presentationml/2006/main" xmlns:r="http://schemas.openxmlformats.org/officeDocument/2006/relationships" xmlns:a="http://schemas.openxmlformats.org/drawingml/2006/main" xmlns:asvg="http://schemas.microsoft.com/office/drawing/2016/SVG/main" xmlns:mc="http://schemas.openxmlformats.org/markup-compatibility/2006" mc:Ignorable="asvg">
+<p:sld xmlns:p="http://schemas.openxmlformats.org/presentationml/2006/main" xmlns:a="http://schemas.openxmlformats.org/drawingml/2006/main" xmlns:asvg="http://schemas.microsoft.com/office/drawing/2016/SVG/main" xmlns:r="http://schemas.openxmlformats.org/officeDocument/2006/relationships" xmlns:mc="http://schemas.openxmlformats.org/markup-compatibility/2006" mc:Ignorable="asvg">
   <p:cSld>
     <p:spTree>
       <p:nvGrpSpPr>
-        <p:cNvPr id="316" name="" descr="&lt;Slide&#10;    style={{&#10;        width: '1280px',&#10;        height: '720px',&#10;        background: 'linear-gradient(135deg, #51277C 0%, #7A45A8 100%)',&#10;        paddingTop: 60,&#10;        paddingBottom: 60,&#10;        paddingLeft: 72,&#10;        paddingRight: 72,&#10;        justifyContent: 'center',&#10;        position: 'relative',&#10;        overflow: 'hidden',&#10;    }}&#10;&gt;&#10;    {/* dekorasi: kalender + centang */}&#10;    &lt;Box&#10;        style={{&#10;            position: 'absolute',&#10;            top: -110,&#10;            right: 140,&#10;            width: 380,&#10;            height: 380,&#10;            borderRadius: 190,&#10;            background: '#F3B26C',&#10;            opacity: 0.16,&#10;        }}&#10;    /&gt;&#10;    &lt;Box style={{ position: 'absolute', bottom: 62, right: 84, opacity: 0.20 }}&gt;&#10;        &lt;svg width={250} height={210} viewBox='0 0 250 210'&gt;&#10;            &lt;rect x='14' y='30' width='222' height='166' rx='18' fill='none' stroke='#FFFFFF' strokeWidth='6' /&gt;&#10;            &lt;path d='M14 74 h222' stroke='#FFFFFF' strokeWidth='6' /&gt;&#10;            &lt;path d='M64 10 v34M186 10 v34' stroke='#FFFFFF' strokeWidth='8' strokeLinecap='round' /&gt;&#10;            &lt;path d='M52 152 l30 32 l66 -74' fill='none' stroke='#AFC440' strokeWidth='14' strokeLinecap='round' strokeLinejoin='round' /&gt;&#10;        &lt;/svg&gt;&#10;    &lt;/Box&gt;&#10;&#10;    {/* isi */}&#10;    &lt;Box style={{ position: 'relative', zIndex: 1, width: '62%' }}&gt;&#10;        &lt;Box style={{ flexDirection: 'row', alignItems: 'center', gap: 14, alignSelf: 'flex-start' }}&gt;&#10;            &lt;Text&#10;                style={{&#10;                    fontSize: 76,&#10;                    fontWeight: 'bold',&#10;                    color: '#F3B26C',&#10;                    fontFamily: 'Trebuchet MS',&#10;                    lineHeight: 1,&#10;                }}&#10;            &gt;&#10;                03&#10;            &lt;/Text&gt;&#10;            &lt;Box style={{ width: 3, height: 52, background: 'rgba(255,255,255,0.45)' }} /&gt;&#10;            &lt;Text style={{ fontSize: 19, color: 'rgba(255,255,255,0.8)', fontFamily: 'Verdana' }}&gt;&#10;                Bagian ketiga&#10;            &lt;/Text&gt;&#10;        &lt;/Box&gt;&#10;&#10;        &lt;Text&#10;            style={{&#10;                marginTop: 26,&#10;                fontSize: 60,&#10;                fontWeight: 'bold',&#10;                color: '#FFFFFF',&#10;                fontFamily: 'Trebuchet MS',&#10;                lineHeight: 1.15,&#10;            }}&#10;        &gt;&#10;            Dipakai{'\n'}tiap hari&#10;        &lt;/Text&gt;&#10;&#10;        &lt;Text&#10;            style={{&#10;                marginTop: 24,&#10;                fontSize: 22,&#10;                color: 'rgba(255,255,255,0.88)',&#10;                fontFamily: 'Verdana',&#10;                lineHeight: 1.5,&#10;            }}&#10;        &gt;&#10;            Tiga hal yang paling sering dibuka orang tua.&#10;        &lt;/Text&gt;&#10;    &lt;/Box&gt;&#10;&lt;/Slide&gt;"/>
+        <p:cNvPr id="316" name=""/>
         <p:cNvGrpSpPr/>
         <p:nvPr/>
       </p:nvGrpSpPr>
@@ -13358,7 +13661,10 @@
         </p:spPr>
         <p:txBody>
           <a:bodyPr/>
-          <a:p/>
+          <a:p>
+            <a:pPr/>
+            <a:endParaRPr/>
+          </a:p>
         </p:txBody>
       </p:sp>
       <p:sp>
@@ -13409,7 +13715,10 @@
         </p:spPr>
         <p:txBody>
           <a:bodyPr/>
-          <a:p/>
+          <a:p>
+            <a:pPr/>
+            <a:endParaRPr/>
+          </a:p>
         </p:txBody>
       </p:sp>
       <p:pic>
@@ -13421,7 +13730,7 @@
           <p:nvPr/>
         </p:nvPicPr>
         <p:blipFill>
-          <a:blip>
+          <a:blip r:embed="rId1">
             <a:alphaModFix amt="20000"/>
             <a:extLst>
               <a:ext uri="{96DAC541-7B7A-43D3-8B79-37D633B846F1}">
@@ -13502,7 +13811,10 @@
         </p:spPr>
         <p:txBody>
           <a:bodyPr/>
-          <a:p/>
+          <a:p>
+            <a:pPr/>
+            <a:endParaRPr/>
+          </a:p>
         </p:txBody>
       </p:sp>
       <p:sp>
